--- a/tutorial/T02/tut02.pptx
+++ b/tutorial/T02/tut02.pptx
@@ -9,8 +9,8 @@
   </p:notesMasterIdLst>
   <p:sldIdLst>
     <p:sldId id="256" r:id="rId2"/>
-    <p:sldId id="257" r:id="rId3"/>
-    <p:sldId id="258" r:id="rId4"/>
+    <p:sldId id="258" r:id="rId3"/>
+    <p:sldId id="257" r:id="rId4"/>
     <p:sldId id="283" r:id="rId5"/>
     <p:sldId id="261" r:id="rId6"/>
     <p:sldId id="260" r:id="rId7"/>
@@ -138,6 +138,650 @@
 <file path=ppt/changesInfos/changesInfo1.xml><?xml version="1.0" encoding="utf-8"?>
 <pc:chgInfo xmlns:a="http://schemas.openxmlformats.org/drawingml/2006/main" xmlns:r="http://schemas.openxmlformats.org/officeDocument/2006/relationships" xmlns:ac="http://schemas.microsoft.com/office/drawing/2013/main/command" xmlns:pc="http://schemas.microsoft.com/office/powerpoint/2013/main/command">
   <pc:docChgLst>
+    <pc:chgData name="SONG, Qingyu" userId="498998f4-7f18-4549-a740-dcfb6e1e3d22" providerId="ADAL" clId="{A2A67607-707D-9A4B-B498-57C0CB8C6AF6}"/>
+    <pc:docChg chg="undo custSel addSld delSld modSld">
+      <pc:chgData name="SONG, Qingyu" userId="498998f4-7f18-4549-a740-dcfb6e1e3d22" providerId="ADAL" clId="{A2A67607-707D-9A4B-B498-57C0CB8C6AF6}" dt="2022-01-09T09:39:47.453" v="739" actId="20577"/>
+      <pc:docMkLst>
+        <pc:docMk/>
+      </pc:docMkLst>
+      <pc:sldChg chg="modSp mod">
+        <pc:chgData name="SONG, Qingyu" userId="498998f4-7f18-4549-a740-dcfb6e1e3d22" providerId="ADAL" clId="{A2A67607-707D-9A4B-B498-57C0CB8C6AF6}" dt="2022-01-09T08:43:56.456" v="166" actId="27636"/>
+        <pc:sldMkLst>
+          <pc:docMk/>
+          <pc:sldMk cId="356419186" sldId="256"/>
+        </pc:sldMkLst>
+        <pc:spChg chg="mod">
+          <ac:chgData name="SONG, Qingyu" userId="498998f4-7f18-4549-a740-dcfb6e1e3d22" providerId="ADAL" clId="{A2A67607-707D-9A4B-B498-57C0CB8C6AF6}" dt="2022-01-09T08:43:56.456" v="166" actId="27636"/>
+          <ac:spMkLst>
+            <pc:docMk/>
+            <pc:sldMk cId="356419186" sldId="256"/>
+            <ac:spMk id="3" creationId="{6CEAD46B-2981-B54E-B7BD-5B165BCFE3E7}"/>
+          </ac:spMkLst>
+        </pc:spChg>
+      </pc:sldChg>
+      <pc:sldChg chg="modSp mod">
+        <pc:chgData name="SONG, Qingyu" userId="498998f4-7f18-4549-a740-dcfb6e1e3d22" providerId="ADAL" clId="{A2A67607-707D-9A4B-B498-57C0CB8C6AF6}" dt="2022-01-09T09:39:47.453" v="739" actId="20577"/>
+        <pc:sldMkLst>
+          <pc:docMk/>
+          <pc:sldMk cId="1947847713" sldId="257"/>
+        </pc:sldMkLst>
+        <pc:spChg chg="mod">
+          <ac:chgData name="SONG, Qingyu" userId="498998f4-7f18-4549-a740-dcfb6e1e3d22" providerId="ADAL" clId="{A2A67607-707D-9A4B-B498-57C0CB8C6AF6}" dt="2022-01-09T08:44:45.239" v="171" actId="20577"/>
+          <ac:spMkLst>
+            <pc:docMk/>
+            <pc:sldMk cId="1947847713" sldId="257"/>
+            <ac:spMk id="2" creationId="{45C79BA1-37A3-5741-B0A1-E64646E4283C}"/>
+          </ac:spMkLst>
+        </pc:spChg>
+        <pc:spChg chg="mod">
+          <ac:chgData name="SONG, Qingyu" userId="498998f4-7f18-4549-a740-dcfb6e1e3d22" providerId="ADAL" clId="{A2A67607-707D-9A4B-B498-57C0CB8C6AF6}" dt="2022-01-09T09:39:47.453" v="739" actId="20577"/>
+          <ac:spMkLst>
+            <pc:docMk/>
+            <pc:sldMk cId="1947847713" sldId="257"/>
+            <ac:spMk id="3" creationId="{8F20472D-613F-3748-9CBD-88055CDB4B08}"/>
+          </ac:spMkLst>
+        </pc:spChg>
+      </pc:sldChg>
+      <pc:sldChg chg="modSp add mod">
+        <pc:chgData name="SONG, Qingyu" userId="498998f4-7f18-4549-a740-dcfb6e1e3d22" providerId="ADAL" clId="{A2A67607-707D-9A4B-B498-57C0CB8C6AF6}" dt="2022-01-09T08:45:17.052" v="215" actId="20577"/>
+        <pc:sldMkLst>
+          <pc:docMk/>
+          <pc:sldMk cId="440415094" sldId="258"/>
+        </pc:sldMkLst>
+        <pc:spChg chg="mod">
+          <ac:chgData name="SONG, Qingyu" userId="498998f4-7f18-4549-a740-dcfb6e1e3d22" providerId="ADAL" clId="{A2A67607-707D-9A4B-B498-57C0CB8C6AF6}" dt="2022-01-09T08:45:00.824" v="186" actId="20577"/>
+          <ac:spMkLst>
+            <pc:docMk/>
+            <pc:sldMk cId="440415094" sldId="258"/>
+            <ac:spMk id="2" creationId="{45C79BA1-37A3-5741-B0A1-E64646E4283C}"/>
+          </ac:spMkLst>
+        </pc:spChg>
+        <pc:spChg chg="mod">
+          <ac:chgData name="SONG, Qingyu" userId="498998f4-7f18-4549-a740-dcfb6e1e3d22" providerId="ADAL" clId="{A2A67607-707D-9A4B-B498-57C0CB8C6AF6}" dt="2022-01-09T08:45:17.052" v="215" actId="20577"/>
+          <ac:spMkLst>
+            <pc:docMk/>
+            <pc:sldMk cId="440415094" sldId="258"/>
+            <ac:spMk id="3" creationId="{8F20472D-613F-3748-9CBD-88055CDB4B08}"/>
+          </ac:spMkLst>
+        </pc:spChg>
+      </pc:sldChg>
+      <pc:sldChg chg="new del">
+        <pc:chgData name="SONG, Qingyu" userId="498998f4-7f18-4549-a740-dcfb6e1e3d22" providerId="ADAL" clId="{A2A67607-707D-9A4B-B498-57C0CB8C6AF6}" dt="2022-01-09T08:44:50.281" v="173" actId="680"/>
+        <pc:sldMkLst>
+          <pc:docMk/>
+          <pc:sldMk cId="1741813886" sldId="258"/>
+        </pc:sldMkLst>
+      </pc:sldChg>
+      <pc:sldChg chg="modSp add mod">
+        <pc:chgData name="SONG, Qingyu" userId="498998f4-7f18-4549-a740-dcfb6e1e3d22" providerId="ADAL" clId="{A2A67607-707D-9A4B-B498-57C0CB8C6AF6}" dt="2022-01-09T08:46:18.147" v="243" actId="123"/>
+        <pc:sldMkLst>
+          <pc:docMk/>
+          <pc:sldMk cId="1573737923" sldId="259"/>
+        </pc:sldMkLst>
+        <pc:spChg chg="mod">
+          <ac:chgData name="SONG, Qingyu" userId="498998f4-7f18-4549-a740-dcfb6e1e3d22" providerId="ADAL" clId="{A2A67607-707D-9A4B-B498-57C0CB8C6AF6}" dt="2022-01-09T08:45:34.361" v="219"/>
+          <ac:spMkLst>
+            <pc:docMk/>
+            <pc:sldMk cId="1573737923" sldId="259"/>
+            <ac:spMk id="2" creationId="{45C79BA1-37A3-5741-B0A1-E64646E4283C}"/>
+          </ac:spMkLst>
+        </pc:spChg>
+        <pc:spChg chg="mod">
+          <ac:chgData name="SONG, Qingyu" userId="498998f4-7f18-4549-a740-dcfb6e1e3d22" providerId="ADAL" clId="{A2A67607-707D-9A4B-B498-57C0CB8C6AF6}" dt="2022-01-09T08:46:18.147" v="243" actId="123"/>
+          <ac:spMkLst>
+            <pc:docMk/>
+            <pc:sldMk cId="1573737923" sldId="259"/>
+            <ac:spMk id="3" creationId="{8F20472D-613F-3748-9CBD-88055CDB4B08}"/>
+          </ac:spMkLst>
+        </pc:spChg>
+      </pc:sldChg>
+      <pc:sldChg chg="add del">
+        <pc:chgData name="SONG, Qingyu" userId="498998f4-7f18-4549-a740-dcfb6e1e3d22" providerId="ADAL" clId="{A2A67607-707D-9A4B-B498-57C0CB8C6AF6}" dt="2022-01-09T08:45:26.162" v="217"/>
+        <pc:sldMkLst>
+          <pc:docMk/>
+          <pc:sldMk cId="2702226723" sldId="259"/>
+        </pc:sldMkLst>
+      </pc:sldChg>
+      <pc:sldChg chg="addSp delSp modSp add mod">
+        <pc:chgData name="SONG, Qingyu" userId="498998f4-7f18-4549-a740-dcfb6e1e3d22" providerId="ADAL" clId="{A2A67607-707D-9A4B-B498-57C0CB8C6AF6}" dt="2022-01-09T08:48:11.318" v="252" actId="1076"/>
+        <pc:sldMkLst>
+          <pc:docMk/>
+          <pc:sldMk cId="2648031906" sldId="260"/>
+        </pc:sldMkLst>
+        <pc:spChg chg="mod">
+          <ac:chgData name="SONG, Qingyu" userId="498998f4-7f18-4549-a740-dcfb6e1e3d22" providerId="ADAL" clId="{A2A67607-707D-9A4B-B498-57C0CB8C6AF6}" dt="2022-01-09T08:47:00.476" v="248"/>
+          <ac:spMkLst>
+            <pc:docMk/>
+            <pc:sldMk cId="2648031906" sldId="260"/>
+            <ac:spMk id="2" creationId="{45C79BA1-37A3-5741-B0A1-E64646E4283C}"/>
+          </ac:spMkLst>
+        </pc:spChg>
+        <pc:spChg chg="del mod">
+          <ac:chgData name="SONG, Qingyu" userId="498998f4-7f18-4549-a740-dcfb6e1e3d22" providerId="ADAL" clId="{A2A67607-707D-9A4B-B498-57C0CB8C6AF6}" dt="2022-01-09T08:48:01.560" v="250"/>
+          <ac:spMkLst>
+            <pc:docMk/>
+            <pc:sldMk cId="2648031906" sldId="260"/>
+            <ac:spMk id="3" creationId="{8F20472D-613F-3748-9CBD-88055CDB4B08}"/>
+          </ac:spMkLst>
+        </pc:spChg>
+        <pc:picChg chg="add mod">
+          <ac:chgData name="SONG, Qingyu" userId="498998f4-7f18-4549-a740-dcfb6e1e3d22" providerId="ADAL" clId="{A2A67607-707D-9A4B-B498-57C0CB8C6AF6}" dt="2022-01-09T08:48:11.318" v="252" actId="1076"/>
+          <ac:picMkLst>
+            <pc:docMk/>
+            <pc:sldMk cId="2648031906" sldId="260"/>
+            <ac:picMk id="4" creationId="{E1F1B7FF-0FBF-3D45-81DD-BA45BC44D742}"/>
+          </ac:picMkLst>
+        </pc:picChg>
+      </pc:sldChg>
+      <pc:sldChg chg="addSp delSp modSp add mod">
+        <pc:chgData name="SONG, Qingyu" userId="498998f4-7f18-4549-a740-dcfb6e1e3d22" providerId="ADAL" clId="{A2A67607-707D-9A4B-B498-57C0CB8C6AF6}" dt="2022-01-09T08:48:40.756" v="255"/>
+        <pc:sldMkLst>
+          <pc:docMk/>
+          <pc:sldMk cId="2279024797" sldId="261"/>
+        </pc:sldMkLst>
+        <pc:spChg chg="mod">
+          <ac:chgData name="SONG, Qingyu" userId="498998f4-7f18-4549-a740-dcfb6e1e3d22" providerId="ADAL" clId="{A2A67607-707D-9A4B-B498-57C0CB8C6AF6}" dt="2022-01-09T08:48:28.653" v="253"/>
+          <ac:spMkLst>
+            <pc:docMk/>
+            <pc:sldMk cId="2279024797" sldId="261"/>
+            <ac:spMk id="2" creationId="{45C79BA1-37A3-5741-B0A1-E64646E4283C}"/>
+          </ac:spMkLst>
+        </pc:spChg>
+        <pc:spChg chg="del mod">
+          <ac:chgData name="SONG, Qingyu" userId="498998f4-7f18-4549-a740-dcfb6e1e3d22" providerId="ADAL" clId="{A2A67607-707D-9A4B-B498-57C0CB8C6AF6}" dt="2022-01-09T08:48:40.756" v="255"/>
+          <ac:spMkLst>
+            <pc:docMk/>
+            <pc:sldMk cId="2279024797" sldId="261"/>
+            <ac:spMk id="3" creationId="{8F20472D-613F-3748-9CBD-88055CDB4B08}"/>
+          </ac:spMkLst>
+        </pc:spChg>
+        <pc:picChg chg="add mod">
+          <ac:chgData name="SONG, Qingyu" userId="498998f4-7f18-4549-a740-dcfb6e1e3d22" providerId="ADAL" clId="{A2A67607-707D-9A4B-B498-57C0CB8C6AF6}" dt="2022-01-09T08:48:40.756" v="255"/>
+          <ac:picMkLst>
+            <pc:docMk/>
+            <pc:sldMk cId="2279024797" sldId="261"/>
+            <ac:picMk id="4" creationId="{E0803F26-69FA-F141-8053-17ADFC76B873}"/>
+          </ac:picMkLst>
+        </pc:picChg>
+      </pc:sldChg>
+      <pc:sldChg chg="addSp delSp modSp add mod">
+        <pc:chgData name="SONG, Qingyu" userId="498998f4-7f18-4549-a740-dcfb6e1e3d22" providerId="ADAL" clId="{A2A67607-707D-9A4B-B498-57C0CB8C6AF6}" dt="2022-01-09T08:52:22.570" v="367"/>
+        <pc:sldMkLst>
+          <pc:docMk/>
+          <pc:sldMk cId="2946419580" sldId="262"/>
+        </pc:sldMkLst>
+        <pc:spChg chg="mod">
+          <ac:chgData name="SONG, Qingyu" userId="498998f4-7f18-4549-a740-dcfb6e1e3d22" providerId="ADAL" clId="{A2A67607-707D-9A4B-B498-57C0CB8C6AF6}" dt="2022-01-09T08:52:22.570" v="367"/>
+          <ac:spMkLst>
+            <pc:docMk/>
+            <pc:sldMk cId="2946419580" sldId="262"/>
+            <ac:spMk id="2" creationId="{45C79BA1-37A3-5741-B0A1-E64646E4283C}"/>
+          </ac:spMkLst>
+        </pc:spChg>
+        <pc:spChg chg="del mod">
+          <ac:chgData name="SONG, Qingyu" userId="498998f4-7f18-4549-a740-dcfb6e1e3d22" providerId="ADAL" clId="{A2A67607-707D-9A4B-B498-57C0CB8C6AF6}" dt="2022-01-09T08:49:04.320" v="257"/>
+          <ac:spMkLst>
+            <pc:docMk/>
+            <pc:sldMk cId="2946419580" sldId="262"/>
+            <ac:spMk id="3" creationId="{8F20472D-613F-3748-9CBD-88055CDB4B08}"/>
+          </ac:spMkLst>
+        </pc:spChg>
+        <pc:spChg chg="add mod">
+          <ac:chgData name="SONG, Qingyu" userId="498998f4-7f18-4549-a740-dcfb6e1e3d22" providerId="ADAL" clId="{A2A67607-707D-9A4B-B498-57C0CB8C6AF6}" dt="2022-01-09T08:49:30.001" v="288" actId="1076"/>
+          <ac:spMkLst>
+            <pc:docMk/>
+            <pc:sldMk cId="2946419580" sldId="262"/>
+            <ac:spMk id="5" creationId="{99B591B7-0ED3-894C-A352-8477ED74F3BB}"/>
+          </ac:spMkLst>
+        </pc:spChg>
+        <pc:spChg chg="add mod">
+          <ac:chgData name="SONG, Qingyu" userId="498998f4-7f18-4549-a740-dcfb6e1e3d22" providerId="ADAL" clId="{A2A67607-707D-9A4B-B498-57C0CB8C6AF6}" dt="2022-01-09T08:49:34.916" v="289" actId="1076"/>
+          <ac:spMkLst>
+            <pc:docMk/>
+            <pc:sldMk cId="2946419580" sldId="262"/>
+            <ac:spMk id="6" creationId="{95A8685D-FCCD-1D48-84F7-D47520F09B5B}"/>
+          </ac:spMkLst>
+        </pc:spChg>
+        <pc:picChg chg="add mod">
+          <ac:chgData name="SONG, Qingyu" userId="498998f4-7f18-4549-a740-dcfb6e1e3d22" providerId="ADAL" clId="{A2A67607-707D-9A4B-B498-57C0CB8C6AF6}" dt="2022-01-09T08:49:04.320" v="257"/>
+          <ac:picMkLst>
+            <pc:docMk/>
+            <pc:sldMk cId="2946419580" sldId="262"/>
+            <ac:picMk id="4" creationId="{8D11AF92-8AD0-444F-83E3-E11532277980}"/>
+          </ac:picMkLst>
+        </pc:picChg>
+      </pc:sldChg>
+      <pc:sldChg chg="addSp modSp add mod">
+        <pc:chgData name="SONG, Qingyu" userId="498998f4-7f18-4549-a740-dcfb6e1e3d22" providerId="ADAL" clId="{A2A67607-707D-9A4B-B498-57C0CB8C6AF6}" dt="2022-01-09T09:02:56.402" v="628" actId="1076"/>
+        <pc:sldMkLst>
+          <pc:docMk/>
+          <pc:sldMk cId="2477746496" sldId="263"/>
+        </pc:sldMkLst>
+        <pc:spChg chg="mod">
+          <ac:chgData name="SONG, Qingyu" userId="498998f4-7f18-4549-a740-dcfb6e1e3d22" providerId="ADAL" clId="{A2A67607-707D-9A4B-B498-57C0CB8C6AF6}" dt="2022-01-09T08:57:23.226" v="476" actId="20577"/>
+          <ac:spMkLst>
+            <pc:docMk/>
+            <pc:sldMk cId="2477746496" sldId="263"/>
+            <ac:spMk id="2" creationId="{45C79BA1-37A3-5741-B0A1-E64646E4283C}"/>
+          </ac:spMkLst>
+        </pc:spChg>
+        <pc:spChg chg="mod">
+          <ac:chgData name="SONG, Qingyu" userId="498998f4-7f18-4549-a740-dcfb6e1e3d22" providerId="ADAL" clId="{A2A67607-707D-9A4B-B498-57C0CB8C6AF6}" dt="2022-01-09T09:00:36.805" v="554" actId="14100"/>
+          <ac:spMkLst>
+            <pc:docMk/>
+            <pc:sldMk cId="2477746496" sldId="263"/>
+            <ac:spMk id="3" creationId="{8F20472D-613F-3748-9CBD-88055CDB4B08}"/>
+          </ac:spMkLst>
+        </pc:spChg>
+        <pc:spChg chg="add mod">
+          <ac:chgData name="SONG, Qingyu" userId="498998f4-7f18-4549-a740-dcfb6e1e3d22" providerId="ADAL" clId="{A2A67607-707D-9A4B-B498-57C0CB8C6AF6}" dt="2022-01-09T09:00:42.462" v="558" actId="403"/>
+          <ac:spMkLst>
+            <pc:docMk/>
+            <pc:sldMk cId="2477746496" sldId="263"/>
+            <ac:spMk id="5" creationId="{D0C166B3-D1B0-6A4E-9334-36DA412495C4}"/>
+          </ac:spMkLst>
+        </pc:spChg>
+        <pc:picChg chg="add mod">
+          <ac:chgData name="SONG, Qingyu" userId="498998f4-7f18-4549-a740-dcfb6e1e3d22" providerId="ADAL" clId="{A2A67607-707D-9A4B-B498-57C0CB8C6AF6}" dt="2022-01-09T09:02:56.402" v="628" actId="1076"/>
+          <ac:picMkLst>
+            <pc:docMk/>
+            <pc:sldMk cId="2477746496" sldId="263"/>
+            <ac:picMk id="4" creationId="{89B148E8-50D7-4542-A495-2257CE9D6A0C}"/>
+          </ac:picMkLst>
+        </pc:picChg>
+      </pc:sldChg>
+      <pc:sldChg chg="addSp delSp modSp add mod">
+        <pc:chgData name="SONG, Qingyu" userId="498998f4-7f18-4549-a740-dcfb6e1e3d22" providerId="ADAL" clId="{A2A67607-707D-9A4B-B498-57C0CB8C6AF6}" dt="2022-01-09T09:00:55.037" v="585" actId="1036"/>
+        <pc:sldMkLst>
+          <pc:docMk/>
+          <pc:sldMk cId="3355003134" sldId="264"/>
+        </pc:sldMkLst>
+        <pc:spChg chg="mod">
+          <ac:chgData name="SONG, Qingyu" userId="498998f4-7f18-4549-a740-dcfb6e1e3d22" providerId="ADAL" clId="{A2A67607-707D-9A4B-B498-57C0CB8C6AF6}" dt="2022-01-09T08:52:41.807" v="379"/>
+          <ac:spMkLst>
+            <pc:docMk/>
+            <pc:sldMk cId="3355003134" sldId="264"/>
+            <ac:spMk id="2" creationId="{45C79BA1-37A3-5741-B0A1-E64646E4283C}"/>
+          </ac:spMkLst>
+        </pc:spChg>
+        <pc:spChg chg="mod">
+          <ac:chgData name="SONG, Qingyu" userId="498998f4-7f18-4549-a740-dcfb6e1e3d22" providerId="ADAL" clId="{A2A67607-707D-9A4B-B498-57C0CB8C6AF6}" dt="2022-01-09T08:59:52.346" v="535" actId="14100"/>
+          <ac:spMkLst>
+            <pc:docMk/>
+            <pc:sldMk cId="3355003134" sldId="264"/>
+            <ac:spMk id="3" creationId="{8F20472D-613F-3748-9CBD-88055CDB4B08}"/>
+          </ac:spMkLst>
+        </pc:spChg>
+        <pc:spChg chg="add mod">
+          <ac:chgData name="SONG, Qingyu" userId="498998f4-7f18-4549-a740-dcfb6e1e3d22" providerId="ADAL" clId="{A2A67607-707D-9A4B-B498-57C0CB8C6AF6}" dt="2022-01-09T09:00:50.651" v="567" actId="1036"/>
+          <ac:spMkLst>
+            <pc:docMk/>
+            <pc:sldMk cId="3355003134" sldId="264"/>
+            <ac:spMk id="6" creationId="{8B586356-C565-9B40-BF75-839DA7B53FCB}"/>
+          </ac:spMkLst>
+        </pc:spChg>
+        <pc:picChg chg="del">
+          <ac:chgData name="SONG, Qingyu" userId="498998f4-7f18-4549-a740-dcfb6e1e3d22" providerId="ADAL" clId="{A2A67607-707D-9A4B-B498-57C0CB8C6AF6}" dt="2022-01-09T08:53:07.781" v="381" actId="478"/>
+          <ac:picMkLst>
+            <pc:docMk/>
+            <pc:sldMk cId="3355003134" sldId="264"/>
+            <ac:picMk id="4" creationId="{89B148E8-50D7-4542-A495-2257CE9D6A0C}"/>
+          </ac:picMkLst>
+        </pc:picChg>
+        <pc:picChg chg="add mod">
+          <ac:chgData name="SONG, Qingyu" userId="498998f4-7f18-4549-a740-dcfb6e1e3d22" providerId="ADAL" clId="{A2A67607-707D-9A4B-B498-57C0CB8C6AF6}" dt="2022-01-09T09:00:55.037" v="585" actId="1036"/>
+          <ac:picMkLst>
+            <pc:docMk/>
+            <pc:sldMk cId="3355003134" sldId="264"/>
+            <ac:picMk id="5" creationId="{273285BD-3165-3D46-A0CB-9A06242E6EF4}"/>
+          </ac:picMkLst>
+        </pc:picChg>
+      </pc:sldChg>
+      <pc:sldChg chg="addSp delSp modSp add mod">
+        <pc:chgData name="SONG, Qingyu" userId="498998f4-7f18-4549-a740-dcfb6e1e3d22" providerId="ADAL" clId="{A2A67607-707D-9A4B-B498-57C0CB8C6AF6}" dt="2022-01-09T09:01:01.172" v="602" actId="1036"/>
+        <pc:sldMkLst>
+          <pc:docMk/>
+          <pc:sldMk cId="3781525919" sldId="265"/>
+        </pc:sldMkLst>
+        <pc:spChg chg="mod">
+          <ac:chgData name="SONG, Qingyu" userId="498998f4-7f18-4549-a740-dcfb6e1e3d22" providerId="ADAL" clId="{A2A67607-707D-9A4B-B498-57C0CB8C6AF6}" dt="2022-01-09T08:56:55.874" v="468"/>
+          <ac:spMkLst>
+            <pc:docMk/>
+            <pc:sldMk cId="3781525919" sldId="265"/>
+            <ac:spMk id="2" creationId="{45C79BA1-37A3-5741-B0A1-E64646E4283C}"/>
+          </ac:spMkLst>
+        </pc:spChg>
+        <pc:spChg chg="mod">
+          <ac:chgData name="SONG, Qingyu" userId="498998f4-7f18-4549-a740-dcfb6e1e3d22" providerId="ADAL" clId="{A2A67607-707D-9A4B-B498-57C0CB8C6AF6}" dt="2022-01-09T09:00:13.333" v="541" actId="14100"/>
+          <ac:spMkLst>
+            <pc:docMk/>
+            <pc:sldMk cId="3781525919" sldId="265"/>
+            <ac:spMk id="3" creationId="{8F20472D-613F-3748-9CBD-88055CDB4B08}"/>
+          </ac:spMkLst>
+        </pc:spChg>
+        <pc:spChg chg="add mod">
+          <ac:chgData name="SONG, Qingyu" userId="498998f4-7f18-4549-a740-dcfb6e1e3d22" providerId="ADAL" clId="{A2A67607-707D-9A4B-B498-57C0CB8C6AF6}" dt="2022-01-09T09:00:24.761" v="547" actId="404"/>
+          <ac:spMkLst>
+            <pc:docMk/>
+            <pc:sldMk cId="3781525919" sldId="265"/>
+            <ac:spMk id="6" creationId="{3B692967-652C-AB4A-9FFE-F0D2464A2DD4}"/>
+          </ac:spMkLst>
+        </pc:spChg>
+        <pc:picChg chg="del">
+          <ac:chgData name="SONG, Qingyu" userId="498998f4-7f18-4549-a740-dcfb6e1e3d22" providerId="ADAL" clId="{A2A67607-707D-9A4B-B498-57C0CB8C6AF6}" dt="2022-01-09T08:55:10.406" v="439" actId="478"/>
+          <ac:picMkLst>
+            <pc:docMk/>
+            <pc:sldMk cId="3781525919" sldId="265"/>
+            <ac:picMk id="4" creationId="{89B148E8-50D7-4542-A495-2257CE9D6A0C}"/>
+          </ac:picMkLst>
+        </pc:picChg>
+        <pc:picChg chg="add mod">
+          <ac:chgData name="SONG, Qingyu" userId="498998f4-7f18-4549-a740-dcfb6e1e3d22" providerId="ADAL" clId="{A2A67607-707D-9A4B-B498-57C0CB8C6AF6}" dt="2022-01-09T09:01:01.172" v="602" actId="1036"/>
+          <ac:picMkLst>
+            <pc:docMk/>
+            <pc:sldMk cId="3781525919" sldId="265"/>
+            <ac:picMk id="5" creationId="{C3480844-4AD9-7945-A207-E3FE35124D43}"/>
+          </ac:picMkLst>
+        </pc:picChg>
+      </pc:sldChg>
+      <pc:sldChg chg="add del">
+        <pc:chgData name="SONG, Qingyu" userId="498998f4-7f18-4549-a740-dcfb6e1e3d22" providerId="ADAL" clId="{A2A67607-707D-9A4B-B498-57C0CB8C6AF6}" dt="2022-01-09T08:56:47.408" v="466" actId="2696"/>
+        <pc:sldMkLst>
+          <pc:docMk/>
+          <pc:sldMk cId="1610562717" sldId="266"/>
+        </pc:sldMkLst>
+      </pc:sldChg>
+      <pc:sldChg chg="addSp delSp modSp add mod">
+        <pc:chgData name="SONG, Qingyu" userId="498998f4-7f18-4549-a740-dcfb6e1e3d22" providerId="ADAL" clId="{A2A67607-707D-9A4B-B498-57C0CB8C6AF6}" dt="2022-01-09T09:01:29.138" v="610" actId="1076"/>
+        <pc:sldMkLst>
+          <pc:docMk/>
+          <pc:sldMk cId="3863058764" sldId="266"/>
+        </pc:sldMkLst>
+        <pc:spChg chg="mod">
+          <ac:chgData name="SONG, Qingyu" userId="498998f4-7f18-4549-a740-dcfb6e1e3d22" providerId="ADAL" clId="{A2A67607-707D-9A4B-B498-57C0CB8C6AF6}" dt="2022-01-09T08:57:52.495" v="484" actId="20577"/>
+          <ac:spMkLst>
+            <pc:docMk/>
+            <pc:sldMk cId="3863058764" sldId="266"/>
+            <ac:spMk id="2" creationId="{45C79BA1-37A3-5741-B0A1-E64646E4283C}"/>
+          </ac:spMkLst>
+        </pc:spChg>
+        <pc:spChg chg="mod">
+          <ac:chgData name="SONG, Qingyu" userId="498998f4-7f18-4549-a740-dcfb6e1e3d22" providerId="ADAL" clId="{A2A67607-707D-9A4B-B498-57C0CB8C6AF6}" dt="2022-01-09T09:01:24.526" v="609" actId="14100"/>
+          <ac:spMkLst>
+            <pc:docMk/>
+            <pc:sldMk cId="3863058764" sldId="266"/>
+            <ac:spMk id="3" creationId="{8F20472D-613F-3748-9CBD-88055CDB4B08}"/>
+          </ac:spMkLst>
+        </pc:spChg>
+        <pc:spChg chg="add mod">
+          <ac:chgData name="SONG, Qingyu" userId="498998f4-7f18-4549-a740-dcfb6e1e3d22" providerId="ADAL" clId="{A2A67607-707D-9A4B-B498-57C0CB8C6AF6}" dt="2022-01-09T09:01:29.138" v="610" actId="1076"/>
+          <ac:spMkLst>
+            <pc:docMk/>
+            <pc:sldMk cId="3863058764" sldId="266"/>
+            <ac:spMk id="6" creationId="{065A69BD-EADE-DA43-8E5A-0F49CD1E94FF}"/>
+          </ac:spMkLst>
+        </pc:spChg>
+        <pc:picChg chg="add mod">
+          <ac:chgData name="SONG, Qingyu" userId="498998f4-7f18-4549-a740-dcfb6e1e3d22" providerId="ADAL" clId="{A2A67607-707D-9A4B-B498-57C0CB8C6AF6}" dt="2022-01-09T09:01:20.609" v="608" actId="1076"/>
+          <ac:picMkLst>
+            <pc:docMk/>
+            <pc:sldMk cId="3863058764" sldId="266"/>
+            <ac:picMk id="4" creationId="{A1D5C397-6034-9D41-9BB4-A827A6FAA1BD}"/>
+          </ac:picMkLst>
+        </pc:picChg>
+        <pc:picChg chg="add del">
+          <ac:chgData name="SONG, Qingyu" userId="498998f4-7f18-4549-a740-dcfb6e1e3d22" providerId="ADAL" clId="{A2A67607-707D-9A4B-B498-57C0CB8C6AF6}" dt="2022-01-09T08:59:15.791" v="520" actId="478"/>
+          <ac:picMkLst>
+            <pc:docMk/>
+            <pc:sldMk cId="3863058764" sldId="266"/>
+            <ac:picMk id="5" creationId="{C3480844-4AD9-7945-A207-E3FE35124D43}"/>
+          </ac:picMkLst>
+        </pc:picChg>
+      </pc:sldChg>
+      <pc:sldChg chg="add del">
+        <pc:chgData name="SONG, Qingyu" userId="498998f4-7f18-4549-a740-dcfb6e1e3d22" providerId="ADAL" clId="{A2A67607-707D-9A4B-B498-57C0CB8C6AF6}" dt="2022-01-09T08:56:47.926" v="467" actId="2696"/>
+        <pc:sldMkLst>
+          <pc:docMk/>
+          <pc:sldMk cId="2034820447" sldId="267"/>
+        </pc:sldMkLst>
+      </pc:sldChg>
+      <pc:sldChg chg="addSp delSp modSp add mod">
+        <pc:chgData name="SONG, Qingyu" userId="498998f4-7f18-4549-a740-dcfb6e1e3d22" providerId="ADAL" clId="{A2A67607-707D-9A4B-B498-57C0CB8C6AF6}" dt="2022-01-09T09:03:51.796" v="655" actId="1037"/>
+        <pc:sldMkLst>
+          <pc:docMk/>
+          <pc:sldMk cId="4271156151" sldId="267"/>
+        </pc:sldMkLst>
+        <pc:spChg chg="mod">
+          <ac:chgData name="SONG, Qingyu" userId="498998f4-7f18-4549-a740-dcfb6e1e3d22" providerId="ADAL" clId="{A2A67607-707D-9A4B-B498-57C0CB8C6AF6}" dt="2022-01-09T09:02:05.389" v="619" actId="20577"/>
+          <ac:spMkLst>
+            <pc:docMk/>
+            <pc:sldMk cId="4271156151" sldId="267"/>
+            <ac:spMk id="2" creationId="{45C79BA1-37A3-5741-B0A1-E64646E4283C}"/>
+          </ac:spMkLst>
+        </pc:spChg>
+        <pc:spChg chg="mod">
+          <ac:chgData name="SONG, Qingyu" userId="498998f4-7f18-4549-a740-dcfb6e1e3d22" providerId="ADAL" clId="{A2A67607-707D-9A4B-B498-57C0CB8C6AF6}" dt="2022-01-09T09:02:19.743" v="620"/>
+          <ac:spMkLst>
+            <pc:docMk/>
+            <pc:sldMk cId="4271156151" sldId="267"/>
+            <ac:spMk id="3" creationId="{8F20472D-613F-3748-9CBD-88055CDB4B08}"/>
+          </ac:spMkLst>
+        </pc:spChg>
+        <pc:spChg chg="mod">
+          <ac:chgData name="SONG, Qingyu" userId="498998f4-7f18-4549-a740-dcfb6e1e3d22" providerId="ADAL" clId="{A2A67607-707D-9A4B-B498-57C0CB8C6AF6}" dt="2022-01-09T09:02:29.871" v="622" actId="20577"/>
+          <ac:spMkLst>
+            <pc:docMk/>
+            <pc:sldMk cId="4271156151" sldId="267"/>
+            <ac:spMk id="6" creationId="{065A69BD-EADE-DA43-8E5A-0F49CD1E94FF}"/>
+          </ac:spMkLst>
+        </pc:spChg>
+        <pc:picChg chg="del">
+          <ac:chgData name="SONG, Qingyu" userId="498998f4-7f18-4549-a740-dcfb6e1e3d22" providerId="ADAL" clId="{A2A67607-707D-9A4B-B498-57C0CB8C6AF6}" dt="2022-01-09T09:02:39.138" v="623" actId="478"/>
+          <ac:picMkLst>
+            <pc:docMk/>
+            <pc:sldMk cId="4271156151" sldId="267"/>
+            <ac:picMk id="4" creationId="{A1D5C397-6034-9D41-9BB4-A827A6FAA1BD}"/>
+          </ac:picMkLst>
+        </pc:picChg>
+        <pc:picChg chg="add mod">
+          <ac:chgData name="SONG, Qingyu" userId="498998f4-7f18-4549-a740-dcfb6e1e3d22" providerId="ADAL" clId="{A2A67607-707D-9A4B-B498-57C0CB8C6AF6}" dt="2022-01-09T09:03:51.796" v="655" actId="1037"/>
+          <ac:picMkLst>
+            <pc:docMk/>
+            <pc:sldMk cId="4271156151" sldId="267"/>
+            <ac:picMk id="5" creationId="{20B8ECFB-DBDD-7147-A6FE-FB32D105F141}"/>
+          </ac:picMkLst>
+        </pc:picChg>
+      </pc:sldChg>
+      <pc:sldChg chg="addSp delSp modSp add mod">
+        <pc:chgData name="SONG, Qingyu" userId="498998f4-7f18-4549-a740-dcfb6e1e3d22" providerId="ADAL" clId="{A2A67607-707D-9A4B-B498-57C0CB8C6AF6}" dt="2022-01-09T09:04:30.224" v="673" actId="1076"/>
+        <pc:sldMkLst>
+          <pc:docMk/>
+          <pc:sldMk cId="3168600580" sldId="268"/>
+        </pc:sldMkLst>
+        <pc:spChg chg="mod">
+          <ac:chgData name="SONG, Qingyu" userId="498998f4-7f18-4549-a740-dcfb6e1e3d22" providerId="ADAL" clId="{A2A67607-707D-9A4B-B498-57C0CB8C6AF6}" dt="2022-01-09T09:04:04.507" v="667" actId="20577"/>
+          <ac:spMkLst>
+            <pc:docMk/>
+            <pc:sldMk cId="3168600580" sldId="268"/>
+            <ac:spMk id="2" creationId="{45C79BA1-37A3-5741-B0A1-E64646E4283C}"/>
+          </ac:spMkLst>
+        </pc:spChg>
+        <pc:spChg chg="mod">
+          <ac:chgData name="SONG, Qingyu" userId="498998f4-7f18-4549-a740-dcfb6e1e3d22" providerId="ADAL" clId="{A2A67607-707D-9A4B-B498-57C0CB8C6AF6}" dt="2022-01-09T09:04:09.928" v="668"/>
+          <ac:spMkLst>
+            <pc:docMk/>
+            <pc:sldMk cId="3168600580" sldId="268"/>
+            <ac:spMk id="3" creationId="{8F20472D-613F-3748-9CBD-88055CDB4B08}"/>
+          </ac:spMkLst>
+        </pc:spChg>
+        <pc:spChg chg="mod">
+          <ac:chgData name="SONG, Qingyu" userId="498998f4-7f18-4549-a740-dcfb6e1e3d22" providerId="ADAL" clId="{A2A67607-707D-9A4B-B498-57C0CB8C6AF6}" dt="2022-01-09T09:04:14.145" v="669"/>
+          <ac:spMkLst>
+            <pc:docMk/>
+            <pc:sldMk cId="3168600580" sldId="268"/>
+            <ac:spMk id="6" creationId="{065A69BD-EADE-DA43-8E5A-0F49CD1E94FF}"/>
+          </ac:spMkLst>
+        </pc:spChg>
+        <pc:picChg chg="add mod">
+          <ac:chgData name="SONG, Qingyu" userId="498998f4-7f18-4549-a740-dcfb6e1e3d22" providerId="ADAL" clId="{A2A67607-707D-9A4B-B498-57C0CB8C6AF6}" dt="2022-01-09T09:04:30.224" v="673" actId="1076"/>
+          <ac:picMkLst>
+            <pc:docMk/>
+            <pc:sldMk cId="3168600580" sldId="268"/>
+            <ac:picMk id="4" creationId="{E04675FE-F79E-C645-8EAA-C00F491721EB}"/>
+          </ac:picMkLst>
+        </pc:picChg>
+        <pc:picChg chg="del">
+          <ac:chgData name="SONG, Qingyu" userId="498998f4-7f18-4549-a740-dcfb6e1e3d22" providerId="ADAL" clId="{A2A67607-707D-9A4B-B498-57C0CB8C6AF6}" dt="2022-01-09T09:03:55.689" v="656" actId="478"/>
+          <ac:picMkLst>
+            <pc:docMk/>
+            <pc:sldMk cId="3168600580" sldId="268"/>
+            <ac:picMk id="5" creationId="{20B8ECFB-DBDD-7147-A6FE-FB32D105F141}"/>
+          </ac:picMkLst>
+        </pc:picChg>
+      </pc:sldChg>
+      <pc:sldChg chg="addSp delSp modSp add mod">
+        <pc:chgData name="SONG, Qingyu" userId="498998f4-7f18-4549-a740-dcfb6e1e3d22" providerId="ADAL" clId="{A2A67607-707D-9A4B-B498-57C0CB8C6AF6}" dt="2022-01-09T09:05:24.298" v="694" actId="1076"/>
+        <pc:sldMkLst>
+          <pc:docMk/>
+          <pc:sldMk cId="1589765134" sldId="269"/>
+        </pc:sldMkLst>
+        <pc:spChg chg="mod">
+          <ac:chgData name="SONG, Qingyu" userId="498998f4-7f18-4549-a740-dcfb6e1e3d22" providerId="ADAL" clId="{A2A67607-707D-9A4B-B498-57C0CB8C6AF6}" dt="2022-01-09T09:04:45.920" v="676"/>
+          <ac:spMkLst>
+            <pc:docMk/>
+            <pc:sldMk cId="1589765134" sldId="269"/>
+            <ac:spMk id="2" creationId="{45C79BA1-37A3-5741-B0A1-E64646E4283C}"/>
+          </ac:spMkLst>
+        </pc:spChg>
+        <pc:spChg chg="mod">
+          <ac:chgData name="SONG, Qingyu" userId="498998f4-7f18-4549-a740-dcfb6e1e3d22" providerId="ADAL" clId="{A2A67607-707D-9A4B-B498-57C0CB8C6AF6}" dt="2022-01-09T09:04:55.810" v="687" actId="20577"/>
+          <ac:spMkLst>
+            <pc:docMk/>
+            <pc:sldMk cId="1589765134" sldId="269"/>
+            <ac:spMk id="3" creationId="{8F20472D-613F-3748-9CBD-88055CDB4B08}"/>
+          </ac:spMkLst>
+        </pc:spChg>
+        <pc:spChg chg="mod">
+          <ac:chgData name="SONG, Qingyu" userId="498998f4-7f18-4549-a740-dcfb6e1e3d22" providerId="ADAL" clId="{A2A67607-707D-9A4B-B498-57C0CB8C6AF6}" dt="2022-01-09T09:05:09.254" v="690"/>
+          <ac:spMkLst>
+            <pc:docMk/>
+            <pc:sldMk cId="1589765134" sldId="269"/>
+            <ac:spMk id="6" creationId="{065A69BD-EADE-DA43-8E5A-0F49CD1E94FF}"/>
+          </ac:spMkLst>
+        </pc:spChg>
+        <pc:picChg chg="del">
+          <ac:chgData name="SONG, Qingyu" userId="498998f4-7f18-4549-a740-dcfb6e1e3d22" providerId="ADAL" clId="{A2A67607-707D-9A4B-B498-57C0CB8C6AF6}" dt="2022-01-09T09:05:18.814" v="691" actId="478"/>
+          <ac:picMkLst>
+            <pc:docMk/>
+            <pc:sldMk cId="1589765134" sldId="269"/>
+            <ac:picMk id="4" creationId="{E04675FE-F79E-C645-8EAA-C00F491721EB}"/>
+          </ac:picMkLst>
+        </pc:picChg>
+        <pc:picChg chg="add mod">
+          <ac:chgData name="SONG, Qingyu" userId="498998f4-7f18-4549-a740-dcfb6e1e3d22" providerId="ADAL" clId="{A2A67607-707D-9A4B-B498-57C0CB8C6AF6}" dt="2022-01-09T09:05:24.298" v="694" actId="1076"/>
+          <ac:picMkLst>
+            <pc:docMk/>
+            <pc:sldMk cId="1589765134" sldId="269"/>
+            <ac:picMk id="5" creationId="{7827AB7E-88BC-F041-A7B3-C9FD27A79BE9}"/>
+          </ac:picMkLst>
+        </pc:picChg>
+      </pc:sldChg>
+      <pc:sldChg chg="delSp modSp add mod">
+        <pc:chgData name="SONG, Qingyu" userId="498998f4-7f18-4549-a740-dcfb6e1e3d22" providerId="ADAL" clId="{A2A67607-707D-9A4B-B498-57C0CB8C6AF6}" dt="2022-01-09T09:17:41.699" v="736"/>
+        <pc:sldMkLst>
+          <pc:docMk/>
+          <pc:sldMk cId="1871005255" sldId="270"/>
+        </pc:sldMkLst>
+        <pc:spChg chg="mod">
+          <ac:chgData name="SONG, Qingyu" userId="498998f4-7f18-4549-a740-dcfb6e1e3d22" providerId="ADAL" clId="{A2A67607-707D-9A4B-B498-57C0CB8C6AF6}" dt="2022-01-09T09:05:37.022" v="695"/>
+          <ac:spMkLst>
+            <pc:docMk/>
+            <pc:sldMk cId="1871005255" sldId="270"/>
+            <ac:spMk id="2" creationId="{45C79BA1-37A3-5741-B0A1-E64646E4283C}"/>
+          </ac:spMkLst>
+        </pc:spChg>
+        <pc:spChg chg="mod">
+          <ac:chgData name="SONG, Qingyu" userId="498998f4-7f18-4549-a740-dcfb6e1e3d22" providerId="ADAL" clId="{A2A67607-707D-9A4B-B498-57C0CB8C6AF6}" dt="2022-01-09T09:17:41.699" v="736"/>
+          <ac:spMkLst>
+            <pc:docMk/>
+            <pc:sldMk cId="1871005255" sldId="270"/>
+            <ac:spMk id="3" creationId="{8F20472D-613F-3748-9CBD-88055CDB4B08}"/>
+          </ac:spMkLst>
+        </pc:spChg>
+        <pc:spChg chg="del mod">
+          <ac:chgData name="SONG, Qingyu" userId="498998f4-7f18-4549-a740-dcfb6e1e3d22" providerId="ADAL" clId="{A2A67607-707D-9A4B-B498-57C0CB8C6AF6}" dt="2022-01-09T09:07:05.309" v="699" actId="478"/>
+          <ac:spMkLst>
+            <pc:docMk/>
+            <pc:sldMk cId="1871005255" sldId="270"/>
+            <ac:spMk id="6" creationId="{065A69BD-EADE-DA43-8E5A-0F49CD1E94FF}"/>
+          </ac:spMkLst>
+        </pc:spChg>
+        <pc:picChg chg="del">
+          <ac:chgData name="SONG, Qingyu" userId="498998f4-7f18-4549-a740-dcfb6e1e3d22" providerId="ADAL" clId="{A2A67607-707D-9A4B-B498-57C0CB8C6AF6}" dt="2022-01-09T09:07:02.226" v="697" actId="478"/>
+          <ac:picMkLst>
+            <pc:docMk/>
+            <pc:sldMk cId="1871005255" sldId="270"/>
+            <ac:picMk id="4" creationId="{E04675FE-F79E-C645-8EAA-C00F491721EB}"/>
+          </ac:picMkLst>
+        </pc:picChg>
+      </pc:sldChg>
+      <pc:sldChg chg="modSp add mod">
+        <pc:chgData name="SONG, Qingyu" userId="498998f4-7f18-4549-a740-dcfb6e1e3d22" providerId="ADAL" clId="{A2A67607-707D-9A4B-B498-57C0CB8C6AF6}" dt="2022-01-09T09:10:29.220" v="720" actId="403"/>
+        <pc:sldMkLst>
+          <pc:docMk/>
+          <pc:sldMk cId="616564471" sldId="271"/>
+        </pc:sldMkLst>
+        <pc:spChg chg="mod">
+          <ac:chgData name="SONG, Qingyu" userId="498998f4-7f18-4549-a740-dcfb6e1e3d22" providerId="ADAL" clId="{A2A67607-707D-9A4B-B498-57C0CB8C6AF6}" dt="2022-01-09T09:08:29.862" v="701"/>
+          <ac:spMkLst>
+            <pc:docMk/>
+            <pc:sldMk cId="616564471" sldId="271"/>
+            <ac:spMk id="2" creationId="{45C79BA1-37A3-5741-B0A1-E64646E4283C}"/>
+          </ac:spMkLst>
+        </pc:spChg>
+        <pc:spChg chg="mod">
+          <ac:chgData name="SONG, Qingyu" userId="498998f4-7f18-4549-a740-dcfb6e1e3d22" providerId="ADAL" clId="{A2A67607-707D-9A4B-B498-57C0CB8C6AF6}" dt="2022-01-09T09:10:29.220" v="720" actId="403"/>
+          <ac:spMkLst>
+            <pc:docMk/>
+            <pc:sldMk cId="616564471" sldId="271"/>
+            <ac:spMk id="3" creationId="{8F20472D-613F-3748-9CBD-88055CDB4B08}"/>
+          </ac:spMkLst>
+        </pc:spChg>
+      </pc:sldChg>
+      <pc:sldChg chg="addSp delSp modSp new mod">
+        <pc:chgData name="SONG, Qingyu" userId="498998f4-7f18-4549-a740-dcfb6e1e3d22" providerId="ADAL" clId="{A2A67607-707D-9A4B-B498-57C0CB8C6AF6}" dt="2022-01-09T09:11:07.645" v="730" actId="1076"/>
+        <pc:sldMkLst>
+          <pc:docMk/>
+          <pc:sldMk cId="3216618933" sldId="272"/>
+        </pc:sldMkLst>
+        <pc:spChg chg="del">
+          <ac:chgData name="SONG, Qingyu" userId="498998f4-7f18-4549-a740-dcfb6e1e3d22" providerId="ADAL" clId="{A2A67607-707D-9A4B-B498-57C0CB8C6AF6}" dt="2022-01-09T09:10:47.797" v="722" actId="478"/>
+          <ac:spMkLst>
+            <pc:docMk/>
+            <pc:sldMk cId="3216618933" sldId="272"/>
+            <ac:spMk id="2" creationId="{900EDBAF-B262-2241-AC45-A243A09C313B}"/>
+          </ac:spMkLst>
+        </pc:spChg>
+        <pc:spChg chg="del">
+          <ac:chgData name="SONG, Qingyu" userId="498998f4-7f18-4549-a740-dcfb6e1e3d22" providerId="ADAL" clId="{A2A67607-707D-9A4B-B498-57C0CB8C6AF6}" dt="2022-01-09T09:10:50.341" v="723" actId="478"/>
+          <ac:spMkLst>
+            <pc:docMk/>
+            <pc:sldMk cId="3216618933" sldId="272"/>
+            <ac:spMk id="3" creationId="{CE685DE1-EC4A-014A-BCA4-FAC5A190BA84}"/>
+          </ac:spMkLst>
+        </pc:spChg>
+        <pc:spChg chg="add mod">
+          <ac:chgData name="SONG, Qingyu" userId="498998f4-7f18-4549-a740-dcfb6e1e3d22" providerId="ADAL" clId="{A2A67607-707D-9A4B-B498-57C0CB8C6AF6}" dt="2022-01-09T09:11:07.645" v="730" actId="1076"/>
+          <ac:spMkLst>
+            <pc:docMk/>
+            <pc:sldMk cId="3216618933" sldId="272"/>
+            <ac:spMk id="4" creationId="{A8D2CAE8-E323-A14E-A62F-188A25405FEA}"/>
+          </ac:spMkLst>
+        </pc:spChg>
+      </pc:sldChg>
+    </pc:docChg>
+  </pc:docChgLst>
+  <pc:docChgLst>
     <pc:chgData name="Qingyu Song" userId="O4NG2utMRSC9bShTQouuMd1Uq3x00QhxVtEheGSGOoU=" providerId="None" clId="Web-{1A9491C6-FD31-4FA7-98FA-39E25D0B6578}"/>
     <pc:docChg chg="modSld">
       <pc:chgData name="Qingyu Song" userId="O4NG2utMRSC9bShTQouuMd1Uq3x00QhxVtEheGSGOoU=" providerId="None" clId="Web-{1A9491C6-FD31-4FA7-98FA-39E25D0B6578}" dt="2022-01-09T11:29:04.756" v="11" actId="20577"/>
@@ -1612,650 +2256,6 @@
       </pc:sldChg>
     </pc:docChg>
   </pc:docChgLst>
-  <pc:docChgLst>
-    <pc:chgData name="SONG, Qingyu" userId="498998f4-7f18-4549-a740-dcfb6e1e3d22" providerId="ADAL" clId="{A2A67607-707D-9A4B-B498-57C0CB8C6AF6}"/>
-    <pc:docChg chg="undo custSel addSld delSld modSld">
-      <pc:chgData name="SONG, Qingyu" userId="498998f4-7f18-4549-a740-dcfb6e1e3d22" providerId="ADAL" clId="{A2A67607-707D-9A4B-B498-57C0CB8C6AF6}" dt="2022-01-09T09:39:47.453" v="739" actId="20577"/>
-      <pc:docMkLst>
-        <pc:docMk/>
-      </pc:docMkLst>
-      <pc:sldChg chg="modSp mod">
-        <pc:chgData name="SONG, Qingyu" userId="498998f4-7f18-4549-a740-dcfb6e1e3d22" providerId="ADAL" clId="{A2A67607-707D-9A4B-B498-57C0CB8C6AF6}" dt="2022-01-09T08:43:56.456" v="166" actId="27636"/>
-        <pc:sldMkLst>
-          <pc:docMk/>
-          <pc:sldMk cId="356419186" sldId="256"/>
-        </pc:sldMkLst>
-        <pc:spChg chg="mod">
-          <ac:chgData name="SONG, Qingyu" userId="498998f4-7f18-4549-a740-dcfb6e1e3d22" providerId="ADAL" clId="{A2A67607-707D-9A4B-B498-57C0CB8C6AF6}" dt="2022-01-09T08:43:56.456" v="166" actId="27636"/>
-          <ac:spMkLst>
-            <pc:docMk/>
-            <pc:sldMk cId="356419186" sldId="256"/>
-            <ac:spMk id="3" creationId="{6CEAD46B-2981-B54E-B7BD-5B165BCFE3E7}"/>
-          </ac:spMkLst>
-        </pc:spChg>
-      </pc:sldChg>
-      <pc:sldChg chg="modSp mod">
-        <pc:chgData name="SONG, Qingyu" userId="498998f4-7f18-4549-a740-dcfb6e1e3d22" providerId="ADAL" clId="{A2A67607-707D-9A4B-B498-57C0CB8C6AF6}" dt="2022-01-09T09:39:47.453" v="739" actId="20577"/>
-        <pc:sldMkLst>
-          <pc:docMk/>
-          <pc:sldMk cId="1947847713" sldId="257"/>
-        </pc:sldMkLst>
-        <pc:spChg chg="mod">
-          <ac:chgData name="SONG, Qingyu" userId="498998f4-7f18-4549-a740-dcfb6e1e3d22" providerId="ADAL" clId="{A2A67607-707D-9A4B-B498-57C0CB8C6AF6}" dt="2022-01-09T08:44:45.239" v="171" actId="20577"/>
-          <ac:spMkLst>
-            <pc:docMk/>
-            <pc:sldMk cId="1947847713" sldId="257"/>
-            <ac:spMk id="2" creationId="{45C79BA1-37A3-5741-B0A1-E64646E4283C}"/>
-          </ac:spMkLst>
-        </pc:spChg>
-        <pc:spChg chg="mod">
-          <ac:chgData name="SONG, Qingyu" userId="498998f4-7f18-4549-a740-dcfb6e1e3d22" providerId="ADAL" clId="{A2A67607-707D-9A4B-B498-57C0CB8C6AF6}" dt="2022-01-09T09:39:47.453" v="739" actId="20577"/>
-          <ac:spMkLst>
-            <pc:docMk/>
-            <pc:sldMk cId="1947847713" sldId="257"/>
-            <ac:spMk id="3" creationId="{8F20472D-613F-3748-9CBD-88055CDB4B08}"/>
-          </ac:spMkLst>
-        </pc:spChg>
-      </pc:sldChg>
-      <pc:sldChg chg="modSp add mod">
-        <pc:chgData name="SONG, Qingyu" userId="498998f4-7f18-4549-a740-dcfb6e1e3d22" providerId="ADAL" clId="{A2A67607-707D-9A4B-B498-57C0CB8C6AF6}" dt="2022-01-09T08:45:17.052" v="215" actId="20577"/>
-        <pc:sldMkLst>
-          <pc:docMk/>
-          <pc:sldMk cId="440415094" sldId="258"/>
-        </pc:sldMkLst>
-        <pc:spChg chg="mod">
-          <ac:chgData name="SONG, Qingyu" userId="498998f4-7f18-4549-a740-dcfb6e1e3d22" providerId="ADAL" clId="{A2A67607-707D-9A4B-B498-57C0CB8C6AF6}" dt="2022-01-09T08:45:00.824" v="186" actId="20577"/>
-          <ac:spMkLst>
-            <pc:docMk/>
-            <pc:sldMk cId="440415094" sldId="258"/>
-            <ac:spMk id="2" creationId="{45C79BA1-37A3-5741-B0A1-E64646E4283C}"/>
-          </ac:spMkLst>
-        </pc:spChg>
-        <pc:spChg chg="mod">
-          <ac:chgData name="SONG, Qingyu" userId="498998f4-7f18-4549-a740-dcfb6e1e3d22" providerId="ADAL" clId="{A2A67607-707D-9A4B-B498-57C0CB8C6AF6}" dt="2022-01-09T08:45:17.052" v="215" actId="20577"/>
-          <ac:spMkLst>
-            <pc:docMk/>
-            <pc:sldMk cId="440415094" sldId="258"/>
-            <ac:spMk id="3" creationId="{8F20472D-613F-3748-9CBD-88055CDB4B08}"/>
-          </ac:spMkLst>
-        </pc:spChg>
-      </pc:sldChg>
-      <pc:sldChg chg="new del">
-        <pc:chgData name="SONG, Qingyu" userId="498998f4-7f18-4549-a740-dcfb6e1e3d22" providerId="ADAL" clId="{A2A67607-707D-9A4B-B498-57C0CB8C6AF6}" dt="2022-01-09T08:44:50.281" v="173" actId="680"/>
-        <pc:sldMkLst>
-          <pc:docMk/>
-          <pc:sldMk cId="1741813886" sldId="258"/>
-        </pc:sldMkLst>
-      </pc:sldChg>
-      <pc:sldChg chg="modSp add mod">
-        <pc:chgData name="SONG, Qingyu" userId="498998f4-7f18-4549-a740-dcfb6e1e3d22" providerId="ADAL" clId="{A2A67607-707D-9A4B-B498-57C0CB8C6AF6}" dt="2022-01-09T08:46:18.147" v="243" actId="123"/>
-        <pc:sldMkLst>
-          <pc:docMk/>
-          <pc:sldMk cId="1573737923" sldId="259"/>
-        </pc:sldMkLst>
-        <pc:spChg chg="mod">
-          <ac:chgData name="SONG, Qingyu" userId="498998f4-7f18-4549-a740-dcfb6e1e3d22" providerId="ADAL" clId="{A2A67607-707D-9A4B-B498-57C0CB8C6AF6}" dt="2022-01-09T08:45:34.361" v="219"/>
-          <ac:spMkLst>
-            <pc:docMk/>
-            <pc:sldMk cId="1573737923" sldId="259"/>
-            <ac:spMk id="2" creationId="{45C79BA1-37A3-5741-B0A1-E64646E4283C}"/>
-          </ac:spMkLst>
-        </pc:spChg>
-        <pc:spChg chg="mod">
-          <ac:chgData name="SONG, Qingyu" userId="498998f4-7f18-4549-a740-dcfb6e1e3d22" providerId="ADAL" clId="{A2A67607-707D-9A4B-B498-57C0CB8C6AF6}" dt="2022-01-09T08:46:18.147" v="243" actId="123"/>
-          <ac:spMkLst>
-            <pc:docMk/>
-            <pc:sldMk cId="1573737923" sldId="259"/>
-            <ac:spMk id="3" creationId="{8F20472D-613F-3748-9CBD-88055CDB4B08}"/>
-          </ac:spMkLst>
-        </pc:spChg>
-      </pc:sldChg>
-      <pc:sldChg chg="add del">
-        <pc:chgData name="SONG, Qingyu" userId="498998f4-7f18-4549-a740-dcfb6e1e3d22" providerId="ADAL" clId="{A2A67607-707D-9A4B-B498-57C0CB8C6AF6}" dt="2022-01-09T08:45:26.162" v="217"/>
-        <pc:sldMkLst>
-          <pc:docMk/>
-          <pc:sldMk cId="2702226723" sldId="259"/>
-        </pc:sldMkLst>
-      </pc:sldChg>
-      <pc:sldChg chg="addSp delSp modSp add mod">
-        <pc:chgData name="SONG, Qingyu" userId="498998f4-7f18-4549-a740-dcfb6e1e3d22" providerId="ADAL" clId="{A2A67607-707D-9A4B-B498-57C0CB8C6AF6}" dt="2022-01-09T08:48:11.318" v="252" actId="1076"/>
-        <pc:sldMkLst>
-          <pc:docMk/>
-          <pc:sldMk cId="2648031906" sldId="260"/>
-        </pc:sldMkLst>
-        <pc:spChg chg="mod">
-          <ac:chgData name="SONG, Qingyu" userId="498998f4-7f18-4549-a740-dcfb6e1e3d22" providerId="ADAL" clId="{A2A67607-707D-9A4B-B498-57C0CB8C6AF6}" dt="2022-01-09T08:47:00.476" v="248"/>
-          <ac:spMkLst>
-            <pc:docMk/>
-            <pc:sldMk cId="2648031906" sldId="260"/>
-            <ac:spMk id="2" creationId="{45C79BA1-37A3-5741-B0A1-E64646E4283C}"/>
-          </ac:spMkLst>
-        </pc:spChg>
-        <pc:spChg chg="del mod">
-          <ac:chgData name="SONG, Qingyu" userId="498998f4-7f18-4549-a740-dcfb6e1e3d22" providerId="ADAL" clId="{A2A67607-707D-9A4B-B498-57C0CB8C6AF6}" dt="2022-01-09T08:48:01.560" v="250"/>
-          <ac:spMkLst>
-            <pc:docMk/>
-            <pc:sldMk cId="2648031906" sldId="260"/>
-            <ac:spMk id="3" creationId="{8F20472D-613F-3748-9CBD-88055CDB4B08}"/>
-          </ac:spMkLst>
-        </pc:spChg>
-        <pc:picChg chg="add mod">
-          <ac:chgData name="SONG, Qingyu" userId="498998f4-7f18-4549-a740-dcfb6e1e3d22" providerId="ADAL" clId="{A2A67607-707D-9A4B-B498-57C0CB8C6AF6}" dt="2022-01-09T08:48:11.318" v="252" actId="1076"/>
-          <ac:picMkLst>
-            <pc:docMk/>
-            <pc:sldMk cId="2648031906" sldId="260"/>
-            <ac:picMk id="4" creationId="{E1F1B7FF-0FBF-3D45-81DD-BA45BC44D742}"/>
-          </ac:picMkLst>
-        </pc:picChg>
-      </pc:sldChg>
-      <pc:sldChg chg="addSp delSp modSp add mod">
-        <pc:chgData name="SONG, Qingyu" userId="498998f4-7f18-4549-a740-dcfb6e1e3d22" providerId="ADAL" clId="{A2A67607-707D-9A4B-B498-57C0CB8C6AF6}" dt="2022-01-09T08:48:40.756" v="255"/>
-        <pc:sldMkLst>
-          <pc:docMk/>
-          <pc:sldMk cId="2279024797" sldId="261"/>
-        </pc:sldMkLst>
-        <pc:spChg chg="mod">
-          <ac:chgData name="SONG, Qingyu" userId="498998f4-7f18-4549-a740-dcfb6e1e3d22" providerId="ADAL" clId="{A2A67607-707D-9A4B-B498-57C0CB8C6AF6}" dt="2022-01-09T08:48:28.653" v="253"/>
-          <ac:spMkLst>
-            <pc:docMk/>
-            <pc:sldMk cId="2279024797" sldId="261"/>
-            <ac:spMk id="2" creationId="{45C79BA1-37A3-5741-B0A1-E64646E4283C}"/>
-          </ac:spMkLst>
-        </pc:spChg>
-        <pc:spChg chg="del mod">
-          <ac:chgData name="SONG, Qingyu" userId="498998f4-7f18-4549-a740-dcfb6e1e3d22" providerId="ADAL" clId="{A2A67607-707D-9A4B-B498-57C0CB8C6AF6}" dt="2022-01-09T08:48:40.756" v="255"/>
-          <ac:spMkLst>
-            <pc:docMk/>
-            <pc:sldMk cId="2279024797" sldId="261"/>
-            <ac:spMk id="3" creationId="{8F20472D-613F-3748-9CBD-88055CDB4B08}"/>
-          </ac:spMkLst>
-        </pc:spChg>
-        <pc:picChg chg="add mod">
-          <ac:chgData name="SONG, Qingyu" userId="498998f4-7f18-4549-a740-dcfb6e1e3d22" providerId="ADAL" clId="{A2A67607-707D-9A4B-B498-57C0CB8C6AF6}" dt="2022-01-09T08:48:40.756" v="255"/>
-          <ac:picMkLst>
-            <pc:docMk/>
-            <pc:sldMk cId="2279024797" sldId="261"/>
-            <ac:picMk id="4" creationId="{E0803F26-69FA-F141-8053-17ADFC76B873}"/>
-          </ac:picMkLst>
-        </pc:picChg>
-      </pc:sldChg>
-      <pc:sldChg chg="addSp delSp modSp add mod">
-        <pc:chgData name="SONG, Qingyu" userId="498998f4-7f18-4549-a740-dcfb6e1e3d22" providerId="ADAL" clId="{A2A67607-707D-9A4B-B498-57C0CB8C6AF6}" dt="2022-01-09T08:52:22.570" v="367"/>
-        <pc:sldMkLst>
-          <pc:docMk/>
-          <pc:sldMk cId="2946419580" sldId="262"/>
-        </pc:sldMkLst>
-        <pc:spChg chg="mod">
-          <ac:chgData name="SONG, Qingyu" userId="498998f4-7f18-4549-a740-dcfb6e1e3d22" providerId="ADAL" clId="{A2A67607-707D-9A4B-B498-57C0CB8C6AF6}" dt="2022-01-09T08:52:22.570" v="367"/>
-          <ac:spMkLst>
-            <pc:docMk/>
-            <pc:sldMk cId="2946419580" sldId="262"/>
-            <ac:spMk id="2" creationId="{45C79BA1-37A3-5741-B0A1-E64646E4283C}"/>
-          </ac:spMkLst>
-        </pc:spChg>
-        <pc:spChg chg="del mod">
-          <ac:chgData name="SONG, Qingyu" userId="498998f4-7f18-4549-a740-dcfb6e1e3d22" providerId="ADAL" clId="{A2A67607-707D-9A4B-B498-57C0CB8C6AF6}" dt="2022-01-09T08:49:04.320" v="257"/>
-          <ac:spMkLst>
-            <pc:docMk/>
-            <pc:sldMk cId="2946419580" sldId="262"/>
-            <ac:spMk id="3" creationId="{8F20472D-613F-3748-9CBD-88055CDB4B08}"/>
-          </ac:spMkLst>
-        </pc:spChg>
-        <pc:spChg chg="add mod">
-          <ac:chgData name="SONG, Qingyu" userId="498998f4-7f18-4549-a740-dcfb6e1e3d22" providerId="ADAL" clId="{A2A67607-707D-9A4B-B498-57C0CB8C6AF6}" dt="2022-01-09T08:49:30.001" v="288" actId="1076"/>
-          <ac:spMkLst>
-            <pc:docMk/>
-            <pc:sldMk cId="2946419580" sldId="262"/>
-            <ac:spMk id="5" creationId="{99B591B7-0ED3-894C-A352-8477ED74F3BB}"/>
-          </ac:spMkLst>
-        </pc:spChg>
-        <pc:spChg chg="add mod">
-          <ac:chgData name="SONG, Qingyu" userId="498998f4-7f18-4549-a740-dcfb6e1e3d22" providerId="ADAL" clId="{A2A67607-707D-9A4B-B498-57C0CB8C6AF6}" dt="2022-01-09T08:49:34.916" v="289" actId="1076"/>
-          <ac:spMkLst>
-            <pc:docMk/>
-            <pc:sldMk cId="2946419580" sldId="262"/>
-            <ac:spMk id="6" creationId="{95A8685D-FCCD-1D48-84F7-D47520F09B5B}"/>
-          </ac:spMkLst>
-        </pc:spChg>
-        <pc:picChg chg="add mod">
-          <ac:chgData name="SONG, Qingyu" userId="498998f4-7f18-4549-a740-dcfb6e1e3d22" providerId="ADAL" clId="{A2A67607-707D-9A4B-B498-57C0CB8C6AF6}" dt="2022-01-09T08:49:04.320" v="257"/>
-          <ac:picMkLst>
-            <pc:docMk/>
-            <pc:sldMk cId="2946419580" sldId="262"/>
-            <ac:picMk id="4" creationId="{8D11AF92-8AD0-444F-83E3-E11532277980}"/>
-          </ac:picMkLst>
-        </pc:picChg>
-      </pc:sldChg>
-      <pc:sldChg chg="addSp modSp add mod">
-        <pc:chgData name="SONG, Qingyu" userId="498998f4-7f18-4549-a740-dcfb6e1e3d22" providerId="ADAL" clId="{A2A67607-707D-9A4B-B498-57C0CB8C6AF6}" dt="2022-01-09T09:02:56.402" v="628" actId="1076"/>
-        <pc:sldMkLst>
-          <pc:docMk/>
-          <pc:sldMk cId="2477746496" sldId="263"/>
-        </pc:sldMkLst>
-        <pc:spChg chg="mod">
-          <ac:chgData name="SONG, Qingyu" userId="498998f4-7f18-4549-a740-dcfb6e1e3d22" providerId="ADAL" clId="{A2A67607-707D-9A4B-B498-57C0CB8C6AF6}" dt="2022-01-09T08:57:23.226" v="476" actId="20577"/>
-          <ac:spMkLst>
-            <pc:docMk/>
-            <pc:sldMk cId="2477746496" sldId="263"/>
-            <ac:spMk id="2" creationId="{45C79BA1-37A3-5741-B0A1-E64646E4283C}"/>
-          </ac:spMkLst>
-        </pc:spChg>
-        <pc:spChg chg="mod">
-          <ac:chgData name="SONG, Qingyu" userId="498998f4-7f18-4549-a740-dcfb6e1e3d22" providerId="ADAL" clId="{A2A67607-707D-9A4B-B498-57C0CB8C6AF6}" dt="2022-01-09T09:00:36.805" v="554" actId="14100"/>
-          <ac:spMkLst>
-            <pc:docMk/>
-            <pc:sldMk cId="2477746496" sldId="263"/>
-            <ac:spMk id="3" creationId="{8F20472D-613F-3748-9CBD-88055CDB4B08}"/>
-          </ac:spMkLst>
-        </pc:spChg>
-        <pc:spChg chg="add mod">
-          <ac:chgData name="SONG, Qingyu" userId="498998f4-7f18-4549-a740-dcfb6e1e3d22" providerId="ADAL" clId="{A2A67607-707D-9A4B-B498-57C0CB8C6AF6}" dt="2022-01-09T09:00:42.462" v="558" actId="403"/>
-          <ac:spMkLst>
-            <pc:docMk/>
-            <pc:sldMk cId="2477746496" sldId="263"/>
-            <ac:spMk id="5" creationId="{D0C166B3-D1B0-6A4E-9334-36DA412495C4}"/>
-          </ac:spMkLst>
-        </pc:spChg>
-        <pc:picChg chg="add mod">
-          <ac:chgData name="SONG, Qingyu" userId="498998f4-7f18-4549-a740-dcfb6e1e3d22" providerId="ADAL" clId="{A2A67607-707D-9A4B-B498-57C0CB8C6AF6}" dt="2022-01-09T09:02:56.402" v="628" actId="1076"/>
-          <ac:picMkLst>
-            <pc:docMk/>
-            <pc:sldMk cId="2477746496" sldId="263"/>
-            <ac:picMk id="4" creationId="{89B148E8-50D7-4542-A495-2257CE9D6A0C}"/>
-          </ac:picMkLst>
-        </pc:picChg>
-      </pc:sldChg>
-      <pc:sldChg chg="addSp delSp modSp add mod">
-        <pc:chgData name="SONG, Qingyu" userId="498998f4-7f18-4549-a740-dcfb6e1e3d22" providerId="ADAL" clId="{A2A67607-707D-9A4B-B498-57C0CB8C6AF6}" dt="2022-01-09T09:00:55.037" v="585" actId="1036"/>
-        <pc:sldMkLst>
-          <pc:docMk/>
-          <pc:sldMk cId="3355003134" sldId="264"/>
-        </pc:sldMkLst>
-        <pc:spChg chg="mod">
-          <ac:chgData name="SONG, Qingyu" userId="498998f4-7f18-4549-a740-dcfb6e1e3d22" providerId="ADAL" clId="{A2A67607-707D-9A4B-B498-57C0CB8C6AF6}" dt="2022-01-09T08:52:41.807" v="379"/>
-          <ac:spMkLst>
-            <pc:docMk/>
-            <pc:sldMk cId="3355003134" sldId="264"/>
-            <ac:spMk id="2" creationId="{45C79BA1-37A3-5741-B0A1-E64646E4283C}"/>
-          </ac:spMkLst>
-        </pc:spChg>
-        <pc:spChg chg="mod">
-          <ac:chgData name="SONG, Qingyu" userId="498998f4-7f18-4549-a740-dcfb6e1e3d22" providerId="ADAL" clId="{A2A67607-707D-9A4B-B498-57C0CB8C6AF6}" dt="2022-01-09T08:59:52.346" v="535" actId="14100"/>
-          <ac:spMkLst>
-            <pc:docMk/>
-            <pc:sldMk cId="3355003134" sldId="264"/>
-            <ac:spMk id="3" creationId="{8F20472D-613F-3748-9CBD-88055CDB4B08}"/>
-          </ac:spMkLst>
-        </pc:spChg>
-        <pc:spChg chg="add mod">
-          <ac:chgData name="SONG, Qingyu" userId="498998f4-7f18-4549-a740-dcfb6e1e3d22" providerId="ADAL" clId="{A2A67607-707D-9A4B-B498-57C0CB8C6AF6}" dt="2022-01-09T09:00:50.651" v="567" actId="1036"/>
-          <ac:spMkLst>
-            <pc:docMk/>
-            <pc:sldMk cId="3355003134" sldId="264"/>
-            <ac:spMk id="6" creationId="{8B586356-C565-9B40-BF75-839DA7B53FCB}"/>
-          </ac:spMkLst>
-        </pc:spChg>
-        <pc:picChg chg="del">
-          <ac:chgData name="SONG, Qingyu" userId="498998f4-7f18-4549-a740-dcfb6e1e3d22" providerId="ADAL" clId="{A2A67607-707D-9A4B-B498-57C0CB8C6AF6}" dt="2022-01-09T08:53:07.781" v="381" actId="478"/>
-          <ac:picMkLst>
-            <pc:docMk/>
-            <pc:sldMk cId="3355003134" sldId="264"/>
-            <ac:picMk id="4" creationId="{89B148E8-50D7-4542-A495-2257CE9D6A0C}"/>
-          </ac:picMkLst>
-        </pc:picChg>
-        <pc:picChg chg="add mod">
-          <ac:chgData name="SONG, Qingyu" userId="498998f4-7f18-4549-a740-dcfb6e1e3d22" providerId="ADAL" clId="{A2A67607-707D-9A4B-B498-57C0CB8C6AF6}" dt="2022-01-09T09:00:55.037" v="585" actId="1036"/>
-          <ac:picMkLst>
-            <pc:docMk/>
-            <pc:sldMk cId="3355003134" sldId="264"/>
-            <ac:picMk id="5" creationId="{273285BD-3165-3D46-A0CB-9A06242E6EF4}"/>
-          </ac:picMkLst>
-        </pc:picChg>
-      </pc:sldChg>
-      <pc:sldChg chg="addSp delSp modSp add mod">
-        <pc:chgData name="SONG, Qingyu" userId="498998f4-7f18-4549-a740-dcfb6e1e3d22" providerId="ADAL" clId="{A2A67607-707D-9A4B-B498-57C0CB8C6AF6}" dt="2022-01-09T09:01:01.172" v="602" actId="1036"/>
-        <pc:sldMkLst>
-          <pc:docMk/>
-          <pc:sldMk cId="3781525919" sldId="265"/>
-        </pc:sldMkLst>
-        <pc:spChg chg="mod">
-          <ac:chgData name="SONG, Qingyu" userId="498998f4-7f18-4549-a740-dcfb6e1e3d22" providerId="ADAL" clId="{A2A67607-707D-9A4B-B498-57C0CB8C6AF6}" dt="2022-01-09T08:56:55.874" v="468"/>
-          <ac:spMkLst>
-            <pc:docMk/>
-            <pc:sldMk cId="3781525919" sldId="265"/>
-            <ac:spMk id="2" creationId="{45C79BA1-37A3-5741-B0A1-E64646E4283C}"/>
-          </ac:spMkLst>
-        </pc:spChg>
-        <pc:spChg chg="mod">
-          <ac:chgData name="SONG, Qingyu" userId="498998f4-7f18-4549-a740-dcfb6e1e3d22" providerId="ADAL" clId="{A2A67607-707D-9A4B-B498-57C0CB8C6AF6}" dt="2022-01-09T09:00:13.333" v="541" actId="14100"/>
-          <ac:spMkLst>
-            <pc:docMk/>
-            <pc:sldMk cId="3781525919" sldId="265"/>
-            <ac:spMk id="3" creationId="{8F20472D-613F-3748-9CBD-88055CDB4B08}"/>
-          </ac:spMkLst>
-        </pc:spChg>
-        <pc:spChg chg="add mod">
-          <ac:chgData name="SONG, Qingyu" userId="498998f4-7f18-4549-a740-dcfb6e1e3d22" providerId="ADAL" clId="{A2A67607-707D-9A4B-B498-57C0CB8C6AF6}" dt="2022-01-09T09:00:24.761" v="547" actId="404"/>
-          <ac:spMkLst>
-            <pc:docMk/>
-            <pc:sldMk cId="3781525919" sldId="265"/>
-            <ac:spMk id="6" creationId="{3B692967-652C-AB4A-9FFE-F0D2464A2DD4}"/>
-          </ac:spMkLst>
-        </pc:spChg>
-        <pc:picChg chg="del">
-          <ac:chgData name="SONG, Qingyu" userId="498998f4-7f18-4549-a740-dcfb6e1e3d22" providerId="ADAL" clId="{A2A67607-707D-9A4B-B498-57C0CB8C6AF6}" dt="2022-01-09T08:55:10.406" v="439" actId="478"/>
-          <ac:picMkLst>
-            <pc:docMk/>
-            <pc:sldMk cId="3781525919" sldId="265"/>
-            <ac:picMk id="4" creationId="{89B148E8-50D7-4542-A495-2257CE9D6A0C}"/>
-          </ac:picMkLst>
-        </pc:picChg>
-        <pc:picChg chg="add mod">
-          <ac:chgData name="SONG, Qingyu" userId="498998f4-7f18-4549-a740-dcfb6e1e3d22" providerId="ADAL" clId="{A2A67607-707D-9A4B-B498-57C0CB8C6AF6}" dt="2022-01-09T09:01:01.172" v="602" actId="1036"/>
-          <ac:picMkLst>
-            <pc:docMk/>
-            <pc:sldMk cId="3781525919" sldId="265"/>
-            <ac:picMk id="5" creationId="{C3480844-4AD9-7945-A207-E3FE35124D43}"/>
-          </ac:picMkLst>
-        </pc:picChg>
-      </pc:sldChg>
-      <pc:sldChg chg="add del">
-        <pc:chgData name="SONG, Qingyu" userId="498998f4-7f18-4549-a740-dcfb6e1e3d22" providerId="ADAL" clId="{A2A67607-707D-9A4B-B498-57C0CB8C6AF6}" dt="2022-01-09T08:56:47.408" v="466" actId="2696"/>
-        <pc:sldMkLst>
-          <pc:docMk/>
-          <pc:sldMk cId="1610562717" sldId="266"/>
-        </pc:sldMkLst>
-      </pc:sldChg>
-      <pc:sldChg chg="addSp delSp modSp add mod">
-        <pc:chgData name="SONG, Qingyu" userId="498998f4-7f18-4549-a740-dcfb6e1e3d22" providerId="ADAL" clId="{A2A67607-707D-9A4B-B498-57C0CB8C6AF6}" dt="2022-01-09T09:01:29.138" v="610" actId="1076"/>
-        <pc:sldMkLst>
-          <pc:docMk/>
-          <pc:sldMk cId="3863058764" sldId="266"/>
-        </pc:sldMkLst>
-        <pc:spChg chg="mod">
-          <ac:chgData name="SONG, Qingyu" userId="498998f4-7f18-4549-a740-dcfb6e1e3d22" providerId="ADAL" clId="{A2A67607-707D-9A4B-B498-57C0CB8C6AF6}" dt="2022-01-09T08:57:52.495" v="484" actId="20577"/>
-          <ac:spMkLst>
-            <pc:docMk/>
-            <pc:sldMk cId="3863058764" sldId="266"/>
-            <ac:spMk id="2" creationId="{45C79BA1-37A3-5741-B0A1-E64646E4283C}"/>
-          </ac:spMkLst>
-        </pc:spChg>
-        <pc:spChg chg="mod">
-          <ac:chgData name="SONG, Qingyu" userId="498998f4-7f18-4549-a740-dcfb6e1e3d22" providerId="ADAL" clId="{A2A67607-707D-9A4B-B498-57C0CB8C6AF6}" dt="2022-01-09T09:01:24.526" v="609" actId="14100"/>
-          <ac:spMkLst>
-            <pc:docMk/>
-            <pc:sldMk cId="3863058764" sldId="266"/>
-            <ac:spMk id="3" creationId="{8F20472D-613F-3748-9CBD-88055CDB4B08}"/>
-          </ac:spMkLst>
-        </pc:spChg>
-        <pc:spChg chg="add mod">
-          <ac:chgData name="SONG, Qingyu" userId="498998f4-7f18-4549-a740-dcfb6e1e3d22" providerId="ADAL" clId="{A2A67607-707D-9A4B-B498-57C0CB8C6AF6}" dt="2022-01-09T09:01:29.138" v="610" actId="1076"/>
-          <ac:spMkLst>
-            <pc:docMk/>
-            <pc:sldMk cId="3863058764" sldId="266"/>
-            <ac:spMk id="6" creationId="{065A69BD-EADE-DA43-8E5A-0F49CD1E94FF}"/>
-          </ac:spMkLst>
-        </pc:spChg>
-        <pc:picChg chg="add mod">
-          <ac:chgData name="SONG, Qingyu" userId="498998f4-7f18-4549-a740-dcfb6e1e3d22" providerId="ADAL" clId="{A2A67607-707D-9A4B-B498-57C0CB8C6AF6}" dt="2022-01-09T09:01:20.609" v="608" actId="1076"/>
-          <ac:picMkLst>
-            <pc:docMk/>
-            <pc:sldMk cId="3863058764" sldId="266"/>
-            <ac:picMk id="4" creationId="{A1D5C397-6034-9D41-9BB4-A827A6FAA1BD}"/>
-          </ac:picMkLst>
-        </pc:picChg>
-        <pc:picChg chg="add del">
-          <ac:chgData name="SONG, Qingyu" userId="498998f4-7f18-4549-a740-dcfb6e1e3d22" providerId="ADAL" clId="{A2A67607-707D-9A4B-B498-57C0CB8C6AF6}" dt="2022-01-09T08:59:15.791" v="520" actId="478"/>
-          <ac:picMkLst>
-            <pc:docMk/>
-            <pc:sldMk cId="3863058764" sldId="266"/>
-            <ac:picMk id="5" creationId="{C3480844-4AD9-7945-A207-E3FE35124D43}"/>
-          </ac:picMkLst>
-        </pc:picChg>
-      </pc:sldChg>
-      <pc:sldChg chg="add del">
-        <pc:chgData name="SONG, Qingyu" userId="498998f4-7f18-4549-a740-dcfb6e1e3d22" providerId="ADAL" clId="{A2A67607-707D-9A4B-B498-57C0CB8C6AF6}" dt="2022-01-09T08:56:47.926" v="467" actId="2696"/>
-        <pc:sldMkLst>
-          <pc:docMk/>
-          <pc:sldMk cId="2034820447" sldId="267"/>
-        </pc:sldMkLst>
-      </pc:sldChg>
-      <pc:sldChg chg="addSp delSp modSp add mod">
-        <pc:chgData name="SONG, Qingyu" userId="498998f4-7f18-4549-a740-dcfb6e1e3d22" providerId="ADAL" clId="{A2A67607-707D-9A4B-B498-57C0CB8C6AF6}" dt="2022-01-09T09:03:51.796" v="655" actId="1037"/>
-        <pc:sldMkLst>
-          <pc:docMk/>
-          <pc:sldMk cId="4271156151" sldId="267"/>
-        </pc:sldMkLst>
-        <pc:spChg chg="mod">
-          <ac:chgData name="SONG, Qingyu" userId="498998f4-7f18-4549-a740-dcfb6e1e3d22" providerId="ADAL" clId="{A2A67607-707D-9A4B-B498-57C0CB8C6AF6}" dt="2022-01-09T09:02:05.389" v="619" actId="20577"/>
-          <ac:spMkLst>
-            <pc:docMk/>
-            <pc:sldMk cId="4271156151" sldId="267"/>
-            <ac:spMk id="2" creationId="{45C79BA1-37A3-5741-B0A1-E64646E4283C}"/>
-          </ac:spMkLst>
-        </pc:spChg>
-        <pc:spChg chg="mod">
-          <ac:chgData name="SONG, Qingyu" userId="498998f4-7f18-4549-a740-dcfb6e1e3d22" providerId="ADAL" clId="{A2A67607-707D-9A4B-B498-57C0CB8C6AF6}" dt="2022-01-09T09:02:19.743" v="620"/>
-          <ac:spMkLst>
-            <pc:docMk/>
-            <pc:sldMk cId="4271156151" sldId="267"/>
-            <ac:spMk id="3" creationId="{8F20472D-613F-3748-9CBD-88055CDB4B08}"/>
-          </ac:spMkLst>
-        </pc:spChg>
-        <pc:spChg chg="mod">
-          <ac:chgData name="SONG, Qingyu" userId="498998f4-7f18-4549-a740-dcfb6e1e3d22" providerId="ADAL" clId="{A2A67607-707D-9A4B-B498-57C0CB8C6AF6}" dt="2022-01-09T09:02:29.871" v="622" actId="20577"/>
-          <ac:spMkLst>
-            <pc:docMk/>
-            <pc:sldMk cId="4271156151" sldId="267"/>
-            <ac:spMk id="6" creationId="{065A69BD-EADE-DA43-8E5A-0F49CD1E94FF}"/>
-          </ac:spMkLst>
-        </pc:spChg>
-        <pc:picChg chg="del">
-          <ac:chgData name="SONG, Qingyu" userId="498998f4-7f18-4549-a740-dcfb6e1e3d22" providerId="ADAL" clId="{A2A67607-707D-9A4B-B498-57C0CB8C6AF6}" dt="2022-01-09T09:02:39.138" v="623" actId="478"/>
-          <ac:picMkLst>
-            <pc:docMk/>
-            <pc:sldMk cId="4271156151" sldId="267"/>
-            <ac:picMk id="4" creationId="{A1D5C397-6034-9D41-9BB4-A827A6FAA1BD}"/>
-          </ac:picMkLst>
-        </pc:picChg>
-        <pc:picChg chg="add mod">
-          <ac:chgData name="SONG, Qingyu" userId="498998f4-7f18-4549-a740-dcfb6e1e3d22" providerId="ADAL" clId="{A2A67607-707D-9A4B-B498-57C0CB8C6AF6}" dt="2022-01-09T09:03:51.796" v="655" actId="1037"/>
-          <ac:picMkLst>
-            <pc:docMk/>
-            <pc:sldMk cId="4271156151" sldId="267"/>
-            <ac:picMk id="5" creationId="{20B8ECFB-DBDD-7147-A6FE-FB32D105F141}"/>
-          </ac:picMkLst>
-        </pc:picChg>
-      </pc:sldChg>
-      <pc:sldChg chg="addSp delSp modSp add mod">
-        <pc:chgData name="SONG, Qingyu" userId="498998f4-7f18-4549-a740-dcfb6e1e3d22" providerId="ADAL" clId="{A2A67607-707D-9A4B-B498-57C0CB8C6AF6}" dt="2022-01-09T09:04:30.224" v="673" actId="1076"/>
-        <pc:sldMkLst>
-          <pc:docMk/>
-          <pc:sldMk cId="3168600580" sldId="268"/>
-        </pc:sldMkLst>
-        <pc:spChg chg="mod">
-          <ac:chgData name="SONG, Qingyu" userId="498998f4-7f18-4549-a740-dcfb6e1e3d22" providerId="ADAL" clId="{A2A67607-707D-9A4B-B498-57C0CB8C6AF6}" dt="2022-01-09T09:04:04.507" v="667" actId="20577"/>
-          <ac:spMkLst>
-            <pc:docMk/>
-            <pc:sldMk cId="3168600580" sldId="268"/>
-            <ac:spMk id="2" creationId="{45C79BA1-37A3-5741-B0A1-E64646E4283C}"/>
-          </ac:spMkLst>
-        </pc:spChg>
-        <pc:spChg chg="mod">
-          <ac:chgData name="SONG, Qingyu" userId="498998f4-7f18-4549-a740-dcfb6e1e3d22" providerId="ADAL" clId="{A2A67607-707D-9A4B-B498-57C0CB8C6AF6}" dt="2022-01-09T09:04:09.928" v="668"/>
-          <ac:spMkLst>
-            <pc:docMk/>
-            <pc:sldMk cId="3168600580" sldId="268"/>
-            <ac:spMk id="3" creationId="{8F20472D-613F-3748-9CBD-88055CDB4B08}"/>
-          </ac:spMkLst>
-        </pc:spChg>
-        <pc:spChg chg="mod">
-          <ac:chgData name="SONG, Qingyu" userId="498998f4-7f18-4549-a740-dcfb6e1e3d22" providerId="ADAL" clId="{A2A67607-707D-9A4B-B498-57C0CB8C6AF6}" dt="2022-01-09T09:04:14.145" v="669"/>
-          <ac:spMkLst>
-            <pc:docMk/>
-            <pc:sldMk cId="3168600580" sldId="268"/>
-            <ac:spMk id="6" creationId="{065A69BD-EADE-DA43-8E5A-0F49CD1E94FF}"/>
-          </ac:spMkLst>
-        </pc:spChg>
-        <pc:picChg chg="add mod">
-          <ac:chgData name="SONG, Qingyu" userId="498998f4-7f18-4549-a740-dcfb6e1e3d22" providerId="ADAL" clId="{A2A67607-707D-9A4B-B498-57C0CB8C6AF6}" dt="2022-01-09T09:04:30.224" v="673" actId="1076"/>
-          <ac:picMkLst>
-            <pc:docMk/>
-            <pc:sldMk cId="3168600580" sldId="268"/>
-            <ac:picMk id="4" creationId="{E04675FE-F79E-C645-8EAA-C00F491721EB}"/>
-          </ac:picMkLst>
-        </pc:picChg>
-        <pc:picChg chg="del">
-          <ac:chgData name="SONG, Qingyu" userId="498998f4-7f18-4549-a740-dcfb6e1e3d22" providerId="ADAL" clId="{A2A67607-707D-9A4B-B498-57C0CB8C6AF6}" dt="2022-01-09T09:03:55.689" v="656" actId="478"/>
-          <ac:picMkLst>
-            <pc:docMk/>
-            <pc:sldMk cId="3168600580" sldId="268"/>
-            <ac:picMk id="5" creationId="{20B8ECFB-DBDD-7147-A6FE-FB32D105F141}"/>
-          </ac:picMkLst>
-        </pc:picChg>
-      </pc:sldChg>
-      <pc:sldChg chg="addSp delSp modSp add mod">
-        <pc:chgData name="SONG, Qingyu" userId="498998f4-7f18-4549-a740-dcfb6e1e3d22" providerId="ADAL" clId="{A2A67607-707D-9A4B-B498-57C0CB8C6AF6}" dt="2022-01-09T09:05:24.298" v="694" actId="1076"/>
-        <pc:sldMkLst>
-          <pc:docMk/>
-          <pc:sldMk cId="1589765134" sldId="269"/>
-        </pc:sldMkLst>
-        <pc:spChg chg="mod">
-          <ac:chgData name="SONG, Qingyu" userId="498998f4-7f18-4549-a740-dcfb6e1e3d22" providerId="ADAL" clId="{A2A67607-707D-9A4B-B498-57C0CB8C6AF6}" dt="2022-01-09T09:04:45.920" v="676"/>
-          <ac:spMkLst>
-            <pc:docMk/>
-            <pc:sldMk cId="1589765134" sldId="269"/>
-            <ac:spMk id="2" creationId="{45C79BA1-37A3-5741-B0A1-E64646E4283C}"/>
-          </ac:spMkLst>
-        </pc:spChg>
-        <pc:spChg chg="mod">
-          <ac:chgData name="SONG, Qingyu" userId="498998f4-7f18-4549-a740-dcfb6e1e3d22" providerId="ADAL" clId="{A2A67607-707D-9A4B-B498-57C0CB8C6AF6}" dt="2022-01-09T09:04:55.810" v="687" actId="20577"/>
-          <ac:spMkLst>
-            <pc:docMk/>
-            <pc:sldMk cId="1589765134" sldId="269"/>
-            <ac:spMk id="3" creationId="{8F20472D-613F-3748-9CBD-88055CDB4B08}"/>
-          </ac:spMkLst>
-        </pc:spChg>
-        <pc:spChg chg="mod">
-          <ac:chgData name="SONG, Qingyu" userId="498998f4-7f18-4549-a740-dcfb6e1e3d22" providerId="ADAL" clId="{A2A67607-707D-9A4B-B498-57C0CB8C6AF6}" dt="2022-01-09T09:05:09.254" v="690"/>
-          <ac:spMkLst>
-            <pc:docMk/>
-            <pc:sldMk cId="1589765134" sldId="269"/>
-            <ac:spMk id="6" creationId="{065A69BD-EADE-DA43-8E5A-0F49CD1E94FF}"/>
-          </ac:spMkLst>
-        </pc:spChg>
-        <pc:picChg chg="del">
-          <ac:chgData name="SONG, Qingyu" userId="498998f4-7f18-4549-a740-dcfb6e1e3d22" providerId="ADAL" clId="{A2A67607-707D-9A4B-B498-57C0CB8C6AF6}" dt="2022-01-09T09:05:18.814" v="691" actId="478"/>
-          <ac:picMkLst>
-            <pc:docMk/>
-            <pc:sldMk cId="1589765134" sldId="269"/>
-            <ac:picMk id="4" creationId="{E04675FE-F79E-C645-8EAA-C00F491721EB}"/>
-          </ac:picMkLst>
-        </pc:picChg>
-        <pc:picChg chg="add mod">
-          <ac:chgData name="SONG, Qingyu" userId="498998f4-7f18-4549-a740-dcfb6e1e3d22" providerId="ADAL" clId="{A2A67607-707D-9A4B-B498-57C0CB8C6AF6}" dt="2022-01-09T09:05:24.298" v="694" actId="1076"/>
-          <ac:picMkLst>
-            <pc:docMk/>
-            <pc:sldMk cId="1589765134" sldId="269"/>
-            <ac:picMk id="5" creationId="{7827AB7E-88BC-F041-A7B3-C9FD27A79BE9}"/>
-          </ac:picMkLst>
-        </pc:picChg>
-      </pc:sldChg>
-      <pc:sldChg chg="delSp modSp add mod">
-        <pc:chgData name="SONG, Qingyu" userId="498998f4-7f18-4549-a740-dcfb6e1e3d22" providerId="ADAL" clId="{A2A67607-707D-9A4B-B498-57C0CB8C6AF6}" dt="2022-01-09T09:17:41.699" v="736"/>
-        <pc:sldMkLst>
-          <pc:docMk/>
-          <pc:sldMk cId="1871005255" sldId="270"/>
-        </pc:sldMkLst>
-        <pc:spChg chg="mod">
-          <ac:chgData name="SONG, Qingyu" userId="498998f4-7f18-4549-a740-dcfb6e1e3d22" providerId="ADAL" clId="{A2A67607-707D-9A4B-B498-57C0CB8C6AF6}" dt="2022-01-09T09:05:37.022" v="695"/>
-          <ac:spMkLst>
-            <pc:docMk/>
-            <pc:sldMk cId="1871005255" sldId="270"/>
-            <ac:spMk id="2" creationId="{45C79BA1-37A3-5741-B0A1-E64646E4283C}"/>
-          </ac:spMkLst>
-        </pc:spChg>
-        <pc:spChg chg="mod">
-          <ac:chgData name="SONG, Qingyu" userId="498998f4-7f18-4549-a740-dcfb6e1e3d22" providerId="ADAL" clId="{A2A67607-707D-9A4B-B498-57C0CB8C6AF6}" dt="2022-01-09T09:17:41.699" v="736"/>
-          <ac:spMkLst>
-            <pc:docMk/>
-            <pc:sldMk cId="1871005255" sldId="270"/>
-            <ac:spMk id="3" creationId="{8F20472D-613F-3748-9CBD-88055CDB4B08}"/>
-          </ac:spMkLst>
-        </pc:spChg>
-        <pc:spChg chg="del mod">
-          <ac:chgData name="SONG, Qingyu" userId="498998f4-7f18-4549-a740-dcfb6e1e3d22" providerId="ADAL" clId="{A2A67607-707D-9A4B-B498-57C0CB8C6AF6}" dt="2022-01-09T09:07:05.309" v="699" actId="478"/>
-          <ac:spMkLst>
-            <pc:docMk/>
-            <pc:sldMk cId="1871005255" sldId="270"/>
-            <ac:spMk id="6" creationId="{065A69BD-EADE-DA43-8E5A-0F49CD1E94FF}"/>
-          </ac:spMkLst>
-        </pc:spChg>
-        <pc:picChg chg="del">
-          <ac:chgData name="SONG, Qingyu" userId="498998f4-7f18-4549-a740-dcfb6e1e3d22" providerId="ADAL" clId="{A2A67607-707D-9A4B-B498-57C0CB8C6AF6}" dt="2022-01-09T09:07:02.226" v="697" actId="478"/>
-          <ac:picMkLst>
-            <pc:docMk/>
-            <pc:sldMk cId="1871005255" sldId="270"/>
-            <ac:picMk id="4" creationId="{E04675FE-F79E-C645-8EAA-C00F491721EB}"/>
-          </ac:picMkLst>
-        </pc:picChg>
-      </pc:sldChg>
-      <pc:sldChg chg="modSp add mod">
-        <pc:chgData name="SONG, Qingyu" userId="498998f4-7f18-4549-a740-dcfb6e1e3d22" providerId="ADAL" clId="{A2A67607-707D-9A4B-B498-57C0CB8C6AF6}" dt="2022-01-09T09:10:29.220" v="720" actId="403"/>
-        <pc:sldMkLst>
-          <pc:docMk/>
-          <pc:sldMk cId="616564471" sldId="271"/>
-        </pc:sldMkLst>
-        <pc:spChg chg="mod">
-          <ac:chgData name="SONG, Qingyu" userId="498998f4-7f18-4549-a740-dcfb6e1e3d22" providerId="ADAL" clId="{A2A67607-707D-9A4B-B498-57C0CB8C6AF6}" dt="2022-01-09T09:08:29.862" v="701"/>
-          <ac:spMkLst>
-            <pc:docMk/>
-            <pc:sldMk cId="616564471" sldId="271"/>
-            <ac:spMk id="2" creationId="{45C79BA1-37A3-5741-B0A1-E64646E4283C}"/>
-          </ac:spMkLst>
-        </pc:spChg>
-        <pc:spChg chg="mod">
-          <ac:chgData name="SONG, Qingyu" userId="498998f4-7f18-4549-a740-dcfb6e1e3d22" providerId="ADAL" clId="{A2A67607-707D-9A4B-B498-57C0CB8C6AF6}" dt="2022-01-09T09:10:29.220" v="720" actId="403"/>
-          <ac:spMkLst>
-            <pc:docMk/>
-            <pc:sldMk cId="616564471" sldId="271"/>
-            <ac:spMk id="3" creationId="{8F20472D-613F-3748-9CBD-88055CDB4B08}"/>
-          </ac:spMkLst>
-        </pc:spChg>
-      </pc:sldChg>
-      <pc:sldChg chg="addSp delSp modSp new mod">
-        <pc:chgData name="SONG, Qingyu" userId="498998f4-7f18-4549-a740-dcfb6e1e3d22" providerId="ADAL" clId="{A2A67607-707D-9A4B-B498-57C0CB8C6AF6}" dt="2022-01-09T09:11:07.645" v="730" actId="1076"/>
-        <pc:sldMkLst>
-          <pc:docMk/>
-          <pc:sldMk cId="3216618933" sldId="272"/>
-        </pc:sldMkLst>
-        <pc:spChg chg="del">
-          <ac:chgData name="SONG, Qingyu" userId="498998f4-7f18-4549-a740-dcfb6e1e3d22" providerId="ADAL" clId="{A2A67607-707D-9A4B-B498-57C0CB8C6AF6}" dt="2022-01-09T09:10:47.797" v="722" actId="478"/>
-          <ac:spMkLst>
-            <pc:docMk/>
-            <pc:sldMk cId="3216618933" sldId="272"/>
-            <ac:spMk id="2" creationId="{900EDBAF-B262-2241-AC45-A243A09C313B}"/>
-          </ac:spMkLst>
-        </pc:spChg>
-        <pc:spChg chg="del">
-          <ac:chgData name="SONG, Qingyu" userId="498998f4-7f18-4549-a740-dcfb6e1e3d22" providerId="ADAL" clId="{A2A67607-707D-9A4B-B498-57C0CB8C6AF6}" dt="2022-01-09T09:10:50.341" v="723" actId="478"/>
-          <ac:spMkLst>
-            <pc:docMk/>
-            <pc:sldMk cId="3216618933" sldId="272"/>
-            <ac:spMk id="3" creationId="{CE685DE1-EC4A-014A-BCA4-FAC5A190BA84}"/>
-          </ac:spMkLst>
-        </pc:spChg>
-        <pc:spChg chg="add mod">
-          <ac:chgData name="SONG, Qingyu" userId="498998f4-7f18-4549-a740-dcfb6e1e3d22" providerId="ADAL" clId="{A2A67607-707D-9A4B-B498-57C0CB8C6AF6}" dt="2022-01-09T09:11:07.645" v="730" actId="1076"/>
-          <ac:spMkLst>
-            <pc:docMk/>
-            <pc:sldMk cId="3216618933" sldId="272"/>
-            <ac:spMk id="4" creationId="{A8D2CAE8-E323-A14E-A62F-188A25405FEA}"/>
-          </ac:spMkLst>
-        </pc:spChg>
-      </pc:sldChg>
-    </pc:docChg>
-  </pc:docChgLst>
 </pc:chgInfo>
 </file>
 
@@ -2341,7 +2341,7 @@
           <a:p>
             <a:fld id="{E03FF167-5468-407F-BF08-399F401F3E28}" type="datetimeFigureOut">
               <a:rPr lang="en-HK" smtClean="0"/>
-              <a:t>13/1/2025</a:t>
+              <a:t>14/1/2025</a:t>
             </a:fld>
             <a:endParaRPr lang="en-HK"/>
           </a:p>
@@ -2653,30 +2653,6 @@
           <a:bodyPr/>
           <a:lstStyle/>
           <a:p>
-            <a:r>
-              <a:rPr lang="en-HK" dirty="0"/>
-              <a:t>Here, we provide an overview of the complete workflow in socket programming.</a:t>
-            </a:r>
-          </a:p>
-          <a:p>
-            <a:endParaRPr lang="en-HK" dirty="0"/>
-          </a:p>
-          <a:p>
-            <a:r>
-              <a:rPr lang="en-HK" dirty="0"/>
-              <a:t>At a high level, the process involves two roles: the server and the client. The server prepares to accept incoming connections by creating a socket, setting it up for communication, and waiting for clients to connect. </a:t>
-            </a:r>
-          </a:p>
-          <a:p>
-            <a:endParaRPr lang="en-HK" dirty="0"/>
-          </a:p>
-          <a:p>
-            <a:r>
-              <a:rPr lang="en-HK" dirty="0"/>
-              <a:t>Meanwhile, the client initiates communication by creating its own socket and connecting to the server. Once the connection is established, data can be exchanged between the two, and the connection is eventually closed.</a:t>
-            </a:r>
-          </a:p>
-          <a:p>
             <a:endParaRPr lang="en-HK" dirty="0"/>
           </a:p>
         </p:txBody>
@@ -2696,9 +2672,9 @@
           <a:bodyPr/>
           <a:lstStyle/>
           <a:p>
-            <a:fld id="{E1500BF2-E5AC-4DD5-8465-7E367A3CF6CA}" type="slidenum">
+            <a:fld id="{B17E5830-6A7B-473E-B69D-2E2616132BAF}" type="slidenum">
               <a:rPr lang="en-HK" smtClean="0"/>
-              <a:t>4</a:t>
+              <a:t>1</a:t>
             </a:fld>
             <a:endParaRPr lang="en-HK"/>
           </a:p>
@@ -2707,7 +2683,847 @@
     </p:spTree>
     <p:extLst>
       <p:ext uri="{BB962C8B-B14F-4D97-AF65-F5344CB8AC3E}">
-        <p14:creationId xmlns:p14="http://schemas.microsoft.com/office/powerpoint/2010/main" val="1056266745"/>
+        <p14:creationId xmlns:p14="http://schemas.microsoft.com/office/powerpoint/2010/main" val="752240718"/>
+      </p:ext>
+    </p:extLst>
+  </p:cSld>
+  <p:clrMapOvr>
+    <a:masterClrMapping/>
+  </p:clrMapOvr>
+</p:notes>
+</file>
+
+<file path=ppt/notesSlides/notesSlide10.xml><?xml version="1.0" encoding="utf-8"?>
+<p:notes xmlns:a="http://schemas.openxmlformats.org/drawingml/2006/main" xmlns:r="http://schemas.openxmlformats.org/officeDocument/2006/relationships" xmlns:p="http://schemas.openxmlformats.org/presentationml/2006/main">
+  <p:cSld>
+    <p:spTree>
+      <p:nvGrpSpPr>
+        <p:cNvPr id="1" name=""/>
+        <p:cNvGrpSpPr/>
+        <p:nvPr/>
+      </p:nvGrpSpPr>
+      <p:grpSpPr>
+        <a:xfrm>
+          <a:off x="0" y="0"/>
+          <a:ext cx="0" cy="0"/>
+          <a:chOff x="0" y="0"/>
+          <a:chExt cx="0" cy="0"/>
+        </a:xfrm>
+      </p:grpSpPr>
+      <p:sp>
+        <p:nvSpPr>
+          <p:cNvPr id="2" name="幻灯片图像占位符 1"/>
+          <p:cNvSpPr>
+            <a:spLocks noGrp="1" noRot="1" noChangeAspect="1"/>
+          </p:cNvSpPr>
+          <p:nvPr>
+            <p:ph type="sldImg"/>
+          </p:nvPr>
+        </p:nvSpPr>
+        <p:spPr/>
+      </p:sp>
+      <p:sp>
+        <p:nvSpPr>
+          <p:cNvPr id="3" name="备注占位符 2"/>
+          <p:cNvSpPr>
+            <a:spLocks noGrp="1"/>
+          </p:cNvSpPr>
+          <p:nvPr>
+            <p:ph type="body" idx="1"/>
+          </p:nvPr>
+        </p:nvSpPr>
+        <p:spPr/>
+        <p:txBody>
+          <a:bodyPr/>
+          <a:lstStyle/>
+          <a:p>
+            <a:endParaRPr lang="en-HK" dirty="0"/>
+          </a:p>
+        </p:txBody>
+      </p:sp>
+      <p:sp>
+        <p:nvSpPr>
+          <p:cNvPr id="4" name="灯片编号占位符 3"/>
+          <p:cNvSpPr>
+            <a:spLocks noGrp="1"/>
+          </p:cNvSpPr>
+          <p:nvPr>
+            <p:ph type="sldNum" sz="quarter" idx="5"/>
+          </p:nvPr>
+        </p:nvSpPr>
+        <p:spPr/>
+        <p:txBody>
+          <a:bodyPr/>
+          <a:lstStyle/>
+          <a:p>
+            <a:fld id="{E1500BF2-E5AC-4DD5-8465-7E367A3CF6CA}" type="slidenum">
+              <a:rPr lang="en-HK" smtClean="0"/>
+              <a:t>10</a:t>
+            </a:fld>
+            <a:endParaRPr lang="en-HK"/>
+          </a:p>
+        </p:txBody>
+      </p:sp>
+    </p:spTree>
+    <p:extLst>
+      <p:ext uri="{BB962C8B-B14F-4D97-AF65-F5344CB8AC3E}">
+        <p14:creationId xmlns:p14="http://schemas.microsoft.com/office/powerpoint/2010/main" val="2105647100"/>
+      </p:ext>
+    </p:extLst>
+  </p:cSld>
+  <p:clrMapOvr>
+    <a:masterClrMapping/>
+  </p:clrMapOvr>
+</p:notes>
+</file>
+
+<file path=ppt/notesSlides/notesSlide11.xml><?xml version="1.0" encoding="utf-8"?>
+<p:notes xmlns:a="http://schemas.openxmlformats.org/drawingml/2006/main" xmlns:r="http://schemas.openxmlformats.org/officeDocument/2006/relationships" xmlns:p="http://schemas.openxmlformats.org/presentationml/2006/main">
+  <p:cSld>
+    <p:spTree>
+      <p:nvGrpSpPr>
+        <p:cNvPr id="1" name=""/>
+        <p:cNvGrpSpPr/>
+        <p:nvPr/>
+      </p:nvGrpSpPr>
+      <p:grpSpPr>
+        <a:xfrm>
+          <a:off x="0" y="0"/>
+          <a:ext cx="0" cy="0"/>
+          <a:chOff x="0" y="0"/>
+          <a:chExt cx="0" cy="0"/>
+        </a:xfrm>
+      </p:grpSpPr>
+      <p:sp>
+        <p:nvSpPr>
+          <p:cNvPr id="2" name="幻灯片图像占位符 1"/>
+          <p:cNvSpPr>
+            <a:spLocks noGrp="1" noRot="1" noChangeAspect="1"/>
+          </p:cNvSpPr>
+          <p:nvPr>
+            <p:ph type="sldImg"/>
+          </p:nvPr>
+        </p:nvSpPr>
+        <p:spPr/>
+      </p:sp>
+      <p:sp>
+        <p:nvSpPr>
+          <p:cNvPr id="3" name="备注占位符 2"/>
+          <p:cNvSpPr>
+            <a:spLocks noGrp="1"/>
+          </p:cNvSpPr>
+          <p:nvPr>
+            <p:ph type="body" idx="1"/>
+          </p:nvPr>
+        </p:nvSpPr>
+        <p:spPr/>
+        <p:txBody>
+          <a:bodyPr/>
+          <a:lstStyle/>
+          <a:p>
+            <a:endParaRPr lang="en-HK" dirty="0"/>
+          </a:p>
+        </p:txBody>
+      </p:sp>
+      <p:sp>
+        <p:nvSpPr>
+          <p:cNvPr id="4" name="灯片编号占位符 3"/>
+          <p:cNvSpPr>
+            <a:spLocks noGrp="1"/>
+          </p:cNvSpPr>
+          <p:nvPr>
+            <p:ph type="sldNum" sz="quarter" idx="5"/>
+          </p:nvPr>
+        </p:nvSpPr>
+        <p:spPr/>
+        <p:txBody>
+          <a:bodyPr/>
+          <a:lstStyle/>
+          <a:p>
+            <a:fld id="{B17E5830-6A7B-473E-B69D-2E2616132BAF}" type="slidenum">
+              <a:rPr lang="en-HK" smtClean="0"/>
+              <a:t>11</a:t>
+            </a:fld>
+            <a:endParaRPr lang="en-HK"/>
+          </a:p>
+        </p:txBody>
+      </p:sp>
+    </p:spTree>
+    <p:extLst>
+      <p:ext uri="{BB962C8B-B14F-4D97-AF65-F5344CB8AC3E}">
+        <p14:creationId xmlns:p14="http://schemas.microsoft.com/office/powerpoint/2010/main" val="3666275127"/>
+      </p:ext>
+    </p:extLst>
+  </p:cSld>
+  <p:clrMapOvr>
+    <a:masterClrMapping/>
+  </p:clrMapOvr>
+</p:notes>
+</file>
+
+<file path=ppt/notesSlides/notesSlide12.xml><?xml version="1.0" encoding="utf-8"?>
+<p:notes xmlns:a="http://schemas.openxmlformats.org/drawingml/2006/main" xmlns:r="http://schemas.openxmlformats.org/officeDocument/2006/relationships" xmlns:p="http://schemas.openxmlformats.org/presentationml/2006/main">
+  <p:cSld>
+    <p:spTree>
+      <p:nvGrpSpPr>
+        <p:cNvPr id="1" name=""/>
+        <p:cNvGrpSpPr/>
+        <p:nvPr/>
+      </p:nvGrpSpPr>
+      <p:grpSpPr>
+        <a:xfrm>
+          <a:off x="0" y="0"/>
+          <a:ext cx="0" cy="0"/>
+          <a:chOff x="0" y="0"/>
+          <a:chExt cx="0" cy="0"/>
+        </a:xfrm>
+      </p:grpSpPr>
+      <p:sp>
+        <p:nvSpPr>
+          <p:cNvPr id="2" name="幻灯片图像占位符 1"/>
+          <p:cNvSpPr>
+            <a:spLocks noGrp="1" noRot="1" noChangeAspect="1"/>
+          </p:cNvSpPr>
+          <p:nvPr>
+            <p:ph type="sldImg"/>
+          </p:nvPr>
+        </p:nvSpPr>
+        <p:spPr/>
+      </p:sp>
+      <p:sp>
+        <p:nvSpPr>
+          <p:cNvPr id="3" name="备注占位符 2"/>
+          <p:cNvSpPr>
+            <a:spLocks noGrp="1"/>
+          </p:cNvSpPr>
+          <p:nvPr>
+            <p:ph type="body" idx="1"/>
+          </p:nvPr>
+        </p:nvSpPr>
+        <p:spPr/>
+        <p:txBody>
+          <a:bodyPr/>
+          <a:lstStyle/>
+          <a:p>
+            <a:endParaRPr lang="en-HK" dirty="0"/>
+          </a:p>
+        </p:txBody>
+      </p:sp>
+      <p:sp>
+        <p:nvSpPr>
+          <p:cNvPr id="4" name="灯片编号占位符 3"/>
+          <p:cNvSpPr>
+            <a:spLocks noGrp="1"/>
+          </p:cNvSpPr>
+          <p:nvPr>
+            <p:ph type="sldNum" sz="quarter" idx="5"/>
+          </p:nvPr>
+        </p:nvSpPr>
+        <p:spPr/>
+        <p:txBody>
+          <a:bodyPr/>
+          <a:lstStyle/>
+          <a:p>
+            <a:fld id="{B17E5830-6A7B-473E-B69D-2E2616132BAF}" type="slidenum">
+              <a:rPr lang="en-HK" smtClean="0"/>
+              <a:t>12</a:t>
+            </a:fld>
+            <a:endParaRPr lang="en-HK"/>
+          </a:p>
+        </p:txBody>
+      </p:sp>
+    </p:spTree>
+    <p:extLst>
+      <p:ext uri="{BB962C8B-B14F-4D97-AF65-F5344CB8AC3E}">
+        <p14:creationId xmlns:p14="http://schemas.microsoft.com/office/powerpoint/2010/main" val="48103581"/>
+      </p:ext>
+    </p:extLst>
+  </p:cSld>
+  <p:clrMapOvr>
+    <a:masterClrMapping/>
+  </p:clrMapOvr>
+</p:notes>
+</file>
+
+<file path=ppt/notesSlides/notesSlide13.xml><?xml version="1.0" encoding="utf-8"?>
+<p:notes xmlns:a="http://schemas.openxmlformats.org/drawingml/2006/main" xmlns:r="http://schemas.openxmlformats.org/officeDocument/2006/relationships" xmlns:p="http://schemas.openxmlformats.org/presentationml/2006/main">
+  <p:cSld>
+    <p:spTree>
+      <p:nvGrpSpPr>
+        <p:cNvPr id="1" name=""/>
+        <p:cNvGrpSpPr/>
+        <p:nvPr/>
+      </p:nvGrpSpPr>
+      <p:grpSpPr>
+        <a:xfrm>
+          <a:off x="0" y="0"/>
+          <a:ext cx="0" cy="0"/>
+          <a:chOff x="0" y="0"/>
+          <a:chExt cx="0" cy="0"/>
+        </a:xfrm>
+      </p:grpSpPr>
+      <p:sp>
+        <p:nvSpPr>
+          <p:cNvPr id="2" name="幻灯片图像占位符 1"/>
+          <p:cNvSpPr>
+            <a:spLocks noGrp="1" noRot="1" noChangeAspect="1"/>
+          </p:cNvSpPr>
+          <p:nvPr>
+            <p:ph type="sldImg"/>
+          </p:nvPr>
+        </p:nvSpPr>
+        <p:spPr/>
+      </p:sp>
+      <p:sp>
+        <p:nvSpPr>
+          <p:cNvPr id="3" name="备注占位符 2"/>
+          <p:cNvSpPr>
+            <a:spLocks noGrp="1"/>
+          </p:cNvSpPr>
+          <p:nvPr>
+            <p:ph type="body" idx="1"/>
+          </p:nvPr>
+        </p:nvSpPr>
+        <p:spPr/>
+        <p:txBody>
+          <a:bodyPr/>
+          <a:lstStyle/>
+          <a:p>
+            <a:endParaRPr lang="en-HK" dirty="0"/>
+          </a:p>
+        </p:txBody>
+      </p:sp>
+      <p:sp>
+        <p:nvSpPr>
+          <p:cNvPr id="4" name="灯片编号占位符 3"/>
+          <p:cNvSpPr>
+            <a:spLocks noGrp="1"/>
+          </p:cNvSpPr>
+          <p:nvPr>
+            <p:ph type="sldNum" sz="quarter" idx="5"/>
+          </p:nvPr>
+        </p:nvSpPr>
+        <p:spPr/>
+        <p:txBody>
+          <a:bodyPr/>
+          <a:lstStyle/>
+          <a:p>
+            <a:fld id="{B17E5830-6A7B-473E-B69D-2E2616132BAF}" type="slidenum">
+              <a:rPr lang="en-HK" smtClean="0"/>
+              <a:t>13</a:t>
+            </a:fld>
+            <a:endParaRPr lang="en-HK"/>
+          </a:p>
+        </p:txBody>
+      </p:sp>
+    </p:spTree>
+    <p:extLst>
+      <p:ext uri="{BB962C8B-B14F-4D97-AF65-F5344CB8AC3E}">
+        <p14:creationId xmlns:p14="http://schemas.microsoft.com/office/powerpoint/2010/main" val="2302161061"/>
+      </p:ext>
+    </p:extLst>
+  </p:cSld>
+  <p:clrMapOvr>
+    <a:masterClrMapping/>
+  </p:clrMapOvr>
+</p:notes>
+</file>
+
+<file path=ppt/notesSlides/notesSlide14.xml><?xml version="1.0" encoding="utf-8"?>
+<p:notes xmlns:a="http://schemas.openxmlformats.org/drawingml/2006/main" xmlns:r="http://schemas.openxmlformats.org/officeDocument/2006/relationships" xmlns:p="http://schemas.openxmlformats.org/presentationml/2006/main">
+  <p:cSld>
+    <p:spTree>
+      <p:nvGrpSpPr>
+        <p:cNvPr id="1" name=""/>
+        <p:cNvGrpSpPr/>
+        <p:nvPr/>
+      </p:nvGrpSpPr>
+      <p:grpSpPr>
+        <a:xfrm>
+          <a:off x="0" y="0"/>
+          <a:ext cx="0" cy="0"/>
+          <a:chOff x="0" y="0"/>
+          <a:chExt cx="0" cy="0"/>
+        </a:xfrm>
+      </p:grpSpPr>
+      <p:sp>
+        <p:nvSpPr>
+          <p:cNvPr id="2" name="幻灯片图像占位符 1"/>
+          <p:cNvSpPr>
+            <a:spLocks noGrp="1" noRot="1" noChangeAspect="1"/>
+          </p:cNvSpPr>
+          <p:nvPr>
+            <p:ph type="sldImg"/>
+          </p:nvPr>
+        </p:nvSpPr>
+        <p:spPr/>
+      </p:sp>
+      <p:sp>
+        <p:nvSpPr>
+          <p:cNvPr id="3" name="备注占位符 2"/>
+          <p:cNvSpPr>
+            <a:spLocks noGrp="1"/>
+          </p:cNvSpPr>
+          <p:nvPr>
+            <p:ph type="body" idx="1"/>
+          </p:nvPr>
+        </p:nvSpPr>
+        <p:spPr/>
+        <p:txBody>
+          <a:bodyPr/>
+          <a:lstStyle/>
+          <a:p>
+            <a:endParaRPr lang="en-HK" dirty="0"/>
+          </a:p>
+        </p:txBody>
+      </p:sp>
+      <p:sp>
+        <p:nvSpPr>
+          <p:cNvPr id="4" name="灯片编号占位符 3"/>
+          <p:cNvSpPr>
+            <a:spLocks noGrp="1"/>
+          </p:cNvSpPr>
+          <p:nvPr>
+            <p:ph type="sldNum" sz="quarter" idx="5"/>
+          </p:nvPr>
+        </p:nvSpPr>
+        <p:spPr/>
+        <p:txBody>
+          <a:bodyPr/>
+          <a:lstStyle/>
+          <a:p>
+            <a:fld id="{B17E5830-6A7B-473E-B69D-2E2616132BAF}" type="slidenum">
+              <a:rPr lang="en-HK" smtClean="0"/>
+              <a:t>14</a:t>
+            </a:fld>
+            <a:endParaRPr lang="en-HK"/>
+          </a:p>
+        </p:txBody>
+      </p:sp>
+    </p:spTree>
+    <p:extLst>
+      <p:ext uri="{BB962C8B-B14F-4D97-AF65-F5344CB8AC3E}">
+        <p14:creationId xmlns:p14="http://schemas.microsoft.com/office/powerpoint/2010/main" val="3691191815"/>
+      </p:ext>
+    </p:extLst>
+  </p:cSld>
+  <p:clrMapOvr>
+    <a:masterClrMapping/>
+  </p:clrMapOvr>
+</p:notes>
+</file>
+
+<file path=ppt/notesSlides/notesSlide15.xml><?xml version="1.0" encoding="utf-8"?>
+<p:notes xmlns:a="http://schemas.openxmlformats.org/drawingml/2006/main" xmlns:r="http://schemas.openxmlformats.org/officeDocument/2006/relationships" xmlns:p="http://schemas.openxmlformats.org/presentationml/2006/main">
+  <p:cSld>
+    <p:spTree>
+      <p:nvGrpSpPr>
+        <p:cNvPr id="1" name=""/>
+        <p:cNvGrpSpPr/>
+        <p:nvPr/>
+      </p:nvGrpSpPr>
+      <p:grpSpPr>
+        <a:xfrm>
+          <a:off x="0" y="0"/>
+          <a:ext cx="0" cy="0"/>
+          <a:chOff x="0" y="0"/>
+          <a:chExt cx="0" cy="0"/>
+        </a:xfrm>
+      </p:grpSpPr>
+      <p:sp>
+        <p:nvSpPr>
+          <p:cNvPr id="2" name="幻灯片图像占位符 1"/>
+          <p:cNvSpPr>
+            <a:spLocks noGrp="1" noRot="1" noChangeAspect="1"/>
+          </p:cNvSpPr>
+          <p:nvPr>
+            <p:ph type="sldImg"/>
+          </p:nvPr>
+        </p:nvSpPr>
+        <p:spPr/>
+      </p:sp>
+      <p:sp>
+        <p:nvSpPr>
+          <p:cNvPr id="3" name="备注占位符 2"/>
+          <p:cNvSpPr>
+            <a:spLocks noGrp="1"/>
+          </p:cNvSpPr>
+          <p:nvPr>
+            <p:ph type="body" idx="1"/>
+          </p:nvPr>
+        </p:nvSpPr>
+        <p:spPr/>
+        <p:txBody>
+          <a:bodyPr/>
+          <a:lstStyle/>
+          <a:p>
+            <a:endParaRPr lang="en-HK" dirty="0"/>
+          </a:p>
+        </p:txBody>
+      </p:sp>
+      <p:sp>
+        <p:nvSpPr>
+          <p:cNvPr id="4" name="灯片编号占位符 3"/>
+          <p:cNvSpPr>
+            <a:spLocks noGrp="1"/>
+          </p:cNvSpPr>
+          <p:nvPr>
+            <p:ph type="sldNum" sz="quarter" idx="5"/>
+          </p:nvPr>
+        </p:nvSpPr>
+        <p:spPr/>
+        <p:txBody>
+          <a:bodyPr/>
+          <a:lstStyle/>
+          <a:p>
+            <a:fld id="{B17E5830-6A7B-473E-B69D-2E2616132BAF}" type="slidenum">
+              <a:rPr lang="en-HK" smtClean="0"/>
+              <a:t>15</a:t>
+            </a:fld>
+            <a:endParaRPr lang="en-HK"/>
+          </a:p>
+        </p:txBody>
+      </p:sp>
+    </p:spTree>
+    <p:extLst>
+      <p:ext uri="{BB962C8B-B14F-4D97-AF65-F5344CB8AC3E}">
+        <p14:creationId xmlns:p14="http://schemas.microsoft.com/office/powerpoint/2010/main" val="3462793764"/>
+      </p:ext>
+    </p:extLst>
+  </p:cSld>
+  <p:clrMapOvr>
+    <a:masterClrMapping/>
+  </p:clrMapOvr>
+</p:notes>
+</file>
+
+<file path=ppt/notesSlides/notesSlide16.xml><?xml version="1.0" encoding="utf-8"?>
+<p:notes xmlns:a="http://schemas.openxmlformats.org/drawingml/2006/main" xmlns:r="http://schemas.openxmlformats.org/officeDocument/2006/relationships" xmlns:p="http://schemas.openxmlformats.org/presentationml/2006/main">
+  <p:cSld>
+    <p:spTree>
+      <p:nvGrpSpPr>
+        <p:cNvPr id="1" name=""/>
+        <p:cNvGrpSpPr/>
+        <p:nvPr/>
+      </p:nvGrpSpPr>
+      <p:grpSpPr>
+        <a:xfrm>
+          <a:off x="0" y="0"/>
+          <a:ext cx="0" cy="0"/>
+          <a:chOff x="0" y="0"/>
+          <a:chExt cx="0" cy="0"/>
+        </a:xfrm>
+      </p:grpSpPr>
+      <p:sp>
+        <p:nvSpPr>
+          <p:cNvPr id="2" name="幻灯片图像占位符 1"/>
+          <p:cNvSpPr>
+            <a:spLocks noGrp="1" noRot="1" noChangeAspect="1"/>
+          </p:cNvSpPr>
+          <p:nvPr>
+            <p:ph type="sldImg"/>
+          </p:nvPr>
+        </p:nvSpPr>
+        <p:spPr/>
+      </p:sp>
+      <p:sp>
+        <p:nvSpPr>
+          <p:cNvPr id="3" name="备注占位符 2"/>
+          <p:cNvSpPr>
+            <a:spLocks noGrp="1"/>
+          </p:cNvSpPr>
+          <p:nvPr>
+            <p:ph type="body" idx="1"/>
+          </p:nvPr>
+        </p:nvSpPr>
+        <p:spPr/>
+        <p:txBody>
+          <a:bodyPr/>
+          <a:lstStyle/>
+          <a:p>
+            <a:endParaRPr lang="en-HK" dirty="0"/>
+          </a:p>
+        </p:txBody>
+      </p:sp>
+      <p:sp>
+        <p:nvSpPr>
+          <p:cNvPr id="4" name="灯片编号占位符 3"/>
+          <p:cNvSpPr>
+            <a:spLocks noGrp="1"/>
+          </p:cNvSpPr>
+          <p:nvPr>
+            <p:ph type="sldNum" sz="quarter" idx="5"/>
+          </p:nvPr>
+        </p:nvSpPr>
+        <p:spPr/>
+        <p:txBody>
+          <a:bodyPr/>
+          <a:lstStyle/>
+          <a:p>
+            <a:fld id="{B17E5830-6A7B-473E-B69D-2E2616132BAF}" type="slidenum">
+              <a:rPr lang="en-HK" smtClean="0"/>
+              <a:t>16</a:t>
+            </a:fld>
+            <a:endParaRPr lang="en-HK"/>
+          </a:p>
+        </p:txBody>
+      </p:sp>
+    </p:spTree>
+    <p:extLst>
+      <p:ext uri="{BB962C8B-B14F-4D97-AF65-F5344CB8AC3E}">
+        <p14:creationId xmlns:p14="http://schemas.microsoft.com/office/powerpoint/2010/main" val="3139731409"/>
+      </p:ext>
+    </p:extLst>
+  </p:cSld>
+  <p:clrMapOvr>
+    <a:masterClrMapping/>
+  </p:clrMapOvr>
+</p:notes>
+</file>
+
+<file path=ppt/notesSlides/notesSlide17.xml><?xml version="1.0" encoding="utf-8"?>
+<p:notes xmlns:a="http://schemas.openxmlformats.org/drawingml/2006/main" xmlns:r="http://schemas.openxmlformats.org/officeDocument/2006/relationships" xmlns:p="http://schemas.openxmlformats.org/presentationml/2006/main">
+  <p:cSld>
+    <p:spTree>
+      <p:nvGrpSpPr>
+        <p:cNvPr id="1" name=""/>
+        <p:cNvGrpSpPr/>
+        <p:nvPr/>
+      </p:nvGrpSpPr>
+      <p:grpSpPr>
+        <a:xfrm>
+          <a:off x="0" y="0"/>
+          <a:ext cx="0" cy="0"/>
+          <a:chOff x="0" y="0"/>
+          <a:chExt cx="0" cy="0"/>
+        </a:xfrm>
+      </p:grpSpPr>
+      <p:sp>
+        <p:nvSpPr>
+          <p:cNvPr id="2" name="幻灯片图像占位符 1"/>
+          <p:cNvSpPr>
+            <a:spLocks noGrp="1" noRot="1" noChangeAspect="1"/>
+          </p:cNvSpPr>
+          <p:nvPr>
+            <p:ph type="sldImg"/>
+          </p:nvPr>
+        </p:nvSpPr>
+        <p:spPr/>
+      </p:sp>
+      <p:sp>
+        <p:nvSpPr>
+          <p:cNvPr id="3" name="备注占位符 2"/>
+          <p:cNvSpPr>
+            <a:spLocks noGrp="1"/>
+          </p:cNvSpPr>
+          <p:nvPr>
+            <p:ph type="body" idx="1"/>
+          </p:nvPr>
+        </p:nvSpPr>
+        <p:spPr/>
+        <p:txBody>
+          <a:bodyPr/>
+          <a:lstStyle/>
+          <a:p>
+            <a:endParaRPr lang="en-HK" dirty="0"/>
+          </a:p>
+        </p:txBody>
+      </p:sp>
+      <p:sp>
+        <p:nvSpPr>
+          <p:cNvPr id="4" name="灯片编号占位符 3"/>
+          <p:cNvSpPr>
+            <a:spLocks noGrp="1"/>
+          </p:cNvSpPr>
+          <p:nvPr>
+            <p:ph type="sldNum" sz="quarter" idx="5"/>
+          </p:nvPr>
+        </p:nvSpPr>
+        <p:spPr/>
+        <p:txBody>
+          <a:bodyPr/>
+          <a:lstStyle/>
+          <a:p>
+            <a:fld id="{B17E5830-6A7B-473E-B69D-2E2616132BAF}" type="slidenum">
+              <a:rPr lang="en-HK" smtClean="0"/>
+              <a:t>17</a:t>
+            </a:fld>
+            <a:endParaRPr lang="en-HK"/>
+          </a:p>
+        </p:txBody>
+      </p:sp>
+    </p:spTree>
+    <p:extLst>
+      <p:ext uri="{BB962C8B-B14F-4D97-AF65-F5344CB8AC3E}">
+        <p14:creationId xmlns:p14="http://schemas.microsoft.com/office/powerpoint/2010/main" val="2585338135"/>
+      </p:ext>
+    </p:extLst>
+  </p:cSld>
+  <p:clrMapOvr>
+    <a:masterClrMapping/>
+  </p:clrMapOvr>
+</p:notes>
+</file>
+
+<file path=ppt/notesSlides/notesSlide18.xml><?xml version="1.0" encoding="utf-8"?>
+<p:notes xmlns:a="http://schemas.openxmlformats.org/drawingml/2006/main" xmlns:r="http://schemas.openxmlformats.org/officeDocument/2006/relationships" xmlns:p="http://schemas.openxmlformats.org/presentationml/2006/main">
+  <p:cSld>
+    <p:spTree>
+      <p:nvGrpSpPr>
+        <p:cNvPr id="1" name=""/>
+        <p:cNvGrpSpPr/>
+        <p:nvPr/>
+      </p:nvGrpSpPr>
+      <p:grpSpPr>
+        <a:xfrm>
+          <a:off x="0" y="0"/>
+          <a:ext cx="0" cy="0"/>
+          <a:chOff x="0" y="0"/>
+          <a:chExt cx="0" cy="0"/>
+        </a:xfrm>
+      </p:grpSpPr>
+      <p:sp>
+        <p:nvSpPr>
+          <p:cNvPr id="2" name="幻灯片图像占位符 1"/>
+          <p:cNvSpPr>
+            <a:spLocks noGrp="1" noRot="1" noChangeAspect="1"/>
+          </p:cNvSpPr>
+          <p:nvPr>
+            <p:ph type="sldImg"/>
+          </p:nvPr>
+        </p:nvSpPr>
+        <p:spPr/>
+      </p:sp>
+      <p:sp>
+        <p:nvSpPr>
+          <p:cNvPr id="3" name="备注占位符 2"/>
+          <p:cNvSpPr>
+            <a:spLocks noGrp="1"/>
+          </p:cNvSpPr>
+          <p:nvPr>
+            <p:ph type="body" idx="1"/>
+          </p:nvPr>
+        </p:nvSpPr>
+        <p:spPr/>
+        <p:txBody>
+          <a:bodyPr/>
+          <a:lstStyle/>
+          <a:p>
+            <a:endParaRPr lang="en-HK" dirty="0"/>
+          </a:p>
+        </p:txBody>
+      </p:sp>
+      <p:sp>
+        <p:nvSpPr>
+          <p:cNvPr id="4" name="灯片编号占位符 3"/>
+          <p:cNvSpPr>
+            <a:spLocks noGrp="1"/>
+          </p:cNvSpPr>
+          <p:nvPr>
+            <p:ph type="sldNum" sz="quarter" idx="5"/>
+          </p:nvPr>
+        </p:nvSpPr>
+        <p:spPr/>
+        <p:txBody>
+          <a:bodyPr/>
+          <a:lstStyle/>
+          <a:p>
+            <a:fld id="{B17E5830-6A7B-473E-B69D-2E2616132BAF}" type="slidenum">
+              <a:rPr lang="en-HK" smtClean="0"/>
+              <a:t>18</a:t>
+            </a:fld>
+            <a:endParaRPr lang="en-HK"/>
+          </a:p>
+        </p:txBody>
+      </p:sp>
+    </p:spTree>
+    <p:extLst>
+      <p:ext uri="{BB962C8B-B14F-4D97-AF65-F5344CB8AC3E}">
+        <p14:creationId xmlns:p14="http://schemas.microsoft.com/office/powerpoint/2010/main" val="6177697"/>
+      </p:ext>
+    </p:extLst>
+  </p:cSld>
+  <p:clrMapOvr>
+    <a:masterClrMapping/>
+  </p:clrMapOvr>
+</p:notes>
+</file>
+
+<file path=ppt/notesSlides/notesSlide19.xml><?xml version="1.0" encoding="utf-8"?>
+<p:notes xmlns:a="http://schemas.openxmlformats.org/drawingml/2006/main" xmlns:r="http://schemas.openxmlformats.org/officeDocument/2006/relationships" xmlns:p="http://schemas.openxmlformats.org/presentationml/2006/main">
+  <p:cSld>
+    <p:spTree>
+      <p:nvGrpSpPr>
+        <p:cNvPr id="1" name=""/>
+        <p:cNvGrpSpPr/>
+        <p:nvPr/>
+      </p:nvGrpSpPr>
+      <p:grpSpPr>
+        <a:xfrm>
+          <a:off x="0" y="0"/>
+          <a:ext cx="0" cy="0"/>
+          <a:chOff x="0" y="0"/>
+          <a:chExt cx="0" cy="0"/>
+        </a:xfrm>
+      </p:grpSpPr>
+      <p:sp>
+        <p:nvSpPr>
+          <p:cNvPr id="2" name="幻灯片图像占位符 1"/>
+          <p:cNvSpPr>
+            <a:spLocks noGrp="1" noRot="1" noChangeAspect="1"/>
+          </p:cNvSpPr>
+          <p:nvPr>
+            <p:ph type="sldImg"/>
+          </p:nvPr>
+        </p:nvSpPr>
+        <p:spPr/>
+      </p:sp>
+      <p:sp>
+        <p:nvSpPr>
+          <p:cNvPr id="3" name="备注占位符 2"/>
+          <p:cNvSpPr>
+            <a:spLocks noGrp="1"/>
+          </p:cNvSpPr>
+          <p:nvPr>
+            <p:ph type="body" idx="1"/>
+          </p:nvPr>
+        </p:nvSpPr>
+        <p:spPr/>
+        <p:txBody>
+          <a:bodyPr/>
+          <a:lstStyle/>
+          <a:p>
+            <a:endParaRPr lang="en-HK" dirty="0"/>
+          </a:p>
+        </p:txBody>
+      </p:sp>
+      <p:sp>
+        <p:nvSpPr>
+          <p:cNvPr id="4" name="灯片编号占位符 3"/>
+          <p:cNvSpPr>
+            <a:spLocks noGrp="1"/>
+          </p:cNvSpPr>
+          <p:nvPr>
+            <p:ph type="sldNum" sz="quarter" idx="5"/>
+          </p:nvPr>
+        </p:nvSpPr>
+        <p:spPr/>
+        <p:txBody>
+          <a:bodyPr/>
+          <a:lstStyle/>
+          <a:p>
+            <a:fld id="{B17E5830-6A7B-473E-B69D-2E2616132BAF}" type="slidenum">
+              <a:rPr lang="en-HK" smtClean="0"/>
+              <a:t>19</a:t>
+            </a:fld>
+            <a:endParaRPr lang="en-HK"/>
+          </a:p>
+        </p:txBody>
+      </p:sp>
+    </p:spTree>
+    <p:extLst>
+      <p:ext uri="{BB962C8B-B14F-4D97-AF65-F5344CB8AC3E}">
+        <p14:creationId xmlns:p14="http://schemas.microsoft.com/office/powerpoint/2010/main" val="2992476646"/>
       </p:ext>
     </p:extLst>
   </p:cSld>
@@ -2761,70 +3577,6 @@
           <a:bodyPr/>
           <a:lstStyle/>
           <a:p>
-            <a:r>
-              <a:rPr lang="en-HK" dirty="0"/>
-              <a:t>Let’s take a detailed look at the client-side flow of socket programming.</a:t>
-            </a:r>
-          </a:p>
-          <a:p>
-            <a:endParaRPr lang="en-HK" dirty="0"/>
-          </a:p>
-          <a:p>
-            <a:pPr>
-              <a:buFont typeface="Arial" panose="020B0604020202020204" pitchFamily="34" charset="0"/>
-              <a:buChar char="•"/>
-            </a:pPr>
-            <a:r>
-              <a:rPr lang="en-HK" b="1" dirty="0"/>
-              <a:t>Step 1:</a:t>
-            </a:r>
-            <a:r>
-              <a:rPr lang="en-HK" dirty="0"/>
-              <a:t> 'socket()' - This function creates the socket.</a:t>
-            </a:r>
-          </a:p>
-          <a:p>
-            <a:pPr>
-              <a:buFont typeface="Arial" panose="020B0604020202020204" pitchFamily="34" charset="0"/>
-              <a:buChar char="•"/>
-            </a:pPr>
-            <a:r>
-              <a:rPr lang="en-HK" b="1" dirty="0"/>
-              <a:t>Step 2:</a:t>
-            </a:r>
-            <a:r>
-              <a:rPr lang="en-HK" dirty="0"/>
-              <a:t> 'bind()' - This step is optional. If you want to assign a specific port number, you use 'bind()'. If you skip it, a random port will be assigned.</a:t>
-            </a:r>
-          </a:p>
-          <a:p>
-            <a:pPr>
-              <a:buFont typeface="Arial" panose="020B0604020202020204" pitchFamily="34" charset="0"/>
-              <a:buChar char="•"/>
-            </a:pPr>
-            <a:r>
-              <a:rPr lang="en-HK" b="1" dirty="0"/>
-              <a:t>Step 3:</a:t>
-            </a:r>
-            <a:r>
-              <a:rPr lang="en-HK" dirty="0"/>
-              <a:t> 'connect()' - This establishes the connection to the server. It is a blocking system call, meaning it will wait until the connection is established before continuing.</a:t>
-            </a:r>
-          </a:p>
-          <a:p>
-            <a:pPr>
-              <a:buFont typeface="Arial" panose="020B0604020202020204" pitchFamily="34" charset="0"/>
-              <a:buChar char="•"/>
-            </a:pPr>
-            <a:endParaRPr lang="en-HK" dirty="0"/>
-          </a:p>
-          <a:p>
-            <a:r>
-              <a:rPr lang="en-HK" dirty="0"/>
-              <a:t>Once connected, the client can use 'read()' to receive data, 'write()' to send data, and 'close()' to terminate the connection.</a:t>
-            </a:r>
-          </a:p>
-          <a:p>
             <a:endParaRPr lang="en-HK" dirty="0"/>
           </a:p>
         </p:txBody>
@@ -2844,9 +3596,9 @@
           <a:bodyPr/>
           <a:lstStyle/>
           <a:p>
-            <a:fld id="{E1500BF2-E5AC-4DD5-8465-7E367A3CF6CA}" type="slidenum">
+            <a:fld id="{B17E5830-6A7B-473E-B69D-2E2616132BAF}" type="slidenum">
               <a:rPr lang="en-HK" smtClean="0"/>
-              <a:t>5</a:t>
+              <a:t>2</a:t>
             </a:fld>
             <a:endParaRPr lang="en-HK"/>
           </a:p>
@@ -2855,7 +3607,91 @@
     </p:spTree>
     <p:extLst>
       <p:ext uri="{BB962C8B-B14F-4D97-AF65-F5344CB8AC3E}">
-        <p14:creationId xmlns:p14="http://schemas.microsoft.com/office/powerpoint/2010/main" val="2210012793"/>
+        <p14:creationId xmlns:p14="http://schemas.microsoft.com/office/powerpoint/2010/main" val="2942803078"/>
+      </p:ext>
+    </p:extLst>
+  </p:cSld>
+  <p:clrMapOvr>
+    <a:masterClrMapping/>
+  </p:clrMapOvr>
+</p:notes>
+</file>
+
+<file path=ppt/notesSlides/notesSlide20.xml><?xml version="1.0" encoding="utf-8"?>
+<p:notes xmlns:a="http://schemas.openxmlformats.org/drawingml/2006/main" xmlns:r="http://schemas.openxmlformats.org/officeDocument/2006/relationships" xmlns:p="http://schemas.openxmlformats.org/presentationml/2006/main">
+  <p:cSld>
+    <p:spTree>
+      <p:nvGrpSpPr>
+        <p:cNvPr id="1" name=""/>
+        <p:cNvGrpSpPr/>
+        <p:nvPr/>
+      </p:nvGrpSpPr>
+      <p:grpSpPr>
+        <a:xfrm>
+          <a:off x="0" y="0"/>
+          <a:ext cx="0" cy="0"/>
+          <a:chOff x="0" y="0"/>
+          <a:chExt cx="0" cy="0"/>
+        </a:xfrm>
+      </p:grpSpPr>
+      <p:sp>
+        <p:nvSpPr>
+          <p:cNvPr id="2" name="幻灯片图像占位符 1"/>
+          <p:cNvSpPr>
+            <a:spLocks noGrp="1" noRot="1" noChangeAspect="1"/>
+          </p:cNvSpPr>
+          <p:nvPr>
+            <p:ph type="sldImg"/>
+          </p:nvPr>
+        </p:nvSpPr>
+        <p:spPr/>
+      </p:sp>
+      <p:sp>
+        <p:nvSpPr>
+          <p:cNvPr id="3" name="备注占位符 2"/>
+          <p:cNvSpPr>
+            <a:spLocks noGrp="1"/>
+          </p:cNvSpPr>
+          <p:nvPr>
+            <p:ph type="body" idx="1"/>
+          </p:nvPr>
+        </p:nvSpPr>
+        <p:spPr/>
+        <p:txBody>
+          <a:bodyPr/>
+          <a:lstStyle/>
+          <a:p>
+            <a:endParaRPr lang="en-HK" dirty="0"/>
+          </a:p>
+        </p:txBody>
+      </p:sp>
+      <p:sp>
+        <p:nvSpPr>
+          <p:cNvPr id="4" name="灯片编号占位符 3"/>
+          <p:cNvSpPr>
+            <a:spLocks noGrp="1"/>
+          </p:cNvSpPr>
+          <p:nvPr>
+            <p:ph type="sldNum" sz="quarter" idx="5"/>
+          </p:nvPr>
+        </p:nvSpPr>
+        <p:spPr/>
+        <p:txBody>
+          <a:bodyPr/>
+          <a:lstStyle/>
+          <a:p>
+            <a:fld id="{B17E5830-6A7B-473E-B69D-2E2616132BAF}" type="slidenum">
+              <a:rPr lang="en-HK" smtClean="0"/>
+              <a:t>20</a:t>
+            </a:fld>
+            <a:endParaRPr lang="en-HK"/>
+          </a:p>
+        </p:txBody>
+      </p:sp>
+    </p:spTree>
+    <p:extLst>
+      <p:ext uri="{BB962C8B-B14F-4D97-AF65-F5344CB8AC3E}">
+        <p14:creationId xmlns:p14="http://schemas.microsoft.com/office/powerpoint/2010/main" val="2557349538"/>
       </p:ext>
     </p:extLst>
   </p:cSld>
@@ -2909,80 +3745,7 @@
           <a:bodyPr/>
           <a:lstStyle/>
           <a:p>
-            <a:r>
-              <a:rPr lang="en-HK" dirty="0"/>
-              <a:t>Next, we’ll go over the server-side flow.</a:t>
-            </a:r>
-          </a:p>
-          <a:p>
-            <a:endParaRPr lang="en-HK" dirty="0"/>
-          </a:p>
-          <a:p>
-            <a:pPr>
-              <a:buFont typeface="Arial" panose="020B0604020202020204" pitchFamily="34" charset="0"/>
-              <a:buChar char="•"/>
-            </a:pPr>
-            <a:r>
-              <a:rPr lang="en-HK" b="1" dirty="0"/>
-              <a:t>Step 1 &amp; Step 2:</a:t>
-            </a:r>
-            <a:r>
-              <a:rPr lang="en-HK" dirty="0"/>
-              <a:t> The server first creates a socket with 'socket()', and optionally, binds it to a port with 'bind()'.</a:t>
-            </a:r>
-          </a:p>
-          <a:p>
-            <a:pPr>
-              <a:buFont typeface="Arial" panose="020B0604020202020204" pitchFamily="34" charset="0"/>
-              <a:buChar char="•"/>
-            </a:pPr>
-            <a:r>
-              <a:rPr lang="en-HK" b="1" dirty="0"/>
-              <a:t>Step 3:</a:t>
-            </a:r>
-            <a:r>
-              <a:rPr lang="en-HK" dirty="0"/>
-              <a:t> 'listen()' - This step sets the server to listen for incoming connections. It's important for TCP connections as it prepares the server to accept client connections.</a:t>
-            </a:r>
-          </a:p>
-          <a:p>
-            <a:pPr>
-              <a:buFont typeface="Arial" panose="020B0604020202020204" pitchFamily="34" charset="0"/>
-              <a:buChar char="•"/>
-            </a:pPr>
-            <a:r>
-              <a:rPr lang="en-HK" b="1" dirty="0"/>
-              <a:t>Step 4:</a:t>
-            </a:r>
-            <a:r>
-              <a:rPr lang="en-HK" dirty="0"/>
-              <a:t> 'accept()' - This function is a blocking call that waits for a client to connect. Once a connection is made, it returns a new socket descriptor for communication with that client.</a:t>
-            </a:r>
-          </a:p>
-          <a:p>
-            <a:pPr>
-              <a:buFont typeface="Arial" panose="020B0604020202020204" pitchFamily="34" charset="0"/>
-              <a:buChar char="•"/>
-            </a:pPr>
-            <a:endParaRPr lang="en-HK" dirty="0"/>
-          </a:p>
-          <a:p>
-            <a:r>
-              <a:rPr lang="en-HK" dirty="0"/>
-              <a:t>Once connected, the server can use 'read()' to receive data, 'write()' to send data, and 'close()' to close the connection once the communication is done.</a:t>
-            </a:r>
-          </a:p>
-          <a:p>
-            <a:endParaRPr lang="en-HK" dirty="0"/>
-          </a:p>
-          <a:p>
-            <a:r>
-              <a:rPr lang="en-HK" dirty="0"/>
-              <a:t>This flow ensures the server is ready to handle multiple connections in a networked environment.</a:t>
-            </a:r>
-          </a:p>
-          <a:p>
-            <a:endParaRPr lang="en-HK" dirty="0"/>
+            <a:endParaRPr lang="en-US" altLang="zh-CN" dirty="0"/>
           </a:p>
         </p:txBody>
       </p:sp>
@@ -3001,9 +3764,9 @@
           <a:bodyPr/>
           <a:lstStyle/>
           <a:p>
-            <a:fld id="{E1500BF2-E5AC-4DD5-8465-7E367A3CF6CA}" type="slidenum">
+            <a:fld id="{B17E5830-6A7B-473E-B69D-2E2616132BAF}" type="slidenum">
               <a:rPr lang="en-HK" smtClean="0"/>
-              <a:t>6</a:t>
+              <a:t>3</a:t>
             </a:fld>
             <a:endParaRPr lang="en-HK"/>
           </a:p>
@@ -3012,7 +3775,7 @@
     </p:spTree>
     <p:extLst>
       <p:ext uri="{BB962C8B-B14F-4D97-AF65-F5344CB8AC3E}">
-        <p14:creationId xmlns:p14="http://schemas.microsoft.com/office/powerpoint/2010/main" val="56808591"/>
+        <p14:creationId xmlns:p14="http://schemas.microsoft.com/office/powerpoint/2010/main" val="16388629"/>
       </p:ext>
     </p:extLst>
   </p:cSld>
@@ -3066,28 +3829,7 @@
           <a:bodyPr/>
           <a:lstStyle/>
           <a:p>
-            <a:r>
-              <a:rPr lang="en-HK" dirty="0"/>
-              <a:t>By the way, let’s take a closer look at the role of the accept() function on the server side. </a:t>
-            </a:r>
-          </a:p>
-          <a:p>
             <a:endParaRPr lang="en-HK" dirty="0"/>
-          </a:p>
-          <a:p>
-            <a:r>
-              <a:rPr lang="en-HK" dirty="0"/>
-              <a:t>When the server accepts a connection from a client, it creates a new file descriptor specifically for that connection. This mechanism allows the server to distinguish and manage multiple connections independently, which is crucial for handling concurrent clients effectively.</a:t>
-            </a:r>
-          </a:p>
-          <a:p>
-            <a:endParaRPr lang="en-HK" dirty="0"/>
-          </a:p>
-          <a:p>
-            <a:r>
-              <a:rPr lang="en-HK" dirty="0"/>
-              <a:t>From the application layer’s perspective, this design is highly practical, as it provides each connection with a unique handler. At the transport layer, this new file descriptor corresponds to a unique TCP control structure, ensuring reliable data transfer for each connection.</a:t>
-            </a:r>
           </a:p>
         </p:txBody>
       </p:sp>
@@ -3108,7 +3850,7 @@
           <a:p>
             <a:fld id="{E1500BF2-E5AC-4DD5-8465-7E367A3CF6CA}" type="slidenum">
               <a:rPr lang="en-HK" smtClean="0"/>
-              <a:t>7</a:t>
+              <a:t>4</a:t>
             </a:fld>
             <a:endParaRPr lang="en-HK"/>
           </a:p>
@@ -3117,7 +3859,7 @@
     </p:spTree>
     <p:extLst>
       <p:ext uri="{BB962C8B-B14F-4D97-AF65-F5344CB8AC3E}">
-        <p14:creationId xmlns:p14="http://schemas.microsoft.com/office/powerpoint/2010/main" val="3389450341"/>
+        <p14:creationId xmlns:p14="http://schemas.microsoft.com/office/powerpoint/2010/main" val="1056266745"/>
       </p:ext>
     </p:extLst>
   </p:cSld>
@@ -3171,28 +3913,7 @@
           <a:bodyPr/>
           <a:lstStyle/>
           <a:p>
-            <a:r>
-              <a:rPr lang="en-HK" dirty="0"/>
-              <a:t>By the way, let’s take a closer look at the role of the accept() function on the server side. </a:t>
-            </a:r>
-          </a:p>
-          <a:p>
             <a:endParaRPr lang="en-HK" dirty="0"/>
-          </a:p>
-          <a:p>
-            <a:r>
-              <a:rPr lang="en-HK" dirty="0"/>
-              <a:t>When the server accepts a connection from a client, it creates a new file descriptor specifically for that connection. This mechanism allows the server to distinguish and manage multiple connections independently, which is crucial for handling concurrent clients effectively.</a:t>
-            </a:r>
-          </a:p>
-          <a:p>
-            <a:endParaRPr lang="en-HK" dirty="0"/>
-          </a:p>
-          <a:p>
-            <a:r>
-              <a:rPr lang="en-HK" dirty="0"/>
-              <a:t>From the application layer’s perspective, this design is highly practical, as it provides each connection with a unique handler. At the transport layer, this new file descriptor corresponds to a unique TCP control structure, ensuring reliable data transfer for each connection.</a:t>
-            </a:r>
           </a:p>
         </p:txBody>
       </p:sp>
@@ -3213,7 +3934,7 @@
           <a:p>
             <a:fld id="{E1500BF2-E5AC-4DD5-8465-7E367A3CF6CA}" type="slidenum">
               <a:rPr lang="en-HK" smtClean="0"/>
-              <a:t>8</a:t>
+              <a:t>5</a:t>
             </a:fld>
             <a:endParaRPr lang="en-HK"/>
           </a:p>
@@ -3222,7 +3943,7 @@
     </p:spTree>
     <p:extLst>
       <p:ext uri="{BB962C8B-B14F-4D97-AF65-F5344CB8AC3E}">
-        <p14:creationId xmlns:p14="http://schemas.microsoft.com/office/powerpoint/2010/main" val="1898385630"/>
+        <p14:creationId xmlns:p14="http://schemas.microsoft.com/office/powerpoint/2010/main" val="2210012793"/>
       </p:ext>
     </p:extLst>
   </p:cSld>
@@ -3276,28 +3997,7 @@
           <a:bodyPr/>
           <a:lstStyle/>
           <a:p>
-            <a:r>
-              <a:rPr lang="en-HK" dirty="0"/>
-              <a:t>By the way, let’s take a closer look at the role of the accept() function on the server side. </a:t>
-            </a:r>
-          </a:p>
-          <a:p>
             <a:endParaRPr lang="en-HK" dirty="0"/>
-          </a:p>
-          <a:p>
-            <a:r>
-              <a:rPr lang="en-HK" dirty="0"/>
-              <a:t>When the server accepts a connection from a client, it creates a new file descriptor specifically for that connection. This mechanism allows the server to distinguish and manage multiple connections independently, which is crucial for handling concurrent clients effectively.</a:t>
-            </a:r>
-          </a:p>
-          <a:p>
-            <a:endParaRPr lang="en-HK" dirty="0"/>
-          </a:p>
-          <a:p>
-            <a:r>
-              <a:rPr lang="en-HK" dirty="0"/>
-              <a:t>From the application layer’s perspective, this design is highly practical, as it provides each connection with a unique handler. At the transport layer, this new file descriptor corresponds to a unique TCP control structure, ensuring reliable data transfer for each connection.</a:t>
-            </a:r>
           </a:p>
         </p:txBody>
       </p:sp>
@@ -3318,7 +4018,7 @@
           <a:p>
             <a:fld id="{E1500BF2-E5AC-4DD5-8465-7E367A3CF6CA}" type="slidenum">
               <a:rPr lang="en-HK" smtClean="0"/>
-              <a:t>9</a:t>
+              <a:t>6</a:t>
             </a:fld>
             <a:endParaRPr lang="en-HK"/>
           </a:p>
@@ -3327,7 +4027,7 @@
     </p:spTree>
     <p:extLst>
       <p:ext uri="{BB962C8B-B14F-4D97-AF65-F5344CB8AC3E}">
-        <p14:creationId xmlns:p14="http://schemas.microsoft.com/office/powerpoint/2010/main" val="160211546"/>
+        <p14:creationId xmlns:p14="http://schemas.microsoft.com/office/powerpoint/2010/main" val="56808591"/>
       </p:ext>
     </p:extLst>
   </p:cSld>
@@ -3381,30 +4081,6 @@
           <a:bodyPr/>
           <a:lstStyle/>
           <a:p>
-            <a:r>
-              <a:rPr lang="en-HK" dirty="0"/>
-              <a:t>Let’s briefly revisit the socket programming workflow.</a:t>
-            </a:r>
-          </a:p>
-          <a:p>
-            <a:endParaRPr lang="en-HK" dirty="0"/>
-          </a:p>
-          <a:p>
-            <a:r>
-              <a:rPr lang="en-HK" dirty="0"/>
-              <a:t>On the server side, the key steps are creating a socket, listening for connections, accepting a client, exchanging data, and closing the connection. For the client, it involves creating a socket, connecting to the server, communicating, and then closing the connection.</a:t>
-            </a:r>
-          </a:p>
-          <a:p>
-            <a:endParaRPr lang="en-HK" dirty="0"/>
-          </a:p>
-          <a:p>
-            <a:r>
-              <a:rPr lang="en-HK" dirty="0"/>
-              <a:t>A key takeaway is that the server uses 'accept()' to handle each client independently, enabling it to manage multiple connections effectively.</a:t>
-            </a:r>
-          </a:p>
-          <a:p>
             <a:endParaRPr lang="en-HK" dirty="0"/>
           </a:p>
         </p:txBody>
@@ -3426,7 +4102,7 @@
           <a:p>
             <a:fld id="{E1500BF2-E5AC-4DD5-8465-7E367A3CF6CA}" type="slidenum">
               <a:rPr lang="en-HK" smtClean="0"/>
-              <a:t>10</a:t>
+              <a:t>7</a:t>
             </a:fld>
             <a:endParaRPr lang="en-HK"/>
           </a:p>
@@ -3435,7 +4111,245 @@
     </p:spTree>
     <p:extLst>
       <p:ext uri="{BB962C8B-B14F-4D97-AF65-F5344CB8AC3E}">
-        <p14:creationId xmlns:p14="http://schemas.microsoft.com/office/powerpoint/2010/main" val="2105647100"/>
+        <p14:creationId xmlns:p14="http://schemas.microsoft.com/office/powerpoint/2010/main" val="3389450341"/>
+      </p:ext>
+    </p:extLst>
+  </p:cSld>
+  <p:clrMapOvr>
+    <a:masterClrMapping/>
+  </p:clrMapOvr>
+</p:notes>
+</file>
+
+<file path=ppt/notesSlides/notesSlide8.xml><?xml version="1.0" encoding="utf-8"?>
+<p:notes xmlns:a="http://schemas.openxmlformats.org/drawingml/2006/main" xmlns:r="http://schemas.openxmlformats.org/officeDocument/2006/relationships" xmlns:p="http://schemas.openxmlformats.org/presentationml/2006/main">
+  <p:cSld>
+    <p:spTree>
+      <p:nvGrpSpPr>
+        <p:cNvPr id="1" name=""/>
+        <p:cNvGrpSpPr/>
+        <p:nvPr/>
+      </p:nvGrpSpPr>
+      <p:grpSpPr>
+        <a:xfrm>
+          <a:off x="0" y="0"/>
+          <a:ext cx="0" cy="0"/>
+          <a:chOff x="0" y="0"/>
+          <a:chExt cx="0" cy="0"/>
+        </a:xfrm>
+      </p:grpSpPr>
+      <p:sp>
+        <p:nvSpPr>
+          <p:cNvPr id="2" name="幻灯片图像占位符 1"/>
+          <p:cNvSpPr>
+            <a:spLocks noGrp="1" noRot="1" noChangeAspect="1"/>
+          </p:cNvSpPr>
+          <p:nvPr>
+            <p:ph type="sldImg"/>
+          </p:nvPr>
+        </p:nvSpPr>
+        <p:spPr/>
+      </p:sp>
+      <p:sp>
+        <p:nvSpPr>
+          <p:cNvPr id="3" name="备注占位符 2"/>
+          <p:cNvSpPr>
+            <a:spLocks noGrp="1"/>
+          </p:cNvSpPr>
+          <p:nvPr>
+            <p:ph type="body" idx="1"/>
+          </p:nvPr>
+        </p:nvSpPr>
+        <p:spPr/>
+        <p:txBody>
+          <a:bodyPr/>
+          <a:lstStyle/>
+          <a:p>
+            <a:endParaRPr lang="en-HK" dirty="0"/>
+          </a:p>
+        </p:txBody>
+      </p:sp>
+      <p:sp>
+        <p:nvSpPr>
+          <p:cNvPr id="4" name="灯片编号占位符 3"/>
+          <p:cNvSpPr>
+            <a:spLocks noGrp="1"/>
+          </p:cNvSpPr>
+          <p:nvPr>
+            <p:ph type="sldNum" sz="quarter" idx="5"/>
+          </p:nvPr>
+        </p:nvSpPr>
+        <p:spPr/>
+        <p:txBody>
+          <a:bodyPr/>
+          <a:lstStyle/>
+          <a:p>
+            <a:fld id="{E1500BF2-E5AC-4DD5-8465-7E367A3CF6CA}" type="slidenum">
+              <a:rPr lang="en-HK" smtClean="0"/>
+              <a:t>8</a:t>
+            </a:fld>
+            <a:endParaRPr lang="en-HK"/>
+          </a:p>
+        </p:txBody>
+      </p:sp>
+    </p:spTree>
+    <p:extLst>
+      <p:ext uri="{BB962C8B-B14F-4D97-AF65-F5344CB8AC3E}">
+        <p14:creationId xmlns:p14="http://schemas.microsoft.com/office/powerpoint/2010/main" val="1898385630"/>
+      </p:ext>
+    </p:extLst>
+  </p:cSld>
+  <p:clrMapOvr>
+    <a:masterClrMapping/>
+  </p:clrMapOvr>
+</p:notes>
+</file>
+
+<file path=ppt/notesSlides/notesSlide9.xml><?xml version="1.0" encoding="utf-8"?>
+<p:notes xmlns:a="http://schemas.openxmlformats.org/drawingml/2006/main" xmlns:r="http://schemas.openxmlformats.org/officeDocument/2006/relationships" xmlns:p="http://schemas.openxmlformats.org/presentationml/2006/main">
+  <p:cSld>
+    <p:spTree>
+      <p:nvGrpSpPr>
+        <p:cNvPr id="1" name=""/>
+        <p:cNvGrpSpPr/>
+        <p:nvPr/>
+      </p:nvGrpSpPr>
+      <p:grpSpPr>
+        <a:xfrm>
+          <a:off x="0" y="0"/>
+          <a:ext cx="0" cy="0"/>
+          <a:chOff x="0" y="0"/>
+          <a:chExt cx="0" cy="0"/>
+        </a:xfrm>
+      </p:grpSpPr>
+      <p:sp>
+        <p:nvSpPr>
+          <p:cNvPr id="2" name="幻灯片图像占位符 1"/>
+          <p:cNvSpPr>
+            <a:spLocks noGrp="1" noRot="1" noChangeAspect="1"/>
+          </p:cNvSpPr>
+          <p:nvPr>
+            <p:ph type="sldImg"/>
+          </p:nvPr>
+        </p:nvSpPr>
+        <p:spPr/>
+      </p:sp>
+      <p:sp>
+        <p:nvSpPr>
+          <p:cNvPr id="3" name="备注占位符 2"/>
+          <p:cNvSpPr>
+            <a:spLocks noGrp="1"/>
+          </p:cNvSpPr>
+          <p:nvPr>
+            <p:ph type="body" idx="1"/>
+          </p:nvPr>
+        </p:nvSpPr>
+        <p:spPr/>
+        <p:txBody>
+          <a:bodyPr/>
+          <a:lstStyle/>
+          <a:p>
+            <a:r>
+              <a:rPr lang="en-HK" dirty="0"/>
+              <a:t>The flow starts similarly: the server creates a socket with socket(), binds it to an address with bind(), and begins listening for connections with listen().</a:t>
+            </a:r>
+          </a:p>
+          <a:p>
+            <a:endParaRPr lang="en-HK" dirty="0"/>
+          </a:p>
+          <a:p>
+            <a:r>
+              <a:rPr lang="en-HK" dirty="0"/>
+              <a:t>When a client connects, the accept() call returns a new file descriptor. But instead of processing the client request directly, the server creates a </a:t>
+            </a:r>
+            <a:r>
+              <a:rPr lang="en-HK" b="1" dirty="0"/>
+              <a:t>child process</a:t>
+            </a:r>
+            <a:r>
+              <a:rPr lang="en-HK" dirty="0"/>
+              <a:t> or </a:t>
+            </a:r>
+            <a:r>
+              <a:rPr lang="en-HK" b="1" dirty="0"/>
+              <a:t>thread</a:t>
+            </a:r>
+            <a:r>
+              <a:rPr lang="en-HK" dirty="0"/>
+              <a:t> to handle the connection. This can be done using fork() for creating processes or </a:t>
+            </a:r>
+            <a:r>
+              <a:rPr lang="en-HK" dirty="0" err="1"/>
+              <a:t>pthread_create</a:t>
+            </a:r>
+            <a:r>
+              <a:rPr lang="en-HK" dirty="0"/>
+              <a:t>() for threads.</a:t>
+            </a:r>
+          </a:p>
+          <a:p>
+            <a:endParaRPr lang="en-HK" dirty="0"/>
+          </a:p>
+          <a:p>
+            <a:r>
+              <a:rPr lang="en-HK" dirty="0"/>
+              <a:t>The </a:t>
+            </a:r>
+            <a:r>
+              <a:rPr lang="en-HK" b="1" dirty="0"/>
+              <a:t>parent process</a:t>
+            </a:r>
+            <a:r>
+              <a:rPr lang="en-HK" dirty="0"/>
+              <a:t> remains in the listening loop, ready to handle additional client connections.</a:t>
+            </a:r>
+          </a:p>
+          <a:p>
+            <a:endParaRPr lang="en-HK" dirty="0"/>
+          </a:p>
+          <a:p>
+            <a:r>
+              <a:rPr lang="en-HK" dirty="0"/>
+              <a:t>This approach enables the server to handle </a:t>
+            </a:r>
+            <a:r>
+              <a:rPr lang="en-HK" b="1" dirty="0"/>
+              <a:t>multiple clients concurrently</a:t>
+            </a:r>
+            <a:r>
+              <a:rPr lang="en-HK" dirty="0"/>
+              <a:t>, without one client blocking others. It is widely used in real-world servers, and understanding its principles will help you build more scalable applications.</a:t>
+            </a:r>
+          </a:p>
+        </p:txBody>
+      </p:sp>
+      <p:sp>
+        <p:nvSpPr>
+          <p:cNvPr id="4" name="灯片编号占位符 3"/>
+          <p:cNvSpPr>
+            <a:spLocks noGrp="1"/>
+          </p:cNvSpPr>
+          <p:nvPr>
+            <p:ph type="sldNum" sz="quarter" idx="5"/>
+          </p:nvPr>
+        </p:nvSpPr>
+        <p:spPr/>
+        <p:txBody>
+          <a:bodyPr/>
+          <a:lstStyle/>
+          <a:p>
+            <a:fld id="{E1500BF2-E5AC-4DD5-8465-7E367A3CF6CA}" type="slidenum">
+              <a:rPr lang="en-HK" smtClean="0"/>
+              <a:t>9</a:t>
+            </a:fld>
+            <a:endParaRPr lang="en-HK"/>
+          </a:p>
+        </p:txBody>
+      </p:sp>
+    </p:spTree>
+    <p:extLst>
+      <p:ext uri="{BB962C8B-B14F-4D97-AF65-F5344CB8AC3E}">
+        <p14:creationId xmlns:p14="http://schemas.microsoft.com/office/powerpoint/2010/main" val="160211546"/>
       </p:ext>
     </p:extLst>
   </p:cSld>
@@ -3594,7 +4508,7 @@
           <a:p>
             <a:fld id="{2425905D-C0C4-D040-B3F5-79CCA23FA4EB}" type="datetimeFigureOut">
               <a:rPr lang="en-US" smtClean="0"/>
-              <a:t>1/13/2025</a:t>
+              <a:t>1/14/2025</a:t>
             </a:fld>
             <a:endParaRPr lang="en-US"/>
           </a:p>
@@ -3794,7 +4708,7 @@
           <a:p>
             <a:fld id="{2425905D-C0C4-D040-B3F5-79CCA23FA4EB}" type="datetimeFigureOut">
               <a:rPr lang="en-US" smtClean="0"/>
-              <a:t>1/13/2025</a:t>
+              <a:t>1/14/2025</a:t>
             </a:fld>
             <a:endParaRPr lang="en-US"/>
           </a:p>
@@ -4004,7 +4918,7 @@
           <a:p>
             <a:fld id="{2425905D-C0C4-D040-B3F5-79CCA23FA4EB}" type="datetimeFigureOut">
               <a:rPr lang="en-US" smtClean="0"/>
-              <a:t>1/13/2025</a:t>
+              <a:t>1/14/2025</a:t>
             </a:fld>
             <a:endParaRPr lang="en-US"/>
           </a:p>
@@ -4204,7 +5118,7 @@
           <a:p>
             <a:fld id="{2425905D-C0C4-D040-B3F5-79CCA23FA4EB}" type="datetimeFigureOut">
               <a:rPr lang="en-US" smtClean="0"/>
-              <a:t>1/13/2025</a:t>
+              <a:t>1/14/2025</a:t>
             </a:fld>
             <a:endParaRPr lang="en-US"/>
           </a:p>
@@ -4480,7 +5394,7 @@
           <a:p>
             <a:fld id="{2425905D-C0C4-D040-B3F5-79CCA23FA4EB}" type="datetimeFigureOut">
               <a:rPr lang="en-US" smtClean="0"/>
-              <a:t>1/13/2025</a:t>
+              <a:t>1/14/2025</a:t>
             </a:fld>
             <a:endParaRPr lang="en-US"/>
           </a:p>
@@ -4748,7 +5662,7 @@
           <a:p>
             <a:fld id="{2425905D-C0C4-D040-B3F5-79CCA23FA4EB}" type="datetimeFigureOut">
               <a:rPr lang="en-US" smtClean="0"/>
-              <a:t>1/13/2025</a:t>
+              <a:t>1/14/2025</a:t>
             </a:fld>
             <a:endParaRPr lang="en-US"/>
           </a:p>
@@ -5163,7 +6077,7 @@
           <a:p>
             <a:fld id="{2425905D-C0C4-D040-B3F5-79CCA23FA4EB}" type="datetimeFigureOut">
               <a:rPr lang="en-US" smtClean="0"/>
-              <a:t>1/13/2025</a:t>
+              <a:t>1/14/2025</a:t>
             </a:fld>
             <a:endParaRPr lang="en-US"/>
           </a:p>
@@ -5305,7 +6219,7 @@
           <a:p>
             <a:fld id="{2425905D-C0C4-D040-B3F5-79CCA23FA4EB}" type="datetimeFigureOut">
               <a:rPr lang="en-US" smtClean="0"/>
-              <a:t>1/13/2025</a:t>
+              <a:t>1/14/2025</a:t>
             </a:fld>
             <a:endParaRPr lang="en-US"/>
           </a:p>
@@ -5418,7 +6332,7 @@
           <a:p>
             <a:fld id="{2425905D-C0C4-D040-B3F5-79CCA23FA4EB}" type="datetimeFigureOut">
               <a:rPr lang="en-US" smtClean="0"/>
-              <a:t>1/13/2025</a:t>
+              <a:t>1/14/2025</a:t>
             </a:fld>
             <a:endParaRPr lang="en-US"/>
           </a:p>
@@ -5731,7 +6645,7 @@
           <a:p>
             <a:fld id="{2425905D-C0C4-D040-B3F5-79CCA23FA4EB}" type="datetimeFigureOut">
               <a:rPr lang="en-US" smtClean="0"/>
-              <a:t>1/13/2025</a:t>
+              <a:t>1/14/2025</a:t>
             </a:fld>
             <a:endParaRPr lang="en-US"/>
           </a:p>
@@ -6020,7 +6934,7 @@
           <a:p>
             <a:fld id="{2425905D-C0C4-D040-B3F5-79CCA23FA4EB}" type="datetimeFigureOut">
               <a:rPr lang="en-US" smtClean="0"/>
-              <a:t>1/13/2025</a:t>
+              <a:t>1/14/2025</a:t>
             </a:fld>
             <a:endParaRPr lang="en-US"/>
           </a:p>
@@ -6263,7 +7177,7 @@
           <a:p>
             <a:fld id="{2425905D-C0C4-D040-B3F5-79CCA23FA4EB}" type="datetimeFigureOut">
               <a:rPr lang="en-US" smtClean="0"/>
-              <a:t>1/13/2025</a:t>
+              <a:t>1/14/2025</a:t>
             </a:fld>
             <a:endParaRPr lang="en-US"/>
           </a:p>
@@ -6788,7 +7702,7 @@
           <p:nvPr/>
         </p:nvPicPr>
         <p:blipFill>
-          <a:blip r:embed="rId2"/>
+          <a:blip r:embed="rId3"/>
           <a:stretch>
             <a:fillRect/>
           </a:stretch>
@@ -6818,7 +7732,7 @@
           <p:nvPr/>
         </p:nvPicPr>
         <p:blipFill>
-          <a:blip r:embed="rId2"/>
+          <a:blip r:embed="rId3"/>
           <a:stretch>
             <a:fillRect/>
           </a:stretch>
@@ -8029,7 +8943,7 @@
           <a:p>
             <a:r>
               <a:rPr lang="en-US" sz="1600" dirty="0">
-                <a:hlinkClick r:id="rId2"/>
+                <a:hlinkClick r:id="rId3"/>
               </a:rPr>
               <a:t>[1] Graphical_Description_of_Network_Delay.png (428×233) (wikimedia.org)</a:t>
             </a:r>
@@ -8052,7 +8966,7 @@
           <p:nvPr/>
         </p:nvPicPr>
         <p:blipFill>
-          <a:blip r:embed="rId3"/>
+          <a:blip r:embed="rId4"/>
           <a:stretch>
             <a:fillRect/>
           </a:stretch>
@@ -8582,8 +9496,8 @@
         </p:nvSpPr>
         <p:spPr>
           <a:xfrm>
-            <a:off x="790786" y="5157912"/>
-            <a:ext cx="9260840" cy="1200329"/>
+            <a:off x="790785" y="5157912"/>
+            <a:ext cx="10938285" cy="1200329"/>
           </a:xfrm>
           <a:prstGeom prst="rect">
             <a:avLst/>
@@ -8612,7 +9526,7 @@
                   <a:srgbClr val="FF0000"/>
                 </a:solidFill>
               </a:rPr>
-              <a:t>delay = RTT + transmission delay = 2.5666 + 2 = 4.5666s </a:t>
+              <a:t>Transfer time = RTT (propagation delay) + transmission delay = 2.5666 + 2 = 4.5666s </a:t>
             </a:r>
           </a:p>
           <a:p>
@@ -8622,7 +9536,7 @@
                   <a:srgbClr val="FF0000"/>
                 </a:solidFill>
               </a:rPr>
-              <a:t>throughput = 25MB * 8 / (2s + 1.28333s) = 60.9 Mbps </a:t>
+              <a:t>Throughput = 25MB * 8 / (2s + 1.28333s) = 60.9 Mbps </a:t>
             </a:r>
           </a:p>
         </p:txBody>
@@ -9126,7 +10040,7 @@
         <p:spPr>
           <a:xfrm>
             <a:off x="838200" y="4685185"/>
-            <a:ext cx="9260840" cy="461665"/>
+            <a:ext cx="5456338" cy="461665"/>
           </a:xfrm>
           <a:prstGeom prst="rect">
             <a:avLst/>
@@ -9155,6 +10069,367 @@
           </a:p>
         </p:txBody>
       </p:sp>
+      <p:sp>
+        <p:nvSpPr>
+          <p:cNvPr id="4" name="矩形 3">
+            <a:extLst>
+              <a:ext uri="{FF2B5EF4-FFF2-40B4-BE49-F238E27FC236}">
+                <a16:creationId xmlns:a16="http://schemas.microsoft.com/office/drawing/2014/main" id="{EA957FE7-3192-4E2E-8A82-067993A46EB8}"/>
+              </a:ext>
+            </a:extLst>
+          </p:cNvPr>
+          <p:cNvSpPr/>
+          <p:nvPr/>
+        </p:nvSpPr>
+        <p:spPr>
+          <a:xfrm>
+            <a:off x="7012691" y="4617511"/>
+            <a:ext cx="495013" cy="262896"/>
+          </a:xfrm>
+          <a:prstGeom prst="rect">
+            <a:avLst/>
+          </a:prstGeom>
+          <a:solidFill>
+            <a:schemeClr val="bg1"/>
+          </a:solidFill>
+          <a:ln>
+            <a:solidFill>
+              <a:schemeClr val="tx1"/>
+            </a:solidFill>
+          </a:ln>
+        </p:spPr>
+        <p:style>
+          <a:lnRef idx="2">
+            <a:schemeClr val="accent1">
+              <a:shade val="50000"/>
+            </a:schemeClr>
+          </a:lnRef>
+          <a:fillRef idx="1">
+            <a:schemeClr val="accent1"/>
+          </a:fillRef>
+          <a:effectRef idx="0">
+            <a:schemeClr val="accent1"/>
+          </a:effectRef>
+          <a:fontRef idx="minor">
+            <a:schemeClr val="lt1"/>
+          </a:fontRef>
+        </p:style>
+        <p:txBody>
+          <a:bodyPr rtlCol="0" anchor="ctr"/>
+          <a:lstStyle/>
+          <a:p>
+            <a:pPr algn="ctr"/>
+            <a:endParaRPr lang="en-HK"/>
+          </a:p>
+        </p:txBody>
+      </p:sp>
+      <p:sp>
+        <p:nvSpPr>
+          <p:cNvPr id="6" name="矩形 5">
+            <a:extLst>
+              <a:ext uri="{FF2B5EF4-FFF2-40B4-BE49-F238E27FC236}">
+                <a16:creationId xmlns:a16="http://schemas.microsoft.com/office/drawing/2014/main" id="{3414B795-94E8-42ED-A686-292C209FE97A}"/>
+              </a:ext>
+            </a:extLst>
+          </p:cNvPr>
+          <p:cNvSpPr/>
+          <p:nvPr/>
+        </p:nvSpPr>
+        <p:spPr>
+          <a:xfrm>
+            <a:off x="8225857" y="4352175"/>
+            <a:ext cx="495013" cy="794081"/>
+          </a:xfrm>
+          <a:prstGeom prst="rect">
+            <a:avLst/>
+          </a:prstGeom>
+          <a:solidFill>
+            <a:schemeClr val="bg1"/>
+          </a:solidFill>
+          <a:ln>
+            <a:solidFill>
+              <a:schemeClr val="tx1"/>
+            </a:solidFill>
+          </a:ln>
+        </p:spPr>
+        <p:style>
+          <a:lnRef idx="2">
+            <a:schemeClr val="accent1">
+              <a:shade val="50000"/>
+            </a:schemeClr>
+          </a:lnRef>
+          <a:fillRef idx="1">
+            <a:schemeClr val="accent1"/>
+          </a:fillRef>
+          <a:effectRef idx="0">
+            <a:schemeClr val="accent1"/>
+          </a:effectRef>
+          <a:fontRef idx="minor">
+            <a:schemeClr val="lt1"/>
+          </a:fontRef>
+        </p:style>
+        <p:txBody>
+          <a:bodyPr rtlCol="0" anchor="ctr"/>
+          <a:lstStyle/>
+          <a:p>
+            <a:pPr algn="ctr"/>
+            <a:endParaRPr lang="en-HK"/>
+          </a:p>
+        </p:txBody>
+      </p:sp>
+      <p:sp>
+        <p:nvSpPr>
+          <p:cNvPr id="9" name="文本框 8">
+            <a:extLst>
+              <a:ext uri="{FF2B5EF4-FFF2-40B4-BE49-F238E27FC236}">
+                <a16:creationId xmlns:a16="http://schemas.microsoft.com/office/drawing/2014/main" id="{CD88E036-D62B-4B5A-8DA9-B91971C4D5AF}"/>
+              </a:ext>
+            </a:extLst>
+          </p:cNvPr>
+          <p:cNvSpPr txBox="1"/>
+          <p:nvPr/>
+        </p:nvSpPr>
+        <p:spPr>
+          <a:xfrm>
+            <a:off x="8092098" y="5184153"/>
+            <a:ext cx="1216294" cy="369332"/>
+          </a:xfrm>
+          <a:prstGeom prst="rect">
+            <a:avLst/>
+          </a:prstGeom>
+          <a:noFill/>
+        </p:spPr>
+        <p:txBody>
+          <a:bodyPr wrap="square">
+            <a:spAutoFit/>
+          </a:bodyPr>
+          <a:lstStyle/>
+          <a:p>
+            <a:r>
+              <a:rPr lang="en-US" sz="1800" dirty="0"/>
+              <a:t>switch</a:t>
+            </a:r>
+            <a:endParaRPr lang="en-HK" dirty="0"/>
+          </a:p>
+        </p:txBody>
+      </p:sp>
+      <p:sp>
+        <p:nvSpPr>
+          <p:cNvPr id="10" name="文本框 9">
+            <a:extLst>
+              <a:ext uri="{FF2B5EF4-FFF2-40B4-BE49-F238E27FC236}">
+                <a16:creationId xmlns:a16="http://schemas.microsoft.com/office/drawing/2014/main" id="{10690A62-7B81-446B-A37B-DCFB899EE93F}"/>
+              </a:ext>
+            </a:extLst>
+          </p:cNvPr>
+          <p:cNvSpPr txBox="1"/>
+          <p:nvPr/>
+        </p:nvSpPr>
+        <p:spPr>
+          <a:xfrm>
+            <a:off x="6883822" y="5184153"/>
+            <a:ext cx="1216294" cy="369332"/>
+          </a:xfrm>
+          <a:prstGeom prst="rect">
+            <a:avLst/>
+          </a:prstGeom>
+          <a:noFill/>
+        </p:spPr>
+        <p:txBody>
+          <a:bodyPr wrap="square">
+            <a:spAutoFit/>
+          </a:bodyPr>
+          <a:lstStyle/>
+          <a:p>
+            <a:r>
+              <a:rPr lang="en-US" altLang="zh-CN" sz="1800" dirty="0"/>
+              <a:t>sender</a:t>
+            </a:r>
+            <a:endParaRPr lang="en-HK" dirty="0"/>
+          </a:p>
+        </p:txBody>
+      </p:sp>
+      <p:sp>
+        <p:nvSpPr>
+          <p:cNvPr id="11" name="矩形 10">
+            <a:extLst>
+              <a:ext uri="{FF2B5EF4-FFF2-40B4-BE49-F238E27FC236}">
+                <a16:creationId xmlns:a16="http://schemas.microsoft.com/office/drawing/2014/main" id="{B6261F6B-DC27-4A26-916A-02483C3E0A65}"/>
+              </a:ext>
+            </a:extLst>
+          </p:cNvPr>
+          <p:cNvSpPr/>
+          <p:nvPr/>
+        </p:nvSpPr>
+        <p:spPr>
+          <a:xfrm>
+            <a:off x="9447040" y="4617511"/>
+            <a:ext cx="495013" cy="262896"/>
+          </a:xfrm>
+          <a:prstGeom prst="rect">
+            <a:avLst/>
+          </a:prstGeom>
+          <a:solidFill>
+            <a:schemeClr val="bg1"/>
+          </a:solidFill>
+          <a:ln>
+            <a:solidFill>
+              <a:schemeClr val="tx1"/>
+            </a:solidFill>
+          </a:ln>
+        </p:spPr>
+        <p:style>
+          <a:lnRef idx="2">
+            <a:schemeClr val="accent1">
+              <a:shade val="50000"/>
+            </a:schemeClr>
+          </a:lnRef>
+          <a:fillRef idx="1">
+            <a:schemeClr val="accent1"/>
+          </a:fillRef>
+          <a:effectRef idx="0">
+            <a:schemeClr val="accent1"/>
+          </a:effectRef>
+          <a:fontRef idx="minor">
+            <a:schemeClr val="lt1"/>
+          </a:fontRef>
+        </p:style>
+        <p:txBody>
+          <a:bodyPr rtlCol="0" anchor="ctr"/>
+          <a:lstStyle/>
+          <a:p>
+            <a:pPr algn="ctr"/>
+            <a:endParaRPr lang="en-HK"/>
+          </a:p>
+        </p:txBody>
+      </p:sp>
+      <p:sp>
+        <p:nvSpPr>
+          <p:cNvPr id="12" name="文本框 11">
+            <a:extLst>
+              <a:ext uri="{FF2B5EF4-FFF2-40B4-BE49-F238E27FC236}">
+                <a16:creationId xmlns:a16="http://schemas.microsoft.com/office/drawing/2014/main" id="{E6CD1DC0-0FB1-495F-8A7D-B4860FF046CE}"/>
+              </a:ext>
+            </a:extLst>
+          </p:cNvPr>
+          <p:cNvSpPr txBox="1"/>
+          <p:nvPr/>
+        </p:nvSpPr>
+        <p:spPr>
+          <a:xfrm>
+            <a:off x="9272031" y="5184153"/>
+            <a:ext cx="1013250" cy="369332"/>
+          </a:xfrm>
+          <a:prstGeom prst="rect">
+            <a:avLst/>
+          </a:prstGeom>
+          <a:noFill/>
+        </p:spPr>
+        <p:txBody>
+          <a:bodyPr wrap="square">
+            <a:spAutoFit/>
+          </a:bodyPr>
+          <a:lstStyle/>
+          <a:p>
+            <a:r>
+              <a:rPr lang="en-US" altLang="zh-CN" sz="1800" dirty="0"/>
+              <a:t>receiver</a:t>
+            </a:r>
+            <a:endParaRPr lang="en-HK" dirty="0"/>
+          </a:p>
+        </p:txBody>
+      </p:sp>
+      <p:cxnSp>
+        <p:nvCxnSpPr>
+          <p:cNvPr id="14" name="直接箭头连接符 13">
+            <a:extLst>
+              <a:ext uri="{FF2B5EF4-FFF2-40B4-BE49-F238E27FC236}">
+                <a16:creationId xmlns:a16="http://schemas.microsoft.com/office/drawing/2014/main" id="{37DF12A7-EF3B-42FC-A64F-60AC297AB4C1}"/>
+              </a:ext>
+            </a:extLst>
+          </p:cNvPr>
+          <p:cNvCxnSpPr>
+            <a:stCxn id="4" idx="3"/>
+            <a:endCxn id="6" idx="1"/>
+          </p:cNvCxnSpPr>
+          <p:nvPr/>
+        </p:nvCxnSpPr>
+        <p:spPr>
+          <a:xfrm>
+            <a:off x="7507704" y="4748959"/>
+            <a:ext cx="718153" cy="257"/>
+          </a:xfrm>
+          <a:prstGeom prst="straightConnector1">
+            <a:avLst/>
+          </a:prstGeom>
+          <a:ln w="12700">
+            <a:solidFill>
+              <a:schemeClr val="tx1"/>
+            </a:solidFill>
+            <a:tailEnd type="triangle"/>
+          </a:ln>
+        </p:spPr>
+        <p:style>
+          <a:lnRef idx="1">
+            <a:schemeClr val="accent1"/>
+          </a:lnRef>
+          <a:fillRef idx="0">
+            <a:schemeClr val="accent1"/>
+          </a:fillRef>
+          <a:effectRef idx="0">
+            <a:schemeClr val="accent1"/>
+          </a:effectRef>
+          <a:fontRef idx="minor">
+            <a:schemeClr val="tx1"/>
+          </a:fontRef>
+        </p:style>
+      </p:cxnSp>
+      <p:cxnSp>
+        <p:nvCxnSpPr>
+          <p:cNvPr id="15" name="直接箭头连接符 14">
+            <a:extLst>
+              <a:ext uri="{FF2B5EF4-FFF2-40B4-BE49-F238E27FC236}">
+                <a16:creationId xmlns:a16="http://schemas.microsoft.com/office/drawing/2014/main" id="{3D86C3B0-0E09-45B0-B0D8-1A5C568D255D}"/>
+              </a:ext>
+            </a:extLst>
+          </p:cNvPr>
+          <p:cNvCxnSpPr>
+            <a:cxnSpLocks/>
+            <a:stCxn id="6" idx="3"/>
+            <a:endCxn id="11" idx="1"/>
+          </p:cNvCxnSpPr>
+          <p:nvPr/>
+        </p:nvCxnSpPr>
+        <p:spPr>
+          <a:xfrm flipV="1">
+            <a:off x="8720870" y="4748959"/>
+            <a:ext cx="726170" cy="257"/>
+          </a:xfrm>
+          <a:prstGeom prst="straightConnector1">
+            <a:avLst/>
+          </a:prstGeom>
+          <a:ln w="12700">
+            <a:solidFill>
+              <a:schemeClr val="tx1"/>
+            </a:solidFill>
+            <a:tailEnd type="triangle"/>
+          </a:ln>
+        </p:spPr>
+        <p:style>
+          <a:lnRef idx="1">
+            <a:schemeClr val="accent1"/>
+          </a:lnRef>
+          <a:fillRef idx="0">
+            <a:schemeClr val="accent1"/>
+          </a:fillRef>
+          <a:effectRef idx="0">
+            <a:schemeClr val="accent1"/>
+          </a:effectRef>
+          <a:fontRef idx="minor">
+            <a:schemeClr val="tx1"/>
+          </a:fontRef>
+        </p:style>
+      </p:cxnSp>
     </p:spTree>
     <p:extLst>
       <p:ext uri="{BB962C8B-B14F-4D97-AF65-F5344CB8AC3E}">
@@ -9368,7 +10643,7 @@
           </p:nvPr>
         </p:nvPicPr>
         <p:blipFill>
-          <a:blip r:embed="rId2"/>
+          <a:blip r:embed="rId3"/>
           <a:stretch>
             <a:fillRect/>
           </a:stretch>
@@ -9661,6 +10936,70 @@
       </p:grpSpPr>
       <p:sp>
         <p:nvSpPr>
+          <p:cNvPr id="3" name="Content Placeholder 2">
+            <a:extLst>
+              <a:ext uri="{FF2B5EF4-FFF2-40B4-BE49-F238E27FC236}">
+                <a16:creationId xmlns:a16="http://schemas.microsoft.com/office/drawing/2014/main" id="{8F20472D-613F-3748-9CBD-88055CDB4B08}"/>
+              </a:ext>
+            </a:extLst>
+          </p:cNvPr>
+          <p:cNvSpPr>
+            <a:spLocks noGrp="1"/>
+          </p:cNvSpPr>
+          <p:nvPr>
+            <p:ph idx="1"/>
+          </p:nvPr>
+        </p:nvSpPr>
+        <p:spPr/>
+        <p:txBody>
+          <a:bodyPr>
+            <a:normAutofit/>
+          </a:bodyPr>
+          <a:lstStyle/>
+          <a:p>
+            <a:r>
+              <a:rPr lang="en-US" sz="3200" dirty="0"/>
+              <a:t>Socket Programming R</a:t>
+            </a:r>
+            <a:r>
+              <a:rPr lang="en-US" altLang="zh-CN" sz="3200" dirty="0"/>
+              <a:t>evisiting</a:t>
+            </a:r>
+            <a:endParaRPr lang="en-US" sz="3200" dirty="0"/>
+          </a:p>
+          <a:p>
+            <a:r>
+              <a:rPr lang="en-US" sz="3200" dirty="0"/>
+              <a:t>Performance Metrics - Delay</a:t>
+            </a:r>
+          </a:p>
+          <a:p>
+            <a:r>
+              <a:rPr lang="en-US" sz="3200" dirty="0"/>
+              <a:t>Performance Metrics - Throughput</a:t>
+            </a:r>
+          </a:p>
+          <a:p>
+            <a:r>
+              <a:rPr lang="en-US" altLang="zh-CN" sz="3200" dirty="0"/>
+              <a:t>Exercise </a:t>
+            </a:r>
+            <a:r>
+              <a:rPr lang="en-US" sz="3200" dirty="0"/>
+              <a:t>1</a:t>
+            </a:r>
+          </a:p>
+          <a:p>
+            <a:r>
+              <a:rPr lang="en-US" altLang="zh-CN" sz="3200" dirty="0"/>
+              <a:t>Exercise 2</a:t>
+            </a:r>
+            <a:endParaRPr lang="en-US" sz="3200" dirty="0"/>
+          </a:p>
+        </p:txBody>
+      </p:sp>
+      <p:sp>
+        <p:nvSpPr>
           <p:cNvPr id="2" name="Title 1">
             <a:extLst>
               <a:ext uri="{FF2B5EF4-FFF2-40B4-BE49-F238E27FC236}">
@@ -9682,512 +11021,15 @@
           <a:p>
             <a:r>
               <a:rPr lang="en-US" b="1" dirty="0"/>
-              <a:t>Assignment 1 </a:t>
-            </a:r>
-          </a:p>
-        </p:txBody>
-      </p:sp>
-      <p:sp>
-        <p:nvSpPr>
-          <p:cNvPr id="3" name="Content Placeholder 2">
-            <a:extLst>
-              <a:ext uri="{FF2B5EF4-FFF2-40B4-BE49-F238E27FC236}">
-                <a16:creationId xmlns:a16="http://schemas.microsoft.com/office/drawing/2014/main" id="{8F20472D-613F-3748-9CBD-88055CDB4B08}"/>
-              </a:ext>
-            </a:extLst>
-          </p:cNvPr>
-          <p:cNvSpPr>
-            <a:spLocks noGrp="1"/>
-          </p:cNvSpPr>
-          <p:nvPr>
-            <p:ph idx="1"/>
-          </p:nvPr>
-        </p:nvSpPr>
-        <p:spPr>
-          <a:xfrm>
-            <a:off x="844594" y="1499511"/>
-            <a:ext cx="10515600" cy="4351338"/>
-          </a:xfrm>
-        </p:spPr>
-        <p:txBody>
-          <a:bodyPr vert="horz" lIns="91440" tIns="45720" rIns="91440" bIns="45720" rtlCol="0" anchor="t">
-            <a:normAutofit/>
-          </a:bodyPr>
-          <a:lstStyle/>
-          <a:p>
-            <a:r>
-              <a:rPr lang="en-US" sz="3200" dirty="0">
-                <a:solidFill>
-                  <a:srgbClr val="FF0000"/>
-                </a:solidFill>
-              </a:rPr>
-              <a:t>Due: </a:t>
-            </a:r>
-            <a:r>
-              <a:rPr lang="en-HK" sz="3200" dirty="0">
-                <a:solidFill>
-                  <a:srgbClr val="FF0000"/>
-                </a:solidFill>
-              </a:rPr>
-              <a:t>11:59:59 p.m., Sat, Jan. 25th</a:t>
-            </a:r>
-            <a:endParaRPr lang="en-US" sz="3200" dirty="0">
-              <a:solidFill>
-                <a:srgbClr val="FF0000"/>
-              </a:solidFill>
-            </a:endParaRPr>
-          </a:p>
-          <a:p>
-            <a:endParaRPr lang="en-US" sz="3200" dirty="0">
-              <a:solidFill>
-                <a:srgbClr val="FF0000"/>
-              </a:solidFill>
-            </a:endParaRPr>
-          </a:p>
-        </p:txBody>
-      </p:sp>
-      <p:pic>
-        <p:nvPicPr>
-          <p:cNvPr id="7" name="图片 6">
-            <a:extLst>
-              <a:ext uri="{FF2B5EF4-FFF2-40B4-BE49-F238E27FC236}">
-                <a16:creationId xmlns:a16="http://schemas.microsoft.com/office/drawing/2014/main" id="{94148393-6CCB-44FE-80D6-264EBD55CF7F}"/>
-              </a:ext>
-            </a:extLst>
-          </p:cNvPr>
-          <p:cNvPicPr>
-            <a:picLocks noChangeAspect="1"/>
-          </p:cNvPicPr>
-          <p:nvPr/>
-        </p:nvPicPr>
-        <p:blipFill>
-          <a:blip r:embed="rId2"/>
-          <a:stretch>
-            <a:fillRect/>
-          </a:stretch>
-        </p:blipFill>
-        <p:spPr>
-          <a:xfrm>
-            <a:off x="850988" y="2358734"/>
-            <a:ext cx="6070917" cy="2926201"/>
-          </a:xfrm>
-          <a:prstGeom prst="rect">
-            <a:avLst/>
-          </a:prstGeom>
-        </p:spPr>
-      </p:pic>
-      <p:pic>
-        <p:nvPicPr>
-          <p:cNvPr id="9" name="图片 8">
-            <a:extLst>
-              <a:ext uri="{FF2B5EF4-FFF2-40B4-BE49-F238E27FC236}">
-                <a16:creationId xmlns:a16="http://schemas.microsoft.com/office/drawing/2014/main" id="{18500EE3-5D69-464B-86C6-810B4B529FB6}"/>
-              </a:ext>
-            </a:extLst>
-          </p:cNvPr>
-          <p:cNvPicPr>
-            <a:picLocks noChangeAspect="1"/>
-          </p:cNvPicPr>
-          <p:nvPr/>
-        </p:nvPicPr>
-        <p:blipFill>
-          <a:blip r:embed="rId3"/>
-          <a:stretch>
-            <a:fillRect/>
-          </a:stretch>
-        </p:blipFill>
-        <p:spPr>
-          <a:xfrm>
-            <a:off x="6969111" y="2140242"/>
-            <a:ext cx="4828567" cy="3902439"/>
-          </a:xfrm>
-          <a:prstGeom prst="rect">
-            <a:avLst/>
-          </a:prstGeom>
-        </p:spPr>
-      </p:pic>
-      <p:pic>
-        <p:nvPicPr>
-          <p:cNvPr id="11" name="图片 10">
-            <a:extLst>
-              <a:ext uri="{FF2B5EF4-FFF2-40B4-BE49-F238E27FC236}">
-                <a16:creationId xmlns:a16="http://schemas.microsoft.com/office/drawing/2014/main" id="{E6A98220-9D71-40C9-AF25-67464820F084}"/>
-              </a:ext>
-            </a:extLst>
-          </p:cNvPr>
-          <p:cNvPicPr>
-            <a:picLocks noChangeAspect="1"/>
-          </p:cNvPicPr>
-          <p:nvPr/>
-        </p:nvPicPr>
-        <p:blipFill>
-          <a:blip r:embed="rId4"/>
-          <a:stretch>
-            <a:fillRect/>
-          </a:stretch>
-        </p:blipFill>
-        <p:spPr>
-          <a:xfrm>
-            <a:off x="9584632" y="2871239"/>
-            <a:ext cx="2300262" cy="959194"/>
-          </a:xfrm>
-          <a:prstGeom prst="rect">
-            <a:avLst/>
-          </a:prstGeom>
-        </p:spPr>
-      </p:pic>
-      <p:pic>
-        <p:nvPicPr>
-          <p:cNvPr id="15" name="图片 14">
-            <a:extLst>
-              <a:ext uri="{FF2B5EF4-FFF2-40B4-BE49-F238E27FC236}">
-                <a16:creationId xmlns:a16="http://schemas.microsoft.com/office/drawing/2014/main" id="{F1D3F1C2-C0E3-4976-93C2-29E5E2E3EBB9}"/>
-              </a:ext>
-            </a:extLst>
-          </p:cNvPr>
-          <p:cNvPicPr>
-            <a:picLocks noChangeAspect="1"/>
-          </p:cNvPicPr>
-          <p:nvPr/>
-        </p:nvPicPr>
-        <p:blipFill>
-          <a:blip r:embed="rId5"/>
-          <a:stretch>
-            <a:fillRect/>
-          </a:stretch>
-        </p:blipFill>
-        <p:spPr>
-          <a:xfrm>
-            <a:off x="5101464" y="3911301"/>
-            <a:ext cx="1542081" cy="1070075"/>
-          </a:xfrm>
-          <a:prstGeom prst="rect">
-            <a:avLst/>
-          </a:prstGeom>
-        </p:spPr>
-      </p:pic>
-      <p:pic>
-        <p:nvPicPr>
-          <p:cNvPr id="17" name="图片 16">
-            <a:extLst>
-              <a:ext uri="{FF2B5EF4-FFF2-40B4-BE49-F238E27FC236}">
-                <a16:creationId xmlns:a16="http://schemas.microsoft.com/office/drawing/2014/main" id="{C3EC4E7F-4158-448B-991A-F95A510256D9}"/>
-              </a:ext>
-            </a:extLst>
-          </p:cNvPr>
-          <p:cNvPicPr>
-            <a:picLocks noChangeAspect="1"/>
-          </p:cNvPicPr>
-          <p:nvPr/>
-        </p:nvPicPr>
-        <p:blipFill>
-          <a:blip r:embed="rId6"/>
-          <a:stretch>
-            <a:fillRect/>
-          </a:stretch>
-        </p:blipFill>
-        <p:spPr>
-          <a:xfrm>
-            <a:off x="5127041" y="3299031"/>
-            <a:ext cx="1542081" cy="259120"/>
-          </a:xfrm>
-          <a:prstGeom prst="rect">
-            <a:avLst/>
-          </a:prstGeom>
-        </p:spPr>
-      </p:pic>
-      <p:sp>
-        <p:nvSpPr>
-          <p:cNvPr id="18" name="矩形 17">
-            <a:extLst>
-              <a:ext uri="{FF2B5EF4-FFF2-40B4-BE49-F238E27FC236}">
-                <a16:creationId xmlns:a16="http://schemas.microsoft.com/office/drawing/2014/main" id="{E9A1B174-3DA2-4036-B5CF-D675C31532A0}"/>
-              </a:ext>
-            </a:extLst>
-          </p:cNvPr>
-          <p:cNvSpPr/>
-          <p:nvPr/>
-        </p:nvSpPr>
-        <p:spPr>
-          <a:xfrm>
-            <a:off x="4962059" y="2660191"/>
-            <a:ext cx="517947" cy="184184"/>
-          </a:xfrm>
-          <a:prstGeom prst="rect">
-            <a:avLst/>
-          </a:prstGeom>
-          <a:noFill/>
-          <a:ln>
-            <a:solidFill>
-              <a:schemeClr val="tx1"/>
-            </a:solidFill>
-          </a:ln>
-        </p:spPr>
-        <p:style>
-          <a:lnRef idx="2">
-            <a:schemeClr val="accent1">
-              <a:shade val="50000"/>
-            </a:schemeClr>
-          </a:lnRef>
-          <a:fillRef idx="1">
-            <a:schemeClr val="accent1"/>
-          </a:fillRef>
-          <a:effectRef idx="0">
-            <a:schemeClr val="accent1"/>
-          </a:effectRef>
-          <a:fontRef idx="minor">
-            <a:schemeClr val="lt1"/>
-          </a:fontRef>
-        </p:style>
-        <p:txBody>
-          <a:bodyPr rtlCol="0" anchor="ctr"/>
-          <a:lstStyle/>
-          <a:p>
-            <a:pPr algn="ctr"/>
-            <a:endParaRPr lang="en-HK"/>
-          </a:p>
-        </p:txBody>
-      </p:sp>
-      <p:cxnSp>
-        <p:nvCxnSpPr>
-          <p:cNvPr id="20" name="直接箭头连接符 19">
-            <a:extLst>
-              <a:ext uri="{FF2B5EF4-FFF2-40B4-BE49-F238E27FC236}">
-                <a16:creationId xmlns:a16="http://schemas.microsoft.com/office/drawing/2014/main" id="{8E4DFA63-AADE-47E2-8269-BD7E2ADF5265}"/>
-              </a:ext>
-            </a:extLst>
-          </p:cNvPr>
-          <p:cNvCxnSpPr>
-            <a:cxnSpLocks/>
-          </p:cNvCxnSpPr>
-          <p:nvPr/>
-        </p:nvCxnSpPr>
-        <p:spPr>
-          <a:xfrm>
-            <a:off x="5371301" y="2877633"/>
-            <a:ext cx="501204" cy="377119"/>
-          </a:xfrm>
-          <a:prstGeom prst="straightConnector1">
-            <a:avLst/>
-          </a:prstGeom>
-          <a:ln w="12700">
-            <a:solidFill>
-              <a:schemeClr val="tx1"/>
-            </a:solidFill>
-            <a:tailEnd type="triangle"/>
-          </a:ln>
-        </p:spPr>
-        <p:style>
-          <a:lnRef idx="1">
-            <a:schemeClr val="accent1"/>
-          </a:lnRef>
-          <a:fillRef idx="0">
-            <a:schemeClr val="accent1"/>
-          </a:fillRef>
-          <a:effectRef idx="0">
-            <a:schemeClr val="accent1"/>
-          </a:effectRef>
-          <a:fontRef idx="minor">
-            <a:schemeClr val="tx1"/>
-          </a:fontRef>
-        </p:style>
-      </p:cxnSp>
-      <p:sp>
-        <p:nvSpPr>
-          <p:cNvPr id="26" name="矩形 25">
-            <a:extLst>
-              <a:ext uri="{FF2B5EF4-FFF2-40B4-BE49-F238E27FC236}">
-                <a16:creationId xmlns:a16="http://schemas.microsoft.com/office/drawing/2014/main" id="{27A2696C-2D8B-46BD-AFAC-D75B5B4E8F4B}"/>
-              </a:ext>
-            </a:extLst>
-          </p:cNvPr>
-          <p:cNvSpPr/>
-          <p:nvPr/>
-        </p:nvSpPr>
-        <p:spPr>
-          <a:xfrm>
-            <a:off x="6975505" y="2121060"/>
-            <a:ext cx="851247" cy="184184"/>
-          </a:xfrm>
-          <a:prstGeom prst="rect">
-            <a:avLst/>
-          </a:prstGeom>
-          <a:noFill/>
-          <a:ln>
-            <a:solidFill>
-              <a:schemeClr val="tx1"/>
-            </a:solidFill>
-          </a:ln>
-        </p:spPr>
-        <p:style>
-          <a:lnRef idx="2">
-            <a:schemeClr val="accent1">
-              <a:shade val="50000"/>
-            </a:schemeClr>
-          </a:lnRef>
-          <a:fillRef idx="1">
-            <a:schemeClr val="accent1"/>
-          </a:fillRef>
-          <a:effectRef idx="0">
-            <a:schemeClr val="accent1"/>
-          </a:effectRef>
-          <a:fontRef idx="minor">
-            <a:schemeClr val="lt1"/>
-          </a:fontRef>
-        </p:style>
-        <p:txBody>
-          <a:bodyPr rtlCol="0" anchor="ctr"/>
-          <a:lstStyle/>
-          <a:p>
-            <a:pPr algn="ctr"/>
-            <a:endParaRPr lang="en-HK"/>
-          </a:p>
-        </p:txBody>
-      </p:sp>
-      <p:cxnSp>
-        <p:nvCxnSpPr>
-          <p:cNvPr id="27" name="直接箭头连接符 26">
-            <a:extLst>
-              <a:ext uri="{FF2B5EF4-FFF2-40B4-BE49-F238E27FC236}">
-                <a16:creationId xmlns:a16="http://schemas.microsoft.com/office/drawing/2014/main" id="{B95DF65D-9D66-4C32-80E7-BB27574D98A9}"/>
-              </a:ext>
-            </a:extLst>
-          </p:cNvPr>
-          <p:cNvCxnSpPr>
-            <a:cxnSpLocks/>
-          </p:cNvCxnSpPr>
-          <p:nvPr/>
-        </p:nvCxnSpPr>
-        <p:spPr>
-          <a:xfrm>
-            <a:off x="7873958" y="2283072"/>
-            <a:ext cx="1781594" cy="971680"/>
-          </a:xfrm>
-          <a:prstGeom prst="straightConnector1">
-            <a:avLst/>
-          </a:prstGeom>
-          <a:ln w="12700">
-            <a:solidFill>
-              <a:schemeClr val="tx1"/>
-            </a:solidFill>
-            <a:tailEnd type="triangle"/>
-          </a:ln>
-        </p:spPr>
-        <p:style>
-          <a:lnRef idx="1">
-            <a:schemeClr val="accent1"/>
-          </a:lnRef>
-          <a:fillRef idx="0">
-            <a:schemeClr val="accent1"/>
-          </a:fillRef>
-          <a:effectRef idx="0">
-            <a:schemeClr val="accent1"/>
-          </a:effectRef>
-          <a:fontRef idx="minor">
-            <a:schemeClr val="tx1"/>
-          </a:fontRef>
-        </p:style>
-      </p:cxnSp>
-      <p:sp>
-        <p:nvSpPr>
-          <p:cNvPr id="29" name="矩形 28">
-            <a:extLst>
-              <a:ext uri="{FF2B5EF4-FFF2-40B4-BE49-F238E27FC236}">
-                <a16:creationId xmlns:a16="http://schemas.microsoft.com/office/drawing/2014/main" id="{8240F4E0-BED2-4121-8E96-E0B8B564A9F1}"/>
-              </a:ext>
-            </a:extLst>
-          </p:cNvPr>
-          <p:cNvSpPr/>
-          <p:nvPr/>
-        </p:nvSpPr>
-        <p:spPr>
-          <a:xfrm>
-            <a:off x="4444114" y="2662102"/>
-            <a:ext cx="517947" cy="184184"/>
-          </a:xfrm>
-          <a:prstGeom prst="rect">
-            <a:avLst/>
-          </a:prstGeom>
-          <a:noFill/>
-          <a:ln>
-            <a:solidFill>
-              <a:schemeClr val="tx1"/>
-            </a:solidFill>
-          </a:ln>
-        </p:spPr>
-        <p:style>
-          <a:lnRef idx="2">
-            <a:schemeClr val="accent1">
-              <a:shade val="50000"/>
-            </a:schemeClr>
-          </a:lnRef>
-          <a:fillRef idx="1">
-            <a:schemeClr val="accent1"/>
-          </a:fillRef>
-          <a:effectRef idx="0">
-            <a:schemeClr val="accent1"/>
-          </a:effectRef>
-          <a:fontRef idx="minor">
-            <a:schemeClr val="lt1"/>
-          </a:fontRef>
-        </p:style>
-        <p:txBody>
-          <a:bodyPr rtlCol="0" anchor="ctr"/>
-          <a:lstStyle/>
-          <a:p>
-            <a:pPr algn="ctr"/>
-            <a:endParaRPr lang="en-HK"/>
-          </a:p>
-        </p:txBody>
-      </p:sp>
-      <p:cxnSp>
-        <p:nvCxnSpPr>
-          <p:cNvPr id="30" name="直接箭头连接符 29">
-            <a:extLst>
-              <a:ext uri="{FF2B5EF4-FFF2-40B4-BE49-F238E27FC236}">
-                <a16:creationId xmlns:a16="http://schemas.microsoft.com/office/drawing/2014/main" id="{5BDC46D1-A8B6-4691-85CF-3662F3CFE629}"/>
-              </a:ext>
-            </a:extLst>
-          </p:cNvPr>
-          <p:cNvCxnSpPr>
-            <a:cxnSpLocks/>
-          </p:cNvCxnSpPr>
-          <p:nvPr/>
-        </p:nvCxnSpPr>
-        <p:spPr>
-          <a:xfrm>
-            <a:off x="4744649" y="2877633"/>
-            <a:ext cx="382392" cy="1201998"/>
-          </a:xfrm>
-          <a:prstGeom prst="straightConnector1">
-            <a:avLst/>
-          </a:prstGeom>
-          <a:ln w="12700">
-            <a:solidFill>
-              <a:schemeClr val="tx1"/>
-            </a:solidFill>
-            <a:tailEnd type="triangle"/>
-          </a:ln>
-        </p:spPr>
-        <p:style>
-          <a:lnRef idx="1">
-            <a:schemeClr val="accent1"/>
-          </a:lnRef>
-          <a:fillRef idx="0">
-            <a:schemeClr val="accent1"/>
-          </a:fillRef>
-          <a:effectRef idx="0">
-            <a:schemeClr val="accent1"/>
-          </a:effectRef>
-          <a:fontRef idx="minor">
-            <a:schemeClr val="tx1"/>
-          </a:fontRef>
-        </p:style>
-      </p:cxnSp>
+              <a:t>Outline</a:t>
+            </a:r>
+          </a:p>
+        </p:txBody>
+      </p:sp>
     </p:spTree>
     <p:extLst>
       <p:ext uri="{BB962C8B-B14F-4D97-AF65-F5344CB8AC3E}">
-        <p14:creationId xmlns:p14="http://schemas.microsoft.com/office/powerpoint/2010/main" val="1947847713"/>
+        <p14:creationId xmlns:p14="http://schemas.microsoft.com/office/powerpoint/2010/main" val="440415094"/>
       </p:ext>
     </p:extLst>
   </p:cSld>
@@ -10311,7 +11153,7 @@
           </p:nvPr>
         </p:nvPicPr>
         <p:blipFill>
-          <a:blip r:embed="rId2"/>
+          <a:blip r:embed="rId3"/>
           <a:stretch>
             <a:fillRect/>
           </a:stretch>
@@ -10419,6 +11261,34 @@
       </p:grpSpPr>
       <p:sp>
         <p:nvSpPr>
+          <p:cNvPr id="2" name="Title 1">
+            <a:extLst>
+              <a:ext uri="{FF2B5EF4-FFF2-40B4-BE49-F238E27FC236}">
+                <a16:creationId xmlns:a16="http://schemas.microsoft.com/office/drawing/2014/main" id="{45C79BA1-37A3-5741-B0A1-E64646E4283C}"/>
+              </a:ext>
+            </a:extLst>
+          </p:cNvPr>
+          <p:cNvSpPr>
+            <a:spLocks noGrp="1"/>
+          </p:cNvSpPr>
+          <p:nvPr>
+            <p:ph type="title"/>
+          </p:nvPr>
+        </p:nvSpPr>
+        <p:spPr/>
+        <p:txBody>
+          <a:bodyPr/>
+          <a:lstStyle/>
+          <a:p>
+            <a:r>
+              <a:rPr lang="en-US" b="1" dirty="0"/>
+              <a:t>Assignment 1 </a:t>
+            </a:r>
+          </a:p>
+        </p:txBody>
+      </p:sp>
+      <p:sp>
+        <p:nvSpPr>
           <p:cNvPr id="3" name="Content Placeholder 2">
             <a:extLst>
               <a:ext uri="{FF2B5EF4-FFF2-40B4-BE49-F238E27FC236}">
@@ -10433,86 +11303,491 @@
             <p:ph idx="1"/>
           </p:nvPr>
         </p:nvSpPr>
-        <p:spPr/>
-        <p:txBody>
-          <a:bodyPr>
+        <p:spPr>
+          <a:xfrm>
+            <a:off x="844594" y="1499511"/>
+            <a:ext cx="10515600" cy="4351338"/>
+          </a:xfrm>
+        </p:spPr>
+        <p:txBody>
+          <a:bodyPr vert="horz" lIns="91440" tIns="45720" rIns="91440" bIns="45720" rtlCol="0" anchor="t">
             <a:normAutofit/>
           </a:bodyPr>
           <a:lstStyle/>
           <a:p>
             <a:r>
-              <a:rPr lang="en-US" sz="3200" dirty="0"/>
-              <a:t>Socket Programming R</a:t>
-            </a:r>
-            <a:r>
-              <a:rPr lang="en-US" altLang="zh-CN" sz="3200" dirty="0"/>
-              <a:t>evisiting</a:t>
-            </a:r>
-            <a:endParaRPr lang="en-US" sz="3200" dirty="0"/>
-          </a:p>
-          <a:p>
-            <a:r>
-              <a:rPr lang="en-US" sz="3200" dirty="0"/>
-              <a:t>Performance Metrics - Delay</a:t>
-            </a:r>
-          </a:p>
-          <a:p>
-            <a:r>
-              <a:rPr lang="en-US" sz="3200" dirty="0"/>
-              <a:t>Performance Metrics - Throughput</a:t>
-            </a:r>
-          </a:p>
-          <a:p>
-            <a:r>
-              <a:rPr lang="en-US" altLang="zh-CN" sz="3200" dirty="0"/>
-              <a:t>Exercise </a:t>
-            </a:r>
-            <a:r>
-              <a:rPr lang="en-US" sz="3200" dirty="0"/>
-              <a:t>1</a:t>
-            </a:r>
-          </a:p>
-          <a:p>
-            <a:r>
-              <a:rPr lang="en-US" altLang="zh-CN" sz="3200" dirty="0"/>
-              <a:t>Exercise 2</a:t>
-            </a:r>
-            <a:endParaRPr lang="en-US" sz="3200" dirty="0"/>
-          </a:p>
-        </p:txBody>
-      </p:sp>
-      <p:sp>
-        <p:nvSpPr>
-          <p:cNvPr id="2" name="Title 1">
-            <a:extLst>
-              <a:ext uri="{FF2B5EF4-FFF2-40B4-BE49-F238E27FC236}">
-                <a16:creationId xmlns:a16="http://schemas.microsoft.com/office/drawing/2014/main" id="{45C79BA1-37A3-5741-B0A1-E64646E4283C}"/>
-              </a:ext>
-            </a:extLst>
-          </p:cNvPr>
-          <p:cNvSpPr>
-            <a:spLocks noGrp="1"/>
-          </p:cNvSpPr>
-          <p:nvPr>
-            <p:ph type="title"/>
-          </p:nvPr>
-        </p:nvSpPr>
-        <p:spPr/>
-        <p:txBody>
-          <a:bodyPr/>
-          <a:lstStyle/>
-          <a:p>
-            <a:r>
-              <a:rPr lang="en-US" b="1" dirty="0"/>
-              <a:t>Outline</a:t>
-            </a:r>
-          </a:p>
-        </p:txBody>
-      </p:sp>
+              <a:rPr lang="en-US" sz="3200" dirty="0">
+                <a:solidFill>
+                  <a:srgbClr val="FF0000"/>
+                </a:solidFill>
+              </a:rPr>
+              <a:t>Due: </a:t>
+            </a:r>
+            <a:r>
+              <a:rPr lang="en-HK" sz="3200" dirty="0">
+                <a:solidFill>
+                  <a:srgbClr val="FF0000"/>
+                </a:solidFill>
+              </a:rPr>
+              <a:t>11:59:59 p.m., Sat, Jan. 25th</a:t>
+            </a:r>
+            <a:endParaRPr lang="en-US" sz="3200" dirty="0">
+              <a:solidFill>
+                <a:srgbClr val="FF0000"/>
+              </a:solidFill>
+            </a:endParaRPr>
+          </a:p>
+          <a:p>
+            <a:endParaRPr lang="en-US" sz="3200" dirty="0">
+              <a:solidFill>
+                <a:srgbClr val="FF0000"/>
+              </a:solidFill>
+            </a:endParaRPr>
+          </a:p>
+        </p:txBody>
+      </p:sp>
+      <p:pic>
+        <p:nvPicPr>
+          <p:cNvPr id="7" name="图片 6">
+            <a:extLst>
+              <a:ext uri="{FF2B5EF4-FFF2-40B4-BE49-F238E27FC236}">
+                <a16:creationId xmlns:a16="http://schemas.microsoft.com/office/drawing/2014/main" id="{94148393-6CCB-44FE-80D6-264EBD55CF7F}"/>
+              </a:ext>
+            </a:extLst>
+          </p:cNvPr>
+          <p:cNvPicPr>
+            <a:picLocks noChangeAspect="1"/>
+          </p:cNvPicPr>
+          <p:nvPr/>
+        </p:nvPicPr>
+        <p:blipFill>
+          <a:blip r:embed="rId3"/>
+          <a:stretch>
+            <a:fillRect/>
+          </a:stretch>
+        </p:blipFill>
+        <p:spPr>
+          <a:xfrm>
+            <a:off x="850988" y="2358734"/>
+            <a:ext cx="6070917" cy="2926201"/>
+          </a:xfrm>
+          <a:prstGeom prst="rect">
+            <a:avLst/>
+          </a:prstGeom>
+        </p:spPr>
+      </p:pic>
+      <p:pic>
+        <p:nvPicPr>
+          <p:cNvPr id="9" name="图片 8">
+            <a:extLst>
+              <a:ext uri="{FF2B5EF4-FFF2-40B4-BE49-F238E27FC236}">
+                <a16:creationId xmlns:a16="http://schemas.microsoft.com/office/drawing/2014/main" id="{18500EE3-5D69-464B-86C6-810B4B529FB6}"/>
+              </a:ext>
+            </a:extLst>
+          </p:cNvPr>
+          <p:cNvPicPr>
+            <a:picLocks noChangeAspect="1"/>
+          </p:cNvPicPr>
+          <p:nvPr/>
+        </p:nvPicPr>
+        <p:blipFill>
+          <a:blip r:embed="rId4"/>
+          <a:stretch>
+            <a:fillRect/>
+          </a:stretch>
+        </p:blipFill>
+        <p:spPr>
+          <a:xfrm>
+            <a:off x="6969111" y="2140242"/>
+            <a:ext cx="4828567" cy="3902439"/>
+          </a:xfrm>
+          <a:prstGeom prst="rect">
+            <a:avLst/>
+          </a:prstGeom>
+        </p:spPr>
+      </p:pic>
+      <p:pic>
+        <p:nvPicPr>
+          <p:cNvPr id="11" name="图片 10">
+            <a:extLst>
+              <a:ext uri="{FF2B5EF4-FFF2-40B4-BE49-F238E27FC236}">
+                <a16:creationId xmlns:a16="http://schemas.microsoft.com/office/drawing/2014/main" id="{E6A98220-9D71-40C9-AF25-67464820F084}"/>
+              </a:ext>
+            </a:extLst>
+          </p:cNvPr>
+          <p:cNvPicPr>
+            <a:picLocks noChangeAspect="1"/>
+          </p:cNvPicPr>
+          <p:nvPr/>
+        </p:nvPicPr>
+        <p:blipFill>
+          <a:blip r:embed="rId5"/>
+          <a:stretch>
+            <a:fillRect/>
+          </a:stretch>
+        </p:blipFill>
+        <p:spPr>
+          <a:xfrm>
+            <a:off x="9584632" y="2871239"/>
+            <a:ext cx="2300262" cy="959194"/>
+          </a:xfrm>
+          <a:prstGeom prst="rect">
+            <a:avLst/>
+          </a:prstGeom>
+        </p:spPr>
+      </p:pic>
+      <p:pic>
+        <p:nvPicPr>
+          <p:cNvPr id="15" name="图片 14">
+            <a:extLst>
+              <a:ext uri="{FF2B5EF4-FFF2-40B4-BE49-F238E27FC236}">
+                <a16:creationId xmlns:a16="http://schemas.microsoft.com/office/drawing/2014/main" id="{F1D3F1C2-C0E3-4976-93C2-29E5E2E3EBB9}"/>
+              </a:ext>
+            </a:extLst>
+          </p:cNvPr>
+          <p:cNvPicPr>
+            <a:picLocks noChangeAspect="1"/>
+          </p:cNvPicPr>
+          <p:nvPr/>
+        </p:nvPicPr>
+        <p:blipFill>
+          <a:blip r:embed="rId6"/>
+          <a:stretch>
+            <a:fillRect/>
+          </a:stretch>
+        </p:blipFill>
+        <p:spPr>
+          <a:xfrm>
+            <a:off x="5101464" y="3911301"/>
+            <a:ext cx="1542081" cy="1070075"/>
+          </a:xfrm>
+          <a:prstGeom prst="rect">
+            <a:avLst/>
+          </a:prstGeom>
+        </p:spPr>
+      </p:pic>
+      <p:pic>
+        <p:nvPicPr>
+          <p:cNvPr id="17" name="图片 16">
+            <a:extLst>
+              <a:ext uri="{FF2B5EF4-FFF2-40B4-BE49-F238E27FC236}">
+                <a16:creationId xmlns:a16="http://schemas.microsoft.com/office/drawing/2014/main" id="{C3EC4E7F-4158-448B-991A-F95A510256D9}"/>
+              </a:ext>
+            </a:extLst>
+          </p:cNvPr>
+          <p:cNvPicPr>
+            <a:picLocks noChangeAspect="1"/>
+          </p:cNvPicPr>
+          <p:nvPr/>
+        </p:nvPicPr>
+        <p:blipFill>
+          <a:blip r:embed="rId7"/>
+          <a:stretch>
+            <a:fillRect/>
+          </a:stretch>
+        </p:blipFill>
+        <p:spPr>
+          <a:xfrm>
+            <a:off x="5127041" y="3299031"/>
+            <a:ext cx="1542081" cy="259120"/>
+          </a:xfrm>
+          <a:prstGeom prst="rect">
+            <a:avLst/>
+          </a:prstGeom>
+        </p:spPr>
+      </p:pic>
+      <p:sp>
+        <p:nvSpPr>
+          <p:cNvPr id="18" name="矩形 17">
+            <a:extLst>
+              <a:ext uri="{FF2B5EF4-FFF2-40B4-BE49-F238E27FC236}">
+                <a16:creationId xmlns:a16="http://schemas.microsoft.com/office/drawing/2014/main" id="{E9A1B174-3DA2-4036-B5CF-D675C31532A0}"/>
+              </a:ext>
+            </a:extLst>
+          </p:cNvPr>
+          <p:cNvSpPr/>
+          <p:nvPr/>
+        </p:nvSpPr>
+        <p:spPr>
+          <a:xfrm>
+            <a:off x="4962059" y="2660191"/>
+            <a:ext cx="517947" cy="184184"/>
+          </a:xfrm>
+          <a:prstGeom prst="rect">
+            <a:avLst/>
+          </a:prstGeom>
+          <a:noFill/>
+          <a:ln>
+            <a:solidFill>
+              <a:schemeClr val="tx1"/>
+            </a:solidFill>
+          </a:ln>
+        </p:spPr>
+        <p:style>
+          <a:lnRef idx="2">
+            <a:schemeClr val="accent1">
+              <a:shade val="50000"/>
+            </a:schemeClr>
+          </a:lnRef>
+          <a:fillRef idx="1">
+            <a:schemeClr val="accent1"/>
+          </a:fillRef>
+          <a:effectRef idx="0">
+            <a:schemeClr val="accent1"/>
+          </a:effectRef>
+          <a:fontRef idx="minor">
+            <a:schemeClr val="lt1"/>
+          </a:fontRef>
+        </p:style>
+        <p:txBody>
+          <a:bodyPr rtlCol="0" anchor="ctr"/>
+          <a:lstStyle/>
+          <a:p>
+            <a:pPr algn="ctr"/>
+            <a:endParaRPr lang="en-HK"/>
+          </a:p>
+        </p:txBody>
+      </p:sp>
+      <p:cxnSp>
+        <p:nvCxnSpPr>
+          <p:cNvPr id="20" name="直接箭头连接符 19">
+            <a:extLst>
+              <a:ext uri="{FF2B5EF4-FFF2-40B4-BE49-F238E27FC236}">
+                <a16:creationId xmlns:a16="http://schemas.microsoft.com/office/drawing/2014/main" id="{8E4DFA63-AADE-47E2-8269-BD7E2ADF5265}"/>
+              </a:ext>
+            </a:extLst>
+          </p:cNvPr>
+          <p:cNvCxnSpPr>
+            <a:cxnSpLocks/>
+          </p:cNvCxnSpPr>
+          <p:nvPr/>
+        </p:nvCxnSpPr>
+        <p:spPr>
+          <a:xfrm>
+            <a:off x="5371301" y="2877633"/>
+            <a:ext cx="501204" cy="377119"/>
+          </a:xfrm>
+          <a:prstGeom prst="straightConnector1">
+            <a:avLst/>
+          </a:prstGeom>
+          <a:ln w="12700">
+            <a:solidFill>
+              <a:schemeClr val="tx1"/>
+            </a:solidFill>
+            <a:tailEnd type="triangle"/>
+          </a:ln>
+        </p:spPr>
+        <p:style>
+          <a:lnRef idx="1">
+            <a:schemeClr val="accent1"/>
+          </a:lnRef>
+          <a:fillRef idx="0">
+            <a:schemeClr val="accent1"/>
+          </a:fillRef>
+          <a:effectRef idx="0">
+            <a:schemeClr val="accent1"/>
+          </a:effectRef>
+          <a:fontRef idx="minor">
+            <a:schemeClr val="tx1"/>
+          </a:fontRef>
+        </p:style>
+      </p:cxnSp>
+      <p:sp>
+        <p:nvSpPr>
+          <p:cNvPr id="26" name="矩形 25">
+            <a:extLst>
+              <a:ext uri="{FF2B5EF4-FFF2-40B4-BE49-F238E27FC236}">
+                <a16:creationId xmlns:a16="http://schemas.microsoft.com/office/drawing/2014/main" id="{27A2696C-2D8B-46BD-AFAC-D75B5B4E8F4B}"/>
+              </a:ext>
+            </a:extLst>
+          </p:cNvPr>
+          <p:cNvSpPr/>
+          <p:nvPr/>
+        </p:nvSpPr>
+        <p:spPr>
+          <a:xfrm>
+            <a:off x="6975505" y="2121060"/>
+            <a:ext cx="851247" cy="184184"/>
+          </a:xfrm>
+          <a:prstGeom prst="rect">
+            <a:avLst/>
+          </a:prstGeom>
+          <a:noFill/>
+          <a:ln>
+            <a:solidFill>
+              <a:schemeClr val="tx1"/>
+            </a:solidFill>
+          </a:ln>
+        </p:spPr>
+        <p:style>
+          <a:lnRef idx="2">
+            <a:schemeClr val="accent1">
+              <a:shade val="50000"/>
+            </a:schemeClr>
+          </a:lnRef>
+          <a:fillRef idx="1">
+            <a:schemeClr val="accent1"/>
+          </a:fillRef>
+          <a:effectRef idx="0">
+            <a:schemeClr val="accent1"/>
+          </a:effectRef>
+          <a:fontRef idx="minor">
+            <a:schemeClr val="lt1"/>
+          </a:fontRef>
+        </p:style>
+        <p:txBody>
+          <a:bodyPr rtlCol="0" anchor="ctr"/>
+          <a:lstStyle/>
+          <a:p>
+            <a:pPr algn="ctr"/>
+            <a:endParaRPr lang="en-HK"/>
+          </a:p>
+        </p:txBody>
+      </p:sp>
+      <p:cxnSp>
+        <p:nvCxnSpPr>
+          <p:cNvPr id="27" name="直接箭头连接符 26">
+            <a:extLst>
+              <a:ext uri="{FF2B5EF4-FFF2-40B4-BE49-F238E27FC236}">
+                <a16:creationId xmlns:a16="http://schemas.microsoft.com/office/drawing/2014/main" id="{B95DF65D-9D66-4C32-80E7-BB27574D98A9}"/>
+              </a:ext>
+            </a:extLst>
+          </p:cNvPr>
+          <p:cNvCxnSpPr>
+            <a:cxnSpLocks/>
+          </p:cNvCxnSpPr>
+          <p:nvPr/>
+        </p:nvCxnSpPr>
+        <p:spPr>
+          <a:xfrm>
+            <a:off x="7873958" y="2283072"/>
+            <a:ext cx="1781594" cy="971680"/>
+          </a:xfrm>
+          <a:prstGeom prst="straightConnector1">
+            <a:avLst/>
+          </a:prstGeom>
+          <a:ln w="12700">
+            <a:solidFill>
+              <a:schemeClr val="tx1"/>
+            </a:solidFill>
+            <a:tailEnd type="triangle"/>
+          </a:ln>
+        </p:spPr>
+        <p:style>
+          <a:lnRef idx="1">
+            <a:schemeClr val="accent1"/>
+          </a:lnRef>
+          <a:fillRef idx="0">
+            <a:schemeClr val="accent1"/>
+          </a:fillRef>
+          <a:effectRef idx="0">
+            <a:schemeClr val="accent1"/>
+          </a:effectRef>
+          <a:fontRef idx="minor">
+            <a:schemeClr val="tx1"/>
+          </a:fontRef>
+        </p:style>
+      </p:cxnSp>
+      <p:sp>
+        <p:nvSpPr>
+          <p:cNvPr id="29" name="矩形 28">
+            <a:extLst>
+              <a:ext uri="{FF2B5EF4-FFF2-40B4-BE49-F238E27FC236}">
+                <a16:creationId xmlns:a16="http://schemas.microsoft.com/office/drawing/2014/main" id="{8240F4E0-BED2-4121-8E96-E0B8B564A9F1}"/>
+              </a:ext>
+            </a:extLst>
+          </p:cNvPr>
+          <p:cNvSpPr/>
+          <p:nvPr/>
+        </p:nvSpPr>
+        <p:spPr>
+          <a:xfrm>
+            <a:off x="4444114" y="2662102"/>
+            <a:ext cx="517947" cy="184184"/>
+          </a:xfrm>
+          <a:prstGeom prst="rect">
+            <a:avLst/>
+          </a:prstGeom>
+          <a:noFill/>
+          <a:ln>
+            <a:solidFill>
+              <a:schemeClr val="tx1"/>
+            </a:solidFill>
+          </a:ln>
+        </p:spPr>
+        <p:style>
+          <a:lnRef idx="2">
+            <a:schemeClr val="accent1">
+              <a:shade val="50000"/>
+            </a:schemeClr>
+          </a:lnRef>
+          <a:fillRef idx="1">
+            <a:schemeClr val="accent1"/>
+          </a:fillRef>
+          <a:effectRef idx="0">
+            <a:schemeClr val="accent1"/>
+          </a:effectRef>
+          <a:fontRef idx="minor">
+            <a:schemeClr val="lt1"/>
+          </a:fontRef>
+        </p:style>
+        <p:txBody>
+          <a:bodyPr rtlCol="0" anchor="ctr"/>
+          <a:lstStyle/>
+          <a:p>
+            <a:pPr algn="ctr"/>
+            <a:endParaRPr lang="en-HK"/>
+          </a:p>
+        </p:txBody>
+      </p:sp>
+      <p:cxnSp>
+        <p:nvCxnSpPr>
+          <p:cNvPr id="30" name="直接箭头连接符 29">
+            <a:extLst>
+              <a:ext uri="{FF2B5EF4-FFF2-40B4-BE49-F238E27FC236}">
+                <a16:creationId xmlns:a16="http://schemas.microsoft.com/office/drawing/2014/main" id="{5BDC46D1-A8B6-4691-85CF-3662F3CFE629}"/>
+              </a:ext>
+            </a:extLst>
+          </p:cNvPr>
+          <p:cNvCxnSpPr>
+            <a:cxnSpLocks/>
+          </p:cNvCxnSpPr>
+          <p:nvPr/>
+        </p:nvCxnSpPr>
+        <p:spPr>
+          <a:xfrm>
+            <a:off x="4744649" y="2877633"/>
+            <a:ext cx="382392" cy="1201998"/>
+          </a:xfrm>
+          <a:prstGeom prst="straightConnector1">
+            <a:avLst/>
+          </a:prstGeom>
+          <a:ln w="12700">
+            <a:solidFill>
+              <a:schemeClr val="tx1"/>
+            </a:solidFill>
+            <a:tailEnd type="triangle"/>
+          </a:ln>
+        </p:spPr>
+        <p:style>
+          <a:lnRef idx="1">
+            <a:schemeClr val="accent1"/>
+          </a:lnRef>
+          <a:fillRef idx="0">
+            <a:schemeClr val="accent1"/>
+          </a:fillRef>
+          <a:effectRef idx="0">
+            <a:schemeClr val="accent1"/>
+          </a:effectRef>
+          <a:fontRef idx="minor">
+            <a:schemeClr val="tx1"/>
+          </a:fontRef>
+        </p:style>
+      </p:cxnSp>
     </p:spTree>
     <p:extLst>
       <p:ext uri="{BB962C8B-B14F-4D97-AF65-F5344CB8AC3E}">
-        <p14:creationId xmlns:p14="http://schemas.microsoft.com/office/powerpoint/2010/main" val="440415094"/>
+        <p14:creationId xmlns:p14="http://schemas.microsoft.com/office/powerpoint/2010/main" val="1947847713"/>
       </p:ext>
     </p:extLst>
   </p:cSld>

--- a/tutorial/T02/tut02.pptx
+++ b/tutorial/T02/tut02.pptx
@@ -5,30 +5,31 @@
     <p:sldMasterId id="2147483648" r:id="rId1"/>
   </p:sldMasterIdLst>
   <p:notesMasterIdLst>
-    <p:notesMasterId r:id="rId23"/>
+    <p:notesMasterId r:id="rId24"/>
   </p:notesMasterIdLst>
   <p:sldIdLst>
     <p:sldId id="256" r:id="rId2"/>
     <p:sldId id="258" r:id="rId3"/>
     <p:sldId id="257" r:id="rId4"/>
-    <p:sldId id="283" r:id="rId5"/>
-    <p:sldId id="261" r:id="rId6"/>
-    <p:sldId id="260" r:id="rId7"/>
-    <p:sldId id="284" r:id="rId8"/>
-    <p:sldId id="286" r:id="rId9"/>
-    <p:sldId id="287" r:id="rId10"/>
-    <p:sldId id="285" r:id="rId11"/>
-    <p:sldId id="259" r:id="rId12"/>
-    <p:sldId id="282" r:id="rId13"/>
-    <p:sldId id="273" r:id="rId14"/>
-    <p:sldId id="274" r:id="rId15"/>
-    <p:sldId id="281" r:id="rId16"/>
-    <p:sldId id="275" r:id="rId17"/>
-    <p:sldId id="277" r:id="rId18"/>
-    <p:sldId id="278" r:id="rId19"/>
-    <p:sldId id="279" r:id="rId20"/>
-    <p:sldId id="280" r:id="rId21"/>
-    <p:sldId id="272" r:id="rId22"/>
+    <p:sldId id="289" r:id="rId5"/>
+    <p:sldId id="283" r:id="rId6"/>
+    <p:sldId id="261" r:id="rId7"/>
+    <p:sldId id="260" r:id="rId8"/>
+    <p:sldId id="284" r:id="rId9"/>
+    <p:sldId id="286" r:id="rId10"/>
+    <p:sldId id="287" r:id="rId11"/>
+    <p:sldId id="285" r:id="rId12"/>
+    <p:sldId id="259" r:id="rId13"/>
+    <p:sldId id="282" r:id="rId14"/>
+    <p:sldId id="273" r:id="rId15"/>
+    <p:sldId id="274" r:id="rId16"/>
+    <p:sldId id="281" r:id="rId17"/>
+    <p:sldId id="275" r:id="rId18"/>
+    <p:sldId id="277" r:id="rId19"/>
+    <p:sldId id="278" r:id="rId20"/>
+    <p:sldId id="279" r:id="rId21"/>
+    <p:sldId id="280" r:id="rId22"/>
+    <p:sldId id="272" r:id="rId23"/>
   </p:sldIdLst>
   <p:sldSz cx="12192000" cy="6858000"/>
   <p:notesSz cx="6858000" cy="9144000"/>
@@ -2341,7 +2342,7 @@
           <a:p>
             <a:fld id="{E03FF167-5468-407F-BF08-399F401F3E28}" type="datetimeFigureOut">
               <a:rPr lang="en-HK" smtClean="0"/>
-              <a:t>14/1/2025</a:t>
+              <a:t>15/1/2025</a:t>
             </a:fld>
             <a:endParaRPr lang="en-HK"/>
           </a:p>
@@ -2737,7 +2738,77 @@
           <a:bodyPr/>
           <a:lstStyle/>
           <a:p>
+            <a:r>
+              <a:rPr lang="en-HK" dirty="0"/>
+              <a:t>The flow starts similarly: the server creates a socket with socket(), binds it to an address with bind(), and begins listening for connections with listen().</a:t>
+            </a:r>
+          </a:p>
+          <a:p>
             <a:endParaRPr lang="en-HK" dirty="0"/>
+          </a:p>
+          <a:p>
+            <a:r>
+              <a:rPr lang="en-HK" dirty="0"/>
+              <a:t>When a client connects, the accept() call returns a new file descriptor. But instead of processing the client request directly, the server creates a </a:t>
+            </a:r>
+            <a:r>
+              <a:rPr lang="en-HK" b="1" dirty="0"/>
+              <a:t>child process</a:t>
+            </a:r>
+            <a:r>
+              <a:rPr lang="en-HK" dirty="0"/>
+              <a:t> or </a:t>
+            </a:r>
+            <a:r>
+              <a:rPr lang="en-HK" b="1" dirty="0"/>
+              <a:t>thread</a:t>
+            </a:r>
+            <a:r>
+              <a:rPr lang="en-HK" dirty="0"/>
+              <a:t> to handle the connection. This can be done using fork() for creating processes or </a:t>
+            </a:r>
+            <a:r>
+              <a:rPr lang="en-HK" dirty="0" err="1"/>
+              <a:t>pthread_create</a:t>
+            </a:r>
+            <a:r>
+              <a:rPr lang="en-HK" dirty="0"/>
+              <a:t>() for threads.</a:t>
+            </a:r>
+          </a:p>
+          <a:p>
+            <a:endParaRPr lang="en-HK" dirty="0"/>
+          </a:p>
+          <a:p>
+            <a:r>
+              <a:rPr lang="en-HK" dirty="0"/>
+              <a:t>The </a:t>
+            </a:r>
+            <a:r>
+              <a:rPr lang="en-HK" b="1" dirty="0"/>
+              <a:t>parent process</a:t>
+            </a:r>
+            <a:r>
+              <a:rPr lang="en-HK" dirty="0"/>
+              <a:t> remains in the listening loop, ready to handle additional client connections.</a:t>
+            </a:r>
+          </a:p>
+          <a:p>
+            <a:endParaRPr lang="en-HK" dirty="0"/>
+          </a:p>
+          <a:p>
+            <a:r>
+              <a:rPr lang="en-HK" dirty="0"/>
+              <a:t>This approach enables the server to handle </a:t>
+            </a:r>
+            <a:r>
+              <a:rPr lang="en-HK" b="1" dirty="0"/>
+              <a:t>multiple clients concurrently</a:t>
+            </a:r>
+            <a:r>
+              <a:rPr lang="en-HK" dirty="0"/>
+              <a:t>, without one client blocking others. It is widely used in real-world servers, and understanding its principles will help you build more scalable applications.</a:t>
+            </a:r>
           </a:p>
         </p:txBody>
       </p:sp>
@@ -2767,7 +2838,7 @@
     </p:spTree>
     <p:extLst>
       <p:ext uri="{BB962C8B-B14F-4D97-AF65-F5344CB8AC3E}">
-        <p14:creationId xmlns:p14="http://schemas.microsoft.com/office/powerpoint/2010/main" val="2105647100"/>
+        <p14:creationId xmlns:p14="http://schemas.microsoft.com/office/powerpoint/2010/main" val="160211546"/>
       </p:ext>
     </p:extLst>
   </p:cSld>
@@ -2840,7 +2911,7 @@
           <a:bodyPr/>
           <a:lstStyle/>
           <a:p>
-            <a:fld id="{B17E5830-6A7B-473E-B69D-2E2616132BAF}" type="slidenum">
+            <a:fld id="{E1500BF2-E5AC-4DD5-8465-7E367A3CF6CA}" type="slidenum">
               <a:rPr lang="en-HK" smtClean="0"/>
               <a:t>11</a:t>
             </a:fld>
@@ -2851,7 +2922,7 @@
     </p:spTree>
     <p:extLst>
       <p:ext uri="{BB962C8B-B14F-4D97-AF65-F5344CB8AC3E}">
-        <p14:creationId xmlns:p14="http://schemas.microsoft.com/office/powerpoint/2010/main" val="3666275127"/>
+        <p14:creationId xmlns:p14="http://schemas.microsoft.com/office/powerpoint/2010/main" val="2105647100"/>
       </p:ext>
     </p:extLst>
   </p:cSld>
@@ -2935,7 +3006,7 @@
     </p:spTree>
     <p:extLst>
       <p:ext uri="{BB962C8B-B14F-4D97-AF65-F5344CB8AC3E}">
-        <p14:creationId xmlns:p14="http://schemas.microsoft.com/office/powerpoint/2010/main" val="48103581"/>
+        <p14:creationId xmlns:p14="http://schemas.microsoft.com/office/powerpoint/2010/main" val="3666275127"/>
       </p:ext>
     </p:extLst>
   </p:cSld>
@@ -3019,7 +3090,7 @@
     </p:spTree>
     <p:extLst>
       <p:ext uri="{BB962C8B-B14F-4D97-AF65-F5344CB8AC3E}">
-        <p14:creationId xmlns:p14="http://schemas.microsoft.com/office/powerpoint/2010/main" val="2302161061"/>
+        <p14:creationId xmlns:p14="http://schemas.microsoft.com/office/powerpoint/2010/main" val="48103581"/>
       </p:ext>
     </p:extLst>
   </p:cSld>
@@ -3103,7 +3174,7 @@
     </p:spTree>
     <p:extLst>
       <p:ext uri="{BB962C8B-B14F-4D97-AF65-F5344CB8AC3E}">
-        <p14:creationId xmlns:p14="http://schemas.microsoft.com/office/powerpoint/2010/main" val="3691191815"/>
+        <p14:creationId xmlns:p14="http://schemas.microsoft.com/office/powerpoint/2010/main" val="2302161061"/>
       </p:ext>
     </p:extLst>
   </p:cSld>
@@ -3187,7 +3258,7 @@
     </p:spTree>
     <p:extLst>
       <p:ext uri="{BB962C8B-B14F-4D97-AF65-F5344CB8AC3E}">
-        <p14:creationId xmlns:p14="http://schemas.microsoft.com/office/powerpoint/2010/main" val="3462793764"/>
+        <p14:creationId xmlns:p14="http://schemas.microsoft.com/office/powerpoint/2010/main" val="3691191815"/>
       </p:ext>
     </p:extLst>
   </p:cSld>
@@ -3271,7 +3342,7 @@
     </p:spTree>
     <p:extLst>
       <p:ext uri="{BB962C8B-B14F-4D97-AF65-F5344CB8AC3E}">
-        <p14:creationId xmlns:p14="http://schemas.microsoft.com/office/powerpoint/2010/main" val="3139731409"/>
+        <p14:creationId xmlns:p14="http://schemas.microsoft.com/office/powerpoint/2010/main" val="3462793764"/>
       </p:ext>
     </p:extLst>
   </p:cSld>
@@ -3355,7 +3426,7 @@
     </p:spTree>
     <p:extLst>
       <p:ext uri="{BB962C8B-B14F-4D97-AF65-F5344CB8AC3E}">
-        <p14:creationId xmlns:p14="http://schemas.microsoft.com/office/powerpoint/2010/main" val="2585338135"/>
+        <p14:creationId xmlns:p14="http://schemas.microsoft.com/office/powerpoint/2010/main" val="3139731409"/>
       </p:ext>
     </p:extLst>
   </p:cSld>
@@ -3439,7 +3510,7 @@
     </p:spTree>
     <p:extLst>
       <p:ext uri="{BB962C8B-B14F-4D97-AF65-F5344CB8AC3E}">
-        <p14:creationId xmlns:p14="http://schemas.microsoft.com/office/powerpoint/2010/main" val="6177697"/>
+        <p14:creationId xmlns:p14="http://schemas.microsoft.com/office/powerpoint/2010/main" val="2585338135"/>
       </p:ext>
     </p:extLst>
   </p:cSld>
@@ -3523,7 +3594,7 @@
     </p:spTree>
     <p:extLst>
       <p:ext uri="{BB962C8B-B14F-4D97-AF65-F5344CB8AC3E}">
-        <p14:creationId xmlns:p14="http://schemas.microsoft.com/office/powerpoint/2010/main" val="2992476646"/>
+        <p14:creationId xmlns:p14="http://schemas.microsoft.com/office/powerpoint/2010/main" val="6177697"/>
       </p:ext>
     </p:extLst>
   </p:cSld>
@@ -3691,6 +3762,90 @@
     </p:spTree>
     <p:extLst>
       <p:ext uri="{BB962C8B-B14F-4D97-AF65-F5344CB8AC3E}">
+        <p14:creationId xmlns:p14="http://schemas.microsoft.com/office/powerpoint/2010/main" val="2992476646"/>
+      </p:ext>
+    </p:extLst>
+  </p:cSld>
+  <p:clrMapOvr>
+    <a:masterClrMapping/>
+  </p:clrMapOvr>
+</p:notes>
+</file>
+
+<file path=ppt/notesSlides/notesSlide21.xml><?xml version="1.0" encoding="utf-8"?>
+<p:notes xmlns:a="http://schemas.openxmlformats.org/drawingml/2006/main" xmlns:r="http://schemas.openxmlformats.org/officeDocument/2006/relationships" xmlns:p="http://schemas.openxmlformats.org/presentationml/2006/main">
+  <p:cSld>
+    <p:spTree>
+      <p:nvGrpSpPr>
+        <p:cNvPr id="1" name=""/>
+        <p:cNvGrpSpPr/>
+        <p:nvPr/>
+      </p:nvGrpSpPr>
+      <p:grpSpPr>
+        <a:xfrm>
+          <a:off x="0" y="0"/>
+          <a:ext cx="0" cy="0"/>
+          <a:chOff x="0" y="0"/>
+          <a:chExt cx="0" cy="0"/>
+        </a:xfrm>
+      </p:grpSpPr>
+      <p:sp>
+        <p:nvSpPr>
+          <p:cNvPr id="2" name="幻灯片图像占位符 1"/>
+          <p:cNvSpPr>
+            <a:spLocks noGrp="1" noRot="1" noChangeAspect="1"/>
+          </p:cNvSpPr>
+          <p:nvPr>
+            <p:ph type="sldImg"/>
+          </p:nvPr>
+        </p:nvSpPr>
+        <p:spPr/>
+      </p:sp>
+      <p:sp>
+        <p:nvSpPr>
+          <p:cNvPr id="3" name="备注占位符 2"/>
+          <p:cNvSpPr>
+            <a:spLocks noGrp="1"/>
+          </p:cNvSpPr>
+          <p:nvPr>
+            <p:ph type="body" idx="1"/>
+          </p:nvPr>
+        </p:nvSpPr>
+        <p:spPr/>
+        <p:txBody>
+          <a:bodyPr/>
+          <a:lstStyle/>
+          <a:p>
+            <a:endParaRPr lang="en-HK" dirty="0"/>
+          </a:p>
+        </p:txBody>
+      </p:sp>
+      <p:sp>
+        <p:nvSpPr>
+          <p:cNvPr id="4" name="灯片编号占位符 3"/>
+          <p:cNvSpPr>
+            <a:spLocks noGrp="1"/>
+          </p:cNvSpPr>
+          <p:nvPr>
+            <p:ph type="sldNum" sz="quarter" idx="5"/>
+          </p:nvPr>
+        </p:nvSpPr>
+        <p:spPr/>
+        <p:txBody>
+          <a:bodyPr/>
+          <a:lstStyle/>
+          <a:p>
+            <a:fld id="{B17E5830-6A7B-473E-B69D-2E2616132BAF}" type="slidenum">
+              <a:rPr lang="en-HK" smtClean="0"/>
+              <a:t>21</a:t>
+            </a:fld>
+            <a:endParaRPr lang="en-HK"/>
+          </a:p>
+        </p:txBody>
+      </p:sp>
+    </p:spTree>
+    <p:extLst>
+      <p:ext uri="{BB962C8B-B14F-4D97-AF65-F5344CB8AC3E}">
         <p14:creationId xmlns:p14="http://schemas.microsoft.com/office/powerpoint/2010/main" val="2557349538"/>
       </p:ext>
     </p:extLst>
@@ -3848,7 +4003,7 @@
           <a:bodyPr/>
           <a:lstStyle/>
           <a:p>
-            <a:fld id="{E1500BF2-E5AC-4DD5-8465-7E367A3CF6CA}" type="slidenum">
+            <a:fld id="{B17E5830-6A7B-473E-B69D-2E2616132BAF}" type="slidenum">
               <a:rPr lang="en-HK" smtClean="0"/>
               <a:t>4</a:t>
             </a:fld>
@@ -3859,7 +4014,7 @@
     </p:spTree>
     <p:extLst>
       <p:ext uri="{BB962C8B-B14F-4D97-AF65-F5344CB8AC3E}">
-        <p14:creationId xmlns:p14="http://schemas.microsoft.com/office/powerpoint/2010/main" val="1056266745"/>
+        <p14:creationId xmlns:p14="http://schemas.microsoft.com/office/powerpoint/2010/main" val="654339159"/>
       </p:ext>
     </p:extLst>
   </p:cSld>
@@ -3943,7 +4098,7 @@
     </p:spTree>
     <p:extLst>
       <p:ext uri="{BB962C8B-B14F-4D97-AF65-F5344CB8AC3E}">
-        <p14:creationId xmlns:p14="http://schemas.microsoft.com/office/powerpoint/2010/main" val="2210012793"/>
+        <p14:creationId xmlns:p14="http://schemas.microsoft.com/office/powerpoint/2010/main" val="1056266745"/>
       </p:ext>
     </p:extLst>
   </p:cSld>
@@ -4027,7 +4182,7 @@
     </p:spTree>
     <p:extLst>
       <p:ext uri="{BB962C8B-B14F-4D97-AF65-F5344CB8AC3E}">
-        <p14:creationId xmlns:p14="http://schemas.microsoft.com/office/powerpoint/2010/main" val="56808591"/>
+        <p14:creationId xmlns:p14="http://schemas.microsoft.com/office/powerpoint/2010/main" val="2210012793"/>
       </p:ext>
     </p:extLst>
   </p:cSld>
@@ -4111,7 +4266,7 @@
     </p:spTree>
     <p:extLst>
       <p:ext uri="{BB962C8B-B14F-4D97-AF65-F5344CB8AC3E}">
-        <p14:creationId xmlns:p14="http://schemas.microsoft.com/office/powerpoint/2010/main" val="3389450341"/>
+        <p14:creationId xmlns:p14="http://schemas.microsoft.com/office/powerpoint/2010/main" val="56808591"/>
       </p:ext>
     </p:extLst>
   </p:cSld>
@@ -4195,7 +4350,7 @@
     </p:spTree>
     <p:extLst>
       <p:ext uri="{BB962C8B-B14F-4D97-AF65-F5344CB8AC3E}">
-        <p14:creationId xmlns:p14="http://schemas.microsoft.com/office/powerpoint/2010/main" val="1898385630"/>
+        <p14:creationId xmlns:p14="http://schemas.microsoft.com/office/powerpoint/2010/main" val="3389450341"/>
       </p:ext>
     </p:extLst>
   </p:cSld>
@@ -4249,77 +4404,7 @@
           <a:bodyPr/>
           <a:lstStyle/>
           <a:p>
-            <a:r>
-              <a:rPr lang="en-HK" dirty="0"/>
-              <a:t>The flow starts similarly: the server creates a socket with socket(), binds it to an address with bind(), and begins listening for connections with listen().</a:t>
-            </a:r>
-          </a:p>
-          <a:p>
             <a:endParaRPr lang="en-HK" dirty="0"/>
-          </a:p>
-          <a:p>
-            <a:r>
-              <a:rPr lang="en-HK" dirty="0"/>
-              <a:t>When a client connects, the accept() call returns a new file descriptor. But instead of processing the client request directly, the server creates a </a:t>
-            </a:r>
-            <a:r>
-              <a:rPr lang="en-HK" b="1" dirty="0"/>
-              <a:t>child process</a:t>
-            </a:r>
-            <a:r>
-              <a:rPr lang="en-HK" dirty="0"/>
-              <a:t> or </a:t>
-            </a:r>
-            <a:r>
-              <a:rPr lang="en-HK" b="1" dirty="0"/>
-              <a:t>thread</a:t>
-            </a:r>
-            <a:r>
-              <a:rPr lang="en-HK" dirty="0"/>
-              <a:t> to handle the connection. This can be done using fork() for creating processes or </a:t>
-            </a:r>
-            <a:r>
-              <a:rPr lang="en-HK" dirty="0" err="1"/>
-              <a:t>pthread_create</a:t>
-            </a:r>
-            <a:r>
-              <a:rPr lang="en-HK" dirty="0"/>
-              <a:t>() for threads.</a:t>
-            </a:r>
-          </a:p>
-          <a:p>
-            <a:endParaRPr lang="en-HK" dirty="0"/>
-          </a:p>
-          <a:p>
-            <a:r>
-              <a:rPr lang="en-HK" dirty="0"/>
-              <a:t>The </a:t>
-            </a:r>
-            <a:r>
-              <a:rPr lang="en-HK" b="1" dirty="0"/>
-              <a:t>parent process</a:t>
-            </a:r>
-            <a:r>
-              <a:rPr lang="en-HK" dirty="0"/>
-              <a:t> remains in the listening loop, ready to handle additional client connections.</a:t>
-            </a:r>
-          </a:p>
-          <a:p>
-            <a:endParaRPr lang="en-HK" dirty="0"/>
-          </a:p>
-          <a:p>
-            <a:r>
-              <a:rPr lang="en-HK" dirty="0"/>
-              <a:t>This approach enables the server to handle </a:t>
-            </a:r>
-            <a:r>
-              <a:rPr lang="en-HK" b="1" dirty="0"/>
-              <a:t>multiple clients concurrently</a:t>
-            </a:r>
-            <a:r>
-              <a:rPr lang="en-HK" dirty="0"/>
-              <a:t>, without one client blocking others. It is widely used in real-world servers, and understanding its principles will help you build more scalable applications.</a:t>
-            </a:r>
           </a:p>
         </p:txBody>
       </p:sp>
@@ -4349,7 +4434,7 @@
     </p:spTree>
     <p:extLst>
       <p:ext uri="{BB962C8B-B14F-4D97-AF65-F5344CB8AC3E}">
-        <p14:creationId xmlns:p14="http://schemas.microsoft.com/office/powerpoint/2010/main" val="160211546"/>
+        <p14:creationId xmlns:p14="http://schemas.microsoft.com/office/powerpoint/2010/main" val="1898385630"/>
       </p:ext>
     </p:extLst>
   </p:cSld>
@@ -4508,7 +4593,7 @@
           <a:p>
             <a:fld id="{2425905D-C0C4-D040-B3F5-79CCA23FA4EB}" type="datetimeFigureOut">
               <a:rPr lang="en-US" smtClean="0"/>
-              <a:t>1/14/2025</a:t>
+              <a:t>1/15/2025</a:t>
             </a:fld>
             <a:endParaRPr lang="en-US"/>
           </a:p>
@@ -4708,7 +4793,7 @@
           <a:p>
             <a:fld id="{2425905D-C0C4-D040-B3F5-79CCA23FA4EB}" type="datetimeFigureOut">
               <a:rPr lang="en-US" smtClean="0"/>
-              <a:t>1/14/2025</a:t>
+              <a:t>1/15/2025</a:t>
             </a:fld>
             <a:endParaRPr lang="en-US"/>
           </a:p>
@@ -4918,7 +5003,7 @@
           <a:p>
             <a:fld id="{2425905D-C0C4-D040-B3F5-79CCA23FA4EB}" type="datetimeFigureOut">
               <a:rPr lang="en-US" smtClean="0"/>
-              <a:t>1/14/2025</a:t>
+              <a:t>1/15/2025</a:t>
             </a:fld>
             <a:endParaRPr lang="en-US"/>
           </a:p>
@@ -5118,7 +5203,7 @@
           <a:p>
             <a:fld id="{2425905D-C0C4-D040-B3F5-79CCA23FA4EB}" type="datetimeFigureOut">
               <a:rPr lang="en-US" smtClean="0"/>
-              <a:t>1/14/2025</a:t>
+              <a:t>1/15/2025</a:t>
             </a:fld>
             <a:endParaRPr lang="en-US"/>
           </a:p>
@@ -5394,7 +5479,7 @@
           <a:p>
             <a:fld id="{2425905D-C0C4-D040-B3F5-79CCA23FA4EB}" type="datetimeFigureOut">
               <a:rPr lang="en-US" smtClean="0"/>
-              <a:t>1/14/2025</a:t>
+              <a:t>1/15/2025</a:t>
             </a:fld>
             <a:endParaRPr lang="en-US"/>
           </a:p>
@@ -5662,7 +5747,7 @@
           <a:p>
             <a:fld id="{2425905D-C0C4-D040-B3F5-79CCA23FA4EB}" type="datetimeFigureOut">
               <a:rPr lang="en-US" smtClean="0"/>
-              <a:t>1/14/2025</a:t>
+              <a:t>1/15/2025</a:t>
             </a:fld>
             <a:endParaRPr lang="en-US"/>
           </a:p>
@@ -6077,7 +6162,7 @@
           <a:p>
             <a:fld id="{2425905D-C0C4-D040-B3F5-79CCA23FA4EB}" type="datetimeFigureOut">
               <a:rPr lang="en-US" smtClean="0"/>
-              <a:t>1/14/2025</a:t>
+              <a:t>1/15/2025</a:t>
             </a:fld>
             <a:endParaRPr lang="en-US"/>
           </a:p>
@@ -6219,7 +6304,7 @@
           <a:p>
             <a:fld id="{2425905D-C0C4-D040-B3F5-79CCA23FA4EB}" type="datetimeFigureOut">
               <a:rPr lang="en-US" smtClean="0"/>
-              <a:t>1/14/2025</a:t>
+              <a:t>1/15/2025</a:t>
             </a:fld>
             <a:endParaRPr lang="en-US"/>
           </a:p>
@@ -6332,7 +6417,7 @@
           <a:p>
             <a:fld id="{2425905D-C0C4-D040-B3F5-79CCA23FA4EB}" type="datetimeFigureOut">
               <a:rPr lang="en-US" smtClean="0"/>
-              <a:t>1/14/2025</a:t>
+              <a:t>1/15/2025</a:t>
             </a:fld>
             <a:endParaRPr lang="en-US"/>
           </a:p>
@@ -6645,7 +6730,7 @@
           <a:p>
             <a:fld id="{2425905D-C0C4-D040-B3F5-79CCA23FA4EB}" type="datetimeFigureOut">
               <a:rPr lang="en-US" smtClean="0"/>
-              <a:t>1/14/2025</a:t>
+              <a:t>1/15/2025</a:t>
             </a:fld>
             <a:endParaRPr lang="en-US"/>
           </a:p>
@@ -6934,7 +7019,7 @@
           <a:p>
             <a:fld id="{2425905D-C0C4-D040-B3F5-79CCA23FA4EB}" type="datetimeFigureOut">
               <a:rPr lang="en-US" smtClean="0"/>
-              <a:t>1/14/2025</a:t>
+              <a:t>1/15/2025</a:t>
             </a:fld>
             <a:endParaRPr lang="en-US"/>
           </a:p>
@@ -7177,7 +7262,7 @@
           <a:p>
             <a:fld id="{2425905D-C0C4-D040-B3F5-79CCA23FA4EB}" type="datetimeFigureOut">
               <a:rPr lang="en-US" smtClean="0"/>
-              <a:t>1/14/2025</a:t>
+              <a:t>1/15/2025</a:t>
             </a:fld>
             <a:endParaRPr lang="en-US"/>
           </a:p>
@@ -7793,6 +7878,1095 @@
             <p:ph type="title"/>
           </p:nvPr>
         </p:nvSpPr>
+        <p:spPr/>
+        <p:txBody>
+          <a:bodyPr/>
+          <a:lstStyle/>
+          <a:p>
+            <a:r>
+              <a:rPr lang="en-US" b="1" dirty="0"/>
+              <a:t>Socket Programming: </a:t>
+            </a:r>
+            <a:r>
+              <a:rPr lang="en-US" altLang="zh-TW" b="1" dirty="0"/>
+              <a:t>Server Parallelization</a:t>
+            </a:r>
+            <a:endParaRPr lang="en-US" b="1" dirty="0"/>
+          </a:p>
+        </p:txBody>
+      </p:sp>
+      <p:sp>
+        <p:nvSpPr>
+          <p:cNvPr id="34" name="Text Box 5">
+            <a:extLst>
+              <a:ext uri="{FF2B5EF4-FFF2-40B4-BE49-F238E27FC236}">
+                <a16:creationId xmlns:a16="http://schemas.microsoft.com/office/drawing/2014/main" id="{4AC9FC81-0627-4B71-86BC-7628F1748238}"/>
+              </a:ext>
+            </a:extLst>
+          </p:cNvPr>
+          <p:cNvSpPr txBox="1">
+            <a:spLocks noChangeArrowheads="1"/>
+          </p:cNvSpPr>
+          <p:nvPr/>
+        </p:nvSpPr>
+        <p:spPr bwMode="auto">
+          <a:xfrm>
+            <a:off x="1768475" y="2124075"/>
+            <a:ext cx="1196975" cy="376237"/>
+          </a:xfrm>
+          <a:prstGeom prst="rect">
+            <a:avLst/>
+          </a:prstGeom>
+          <a:solidFill>
+            <a:srgbClr val="FFFF99"/>
+          </a:solidFill>
+          <a:ln w="9525">
+            <a:solidFill>
+              <a:schemeClr val="tx1"/>
+            </a:solidFill>
+            <a:miter lim="800000"/>
+            <a:headEnd/>
+            <a:tailEnd/>
+          </a:ln>
+        </p:spPr>
+        <p:txBody>
+          <a:bodyPr wrap="none">
+            <a:spAutoFit/>
+          </a:bodyPr>
+          <a:lstStyle/>
+          <a:p>
+            <a:r>
+              <a:rPr lang="en-US" altLang="zh-TW" b="1">
+                <a:latin typeface="Consolas" pitchFamily="49" charset="0"/>
+              </a:rPr>
+              <a:t>socket()</a:t>
+            </a:r>
+          </a:p>
+        </p:txBody>
+      </p:sp>
+      <p:sp>
+        <p:nvSpPr>
+          <p:cNvPr id="35" name="Text Box 6">
+            <a:extLst>
+              <a:ext uri="{FF2B5EF4-FFF2-40B4-BE49-F238E27FC236}">
+                <a16:creationId xmlns:a16="http://schemas.microsoft.com/office/drawing/2014/main" id="{BCFE8564-0D96-4CD2-9BC6-499365BA818F}"/>
+              </a:ext>
+            </a:extLst>
+          </p:cNvPr>
+          <p:cNvSpPr txBox="1">
+            <a:spLocks noChangeArrowheads="1"/>
+          </p:cNvSpPr>
+          <p:nvPr/>
+        </p:nvSpPr>
+        <p:spPr bwMode="auto">
+          <a:xfrm>
+            <a:off x="5502275" y="2124075"/>
+            <a:ext cx="1196975" cy="376237"/>
+          </a:xfrm>
+          <a:prstGeom prst="rect">
+            <a:avLst/>
+          </a:prstGeom>
+          <a:solidFill>
+            <a:srgbClr val="FFFF99"/>
+          </a:solidFill>
+          <a:ln w="9525">
+            <a:solidFill>
+              <a:schemeClr val="tx1"/>
+            </a:solidFill>
+            <a:miter lim="800000"/>
+            <a:headEnd/>
+            <a:tailEnd/>
+          </a:ln>
+        </p:spPr>
+        <p:txBody>
+          <a:bodyPr wrap="none">
+            <a:spAutoFit/>
+          </a:bodyPr>
+          <a:lstStyle/>
+          <a:p>
+            <a:r>
+              <a:rPr lang="en-US" altLang="zh-TW" b="1">
+                <a:latin typeface="Consolas" pitchFamily="49" charset="0"/>
+              </a:rPr>
+              <a:t>listen()</a:t>
+            </a:r>
+          </a:p>
+        </p:txBody>
+      </p:sp>
+      <p:sp>
+        <p:nvSpPr>
+          <p:cNvPr id="36" name="Line 7">
+            <a:extLst>
+              <a:ext uri="{FF2B5EF4-FFF2-40B4-BE49-F238E27FC236}">
+                <a16:creationId xmlns:a16="http://schemas.microsoft.com/office/drawing/2014/main" id="{E5E71293-3382-4BC4-9CF6-FD4B0F62240D}"/>
+              </a:ext>
+            </a:extLst>
+          </p:cNvPr>
+          <p:cNvSpPr>
+            <a:spLocks noChangeShapeType="1"/>
+          </p:cNvSpPr>
+          <p:nvPr/>
+        </p:nvSpPr>
+        <p:spPr bwMode="auto">
+          <a:xfrm>
+            <a:off x="3140075" y="2290762"/>
+            <a:ext cx="457200" cy="0"/>
+          </a:xfrm>
+          <a:prstGeom prst="line">
+            <a:avLst/>
+          </a:prstGeom>
+          <a:noFill/>
+          <a:ln w="9525">
+            <a:solidFill>
+              <a:schemeClr val="tx1"/>
+            </a:solidFill>
+            <a:round/>
+            <a:headEnd/>
+            <a:tailEnd type="triangle" w="med" len="med"/>
+          </a:ln>
+        </p:spPr>
+        <p:txBody>
+          <a:bodyPr/>
+          <a:lstStyle/>
+          <a:p>
+            <a:endParaRPr lang="en-US"/>
+          </a:p>
+        </p:txBody>
+      </p:sp>
+      <p:sp>
+        <p:nvSpPr>
+          <p:cNvPr id="49" name="Text Box 8">
+            <a:extLst>
+              <a:ext uri="{FF2B5EF4-FFF2-40B4-BE49-F238E27FC236}">
+                <a16:creationId xmlns:a16="http://schemas.microsoft.com/office/drawing/2014/main" id="{B784DA10-4EAB-4DC3-AEF5-68E32F499B08}"/>
+              </a:ext>
+            </a:extLst>
+          </p:cNvPr>
+          <p:cNvSpPr txBox="1">
+            <a:spLocks noChangeArrowheads="1"/>
+          </p:cNvSpPr>
+          <p:nvPr/>
+        </p:nvSpPr>
+        <p:spPr bwMode="auto">
+          <a:xfrm>
+            <a:off x="3749675" y="2124075"/>
+            <a:ext cx="946150" cy="376237"/>
+          </a:xfrm>
+          <a:prstGeom prst="rect">
+            <a:avLst/>
+          </a:prstGeom>
+          <a:solidFill>
+            <a:srgbClr val="FFFF99"/>
+          </a:solidFill>
+          <a:ln w="9525">
+            <a:solidFill>
+              <a:schemeClr val="tx1"/>
+            </a:solidFill>
+            <a:miter lim="800000"/>
+            <a:headEnd/>
+            <a:tailEnd/>
+          </a:ln>
+        </p:spPr>
+        <p:txBody>
+          <a:bodyPr wrap="none">
+            <a:spAutoFit/>
+          </a:bodyPr>
+          <a:lstStyle/>
+          <a:p>
+            <a:r>
+              <a:rPr lang="en-US" altLang="zh-TW" b="1">
+                <a:latin typeface="Consolas" pitchFamily="49" charset="0"/>
+              </a:rPr>
+              <a:t>bind()</a:t>
+            </a:r>
+          </a:p>
+        </p:txBody>
+      </p:sp>
+      <p:sp>
+        <p:nvSpPr>
+          <p:cNvPr id="66" name="Line 9">
+            <a:extLst>
+              <a:ext uri="{FF2B5EF4-FFF2-40B4-BE49-F238E27FC236}">
+                <a16:creationId xmlns:a16="http://schemas.microsoft.com/office/drawing/2014/main" id="{894643CD-8472-432D-A408-19FCC4A922F6}"/>
+              </a:ext>
+            </a:extLst>
+          </p:cNvPr>
+          <p:cNvSpPr>
+            <a:spLocks noChangeShapeType="1"/>
+          </p:cNvSpPr>
+          <p:nvPr/>
+        </p:nvSpPr>
+        <p:spPr bwMode="auto">
+          <a:xfrm>
+            <a:off x="4892675" y="2290762"/>
+            <a:ext cx="457200" cy="0"/>
+          </a:xfrm>
+          <a:prstGeom prst="line">
+            <a:avLst/>
+          </a:prstGeom>
+          <a:noFill/>
+          <a:ln w="9525">
+            <a:solidFill>
+              <a:schemeClr val="tx1"/>
+            </a:solidFill>
+            <a:round/>
+            <a:headEnd/>
+            <a:tailEnd type="triangle" w="med" len="med"/>
+          </a:ln>
+        </p:spPr>
+        <p:txBody>
+          <a:bodyPr/>
+          <a:lstStyle/>
+          <a:p>
+            <a:endParaRPr lang="en-US"/>
+          </a:p>
+        </p:txBody>
+      </p:sp>
+      <p:sp>
+        <p:nvSpPr>
+          <p:cNvPr id="67" name="Text Box 11">
+            <a:extLst>
+              <a:ext uri="{FF2B5EF4-FFF2-40B4-BE49-F238E27FC236}">
+                <a16:creationId xmlns:a16="http://schemas.microsoft.com/office/drawing/2014/main" id="{1294C81E-8DD3-4B24-B6A2-9E172AC18ACB}"/>
+              </a:ext>
+            </a:extLst>
+          </p:cNvPr>
+          <p:cNvSpPr txBox="1">
+            <a:spLocks noChangeArrowheads="1"/>
+          </p:cNvSpPr>
+          <p:nvPr/>
+        </p:nvSpPr>
+        <p:spPr bwMode="auto">
+          <a:xfrm>
+            <a:off x="1692275" y="2819400"/>
+            <a:ext cx="1276350" cy="527050"/>
+          </a:xfrm>
+          <a:prstGeom prst="rect">
+            <a:avLst/>
+          </a:prstGeom>
+          <a:solidFill>
+            <a:schemeClr val="bg1"/>
+          </a:solidFill>
+          <a:ln w="9525">
+            <a:solidFill>
+              <a:srgbClr val="FF3300"/>
+            </a:solidFill>
+            <a:miter lim="800000"/>
+            <a:headEnd/>
+            <a:tailEnd/>
+          </a:ln>
+        </p:spPr>
+        <p:txBody>
+          <a:bodyPr wrap="none">
+            <a:spAutoFit/>
+          </a:bodyPr>
+          <a:lstStyle/>
+          <a:p>
+            <a:r>
+              <a:rPr lang="en-US" altLang="zh-TW" sz="1400" b="1">
+                <a:latin typeface="Consolas" pitchFamily="49" charset="0"/>
+              </a:rPr>
+              <a:t>Server main</a:t>
+            </a:r>
+          </a:p>
+          <a:p>
+            <a:r>
+              <a:rPr lang="en-US" altLang="zh-TW" sz="1400" b="1">
+                <a:latin typeface="Consolas" pitchFamily="49" charset="0"/>
+              </a:rPr>
+              <a:t>flow chart</a:t>
+            </a:r>
+          </a:p>
+        </p:txBody>
+      </p:sp>
+      <p:sp>
+        <p:nvSpPr>
+          <p:cNvPr id="68" name="Text Box 12">
+            <a:extLst>
+              <a:ext uri="{FF2B5EF4-FFF2-40B4-BE49-F238E27FC236}">
+                <a16:creationId xmlns:a16="http://schemas.microsoft.com/office/drawing/2014/main" id="{A83E6211-FE6F-4BC2-9279-501DB073F7D4}"/>
+              </a:ext>
+            </a:extLst>
+          </p:cNvPr>
+          <p:cNvSpPr txBox="1">
+            <a:spLocks noChangeArrowheads="1"/>
+          </p:cNvSpPr>
+          <p:nvPr/>
+        </p:nvSpPr>
+        <p:spPr bwMode="auto">
+          <a:xfrm>
+            <a:off x="7407275" y="2138362"/>
+            <a:ext cx="1196975" cy="376238"/>
+          </a:xfrm>
+          <a:prstGeom prst="rect">
+            <a:avLst/>
+          </a:prstGeom>
+          <a:solidFill>
+            <a:srgbClr val="FFFF99"/>
+          </a:solidFill>
+          <a:ln w="9525">
+            <a:solidFill>
+              <a:schemeClr val="tx1"/>
+            </a:solidFill>
+            <a:miter lim="800000"/>
+            <a:headEnd/>
+            <a:tailEnd/>
+          </a:ln>
+        </p:spPr>
+        <p:txBody>
+          <a:bodyPr wrap="none">
+            <a:spAutoFit/>
+          </a:bodyPr>
+          <a:lstStyle/>
+          <a:p>
+            <a:r>
+              <a:rPr lang="en-US" altLang="zh-TW" b="1" dirty="0">
+                <a:latin typeface="Consolas" pitchFamily="49" charset="0"/>
+              </a:rPr>
+              <a:t>accept()</a:t>
+            </a:r>
+          </a:p>
+        </p:txBody>
+      </p:sp>
+      <p:sp>
+        <p:nvSpPr>
+          <p:cNvPr id="69" name="Text Box 13">
+            <a:extLst>
+              <a:ext uri="{FF2B5EF4-FFF2-40B4-BE49-F238E27FC236}">
+                <a16:creationId xmlns:a16="http://schemas.microsoft.com/office/drawing/2014/main" id="{0589CC9B-2FAC-40C5-AE4B-E2A07D041A21}"/>
+              </a:ext>
+            </a:extLst>
+          </p:cNvPr>
+          <p:cNvSpPr txBox="1">
+            <a:spLocks noChangeArrowheads="1"/>
+          </p:cNvSpPr>
+          <p:nvPr/>
+        </p:nvSpPr>
+        <p:spPr bwMode="auto">
+          <a:xfrm>
+            <a:off x="7426325" y="4687887"/>
+            <a:ext cx="1657350" cy="650875"/>
+          </a:xfrm>
+          <a:prstGeom prst="rect">
+            <a:avLst/>
+          </a:prstGeom>
+          <a:solidFill>
+            <a:srgbClr val="FFCCFF"/>
+          </a:solidFill>
+          <a:ln w="9525">
+            <a:solidFill>
+              <a:schemeClr val="tx1"/>
+            </a:solidFill>
+            <a:miter lim="800000"/>
+            <a:headEnd/>
+            <a:tailEnd/>
+          </a:ln>
+        </p:spPr>
+        <p:txBody>
+          <a:bodyPr>
+            <a:spAutoFit/>
+          </a:bodyPr>
+          <a:lstStyle/>
+          <a:p>
+            <a:r>
+              <a:rPr lang="en-US" altLang="zh-TW" b="1">
+                <a:latin typeface="Consolas" pitchFamily="49" charset="0"/>
+              </a:rPr>
+              <a:t>Application-layer code</a:t>
+            </a:r>
+          </a:p>
+        </p:txBody>
+      </p:sp>
+      <p:sp>
+        <p:nvSpPr>
+          <p:cNvPr id="70" name="Line 14">
+            <a:extLst>
+              <a:ext uri="{FF2B5EF4-FFF2-40B4-BE49-F238E27FC236}">
+                <a16:creationId xmlns:a16="http://schemas.microsoft.com/office/drawing/2014/main" id="{855F7553-5C12-4AF6-93CE-579CDDCE9A90}"/>
+              </a:ext>
+            </a:extLst>
+          </p:cNvPr>
+          <p:cNvSpPr>
+            <a:spLocks noChangeShapeType="1"/>
+          </p:cNvSpPr>
+          <p:nvPr/>
+        </p:nvSpPr>
+        <p:spPr bwMode="auto">
+          <a:xfrm>
+            <a:off x="6797675" y="2290762"/>
+            <a:ext cx="457200" cy="0"/>
+          </a:xfrm>
+          <a:prstGeom prst="line">
+            <a:avLst/>
+          </a:prstGeom>
+          <a:noFill/>
+          <a:ln w="9525">
+            <a:solidFill>
+              <a:schemeClr val="tx1"/>
+            </a:solidFill>
+            <a:round/>
+            <a:headEnd/>
+            <a:tailEnd type="triangle" w="med" len="med"/>
+          </a:ln>
+        </p:spPr>
+        <p:txBody>
+          <a:bodyPr/>
+          <a:lstStyle/>
+          <a:p>
+            <a:endParaRPr lang="en-US"/>
+          </a:p>
+        </p:txBody>
+      </p:sp>
+      <p:sp>
+        <p:nvSpPr>
+          <p:cNvPr id="71" name="Text Box 18">
+            <a:extLst>
+              <a:ext uri="{FF2B5EF4-FFF2-40B4-BE49-F238E27FC236}">
+                <a16:creationId xmlns:a16="http://schemas.microsoft.com/office/drawing/2014/main" id="{01751F0C-58E5-4F6C-BAFA-C8D6CFAC3FBE}"/>
+              </a:ext>
+            </a:extLst>
+          </p:cNvPr>
+          <p:cNvSpPr txBox="1">
+            <a:spLocks noChangeArrowheads="1"/>
+          </p:cNvSpPr>
+          <p:nvPr/>
+        </p:nvSpPr>
+        <p:spPr bwMode="auto">
+          <a:xfrm>
+            <a:off x="4587875" y="3362325"/>
+            <a:ext cx="3917950" cy="376237"/>
+          </a:xfrm>
+          <a:prstGeom prst="rect">
+            <a:avLst/>
+          </a:prstGeom>
+          <a:solidFill>
+            <a:srgbClr val="FFFF99"/>
+          </a:solidFill>
+          <a:ln w="9525">
+            <a:solidFill>
+              <a:schemeClr val="tx1"/>
+            </a:solidFill>
+            <a:miter lim="800000"/>
+            <a:headEnd/>
+            <a:tailEnd/>
+          </a:ln>
+        </p:spPr>
+        <p:txBody>
+          <a:bodyPr>
+            <a:spAutoFit/>
+          </a:bodyPr>
+          <a:lstStyle/>
+          <a:p>
+            <a:pPr algn="ctr"/>
+            <a:r>
+              <a:rPr lang="en-US" altLang="zh-TW" b="1" dirty="0">
+                <a:latin typeface="Consolas" pitchFamily="49" charset="0"/>
+              </a:rPr>
+              <a:t>fork() or </a:t>
+            </a:r>
+            <a:r>
+              <a:rPr lang="en-US" altLang="zh-TW" b="1" dirty="0" err="1">
+                <a:latin typeface="Consolas" pitchFamily="49" charset="0"/>
+              </a:rPr>
+              <a:t>pthread_create</a:t>
+            </a:r>
+            <a:r>
+              <a:rPr lang="en-US" altLang="zh-TW" b="1" dirty="0">
+                <a:latin typeface="Consolas" pitchFamily="49" charset="0"/>
+              </a:rPr>
+              <a:t>()</a:t>
+            </a:r>
+          </a:p>
+        </p:txBody>
+      </p:sp>
+      <p:sp>
+        <p:nvSpPr>
+          <p:cNvPr id="72" name="Line 21">
+            <a:extLst>
+              <a:ext uri="{FF2B5EF4-FFF2-40B4-BE49-F238E27FC236}">
+                <a16:creationId xmlns:a16="http://schemas.microsoft.com/office/drawing/2014/main" id="{5048673B-FD5E-4AC6-BDFC-7342D119D6F6}"/>
+              </a:ext>
+            </a:extLst>
+          </p:cNvPr>
+          <p:cNvSpPr>
+            <a:spLocks noChangeShapeType="1"/>
+          </p:cNvSpPr>
+          <p:nvPr/>
+        </p:nvSpPr>
+        <p:spPr bwMode="auto">
+          <a:xfrm flipH="1">
+            <a:off x="5749925" y="5033962"/>
+            <a:ext cx="1600200" cy="0"/>
+          </a:xfrm>
+          <a:prstGeom prst="line">
+            <a:avLst/>
+          </a:prstGeom>
+          <a:noFill/>
+          <a:ln w="9525">
+            <a:solidFill>
+              <a:schemeClr val="tx1"/>
+            </a:solidFill>
+            <a:round/>
+            <a:headEnd/>
+            <a:tailEnd type="triangle" w="med" len="med"/>
+          </a:ln>
+        </p:spPr>
+        <p:txBody>
+          <a:bodyPr anchor="ctr"/>
+          <a:lstStyle/>
+          <a:p>
+            <a:endParaRPr lang="en-US"/>
+          </a:p>
+        </p:txBody>
+      </p:sp>
+      <p:sp>
+        <p:nvSpPr>
+          <p:cNvPr id="73" name="Text Box 16">
+            <a:extLst>
+              <a:ext uri="{FF2B5EF4-FFF2-40B4-BE49-F238E27FC236}">
+                <a16:creationId xmlns:a16="http://schemas.microsoft.com/office/drawing/2014/main" id="{A7A49A50-3CA3-4FA5-B08A-C3380D8899DE}"/>
+              </a:ext>
+            </a:extLst>
+          </p:cNvPr>
+          <p:cNvSpPr txBox="1">
+            <a:spLocks noChangeArrowheads="1"/>
+          </p:cNvSpPr>
+          <p:nvPr/>
+        </p:nvSpPr>
+        <p:spPr bwMode="auto">
+          <a:xfrm>
+            <a:off x="6030913" y="4795837"/>
+            <a:ext cx="1090612" cy="466725"/>
+          </a:xfrm>
+          <a:prstGeom prst="rect">
+            <a:avLst/>
+          </a:prstGeom>
+          <a:solidFill>
+            <a:schemeClr val="bg1"/>
+          </a:solidFill>
+          <a:ln w="9525">
+            <a:solidFill>
+              <a:schemeClr val="tx1"/>
+            </a:solidFill>
+            <a:miter lim="800000"/>
+            <a:headEnd/>
+            <a:tailEnd/>
+          </a:ln>
+        </p:spPr>
+        <p:txBody>
+          <a:bodyPr>
+            <a:spAutoFit/>
+          </a:bodyPr>
+          <a:lstStyle/>
+          <a:p>
+            <a:r>
+              <a:rPr lang="en-US" altLang="zh-TW" sz="1200" b="1">
+                <a:latin typeface="Consolas" pitchFamily="49" charset="0"/>
+              </a:rPr>
+              <a:t>connection is closed.</a:t>
+            </a:r>
+          </a:p>
+        </p:txBody>
+      </p:sp>
+      <p:sp>
+        <p:nvSpPr>
+          <p:cNvPr id="74" name="Text Box 23">
+            <a:extLst>
+              <a:ext uri="{FF2B5EF4-FFF2-40B4-BE49-F238E27FC236}">
+                <a16:creationId xmlns:a16="http://schemas.microsoft.com/office/drawing/2014/main" id="{D77CC3D0-5ADF-4F8F-A4FF-172DBD3C2AD8}"/>
+              </a:ext>
+            </a:extLst>
+          </p:cNvPr>
+          <p:cNvSpPr txBox="1">
+            <a:spLocks noChangeArrowheads="1"/>
+          </p:cNvSpPr>
+          <p:nvPr/>
+        </p:nvSpPr>
+        <p:spPr bwMode="auto">
+          <a:xfrm>
+            <a:off x="3692525" y="4652962"/>
+            <a:ext cx="1949450" cy="650875"/>
+          </a:xfrm>
+          <a:prstGeom prst="rect">
+            <a:avLst/>
+          </a:prstGeom>
+          <a:solidFill>
+            <a:srgbClr val="FFFF99"/>
+          </a:solidFill>
+          <a:ln w="9525">
+            <a:solidFill>
+              <a:schemeClr val="tx1"/>
+            </a:solidFill>
+            <a:miter lim="800000"/>
+            <a:headEnd/>
+            <a:tailEnd/>
+          </a:ln>
+        </p:spPr>
+        <p:txBody>
+          <a:bodyPr wrap="none">
+            <a:spAutoFit/>
+          </a:bodyPr>
+          <a:lstStyle/>
+          <a:p>
+            <a:r>
+              <a:rPr lang="en-US" altLang="zh-TW" b="1">
+                <a:latin typeface="Consolas" pitchFamily="49" charset="0"/>
+              </a:rPr>
+              <a:t>exit() or</a:t>
+            </a:r>
+          </a:p>
+          <a:p>
+            <a:r>
+              <a:rPr lang="en-US" altLang="zh-TW" b="1">
+                <a:latin typeface="Consolas" pitchFamily="49" charset="0"/>
+              </a:rPr>
+              <a:t>pthread_exit()</a:t>
+            </a:r>
+          </a:p>
+        </p:txBody>
+      </p:sp>
+      <p:sp>
+        <p:nvSpPr>
+          <p:cNvPr id="75" name="Line 24">
+            <a:extLst>
+              <a:ext uri="{FF2B5EF4-FFF2-40B4-BE49-F238E27FC236}">
+                <a16:creationId xmlns:a16="http://schemas.microsoft.com/office/drawing/2014/main" id="{5E6552E1-DE21-473E-B000-FE76B12F5935}"/>
+              </a:ext>
+            </a:extLst>
+          </p:cNvPr>
+          <p:cNvSpPr>
+            <a:spLocks noChangeShapeType="1"/>
+          </p:cNvSpPr>
+          <p:nvPr/>
+        </p:nvSpPr>
+        <p:spPr bwMode="auto">
+          <a:xfrm>
+            <a:off x="8016875" y="3814762"/>
+            <a:ext cx="0" cy="838200"/>
+          </a:xfrm>
+          <a:prstGeom prst="line">
+            <a:avLst/>
+          </a:prstGeom>
+          <a:noFill/>
+          <a:ln w="9525">
+            <a:solidFill>
+              <a:schemeClr val="tx1"/>
+            </a:solidFill>
+            <a:round/>
+            <a:headEnd/>
+            <a:tailEnd type="triangle" w="med" len="med"/>
+          </a:ln>
+        </p:spPr>
+        <p:txBody>
+          <a:bodyPr anchor="ctr"/>
+          <a:lstStyle/>
+          <a:p>
+            <a:endParaRPr lang="en-US"/>
+          </a:p>
+        </p:txBody>
+      </p:sp>
+      <p:sp>
+        <p:nvSpPr>
+          <p:cNvPr id="76" name="Text Box 25">
+            <a:extLst>
+              <a:ext uri="{FF2B5EF4-FFF2-40B4-BE49-F238E27FC236}">
+                <a16:creationId xmlns:a16="http://schemas.microsoft.com/office/drawing/2014/main" id="{32F94719-8F28-4DFF-A14E-982864C855B1}"/>
+              </a:ext>
+            </a:extLst>
+          </p:cNvPr>
+          <p:cNvSpPr txBox="1">
+            <a:spLocks noChangeArrowheads="1"/>
+          </p:cNvSpPr>
+          <p:nvPr/>
+        </p:nvSpPr>
+        <p:spPr bwMode="auto">
+          <a:xfrm>
+            <a:off x="7635875" y="4043362"/>
+            <a:ext cx="685800" cy="284163"/>
+          </a:xfrm>
+          <a:prstGeom prst="rect">
+            <a:avLst/>
+          </a:prstGeom>
+          <a:solidFill>
+            <a:schemeClr val="bg1"/>
+          </a:solidFill>
+          <a:ln w="9525">
+            <a:solidFill>
+              <a:schemeClr val="tx1"/>
+            </a:solidFill>
+            <a:miter lim="800000"/>
+            <a:headEnd/>
+            <a:tailEnd/>
+          </a:ln>
+        </p:spPr>
+        <p:txBody>
+          <a:bodyPr>
+            <a:spAutoFit/>
+          </a:bodyPr>
+          <a:lstStyle/>
+          <a:p>
+            <a:r>
+              <a:rPr lang="en-US" altLang="zh-TW" sz="1200" b="1">
+                <a:latin typeface="Consolas" pitchFamily="49" charset="0"/>
+              </a:rPr>
+              <a:t>child</a:t>
+            </a:r>
+          </a:p>
+        </p:txBody>
+      </p:sp>
+      <p:sp>
+        <p:nvSpPr>
+          <p:cNvPr id="77" name="Line 26">
+            <a:extLst>
+              <a:ext uri="{FF2B5EF4-FFF2-40B4-BE49-F238E27FC236}">
+                <a16:creationId xmlns:a16="http://schemas.microsoft.com/office/drawing/2014/main" id="{CE17BBD3-09CA-4E6B-8347-B3C285BA6A10}"/>
+              </a:ext>
+            </a:extLst>
+          </p:cNvPr>
+          <p:cNvSpPr>
+            <a:spLocks noChangeShapeType="1"/>
+          </p:cNvSpPr>
+          <p:nvPr/>
+        </p:nvSpPr>
+        <p:spPr bwMode="auto">
+          <a:xfrm>
+            <a:off x="8016875" y="2595562"/>
+            <a:ext cx="0" cy="762000"/>
+          </a:xfrm>
+          <a:prstGeom prst="line">
+            <a:avLst/>
+          </a:prstGeom>
+          <a:noFill/>
+          <a:ln w="9525">
+            <a:solidFill>
+              <a:schemeClr val="tx1"/>
+            </a:solidFill>
+            <a:round/>
+            <a:headEnd/>
+            <a:tailEnd type="triangle" w="med" len="med"/>
+          </a:ln>
+        </p:spPr>
+        <p:txBody>
+          <a:bodyPr anchor="ctr"/>
+          <a:lstStyle/>
+          <a:p>
+            <a:endParaRPr lang="en-US"/>
+          </a:p>
+        </p:txBody>
+      </p:sp>
+      <p:sp>
+        <p:nvSpPr>
+          <p:cNvPr id="78" name="Line 27">
+            <a:extLst>
+              <a:ext uri="{FF2B5EF4-FFF2-40B4-BE49-F238E27FC236}">
+                <a16:creationId xmlns:a16="http://schemas.microsoft.com/office/drawing/2014/main" id="{9FBC52DC-90B9-4B97-9011-B26D7EAD8B2E}"/>
+              </a:ext>
+            </a:extLst>
+          </p:cNvPr>
+          <p:cNvSpPr>
+            <a:spLocks noChangeShapeType="1"/>
+          </p:cNvSpPr>
+          <p:nvPr/>
+        </p:nvSpPr>
+        <p:spPr bwMode="auto">
+          <a:xfrm flipH="1">
+            <a:off x="8626475" y="2290762"/>
+            <a:ext cx="381000" cy="0"/>
+          </a:xfrm>
+          <a:prstGeom prst="line">
+            <a:avLst/>
+          </a:prstGeom>
+          <a:noFill/>
+          <a:ln w="9525">
+            <a:solidFill>
+              <a:schemeClr val="tx1"/>
+            </a:solidFill>
+            <a:round/>
+            <a:headEnd/>
+            <a:tailEnd type="triangle" w="med" len="med"/>
+          </a:ln>
+        </p:spPr>
+        <p:txBody>
+          <a:bodyPr anchor="ctr"/>
+          <a:lstStyle/>
+          <a:p>
+            <a:endParaRPr lang="en-US"/>
+          </a:p>
+        </p:txBody>
+      </p:sp>
+      <p:sp>
+        <p:nvSpPr>
+          <p:cNvPr id="79" name="Line 28">
+            <a:extLst>
+              <a:ext uri="{FF2B5EF4-FFF2-40B4-BE49-F238E27FC236}">
+                <a16:creationId xmlns:a16="http://schemas.microsoft.com/office/drawing/2014/main" id="{85CC7AD9-D641-426B-A611-843784356599}"/>
+              </a:ext>
+            </a:extLst>
+          </p:cNvPr>
+          <p:cNvSpPr>
+            <a:spLocks noChangeShapeType="1"/>
+          </p:cNvSpPr>
+          <p:nvPr/>
+        </p:nvSpPr>
+        <p:spPr bwMode="auto">
+          <a:xfrm>
+            <a:off x="9007475" y="2290762"/>
+            <a:ext cx="0" cy="1219200"/>
+          </a:xfrm>
+          <a:prstGeom prst="line">
+            <a:avLst/>
+          </a:prstGeom>
+          <a:noFill/>
+          <a:ln w="9525">
+            <a:solidFill>
+              <a:schemeClr val="tx1"/>
+            </a:solidFill>
+            <a:round/>
+            <a:headEnd/>
+            <a:tailEnd/>
+          </a:ln>
+        </p:spPr>
+        <p:txBody>
+          <a:bodyPr anchor="ctr"/>
+          <a:lstStyle/>
+          <a:p>
+            <a:endParaRPr lang="en-US"/>
+          </a:p>
+        </p:txBody>
+      </p:sp>
+      <p:sp>
+        <p:nvSpPr>
+          <p:cNvPr id="80" name="Line 29">
+            <a:extLst>
+              <a:ext uri="{FF2B5EF4-FFF2-40B4-BE49-F238E27FC236}">
+                <a16:creationId xmlns:a16="http://schemas.microsoft.com/office/drawing/2014/main" id="{08C4E711-3A7B-450E-BA21-AFE77C36DF71}"/>
+              </a:ext>
+            </a:extLst>
+          </p:cNvPr>
+          <p:cNvSpPr>
+            <a:spLocks noChangeShapeType="1"/>
+          </p:cNvSpPr>
+          <p:nvPr/>
+        </p:nvSpPr>
+        <p:spPr bwMode="auto">
+          <a:xfrm>
+            <a:off x="8550275" y="3509962"/>
+            <a:ext cx="457200" cy="0"/>
+          </a:xfrm>
+          <a:prstGeom prst="line">
+            <a:avLst/>
+          </a:prstGeom>
+          <a:noFill/>
+          <a:ln w="9525">
+            <a:solidFill>
+              <a:schemeClr val="tx1"/>
+            </a:solidFill>
+            <a:round/>
+            <a:headEnd/>
+            <a:tailEnd/>
+          </a:ln>
+        </p:spPr>
+        <p:txBody>
+          <a:bodyPr anchor="ctr"/>
+          <a:lstStyle/>
+          <a:p>
+            <a:endParaRPr lang="en-US"/>
+          </a:p>
+        </p:txBody>
+      </p:sp>
+      <p:sp>
+        <p:nvSpPr>
+          <p:cNvPr id="81" name="Text Box 30">
+            <a:extLst>
+              <a:ext uri="{FF2B5EF4-FFF2-40B4-BE49-F238E27FC236}">
+                <a16:creationId xmlns:a16="http://schemas.microsoft.com/office/drawing/2014/main" id="{2F07CAF5-4724-46FC-BA4A-6DD2C34C7212}"/>
+              </a:ext>
+            </a:extLst>
+          </p:cNvPr>
+          <p:cNvSpPr txBox="1">
+            <a:spLocks noChangeArrowheads="1"/>
+          </p:cNvSpPr>
+          <p:nvPr/>
+        </p:nvSpPr>
+        <p:spPr bwMode="auto">
+          <a:xfrm>
+            <a:off x="8550275" y="2595562"/>
+            <a:ext cx="914400" cy="284163"/>
+          </a:xfrm>
+          <a:prstGeom prst="rect">
+            <a:avLst/>
+          </a:prstGeom>
+          <a:solidFill>
+            <a:schemeClr val="bg1"/>
+          </a:solidFill>
+          <a:ln w="9525">
+            <a:solidFill>
+              <a:schemeClr val="tx1"/>
+            </a:solidFill>
+            <a:miter lim="800000"/>
+            <a:headEnd/>
+            <a:tailEnd/>
+          </a:ln>
+        </p:spPr>
+        <p:txBody>
+          <a:bodyPr>
+            <a:spAutoFit/>
+          </a:bodyPr>
+          <a:lstStyle/>
+          <a:p>
+            <a:r>
+              <a:rPr lang="en-US" altLang="zh-TW" sz="1200" b="1">
+                <a:latin typeface="Consolas" pitchFamily="49" charset="0"/>
+              </a:rPr>
+              <a:t>parent</a:t>
+            </a:r>
+          </a:p>
+        </p:txBody>
+      </p:sp>
+      <p:sp>
+        <p:nvSpPr>
+          <p:cNvPr id="82" name="Text Box 31">
+            <a:extLst>
+              <a:ext uri="{FF2B5EF4-FFF2-40B4-BE49-F238E27FC236}">
+                <a16:creationId xmlns:a16="http://schemas.microsoft.com/office/drawing/2014/main" id="{4F08A940-1BE8-4B41-A27D-F3960F52DAAD}"/>
+              </a:ext>
+            </a:extLst>
+          </p:cNvPr>
+          <p:cNvSpPr txBox="1">
+            <a:spLocks noChangeArrowheads="1"/>
+          </p:cNvSpPr>
+          <p:nvPr/>
+        </p:nvSpPr>
+        <p:spPr bwMode="auto">
+          <a:xfrm>
+            <a:off x="1692275" y="4576762"/>
+            <a:ext cx="1600200" cy="739775"/>
+          </a:xfrm>
+          <a:prstGeom prst="rect">
+            <a:avLst/>
+          </a:prstGeom>
+          <a:solidFill>
+            <a:schemeClr val="bg1"/>
+          </a:solidFill>
+          <a:ln w="9525">
+            <a:solidFill>
+              <a:srgbClr val="FF3300"/>
+            </a:solidFill>
+            <a:miter lim="800000"/>
+            <a:headEnd/>
+            <a:tailEnd/>
+          </a:ln>
+        </p:spPr>
+        <p:txBody>
+          <a:bodyPr>
+            <a:spAutoFit/>
+          </a:bodyPr>
+          <a:lstStyle/>
+          <a:p>
+            <a:r>
+              <a:rPr lang="en-US" altLang="zh-TW" sz="1400" b="1">
+                <a:latin typeface="Consolas" pitchFamily="49" charset="0"/>
+              </a:rPr>
+              <a:t>Server client-handler flow chart</a:t>
+            </a:r>
+          </a:p>
+        </p:txBody>
+      </p:sp>
+      <p:sp>
+        <p:nvSpPr>
+          <p:cNvPr id="83" name="Text Box 33">
+            <a:extLst>
+              <a:ext uri="{FF2B5EF4-FFF2-40B4-BE49-F238E27FC236}">
+                <a16:creationId xmlns:a16="http://schemas.microsoft.com/office/drawing/2014/main" id="{028C2B4C-9E72-4C06-99C3-6500F58E37B6}"/>
+              </a:ext>
+            </a:extLst>
+          </p:cNvPr>
+          <p:cNvSpPr txBox="1">
+            <a:spLocks noChangeArrowheads="1"/>
+          </p:cNvSpPr>
+          <p:nvPr/>
+        </p:nvSpPr>
+        <p:spPr bwMode="auto">
+          <a:xfrm>
+            <a:off x="6492875" y="2671762"/>
+            <a:ext cx="1395413" cy="466725"/>
+          </a:xfrm>
+          <a:prstGeom prst="rect">
+            <a:avLst/>
+          </a:prstGeom>
+          <a:solidFill>
+            <a:schemeClr val="bg1"/>
+          </a:solidFill>
+          <a:ln w="9525">
+            <a:solidFill>
+              <a:schemeClr val="tx1"/>
+            </a:solidFill>
+            <a:miter lim="800000"/>
+            <a:headEnd/>
+            <a:tailEnd/>
+          </a:ln>
+        </p:spPr>
+        <p:txBody>
+          <a:bodyPr>
+            <a:spAutoFit/>
+          </a:bodyPr>
+          <a:lstStyle/>
+          <a:p>
+            <a:r>
+              <a:rPr lang="en-US" altLang="zh-TW" sz="1200" b="1">
+                <a:latin typeface="Consolas" pitchFamily="49" charset="0"/>
+              </a:rPr>
+              <a:t>New connection arrives</a:t>
+            </a:r>
+          </a:p>
+        </p:txBody>
+      </p:sp>
+    </p:spTree>
+    <p:extLst>
+      <p:ext uri="{BB962C8B-B14F-4D97-AF65-F5344CB8AC3E}">
+        <p14:creationId xmlns:p14="http://schemas.microsoft.com/office/powerpoint/2010/main" val="1729902151"/>
+      </p:ext>
+    </p:extLst>
+  </p:cSld>
+  <p:clrMapOvr>
+    <a:masterClrMapping/>
+  </p:clrMapOvr>
+</p:sld>
+</file>
+
+<file path=ppt/slides/slide11.xml><?xml version="1.0" encoding="utf-8"?>
+<p:sld xmlns:a="http://schemas.openxmlformats.org/drawingml/2006/main" xmlns:r="http://schemas.openxmlformats.org/officeDocument/2006/relationships" xmlns:p="http://schemas.openxmlformats.org/presentationml/2006/main">
+  <p:cSld>
+    <p:spTree>
+      <p:nvGrpSpPr>
+        <p:cNvPr id="1" name=""/>
+        <p:cNvGrpSpPr/>
+        <p:nvPr/>
+      </p:nvGrpSpPr>
+      <p:grpSpPr>
+        <a:xfrm>
+          <a:off x="0" y="0"/>
+          <a:ext cx="0" cy="0"/>
+          <a:chOff x="0" y="0"/>
+          <a:chExt cx="0" cy="0"/>
+        </a:xfrm>
+      </p:grpSpPr>
+      <p:sp>
+        <p:nvSpPr>
+          <p:cNvPr id="2" name="Title 1">
+            <a:extLst>
+              <a:ext uri="{FF2B5EF4-FFF2-40B4-BE49-F238E27FC236}">
+                <a16:creationId xmlns:a16="http://schemas.microsoft.com/office/drawing/2014/main" id="{45C79BA1-37A3-5741-B0A1-E64646E4283C}"/>
+              </a:ext>
+            </a:extLst>
+          </p:cNvPr>
+          <p:cNvSpPr>
+            <a:spLocks noGrp="1"/>
+          </p:cNvSpPr>
+          <p:nvPr>
+            <p:ph type="title"/>
+          </p:nvPr>
+        </p:nvSpPr>
         <p:spPr>
           <a:xfrm>
             <a:off x="724736" y="53405"/>
@@ -8188,7 +9362,7 @@
 </p:sld>
 </file>
 
-<file path=ppt/slides/slide11.xml><?xml version="1.0" encoding="utf-8"?>
+<file path=ppt/slides/slide12.xml><?xml version="1.0" encoding="utf-8"?>
 <p:sld xmlns:a="http://schemas.openxmlformats.org/drawingml/2006/main" xmlns:r="http://schemas.openxmlformats.org/officeDocument/2006/relationships" xmlns:p="http://schemas.openxmlformats.org/presentationml/2006/main">
   <p:cSld>
     <p:spTree>
@@ -8818,7 +9992,7 @@
 </p:sld>
 </file>
 
-<file path=ppt/slides/slide12.xml><?xml version="1.0" encoding="utf-8"?>
+<file path=ppt/slides/slide13.xml><?xml version="1.0" encoding="utf-8"?>
 <p:sld xmlns:a="http://schemas.openxmlformats.org/drawingml/2006/main" xmlns:r="http://schemas.openxmlformats.org/officeDocument/2006/relationships" xmlns:p="http://schemas.openxmlformats.org/presentationml/2006/main">
   <p:cSld>
     <p:spTree>
@@ -8994,103 +10168,6 @@
 </p:sld>
 </file>
 
-<file path=ppt/slides/slide13.xml><?xml version="1.0" encoding="utf-8"?>
-<p:sld xmlns:a="http://schemas.openxmlformats.org/drawingml/2006/main" xmlns:r="http://schemas.openxmlformats.org/officeDocument/2006/relationships" xmlns:p="http://schemas.openxmlformats.org/presentationml/2006/main">
-  <p:cSld>
-    <p:spTree>
-      <p:nvGrpSpPr>
-        <p:cNvPr id="1" name=""/>
-        <p:cNvGrpSpPr/>
-        <p:nvPr/>
-      </p:nvGrpSpPr>
-      <p:grpSpPr>
-        <a:xfrm>
-          <a:off x="0" y="0"/>
-          <a:ext cx="0" cy="0"/>
-          <a:chOff x="0" y="0"/>
-          <a:chExt cx="0" cy="0"/>
-        </a:xfrm>
-      </p:grpSpPr>
-      <p:sp>
-        <p:nvSpPr>
-          <p:cNvPr id="2" name="Title 1">
-            <a:extLst>
-              <a:ext uri="{FF2B5EF4-FFF2-40B4-BE49-F238E27FC236}">
-                <a16:creationId xmlns:a16="http://schemas.microsoft.com/office/drawing/2014/main" id="{45C79BA1-37A3-5741-B0A1-E64646E4283C}"/>
-              </a:ext>
-            </a:extLst>
-          </p:cNvPr>
-          <p:cNvSpPr>
-            <a:spLocks noGrp="1"/>
-          </p:cNvSpPr>
-          <p:nvPr>
-            <p:ph type="title"/>
-          </p:nvPr>
-        </p:nvSpPr>
-        <p:spPr/>
-        <p:txBody>
-          <a:bodyPr/>
-          <a:lstStyle/>
-          <a:p>
-            <a:r>
-              <a:rPr lang="en-US" b="1" dirty="0"/>
-              <a:t>Performance Metrics - Throughput</a:t>
-            </a:r>
-          </a:p>
-        </p:txBody>
-      </p:sp>
-      <p:sp>
-        <p:nvSpPr>
-          <p:cNvPr id="3" name="Content Placeholder 2">
-            <a:extLst>
-              <a:ext uri="{FF2B5EF4-FFF2-40B4-BE49-F238E27FC236}">
-                <a16:creationId xmlns:a16="http://schemas.microsoft.com/office/drawing/2014/main" id="{8F20472D-613F-3748-9CBD-88055CDB4B08}"/>
-              </a:ext>
-            </a:extLst>
-          </p:cNvPr>
-          <p:cNvSpPr>
-            <a:spLocks noGrp="1"/>
-          </p:cNvSpPr>
-          <p:nvPr>
-            <p:ph idx="1"/>
-          </p:nvPr>
-        </p:nvSpPr>
-        <p:spPr/>
-        <p:txBody>
-          <a:bodyPr>
-            <a:normAutofit/>
-          </a:bodyPr>
-          <a:lstStyle/>
-          <a:p>
-            <a:r>
-              <a:rPr lang="en-US" sz="3200" dirty="0"/>
-              <a:t>Throughput = Data transferred / Transfer time</a:t>
-            </a:r>
-          </a:p>
-          <a:p>
-            <a:endParaRPr lang="en-US" sz="3200" dirty="0"/>
-          </a:p>
-          <a:p>
-            <a:r>
-              <a:rPr lang="en-US" sz="3200" dirty="0"/>
-              <a:t>Transfer time = transmission delay + propagation delay</a:t>
-            </a:r>
-          </a:p>
-        </p:txBody>
-      </p:sp>
-    </p:spTree>
-    <p:extLst>
-      <p:ext uri="{BB962C8B-B14F-4D97-AF65-F5344CB8AC3E}">
-        <p14:creationId xmlns:p14="http://schemas.microsoft.com/office/powerpoint/2010/main" val="1460982116"/>
-      </p:ext>
-    </p:extLst>
-  </p:cSld>
-  <p:clrMapOvr>
-    <a:masterClrMapping/>
-  </p:clrMapOvr>
-</p:sld>
-</file>
-
 <file path=ppt/slides/slide14.xml><?xml version="1.0" encoding="utf-8"?>
 <p:sld xmlns:a="http://schemas.openxmlformats.org/drawingml/2006/main" xmlns:r="http://schemas.openxmlformats.org/officeDocument/2006/relationships" xmlns:p="http://schemas.openxmlformats.org/presentationml/2006/main">
   <p:cSld>
@@ -9130,16 +10207,8 @@
           <a:lstStyle/>
           <a:p>
             <a:r>
-              <a:rPr lang="en-US" altLang="zh-CN" b="1" dirty="0"/>
-              <a:t>Exercise</a:t>
-            </a:r>
-            <a:r>
-              <a:rPr lang="zh-CN" altLang="en-US" b="1" dirty="0"/>
-              <a:t> </a:t>
-            </a:r>
-            <a:r>
               <a:rPr lang="en-US" b="1" dirty="0"/>
-              <a:t>- Q1</a:t>
+              <a:t>Performance Metrics - Throughput</a:t>
             </a:r>
           </a:p>
         </p:txBody>
@@ -9160,105 +10229,25 @@
             <p:ph idx="1"/>
           </p:nvPr>
         </p:nvSpPr>
-        <p:spPr>
-          <a:xfrm>
-            <a:off x="838200" y="1825625"/>
-            <a:ext cx="10515600" cy="2705735"/>
-          </a:xfrm>
-        </p:spPr>
+        <p:spPr/>
         <p:txBody>
           <a:bodyPr>
             <a:normAutofit/>
           </a:bodyPr>
           <a:lstStyle/>
           <a:p>
-            <a:pPr marL="0" indent="0">
-              <a:buNone/>
-            </a:pPr>
-            <a:r>
-              <a:rPr lang="en-US" sz="2400" dirty="0"/>
-              <a:t>Suppose a 100-Mbps point-to-point link is being set up between Earth and a new lunar colony. </a:t>
-            </a:r>
-          </a:p>
-          <a:p>
-            <a:pPr marL="0" indent="0">
-              <a:buNone/>
-            </a:pPr>
-            <a:r>
-              <a:rPr lang="en-US" sz="2400" dirty="0"/>
-              <a:t>The distance from the moon to Earth is approximately 385,000 km, and data travels over the link at the speed of light = 3∗10^8 m/s.</a:t>
-            </a:r>
-          </a:p>
-          <a:p>
-            <a:pPr marL="0" indent="0">
-              <a:buNone/>
-            </a:pPr>
-            <a:endParaRPr lang="en-US" sz="2400" dirty="0"/>
-          </a:p>
-          <a:p>
-            <a:pPr marL="0" indent="0">
-              <a:buNone/>
-            </a:pPr>
-            <a:r>
-              <a:rPr lang="en-US" sz="2400" dirty="0"/>
-              <a:t>(a) Calculate the minimum RTT</a:t>
-            </a:r>
-            <a:r>
-              <a:rPr lang="en-US" altLang="zh-CN" sz="2400" dirty="0"/>
-              <a:t>(round-trip time)</a:t>
-            </a:r>
-            <a:r>
-              <a:rPr lang="en-US" sz="2400" dirty="0"/>
-              <a:t> for the link. </a:t>
-            </a:r>
-          </a:p>
-        </p:txBody>
-      </p:sp>
-      <p:sp>
-        <p:nvSpPr>
-          <p:cNvPr id="7" name="TextBox 6">
-            <a:extLst>
-              <a:ext uri="{FF2B5EF4-FFF2-40B4-BE49-F238E27FC236}">
-                <a16:creationId xmlns:a16="http://schemas.microsoft.com/office/drawing/2014/main" id="{B4F2FCAB-565E-4178-BECE-B014B8B03F74}"/>
-              </a:ext>
-            </a:extLst>
-          </p:cNvPr>
-          <p:cNvSpPr txBox="1"/>
-          <p:nvPr/>
-        </p:nvSpPr>
-        <p:spPr>
-          <a:xfrm>
-            <a:off x="838200" y="4970195"/>
-            <a:ext cx="9260840" cy="830997"/>
-          </a:xfrm>
-          <a:prstGeom prst="rect">
-            <a:avLst/>
-          </a:prstGeom>
-          <a:noFill/>
-        </p:spPr>
-        <p:txBody>
-          <a:bodyPr wrap="square">
-            <a:spAutoFit/>
-          </a:bodyPr>
-          <a:lstStyle/>
-          <a:p>
-            <a:r>
-              <a:rPr lang="en-HK" sz="2400" dirty="0">
-                <a:solidFill>
-                  <a:srgbClr val="FF0000"/>
-                </a:solidFill>
-              </a:rPr>
-              <a:t>propagation delay = 385000 km / (3 * 10^5 km/s) = 1.28333s</a:t>
-            </a:r>
-          </a:p>
-          <a:p>
-            <a:r>
-              <a:rPr lang="en-HK" sz="2400" dirty="0">
-                <a:solidFill>
-                  <a:srgbClr val="FF0000"/>
-                </a:solidFill>
-              </a:rPr>
-              <a:t>RTT = 2 * propagation delay =  2 * 1.28333 = 2.56666s</a:t>
+            <a:r>
+              <a:rPr lang="en-US" sz="3200" dirty="0"/>
+              <a:t>Throughput = Data transferred / Transfer time</a:t>
+            </a:r>
+          </a:p>
+          <a:p>
+            <a:endParaRPr lang="en-US" sz="3200" dirty="0"/>
+          </a:p>
+          <a:p>
+            <a:r>
+              <a:rPr lang="en-US" sz="3200" dirty="0"/>
+              <a:t>Transfer time = transmission delay + propagation delay</a:t>
             </a:r>
           </a:p>
         </p:txBody>
@@ -9266,99 +10255,13 @@
     </p:spTree>
     <p:extLst>
       <p:ext uri="{BB962C8B-B14F-4D97-AF65-F5344CB8AC3E}">
-        <p14:creationId xmlns:p14="http://schemas.microsoft.com/office/powerpoint/2010/main" val="746100141"/>
+        <p14:creationId xmlns:p14="http://schemas.microsoft.com/office/powerpoint/2010/main" val="1460982116"/>
       </p:ext>
     </p:extLst>
   </p:cSld>
   <p:clrMapOvr>
     <a:masterClrMapping/>
   </p:clrMapOvr>
-  <p:timing>
-    <p:tnLst>
-      <p:par>
-        <p:cTn id="1" dur="indefinite" restart="never" nodeType="tmRoot">
-          <p:childTnLst>
-            <p:seq concurrent="1" nextAc="seek">
-              <p:cTn id="2" dur="indefinite" nodeType="mainSeq">
-                <p:childTnLst>
-                  <p:par>
-                    <p:cTn id="3" fill="hold">
-                      <p:stCondLst>
-                        <p:cond delay="indefinite"/>
-                      </p:stCondLst>
-                      <p:childTnLst>
-                        <p:par>
-                          <p:cTn id="4" fill="hold">
-                            <p:stCondLst>
-                              <p:cond delay="0"/>
-                            </p:stCondLst>
-                            <p:childTnLst>
-                              <p:par>
-                                <p:cTn id="5" presetID="10" presetClass="entr" presetSubtype="0" fill="hold" grpId="0" nodeType="clickEffect">
-                                  <p:stCondLst>
-                                    <p:cond delay="0"/>
-                                  </p:stCondLst>
-                                  <p:childTnLst>
-                                    <p:set>
-                                      <p:cBhvr>
-                                        <p:cTn id="6" dur="1" fill="hold">
-                                          <p:stCondLst>
-                                            <p:cond delay="0"/>
-                                          </p:stCondLst>
-                                        </p:cTn>
-                                        <p:tgtEl>
-                                          <p:spTgt spid="7"/>
-                                        </p:tgtEl>
-                                        <p:attrNameLst>
-                                          <p:attrName>style.visibility</p:attrName>
-                                        </p:attrNameLst>
-                                      </p:cBhvr>
-                                      <p:to>
-                                        <p:strVal val="visible"/>
-                                      </p:to>
-                                    </p:set>
-                                    <p:animEffect transition="in" filter="fade">
-                                      <p:cBhvr>
-                                        <p:cTn id="7" dur="500"/>
-                                        <p:tgtEl>
-                                          <p:spTgt spid="7"/>
-                                        </p:tgtEl>
-                                      </p:cBhvr>
-                                    </p:animEffect>
-                                  </p:childTnLst>
-                                </p:cTn>
-                              </p:par>
-                            </p:childTnLst>
-                          </p:cTn>
-                        </p:par>
-                      </p:childTnLst>
-                    </p:cTn>
-                  </p:par>
-                </p:childTnLst>
-              </p:cTn>
-              <p:prevCondLst>
-                <p:cond evt="onPrev" delay="0">
-                  <p:tgtEl>
-                    <p:sldTgt/>
-                  </p:tgtEl>
-                </p:cond>
-              </p:prevCondLst>
-              <p:nextCondLst>
-                <p:cond evt="onNext" delay="0">
-                  <p:tgtEl>
-                    <p:sldTgt/>
-                  </p:tgtEl>
-                </p:cond>
-              </p:nextCondLst>
-            </p:seq>
-          </p:childTnLst>
-        </p:cTn>
-      </p:par>
-    </p:tnLst>
-    <p:bldLst>
-      <p:bldP spid="7" grpId="0"/>
-    </p:bldLst>
-  </p:timing>
 </p:sld>
 </file>
 
@@ -9433,13 +10336,13 @@
         </p:nvSpPr>
         <p:spPr>
           <a:xfrm>
-            <a:off x="838200" y="1771439"/>
+            <a:off x="838200" y="1825625"/>
             <a:ext cx="10515600" cy="2705735"/>
           </a:xfrm>
         </p:spPr>
         <p:txBody>
           <a:bodyPr>
-            <a:noAutofit/>
+            <a:normAutofit/>
           </a:bodyPr>
           <a:lstStyle/>
           <a:p>
@@ -9462,22 +10365,25 @@
           </a:p>
           <a:p>
             <a:pPr marL="0" indent="0">
-              <a:lnSpc>
-                <a:spcPct val="100000"/>
-              </a:lnSpc>
               <a:buNone/>
             </a:pPr>
+            <a:endParaRPr lang="en-US" sz="2400" dirty="0"/>
+          </a:p>
+          <a:p>
+            <a:pPr marL="0" indent="0">
+              <a:buNone/>
+            </a:pPr>
             <a:r>
               <a:rPr lang="en-US" sz="2400" dirty="0"/>
-              <a:t>(b) Suppose Mission Control on Earth wishes to download a 25MB (1MB = 10^6B) image from a camera on the lunar base.</a:t>
-            </a:r>
-            <a:r>
-              <a:rPr lang="zh-CN" altLang="en-US" sz="2400" dirty="0"/>
-              <a:t> </a:t>
+              <a:t>(a) Calculate the minimum RTT</a:t>
+            </a:r>
+            <a:r>
+              <a:rPr lang="en-US" altLang="zh-CN" sz="2400" dirty="0"/>
+              <a:t>(round-trip time)</a:t>
             </a:r>
             <a:r>
               <a:rPr lang="en-US" sz="2400" dirty="0"/>
-              <a:t>What is the minimum amount of time that will elapse between when the request for the data goes out and the transfer is finished? Throughput?</a:t>
+              <a:t> for the link. </a:t>
             </a:r>
           </a:p>
         </p:txBody>
@@ -9496,8 +10402,8 @@
         </p:nvSpPr>
         <p:spPr>
           <a:xfrm>
-            <a:off x="790785" y="5157912"/>
-            <a:ext cx="10938285" cy="1200329"/>
+            <a:off x="838200" y="4970195"/>
+            <a:ext cx="9260840" cy="830997"/>
           </a:xfrm>
           <a:prstGeom prst="rect">
             <a:avLst/>
@@ -9511,32 +10417,22 @@
           <a:lstStyle/>
           <a:p>
             <a:r>
-              <a:rPr lang="en-US" sz="2400" dirty="0">
+              <a:rPr lang="en-HK" sz="2400" dirty="0">
                 <a:solidFill>
                   <a:srgbClr val="FF0000"/>
                 </a:solidFill>
               </a:rPr>
-              <a:t>transmission delay = 25MB / 100Mbps = 25 * 8 / 100 = 2s </a:t>
-            </a:r>
-          </a:p>
-          <a:p>
-            <a:r>
-              <a:rPr lang="en-US" sz="2400" dirty="0">
+              <a:t>propagation delay = 385000 km / (3 * 10^5 km/s) = 1.28333s</a:t>
+            </a:r>
+          </a:p>
+          <a:p>
+            <a:r>
+              <a:rPr lang="en-HK" sz="2400" dirty="0">
                 <a:solidFill>
                   <a:srgbClr val="FF0000"/>
                 </a:solidFill>
               </a:rPr>
-              <a:t>Transfer time = RTT (propagation delay) + transmission delay = 2.5666 + 2 = 4.5666s </a:t>
-            </a:r>
-          </a:p>
-          <a:p>
-            <a:r>
-              <a:rPr lang="en-US" sz="2400" dirty="0">
-                <a:solidFill>
-                  <a:srgbClr val="FF0000"/>
-                </a:solidFill>
-              </a:rPr>
-              <a:t>Throughput = 25MB * 8 / (2s + 1.28333s) = 60.9 Mbps </a:t>
+              <a:t>RTT = 2 * propagation delay =  2 * 1.28333 = 2.56666s</a:t>
             </a:r>
           </a:p>
         </p:txBody>
@@ -9544,7 +10440,7 @@
     </p:spTree>
     <p:extLst>
       <p:ext uri="{BB962C8B-B14F-4D97-AF65-F5344CB8AC3E}">
-        <p14:creationId xmlns:p14="http://schemas.microsoft.com/office/powerpoint/2010/main" val="11664182"/>
+        <p14:creationId xmlns:p14="http://schemas.microsoft.com/office/powerpoint/2010/main" val="746100141"/>
       </p:ext>
     </p:extLst>
   </p:cSld>
@@ -9740,6 +10636,284 @@
           </a:p>
           <a:p>
             <a:pPr marL="0" indent="0">
+              <a:lnSpc>
+                <a:spcPct val="100000"/>
+              </a:lnSpc>
+              <a:buNone/>
+            </a:pPr>
+            <a:r>
+              <a:rPr lang="en-US" sz="2400" dirty="0"/>
+              <a:t>(b) Suppose Mission Control on Earth wishes to download a 25MB (1MB = 10^6B) image from a camera on the lunar base.</a:t>
+            </a:r>
+            <a:r>
+              <a:rPr lang="zh-CN" altLang="en-US" sz="2400" dirty="0"/>
+              <a:t> </a:t>
+            </a:r>
+            <a:r>
+              <a:rPr lang="en-US" sz="2400" dirty="0"/>
+              <a:t>What is the minimum amount of time that will elapse between when the request for the data goes out and the transfer is finished? Throughput?</a:t>
+            </a:r>
+          </a:p>
+        </p:txBody>
+      </p:sp>
+      <p:sp>
+        <p:nvSpPr>
+          <p:cNvPr id="7" name="TextBox 6">
+            <a:extLst>
+              <a:ext uri="{FF2B5EF4-FFF2-40B4-BE49-F238E27FC236}">
+                <a16:creationId xmlns:a16="http://schemas.microsoft.com/office/drawing/2014/main" id="{B4F2FCAB-565E-4178-BECE-B014B8B03F74}"/>
+              </a:ext>
+            </a:extLst>
+          </p:cNvPr>
+          <p:cNvSpPr txBox="1"/>
+          <p:nvPr/>
+        </p:nvSpPr>
+        <p:spPr>
+          <a:xfrm>
+            <a:off x="790785" y="5157912"/>
+            <a:ext cx="10938285" cy="1200329"/>
+          </a:xfrm>
+          <a:prstGeom prst="rect">
+            <a:avLst/>
+          </a:prstGeom>
+          <a:noFill/>
+        </p:spPr>
+        <p:txBody>
+          <a:bodyPr wrap="square">
+            <a:spAutoFit/>
+          </a:bodyPr>
+          <a:lstStyle/>
+          <a:p>
+            <a:r>
+              <a:rPr lang="en-US" sz="2400" dirty="0">
+                <a:solidFill>
+                  <a:srgbClr val="FF0000"/>
+                </a:solidFill>
+              </a:rPr>
+              <a:t>transmission delay = 25MB / 100Mbps = 25 * 8 / 100 = 2s </a:t>
+            </a:r>
+          </a:p>
+          <a:p>
+            <a:r>
+              <a:rPr lang="en-US" sz="2400" dirty="0">
+                <a:solidFill>
+                  <a:srgbClr val="FF0000"/>
+                </a:solidFill>
+              </a:rPr>
+              <a:t>Transfer time = RTT (propagation delay) + transmission delay = 2.5666 + 2 = 4.5666s </a:t>
+            </a:r>
+          </a:p>
+          <a:p>
+            <a:r>
+              <a:rPr lang="en-US" sz="2400" dirty="0">
+                <a:solidFill>
+                  <a:srgbClr val="FF0000"/>
+                </a:solidFill>
+              </a:rPr>
+              <a:t>Throughput = 25MB * 8 / (2s + 1.28333s) = 60.9 Mbps </a:t>
+            </a:r>
+          </a:p>
+        </p:txBody>
+      </p:sp>
+    </p:spTree>
+    <p:extLst>
+      <p:ext uri="{BB962C8B-B14F-4D97-AF65-F5344CB8AC3E}">
+        <p14:creationId xmlns:p14="http://schemas.microsoft.com/office/powerpoint/2010/main" val="11664182"/>
+      </p:ext>
+    </p:extLst>
+  </p:cSld>
+  <p:clrMapOvr>
+    <a:masterClrMapping/>
+  </p:clrMapOvr>
+  <p:timing>
+    <p:tnLst>
+      <p:par>
+        <p:cTn id="1" dur="indefinite" restart="never" nodeType="tmRoot">
+          <p:childTnLst>
+            <p:seq concurrent="1" nextAc="seek">
+              <p:cTn id="2" dur="indefinite" nodeType="mainSeq">
+                <p:childTnLst>
+                  <p:par>
+                    <p:cTn id="3" fill="hold">
+                      <p:stCondLst>
+                        <p:cond delay="indefinite"/>
+                      </p:stCondLst>
+                      <p:childTnLst>
+                        <p:par>
+                          <p:cTn id="4" fill="hold">
+                            <p:stCondLst>
+                              <p:cond delay="0"/>
+                            </p:stCondLst>
+                            <p:childTnLst>
+                              <p:par>
+                                <p:cTn id="5" presetID="10" presetClass="entr" presetSubtype="0" fill="hold" grpId="0" nodeType="clickEffect">
+                                  <p:stCondLst>
+                                    <p:cond delay="0"/>
+                                  </p:stCondLst>
+                                  <p:childTnLst>
+                                    <p:set>
+                                      <p:cBhvr>
+                                        <p:cTn id="6" dur="1" fill="hold">
+                                          <p:stCondLst>
+                                            <p:cond delay="0"/>
+                                          </p:stCondLst>
+                                        </p:cTn>
+                                        <p:tgtEl>
+                                          <p:spTgt spid="7"/>
+                                        </p:tgtEl>
+                                        <p:attrNameLst>
+                                          <p:attrName>style.visibility</p:attrName>
+                                        </p:attrNameLst>
+                                      </p:cBhvr>
+                                      <p:to>
+                                        <p:strVal val="visible"/>
+                                      </p:to>
+                                    </p:set>
+                                    <p:animEffect transition="in" filter="fade">
+                                      <p:cBhvr>
+                                        <p:cTn id="7" dur="500"/>
+                                        <p:tgtEl>
+                                          <p:spTgt spid="7"/>
+                                        </p:tgtEl>
+                                      </p:cBhvr>
+                                    </p:animEffect>
+                                  </p:childTnLst>
+                                </p:cTn>
+                              </p:par>
+                            </p:childTnLst>
+                          </p:cTn>
+                        </p:par>
+                      </p:childTnLst>
+                    </p:cTn>
+                  </p:par>
+                </p:childTnLst>
+              </p:cTn>
+              <p:prevCondLst>
+                <p:cond evt="onPrev" delay="0">
+                  <p:tgtEl>
+                    <p:sldTgt/>
+                  </p:tgtEl>
+                </p:cond>
+              </p:prevCondLst>
+              <p:nextCondLst>
+                <p:cond evt="onNext" delay="0">
+                  <p:tgtEl>
+                    <p:sldTgt/>
+                  </p:tgtEl>
+                </p:cond>
+              </p:nextCondLst>
+            </p:seq>
+          </p:childTnLst>
+        </p:cTn>
+      </p:par>
+    </p:tnLst>
+    <p:bldLst>
+      <p:bldP spid="7" grpId="0"/>
+    </p:bldLst>
+  </p:timing>
+</p:sld>
+</file>
+
+<file path=ppt/slides/slide17.xml><?xml version="1.0" encoding="utf-8"?>
+<p:sld xmlns:a="http://schemas.openxmlformats.org/drawingml/2006/main" xmlns:r="http://schemas.openxmlformats.org/officeDocument/2006/relationships" xmlns:p="http://schemas.openxmlformats.org/presentationml/2006/main">
+  <p:cSld>
+    <p:spTree>
+      <p:nvGrpSpPr>
+        <p:cNvPr id="1" name=""/>
+        <p:cNvGrpSpPr/>
+        <p:nvPr/>
+      </p:nvGrpSpPr>
+      <p:grpSpPr>
+        <a:xfrm>
+          <a:off x="0" y="0"/>
+          <a:ext cx="0" cy="0"/>
+          <a:chOff x="0" y="0"/>
+          <a:chExt cx="0" cy="0"/>
+        </a:xfrm>
+      </p:grpSpPr>
+      <p:sp>
+        <p:nvSpPr>
+          <p:cNvPr id="2" name="Title 1">
+            <a:extLst>
+              <a:ext uri="{FF2B5EF4-FFF2-40B4-BE49-F238E27FC236}">
+                <a16:creationId xmlns:a16="http://schemas.microsoft.com/office/drawing/2014/main" id="{45C79BA1-37A3-5741-B0A1-E64646E4283C}"/>
+              </a:ext>
+            </a:extLst>
+          </p:cNvPr>
+          <p:cNvSpPr>
+            <a:spLocks noGrp="1"/>
+          </p:cNvSpPr>
+          <p:nvPr>
+            <p:ph type="title"/>
+          </p:nvPr>
+        </p:nvSpPr>
+        <p:spPr/>
+        <p:txBody>
+          <a:bodyPr/>
+          <a:lstStyle/>
+          <a:p>
+            <a:r>
+              <a:rPr lang="en-US" altLang="zh-CN" b="1" dirty="0"/>
+              <a:t>Exercise</a:t>
+            </a:r>
+            <a:r>
+              <a:rPr lang="zh-CN" altLang="en-US" b="1" dirty="0"/>
+              <a:t> </a:t>
+            </a:r>
+            <a:r>
+              <a:rPr lang="en-US" b="1" dirty="0"/>
+              <a:t>- Q1</a:t>
+            </a:r>
+          </a:p>
+        </p:txBody>
+      </p:sp>
+      <p:sp>
+        <p:nvSpPr>
+          <p:cNvPr id="3" name="Content Placeholder 2">
+            <a:extLst>
+              <a:ext uri="{FF2B5EF4-FFF2-40B4-BE49-F238E27FC236}">
+                <a16:creationId xmlns:a16="http://schemas.microsoft.com/office/drawing/2014/main" id="{8F20472D-613F-3748-9CBD-88055CDB4B08}"/>
+              </a:ext>
+            </a:extLst>
+          </p:cNvPr>
+          <p:cNvSpPr>
+            <a:spLocks noGrp="1"/>
+          </p:cNvSpPr>
+          <p:nvPr>
+            <p:ph idx="1"/>
+          </p:nvPr>
+        </p:nvSpPr>
+        <p:spPr>
+          <a:xfrm>
+            <a:off x="838200" y="1771439"/>
+            <a:ext cx="10515600" cy="2705735"/>
+          </a:xfrm>
+        </p:spPr>
+        <p:txBody>
+          <a:bodyPr>
+            <a:noAutofit/>
+          </a:bodyPr>
+          <a:lstStyle/>
+          <a:p>
+            <a:pPr marL="0" indent="0">
+              <a:buNone/>
+            </a:pPr>
+            <a:r>
+              <a:rPr lang="en-US" sz="2400" dirty="0"/>
+              <a:t>Suppose a 100-Mbps point-to-point link is being set up between Earth and a new lunar colony. </a:t>
+            </a:r>
+          </a:p>
+          <a:p>
+            <a:pPr marL="0" indent="0">
+              <a:buNone/>
+            </a:pPr>
+            <a:r>
+              <a:rPr lang="en-US" sz="2400" dirty="0"/>
+              <a:t>The distance from the moon to Earth is approximately 385,000 km, and data travels over the link at the speed of light = 3∗10^8 m/s.</a:t>
+            </a:r>
+          </a:p>
+          <a:p>
+            <a:pPr marL="0" indent="0">
               <a:buNone/>
             </a:pPr>
             <a:endParaRPr lang="en-US" sz="2400" dirty="0"/>
@@ -9919,7 +11093,7 @@
 </p:sld>
 </file>
 
-<file path=ppt/slides/slide17.xml><?xml version="1.0" encoding="utf-8"?>
+<file path=ppt/slides/slide18.xml><?xml version="1.0" encoding="utf-8"?>
 <p:sld xmlns:a="http://schemas.openxmlformats.org/drawingml/2006/main" xmlns:r="http://schemas.openxmlformats.org/officeDocument/2006/relationships" xmlns:p="http://schemas.openxmlformats.org/presentationml/2006/main">
   <p:cSld>
     <p:spTree>
@@ -10529,7 +11703,7 @@
 </p:sld>
 </file>
 
-<file path=ppt/slides/slide18.xml><?xml version="1.0" encoding="utf-8"?>
+<file path=ppt/slides/slide19.xml><?xml version="1.0" encoding="utf-8"?>
 <p:sld xmlns:a="http://schemas.openxmlformats.org/drawingml/2006/main" xmlns:r="http://schemas.openxmlformats.org/officeDocument/2006/relationships" xmlns:p="http://schemas.openxmlformats.org/presentationml/2006/main">
   <p:cSld>
     <p:spTree>
@@ -10668,7 +11842,129 @@
 </p:sld>
 </file>
 
-<file path=ppt/slides/slide19.xml><?xml version="1.0" encoding="utf-8"?>
+<file path=ppt/slides/slide2.xml><?xml version="1.0" encoding="utf-8"?>
+<p:sld xmlns:a="http://schemas.openxmlformats.org/drawingml/2006/main" xmlns:r="http://schemas.openxmlformats.org/officeDocument/2006/relationships" xmlns:p="http://schemas.openxmlformats.org/presentationml/2006/main">
+  <p:cSld>
+    <p:spTree>
+      <p:nvGrpSpPr>
+        <p:cNvPr id="1" name=""/>
+        <p:cNvGrpSpPr/>
+        <p:nvPr/>
+      </p:nvGrpSpPr>
+      <p:grpSpPr>
+        <a:xfrm>
+          <a:off x="0" y="0"/>
+          <a:ext cx="0" cy="0"/>
+          <a:chOff x="0" y="0"/>
+          <a:chExt cx="0" cy="0"/>
+        </a:xfrm>
+      </p:grpSpPr>
+      <p:sp>
+        <p:nvSpPr>
+          <p:cNvPr id="3" name="Content Placeholder 2">
+            <a:extLst>
+              <a:ext uri="{FF2B5EF4-FFF2-40B4-BE49-F238E27FC236}">
+                <a16:creationId xmlns:a16="http://schemas.microsoft.com/office/drawing/2014/main" id="{8F20472D-613F-3748-9CBD-88055CDB4B08}"/>
+              </a:ext>
+            </a:extLst>
+          </p:cNvPr>
+          <p:cNvSpPr>
+            <a:spLocks noGrp="1"/>
+          </p:cNvSpPr>
+          <p:nvPr>
+            <p:ph idx="1"/>
+          </p:nvPr>
+        </p:nvSpPr>
+        <p:spPr/>
+        <p:txBody>
+          <a:bodyPr>
+            <a:normAutofit/>
+          </a:bodyPr>
+          <a:lstStyle/>
+          <a:p>
+            <a:r>
+              <a:rPr lang="en-US" sz="3200" dirty="0"/>
+              <a:t>Socket Programming R</a:t>
+            </a:r>
+            <a:r>
+              <a:rPr lang="en-US" altLang="zh-CN" sz="3200" dirty="0"/>
+              <a:t>evisiting</a:t>
+            </a:r>
+            <a:endParaRPr lang="en-US" sz="3200" dirty="0"/>
+          </a:p>
+          <a:p>
+            <a:r>
+              <a:rPr lang="en-US" sz="3200" dirty="0"/>
+              <a:t>Performance Metrics - Delay</a:t>
+            </a:r>
+          </a:p>
+          <a:p>
+            <a:r>
+              <a:rPr lang="en-US" sz="3200" dirty="0"/>
+              <a:t>Performance Metrics - Throughput</a:t>
+            </a:r>
+          </a:p>
+          <a:p>
+            <a:r>
+              <a:rPr lang="en-US" altLang="zh-CN" sz="3200" dirty="0"/>
+              <a:t>Exercise </a:t>
+            </a:r>
+            <a:r>
+              <a:rPr lang="en-US" sz="3200" dirty="0"/>
+              <a:t>1</a:t>
+            </a:r>
+          </a:p>
+          <a:p>
+            <a:r>
+              <a:rPr lang="en-US" altLang="zh-CN" sz="3200" dirty="0"/>
+              <a:t>Exercise 2</a:t>
+            </a:r>
+            <a:endParaRPr lang="en-US" sz="3200" dirty="0"/>
+          </a:p>
+        </p:txBody>
+      </p:sp>
+      <p:sp>
+        <p:nvSpPr>
+          <p:cNvPr id="2" name="Title 1">
+            <a:extLst>
+              <a:ext uri="{FF2B5EF4-FFF2-40B4-BE49-F238E27FC236}">
+                <a16:creationId xmlns:a16="http://schemas.microsoft.com/office/drawing/2014/main" id="{45C79BA1-37A3-5741-B0A1-E64646E4283C}"/>
+              </a:ext>
+            </a:extLst>
+          </p:cNvPr>
+          <p:cNvSpPr>
+            <a:spLocks noGrp="1"/>
+          </p:cNvSpPr>
+          <p:nvPr>
+            <p:ph type="title"/>
+          </p:nvPr>
+        </p:nvSpPr>
+        <p:spPr/>
+        <p:txBody>
+          <a:bodyPr/>
+          <a:lstStyle/>
+          <a:p>
+            <a:r>
+              <a:rPr lang="en-US" b="1" dirty="0"/>
+              <a:t>Outline</a:t>
+            </a:r>
+          </a:p>
+        </p:txBody>
+      </p:sp>
+    </p:spTree>
+    <p:extLst>
+      <p:ext uri="{BB962C8B-B14F-4D97-AF65-F5344CB8AC3E}">
+        <p14:creationId xmlns:p14="http://schemas.microsoft.com/office/powerpoint/2010/main" val="440415094"/>
+      </p:ext>
+    </p:extLst>
+  </p:cSld>
+  <p:clrMapOvr>
+    <a:masterClrMapping/>
+  </p:clrMapOvr>
+</p:sld>
+</file>
+
+<file path=ppt/slides/slide20.xml><?xml version="1.0" encoding="utf-8"?>
 <p:sld xmlns:a="http://schemas.openxmlformats.org/drawingml/2006/main" xmlns:r="http://schemas.openxmlformats.org/officeDocument/2006/relationships" xmlns:p="http://schemas.openxmlformats.org/presentationml/2006/main">
   <p:cSld>
     <p:spTree>
@@ -10917,129 +12213,7 @@
 </p:sld>
 </file>
 
-<file path=ppt/slides/slide2.xml><?xml version="1.0" encoding="utf-8"?>
-<p:sld xmlns:a="http://schemas.openxmlformats.org/drawingml/2006/main" xmlns:r="http://schemas.openxmlformats.org/officeDocument/2006/relationships" xmlns:p="http://schemas.openxmlformats.org/presentationml/2006/main">
-  <p:cSld>
-    <p:spTree>
-      <p:nvGrpSpPr>
-        <p:cNvPr id="1" name=""/>
-        <p:cNvGrpSpPr/>
-        <p:nvPr/>
-      </p:nvGrpSpPr>
-      <p:grpSpPr>
-        <a:xfrm>
-          <a:off x="0" y="0"/>
-          <a:ext cx="0" cy="0"/>
-          <a:chOff x="0" y="0"/>
-          <a:chExt cx="0" cy="0"/>
-        </a:xfrm>
-      </p:grpSpPr>
-      <p:sp>
-        <p:nvSpPr>
-          <p:cNvPr id="3" name="Content Placeholder 2">
-            <a:extLst>
-              <a:ext uri="{FF2B5EF4-FFF2-40B4-BE49-F238E27FC236}">
-                <a16:creationId xmlns:a16="http://schemas.microsoft.com/office/drawing/2014/main" id="{8F20472D-613F-3748-9CBD-88055CDB4B08}"/>
-              </a:ext>
-            </a:extLst>
-          </p:cNvPr>
-          <p:cNvSpPr>
-            <a:spLocks noGrp="1"/>
-          </p:cNvSpPr>
-          <p:nvPr>
-            <p:ph idx="1"/>
-          </p:nvPr>
-        </p:nvSpPr>
-        <p:spPr/>
-        <p:txBody>
-          <a:bodyPr>
-            <a:normAutofit/>
-          </a:bodyPr>
-          <a:lstStyle/>
-          <a:p>
-            <a:r>
-              <a:rPr lang="en-US" sz="3200" dirty="0"/>
-              <a:t>Socket Programming R</a:t>
-            </a:r>
-            <a:r>
-              <a:rPr lang="en-US" altLang="zh-CN" sz="3200" dirty="0"/>
-              <a:t>evisiting</a:t>
-            </a:r>
-            <a:endParaRPr lang="en-US" sz="3200" dirty="0"/>
-          </a:p>
-          <a:p>
-            <a:r>
-              <a:rPr lang="en-US" sz="3200" dirty="0"/>
-              <a:t>Performance Metrics - Delay</a:t>
-            </a:r>
-          </a:p>
-          <a:p>
-            <a:r>
-              <a:rPr lang="en-US" sz="3200" dirty="0"/>
-              <a:t>Performance Metrics - Throughput</a:t>
-            </a:r>
-          </a:p>
-          <a:p>
-            <a:r>
-              <a:rPr lang="en-US" altLang="zh-CN" sz="3200" dirty="0"/>
-              <a:t>Exercise </a:t>
-            </a:r>
-            <a:r>
-              <a:rPr lang="en-US" sz="3200" dirty="0"/>
-              <a:t>1</a:t>
-            </a:r>
-          </a:p>
-          <a:p>
-            <a:r>
-              <a:rPr lang="en-US" altLang="zh-CN" sz="3200" dirty="0"/>
-              <a:t>Exercise 2</a:t>
-            </a:r>
-            <a:endParaRPr lang="en-US" sz="3200" dirty="0"/>
-          </a:p>
-        </p:txBody>
-      </p:sp>
-      <p:sp>
-        <p:nvSpPr>
-          <p:cNvPr id="2" name="Title 1">
-            <a:extLst>
-              <a:ext uri="{FF2B5EF4-FFF2-40B4-BE49-F238E27FC236}">
-                <a16:creationId xmlns:a16="http://schemas.microsoft.com/office/drawing/2014/main" id="{45C79BA1-37A3-5741-B0A1-E64646E4283C}"/>
-              </a:ext>
-            </a:extLst>
-          </p:cNvPr>
-          <p:cNvSpPr>
-            <a:spLocks noGrp="1"/>
-          </p:cNvSpPr>
-          <p:nvPr>
-            <p:ph type="title"/>
-          </p:nvPr>
-        </p:nvSpPr>
-        <p:spPr/>
-        <p:txBody>
-          <a:bodyPr/>
-          <a:lstStyle/>
-          <a:p>
-            <a:r>
-              <a:rPr lang="en-US" b="1" dirty="0"/>
-              <a:t>Outline</a:t>
-            </a:r>
-          </a:p>
-        </p:txBody>
-      </p:sp>
-    </p:spTree>
-    <p:extLst>
-      <p:ext uri="{BB962C8B-B14F-4D97-AF65-F5344CB8AC3E}">
-        <p14:creationId xmlns:p14="http://schemas.microsoft.com/office/powerpoint/2010/main" val="440415094"/>
-      </p:ext>
-    </p:extLst>
-  </p:cSld>
-  <p:clrMapOvr>
-    <a:masterClrMapping/>
-  </p:clrMapOvr>
-</p:sld>
-</file>
-
-<file path=ppt/slides/slide20.xml><?xml version="1.0" encoding="utf-8"?>
+<file path=ppt/slides/slide21.xml><?xml version="1.0" encoding="utf-8"?>
 <p:sld xmlns:a="http://schemas.openxmlformats.org/drawingml/2006/main" xmlns:r="http://schemas.openxmlformats.org/officeDocument/2006/relationships" xmlns:p="http://schemas.openxmlformats.org/presentationml/2006/main">
   <p:cSld>
     <p:spTree>
@@ -11178,7 +12352,7 @@
 </p:sld>
 </file>
 
-<file path=ppt/slides/slide21.xml><?xml version="1.0" encoding="utf-8"?>
+<file path=ppt/slides/slide22.xml><?xml version="1.0" encoding="utf-8"?>
 <p:sld xmlns:a="http://schemas.openxmlformats.org/drawingml/2006/main" xmlns:r="http://schemas.openxmlformats.org/officeDocument/2006/relationships" xmlns:p="http://schemas.openxmlformats.org/presentationml/2006/main">
   <p:cSld>
     <p:spTree>
@@ -11830,6 +13004,311 @@
             <p:ph type="title"/>
           </p:nvPr>
         </p:nvSpPr>
+        <p:spPr>
+          <a:xfrm>
+            <a:off x="838200" y="365125"/>
+            <a:ext cx="10515600" cy="923331"/>
+          </a:xfrm>
+        </p:spPr>
+        <p:txBody>
+          <a:bodyPr/>
+          <a:lstStyle/>
+          <a:p>
+            <a:r>
+              <a:rPr lang="en-US" b="1" dirty="0"/>
+              <a:t>Assignment 2&amp;3 Group</a:t>
+            </a:r>
+          </a:p>
+        </p:txBody>
+      </p:sp>
+      <p:pic>
+        <p:nvPicPr>
+          <p:cNvPr id="1026" name="Picture 2" descr="image">
+            <a:extLst>
+              <a:ext uri="{FF2B5EF4-FFF2-40B4-BE49-F238E27FC236}">
+                <a16:creationId xmlns:a16="http://schemas.microsoft.com/office/drawing/2014/main" id="{93C4DF01-83FA-4E10-AE51-839B708EA49D}"/>
+              </a:ext>
+            </a:extLst>
+          </p:cNvPr>
+          <p:cNvPicPr>
+            <a:picLocks noChangeAspect="1" noChangeArrowheads="1"/>
+          </p:cNvPicPr>
+          <p:nvPr/>
+        </p:nvPicPr>
+        <p:blipFill>
+          <a:blip r:embed="rId3">
+            <a:extLst>
+              <a:ext uri="{28A0092B-C50C-407E-A947-70E740481C1C}">
+                <a14:useLocalDpi xmlns:a14="http://schemas.microsoft.com/office/drawing/2010/main" val="0"/>
+              </a:ext>
+            </a:extLst>
+          </a:blip>
+          <a:srcRect/>
+          <a:stretch>
+            <a:fillRect/>
+          </a:stretch>
+        </p:blipFill>
+        <p:spPr bwMode="auto">
+          <a:xfrm>
+            <a:off x="901994" y="1629698"/>
+            <a:ext cx="4312754" cy="4177981"/>
+          </a:xfrm>
+          <a:prstGeom prst="rect">
+            <a:avLst/>
+          </a:prstGeom>
+          <a:noFill/>
+          <a:extLst>
+            <a:ext uri="{909E8E84-426E-40DD-AFC4-6F175D3DCCD1}">
+              <a14:hiddenFill xmlns:a14="http://schemas.microsoft.com/office/drawing/2010/main">
+                <a:solidFill>
+                  <a:srgbClr val="FFFFFF"/>
+                </a:solidFill>
+              </a14:hiddenFill>
+            </a:ext>
+          </a:extLst>
+        </p:spPr>
+      </p:pic>
+      <p:sp>
+        <p:nvSpPr>
+          <p:cNvPr id="5" name="文本框 4">
+            <a:extLst>
+              <a:ext uri="{FF2B5EF4-FFF2-40B4-BE49-F238E27FC236}">
+                <a16:creationId xmlns:a16="http://schemas.microsoft.com/office/drawing/2014/main" id="{B677AC68-0EBE-43C2-8478-901F8AC41A2A}"/>
+              </a:ext>
+            </a:extLst>
+          </p:cNvPr>
+          <p:cNvSpPr txBox="1"/>
+          <p:nvPr/>
+        </p:nvSpPr>
+        <p:spPr>
+          <a:xfrm>
+            <a:off x="5623627" y="1629698"/>
+            <a:ext cx="5765615" cy="646331"/>
+          </a:xfrm>
+          <a:prstGeom prst="rect">
+            <a:avLst/>
+          </a:prstGeom>
+          <a:noFill/>
+        </p:spPr>
+        <p:txBody>
+          <a:bodyPr wrap="square">
+            <a:spAutoFit/>
+          </a:bodyPr>
+          <a:lstStyle/>
+          <a:p>
+            <a:r>
+              <a:rPr lang="en-HK" dirty="0"/>
+              <a:t>The </a:t>
+            </a:r>
+            <a:r>
+              <a:rPr lang="en-HK" b="1" dirty="0"/>
+              <a:t>deadline for grouping</a:t>
+            </a:r>
+            <a:r>
+              <a:rPr lang="en-HK" dirty="0"/>
+              <a:t> is </a:t>
+            </a:r>
+            <a:r>
+              <a:rPr lang="en-HK" b="1" dirty="0">
+                <a:solidFill>
+                  <a:srgbClr val="C00000"/>
+                </a:solidFill>
+              </a:rPr>
+              <a:t>23:59:59, Jan. 24th 2025, the next Friday</a:t>
+            </a:r>
+            <a:r>
+              <a:rPr lang="en-HK" dirty="0">
+                <a:solidFill>
+                  <a:srgbClr val="C00000"/>
+                </a:solidFill>
+              </a:rPr>
+              <a:t>. </a:t>
+            </a:r>
+          </a:p>
+        </p:txBody>
+      </p:sp>
+      <p:sp>
+        <p:nvSpPr>
+          <p:cNvPr id="7" name="文本框 6">
+            <a:extLst>
+              <a:ext uri="{FF2B5EF4-FFF2-40B4-BE49-F238E27FC236}">
+                <a16:creationId xmlns:a16="http://schemas.microsoft.com/office/drawing/2014/main" id="{ED9F8D6A-27AB-4CF5-A228-373D6BC6290B}"/>
+              </a:ext>
+            </a:extLst>
+          </p:cNvPr>
+          <p:cNvSpPr txBox="1"/>
+          <p:nvPr/>
+        </p:nvSpPr>
+        <p:spPr>
+          <a:xfrm>
+            <a:off x="5630714" y="2562397"/>
+            <a:ext cx="6096000" cy="923330"/>
+          </a:xfrm>
+          <a:prstGeom prst="rect">
+            <a:avLst/>
+          </a:prstGeom>
+          <a:noFill/>
+        </p:spPr>
+        <p:txBody>
+          <a:bodyPr wrap="square">
+            <a:spAutoFit/>
+          </a:bodyPr>
+          <a:lstStyle/>
+          <a:p>
+            <a:r>
+              <a:rPr lang="en-HK" dirty="0"/>
+              <a:t>For </a:t>
+            </a:r>
+            <a:r>
+              <a:rPr lang="en-HK" b="1" dirty="0"/>
+              <a:t>assignments 2 and 3</a:t>
+            </a:r>
+            <a:r>
+              <a:rPr lang="en-HK" dirty="0"/>
+              <a:t>, you need to form a group of </a:t>
+            </a:r>
+            <a:r>
+              <a:rPr lang="en-HK" b="1" u="sng" dirty="0">
+                <a:solidFill>
+                  <a:srgbClr val="C00000"/>
+                </a:solidFill>
+              </a:rPr>
+              <a:t>exactly 2 students</a:t>
+            </a:r>
+            <a:r>
+              <a:rPr lang="en-HK" dirty="0"/>
+              <a:t> and finish the assignment as a group. We use </a:t>
+            </a:r>
+            <a:r>
+              <a:rPr lang="en-HK" b="1" dirty="0"/>
+              <a:t>Blackboard</a:t>
+            </a:r>
+            <a:r>
+              <a:rPr lang="en-HK" dirty="0"/>
+              <a:t> as the tool to form groups. </a:t>
+            </a:r>
+          </a:p>
+        </p:txBody>
+      </p:sp>
+      <p:sp>
+        <p:nvSpPr>
+          <p:cNvPr id="9" name="文本框 8">
+            <a:extLst>
+              <a:ext uri="{FF2B5EF4-FFF2-40B4-BE49-F238E27FC236}">
+                <a16:creationId xmlns:a16="http://schemas.microsoft.com/office/drawing/2014/main" id="{93B270DF-DF10-4B5E-88B5-6B10DCCDCF5B}"/>
+              </a:ext>
+            </a:extLst>
+          </p:cNvPr>
+          <p:cNvSpPr txBox="1"/>
+          <p:nvPr/>
+        </p:nvSpPr>
+        <p:spPr>
+          <a:xfrm>
+            <a:off x="5630715" y="3820452"/>
+            <a:ext cx="6625080" cy="646331"/>
+          </a:xfrm>
+          <a:prstGeom prst="rect">
+            <a:avLst/>
+          </a:prstGeom>
+          <a:noFill/>
+        </p:spPr>
+        <p:txBody>
+          <a:bodyPr wrap="square">
+            <a:spAutoFit/>
+          </a:bodyPr>
+          <a:lstStyle/>
+          <a:p>
+            <a:r>
+              <a:rPr lang="en-HK" dirty="0"/>
+              <a:t>More information, </a:t>
+            </a:r>
+            <a:r>
+              <a:rPr lang="en-HK" dirty="0" err="1"/>
+              <a:t>plz</a:t>
+            </a:r>
+            <a:r>
+              <a:rPr lang="en-HK" dirty="0"/>
+              <a:t> check Piazza announcement: https://piazza.com/class/m5g5xzrpiad38y/post/21</a:t>
+            </a:r>
+          </a:p>
+        </p:txBody>
+      </p:sp>
+      <p:pic>
+        <p:nvPicPr>
+          <p:cNvPr id="10" name="图片 9">
+            <a:extLst>
+              <a:ext uri="{FF2B5EF4-FFF2-40B4-BE49-F238E27FC236}">
+                <a16:creationId xmlns:a16="http://schemas.microsoft.com/office/drawing/2014/main" id="{7B1EB643-D283-4C36-9B4E-6C1465440249}"/>
+              </a:ext>
+            </a:extLst>
+          </p:cNvPr>
+          <p:cNvPicPr>
+            <a:picLocks noChangeAspect="1"/>
+          </p:cNvPicPr>
+          <p:nvPr/>
+        </p:nvPicPr>
+        <p:blipFill>
+          <a:blip r:embed="rId4"/>
+          <a:stretch>
+            <a:fillRect/>
+          </a:stretch>
+        </p:blipFill>
+        <p:spPr>
+          <a:xfrm>
+            <a:off x="5729951" y="4580401"/>
+            <a:ext cx="5741581" cy="968135"/>
+          </a:xfrm>
+          <a:prstGeom prst="rect">
+            <a:avLst/>
+          </a:prstGeom>
+        </p:spPr>
+      </p:pic>
+    </p:spTree>
+    <p:extLst>
+      <p:ext uri="{BB962C8B-B14F-4D97-AF65-F5344CB8AC3E}">
+        <p14:creationId xmlns:p14="http://schemas.microsoft.com/office/powerpoint/2010/main" val="2462712017"/>
+      </p:ext>
+    </p:extLst>
+  </p:cSld>
+  <p:clrMapOvr>
+    <a:masterClrMapping/>
+  </p:clrMapOvr>
+</p:sld>
+</file>
+
+<file path=ppt/slides/slide5.xml><?xml version="1.0" encoding="utf-8"?>
+<p:sld xmlns:a="http://schemas.openxmlformats.org/drawingml/2006/main" xmlns:r="http://schemas.openxmlformats.org/officeDocument/2006/relationships" xmlns:p="http://schemas.openxmlformats.org/presentationml/2006/main">
+  <p:cSld>
+    <p:spTree>
+      <p:nvGrpSpPr>
+        <p:cNvPr id="1" name=""/>
+        <p:cNvGrpSpPr/>
+        <p:nvPr/>
+      </p:nvGrpSpPr>
+      <p:grpSpPr>
+        <a:xfrm>
+          <a:off x="0" y="0"/>
+          <a:ext cx="0" cy="0"/>
+          <a:chOff x="0" y="0"/>
+          <a:chExt cx="0" cy="0"/>
+        </a:xfrm>
+      </p:grpSpPr>
+      <p:sp>
+        <p:nvSpPr>
+          <p:cNvPr id="2" name="Title 1">
+            <a:extLst>
+              <a:ext uri="{FF2B5EF4-FFF2-40B4-BE49-F238E27FC236}">
+                <a16:creationId xmlns:a16="http://schemas.microsoft.com/office/drawing/2014/main" id="{45C79BA1-37A3-5741-B0A1-E64646E4283C}"/>
+              </a:ext>
+            </a:extLst>
+          </p:cNvPr>
+          <p:cNvSpPr>
+            <a:spLocks noGrp="1"/>
+          </p:cNvSpPr>
+          <p:nvPr>
+            <p:ph type="title"/>
+          </p:nvPr>
+        </p:nvSpPr>
         <p:spPr/>
         <p:txBody>
           <a:bodyPr/>
@@ -11957,7 +13436,7 @@
 </p:sld>
 </file>
 
-<file path=ppt/slides/slide5.xml><?xml version="1.0" encoding="utf-8"?>
+<file path=ppt/slides/slide6.xml><?xml version="1.0" encoding="utf-8"?>
 <p:sld xmlns:a="http://schemas.openxmlformats.org/drawingml/2006/main" xmlns:r="http://schemas.openxmlformats.org/officeDocument/2006/relationships" xmlns:p="http://schemas.openxmlformats.org/presentationml/2006/main">
   <p:cSld>
     <p:spTree>
@@ -13781,7 +15260,7 @@
 </p:sld>
 </file>
 
-<file path=ppt/slides/slide6.xml><?xml version="1.0" encoding="utf-8"?>
+<file path=ppt/slides/slide7.xml><?xml version="1.0" encoding="utf-8"?>
 <p:sld xmlns:a="http://schemas.openxmlformats.org/drawingml/2006/main" xmlns:r="http://schemas.openxmlformats.org/officeDocument/2006/relationships" xmlns:p="http://schemas.openxmlformats.org/presentationml/2006/main">
   <p:cSld>
     <p:spTree>
@@ -15548,7 +17027,7 @@
 </p:sld>
 </file>
 
-<file path=ppt/slides/slide7.xml><?xml version="1.0" encoding="utf-8"?>
+<file path=ppt/slides/slide8.xml><?xml version="1.0" encoding="utf-8"?>
 <p:sld xmlns:a="http://schemas.openxmlformats.org/drawingml/2006/main" xmlns:r="http://schemas.openxmlformats.org/officeDocument/2006/relationships" xmlns:p="http://schemas.openxmlformats.org/presentationml/2006/main">
   <p:cSld>
     <p:spTree>
@@ -16872,7 +18351,7 @@
 </p:sld>
 </file>
 
-<file path=ppt/slides/slide8.xml><?xml version="1.0" encoding="utf-8"?>
+<file path=ppt/slides/slide9.xml><?xml version="1.0" encoding="utf-8"?>
 <p:sld xmlns:a="http://schemas.openxmlformats.org/drawingml/2006/main" xmlns:r="http://schemas.openxmlformats.org/officeDocument/2006/relationships" xmlns:p="http://schemas.openxmlformats.org/presentationml/2006/main">
   <p:cSld>
     <p:spTree>
@@ -17083,7 +18562,7 @@
             <a:fld id="{2AEB5DB0-1750-46EA-AC7C-282DFECA4821}" type="slidenum">
               <a:rPr lang="en-US" altLang="en-US" smtClean="0"/>
               <a:pPr/>
-              <a:t>8</a:t>
+              <a:t>9</a:t>
             </a:fld>
             <a:endParaRPr lang="en-US" altLang="en-US" dirty="0"/>
           </a:p>
@@ -18493,1095 +19972,6 @@
       <p:bldP spid="64" grpId="0" animBg="1"/>
     </p:bldLst>
   </p:timing>
-</p:sld>
-</file>
-
-<file path=ppt/slides/slide9.xml><?xml version="1.0" encoding="utf-8"?>
-<p:sld xmlns:a="http://schemas.openxmlformats.org/drawingml/2006/main" xmlns:r="http://schemas.openxmlformats.org/officeDocument/2006/relationships" xmlns:p="http://schemas.openxmlformats.org/presentationml/2006/main">
-  <p:cSld>
-    <p:spTree>
-      <p:nvGrpSpPr>
-        <p:cNvPr id="1" name=""/>
-        <p:cNvGrpSpPr/>
-        <p:nvPr/>
-      </p:nvGrpSpPr>
-      <p:grpSpPr>
-        <a:xfrm>
-          <a:off x="0" y="0"/>
-          <a:ext cx="0" cy="0"/>
-          <a:chOff x="0" y="0"/>
-          <a:chExt cx="0" cy="0"/>
-        </a:xfrm>
-      </p:grpSpPr>
-      <p:sp>
-        <p:nvSpPr>
-          <p:cNvPr id="2" name="Title 1">
-            <a:extLst>
-              <a:ext uri="{FF2B5EF4-FFF2-40B4-BE49-F238E27FC236}">
-                <a16:creationId xmlns:a16="http://schemas.microsoft.com/office/drawing/2014/main" id="{45C79BA1-37A3-5741-B0A1-E64646E4283C}"/>
-              </a:ext>
-            </a:extLst>
-          </p:cNvPr>
-          <p:cNvSpPr>
-            <a:spLocks noGrp="1"/>
-          </p:cNvSpPr>
-          <p:nvPr>
-            <p:ph type="title"/>
-          </p:nvPr>
-        </p:nvSpPr>
-        <p:spPr/>
-        <p:txBody>
-          <a:bodyPr/>
-          <a:lstStyle/>
-          <a:p>
-            <a:r>
-              <a:rPr lang="en-US" b="1" dirty="0"/>
-              <a:t>Socket Programming: </a:t>
-            </a:r>
-            <a:r>
-              <a:rPr lang="en-US" altLang="zh-TW" b="1" dirty="0"/>
-              <a:t>Server Parallelization</a:t>
-            </a:r>
-            <a:endParaRPr lang="en-US" b="1" dirty="0"/>
-          </a:p>
-        </p:txBody>
-      </p:sp>
-      <p:sp>
-        <p:nvSpPr>
-          <p:cNvPr id="34" name="Text Box 5">
-            <a:extLst>
-              <a:ext uri="{FF2B5EF4-FFF2-40B4-BE49-F238E27FC236}">
-                <a16:creationId xmlns:a16="http://schemas.microsoft.com/office/drawing/2014/main" id="{4AC9FC81-0627-4B71-86BC-7628F1748238}"/>
-              </a:ext>
-            </a:extLst>
-          </p:cNvPr>
-          <p:cNvSpPr txBox="1">
-            <a:spLocks noChangeArrowheads="1"/>
-          </p:cNvSpPr>
-          <p:nvPr/>
-        </p:nvSpPr>
-        <p:spPr bwMode="auto">
-          <a:xfrm>
-            <a:off x="1768475" y="2124075"/>
-            <a:ext cx="1196975" cy="376237"/>
-          </a:xfrm>
-          <a:prstGeom prst="rect">
-            <a:avLst/>
-          </a:prstGeom>
-          <a:solidFill>
-            <a:srgbClr val="FFFF99"/>
-          </a:solidFill>
-          <a:ln w="9525">
-            <a:solidFill>
-              <a:schemeClr val="tx1"/>
-            </a:solidFill>
-            <a:miter lim="800000"/>
-            <a:headEnd/>
-            <a:tailEnd/>
-          </a:ln>
-        </p:spPr>
-        <p:txBody>
-          <a:bodyPr wrap="none">
-            <a:spAutoFit/>
-          </a:bodyPr>
-          <a:lstStyle/>
-          <a:p>
-            <a:r>
-              <a:rPr lang="en-US" altLang="zh-TW" b="1">
-                <a:latin typeface="Consolas" pitchFamily="49" charset="0"/>
-              </a:rPr>
-              <a:t>socket()</a:t>
-            </a:r>
-          </a:p>
-        </p:txBody>
-      </p:sp>
-      <p:sp>
-        <p:nvSpPr>
-          <p:cNvPr id="35" name="Text Box 6">
-            <a:extLst>
-              <a:ext uri="{FF2B5EF4-FFF2-40B4-BE49-F238E27FC236}">
-                <a16:creationId xmlns:a16="http://schemas.microsoft.com/office/drawing/2014/main" id="{BCFE8564-0D96-4CD2-9BC6-499365BA818F}"/>
-              </a:ext>
-            </a:extLst>
-          </p:cNvPr>
-          <p:cNvSpPr txBox="1">
-            <a:spLocks noChangeArrowheads="1"/>
-          </p:cNvSpPr>
-          <p:nvPr/>
-        </p:nvSpPr>
-        <p:spPr bwMode="auto">
-          <a:xfrm>
-            <a:off x="5502275" y="2124075"/>
-            <a:ext cx="1196975" cy="376237"/>
-          </a:xfrm>
-          <a:prstGeom prst="rect">
-            <a:avLst/>
-          </a:prstGeom>
-          <a:solidFill>
-            <a:srgbClr val="FFFF99"/>
-          </a:solidFill>
-          <a:ln w="9525">
-            <a:solidFill>
-              <a:schemeClr val="tx1"/>
-            </a:solidFill>
-            <a:miter lim="800000"/>
-            <a:headEnd/>
-            <a:tailEnd/>
-          </a:ln>
-        </p:spPr>
-        <p:txBody>
-          <a:bodyPr wrap="none">
-            <a:spAutoFit/>
-          </a:bodyPr>
-          <a:lstStyle/>
-          <a:p>
-            <a:r>
-              <a:rPr lang="en-US" altLang="zh-TW" b="1">
-                <a:latin typeface="Consolas" pitchFamily="49" charset="0"/>
-              </a:rPr>
-              <a:t>listen()</a:t>
-            </a:r>
-          </a:p>
-        </p:txBody>
-      </p:sp>
-      <p:sp>
-        <p:nvSpPr>
-          <p:cNvPr id="36" name="Line 7">
-            <a:extLst>
-              <a:ext uri="{FF2B5EF4-FFF2-40B4-BE49-F238E27FC236}">
-                <a16:creationId xmlns:a16="http://schemas.microsoft.com/office/drawing/2014/main" id="{E5E71293-3382-4BC4-9CF6-FD4B0F62240D}"/>
-              </a:ext>
-            </a:extLst>
-          </p:cNvPr>
-          <p:cNvSpPr>
-            <a:spLocks noChangeShapeType="1"/>
-          </p:cNvSpPr>
-          <p:nvPr/>
-        </p:nvSpPr>
-        <p:spPr bwMode="auto">
-          <a:xfrm>
-            <a:off x="3140075" y="2290762"/>
-            <a:ext cx="457200" cy="0"/>
-          </a:xfrm>
-          <a:prstGeom prst="line">
-            <a:avLst/>
-          </a:prstGeom>
-          <a:noFill/>
-          <a:ln w="9525">
-            <a:solidFill>
-              <a:schemeClr val="tx1"/>
-            </a:solidFill>
-            <a:round/>
-            <a:headEnd/>
-            <a:tailEnd type="triangle" w="med" len="med"/>
-          </a:ln>
-        </p:spPr>
-        <p:txBody>
-          <a:bodyPr/>
-          <a:lstStyle/>
-          <a:p>
-            <a:endParaRPr lang="en-US"/>
-          </a:p>
-        </p:txBody>
-      </p:sp>
-      <p:sp>
-        <p:nvSpPr>
-          <p:cNvPr id="49" name="Text Box 8">
-            <a:extLst>
-              <a:ext uri="{FF2B5EF4-FFF2-40B4-BE49-F238E27FC236}">
-                <a16:creationId xmlns:a16="http://schemas.microsoft.com/office/drawing/2014/main" id="{B784DA10-4EAB-4DC3-AEF5-68E32F499B08}"/>
-              </a:ext>
-            </a:extLst>
-          </p:cNvPr>
-          <p:cNvSpPr txBox="1">
-            <a:spLocks noChangeArrowheads="1"/>
-          </p:cNvSpPr>
-          <p:nvPr/>
-        </p:nvSpPr>
-        <p:spPr bwMode="auto">
-          <a:xfrm>
-            <a:off x="3749675" y="2124075"/>
-            <a:ext cx="946150" cy="376237"/>
-          </a:xfrm>
-          <a:prstGeom prst="rect">
-            <a:avLst/>
-          </a:prstGeom>
-          <a:solidFill>
-            <a:srgbClr val="FFFF99"/>
-          </a:solidFill>
-          <a:ln w="9525">
-            <a:solidFill>
-              <a:schemeClr val="tx1"/>
-            </a:solidFill>
-            <a:miter lim="800000"/>
-            <a:headEnd/>
-            <a:tailEnd/>
-          </a:ln>
-        </p:spPr>
-        <p:txBody>
-          <a:bodyPr wrap="none">
-            <a:spAutoFit/>
-          </a:bodyPr>
-          <a:lstStyle/>
-          <a:p>
-            <a:r>
-              <a:rPr lang="en-US" altLang="zh-TW" b="1">
-                <a:latin typeface="Consolas" pitchFamily="49" charset="0"/>
-              </a:rPr>
-              <a:t>bind()</a:t>
-            </a:r>
-          </a:p>
-        </p:txBody>
-      </p:sp>
-      <p:sp>
-        <p:nvSpPr>
-          <p:cNvPr id="66" name="Line 9">
-            <a:extLst>
-              <a:ext uri="{FF2B5EF4-FFF2-40B4-BE49-F238E27FC236}">
-                <a16:creationId xmlns:a16="http://schemas.microsoft.com/office/drawing/2014/main" id="{894643CD-8472-432D-A408-19FCC4A922F6}"/>
-              </a:ext>
-            </a:extLst>
-          </p:cNvPr>
-          <p:cNvSpPr>
-            <a:spLocks noChangeShapeType="1"/>
-          </p:cNvSpPr>
-          <p:nvPr/>
-        </p:nvSpPr>
-        <p:spPr bwMode="auto">
-          <a:xfrm>
-            <a:off x="4892675" y="2290762"/>
-            <a:ext cx="457200" cy="0"/>
-          </a:xfrm>
-          <a:prstGeom prst="line">
-            <a:avLst/>
-          </a:prstGeom>
-          <a:noFill/>
-          <a:ln w="9525">
-            <a:solidFill>
-              <a:schemeClr val="tx1"/>
-            </a:solidFill>
-            <a:round/>
-            <a:headEnd/>
-            <a:tailEnd type="triangle" w="med" len="med"/>
-          </a:ln>
-        </p:spPr>
-        <p:txBody>
-          <a:bodyPr/>
-          <a:lstStyle/>
-          <a:p>
-            <a:endParaRPr lang="en-US"/>
-          </a:p>
-        </p:txBody>
-      </p:sp>
-      <p:sp>
-        <p:nvSpPr>
-          <p:cNvPr id="67" name="Text Box 11">
-            <a:extLst>
-              <a:ext uri="{FF2B5EF4-FFF2-40B4-BE49-F238E27FC236}">
-                <a16:creationId xmlns:a16="http://schemas.microsoft.com/office/drawing/2014/main" id="{1294C81E-8DD3-4B24-B6A2-9E172AC18ACB}"/>
-              </a:ext>
-            </a:extLst>
-          </p:cNvPr>
-          <p:cNvSpPr txBox="1">
-            <a:spLocks noChangeArrowheads="1"/>
-          </p:cNvSpPr>
-          <p:nvPr/>
-        </p:nvSpPr>
-        <p:spPr bwMode="auto">
-          <a:xfrm>
-            <a:off x="1692275" y="2819400"/>
-            <a:ext cx="1276350" cy="527050"/>
-          </a:xfrm>
-          <a:prstGeom prst="rect">
-            <a:avLst/>
-          </a:prstGeom>
-          <a:solidFill>
-            <a:schemeClr val="bg1"/>
-          </a:solidFill>
-          <a:ln w="9525">
-            <a:solidFill>
-              <a:srgbClr val="FF3300"/>
-            </a:solidFill>
-            <a:miter lim="800000"/>
-            <a:headEnd/>
-            <a:tailEnd/>
-          </a:ln>
-        </p:spPr>
-        <p:txBody>
-          <a:bodyPr wrap="none">
-            <a:spAutoFit/>
-          </a:bodyPr>
-          <a:lstStyle/>
-          <a:p>
-            <a:r>
-              <a:rPr lang="en-US" altLang="zh-TW" sz="1400" b="1">
-                <a:latin typeface="Consolas" pitchFamily="49" charset="0"/>
-              </a:rPr>
-              <a:t>Server main</a:t>
-            </a:r>
-          </a:p>
-          <a:p>
-            <a:r>
-              <a:rPr lang="en-US" altLang="zh-TW" sz="1400" b="1">
-                <a:latin typeface="Consolas" pitchFamily="49" charset="0"/>
-              </a:rPr>
-              <a:t>flow chart</a:t>
-            </a:r>
-          </a:p>
-        </p:txBody>
-      </p:sp>
-      <p:sp>
-        <p:nvSpPr>
-          <p:cNvPr id="68" name="Text Box 12">
-            <a:extLst>
-              <a:ext uri="{FF2B5EF4-FFF2-40B4-BE49-F238E27FC236}">
-                <a16:creationId xmlns:a16="http://schemas.microsoft.com/office/drawing/2014/main" id="{A83E6211-FE6F-4BC2-9279-501DB073F7D4}"/>
-              </a:ext>
-            </a:extLst>
-          </p:cNvPr>
-          <p:cNvSpPr txBox="1">
-            <a:spLocks noChangeArrowheads="1"/>
-          </p:cNvSpPr>
-          <p:nvPr/>
-        </p:nvSpPr>
-        <p:spPr bwMode="auto">
-          <a:xfrm>
-            <a:off x="7407275" y="2138362"/>
-            <a:ext cx="1196975" cy="376238"/>
-          </a:xfrm>
-          <a:prstGeom prst="rect">
-            <a:avLst/>
-          </a:prstGeom>
-          <a:solidFill>
-            <a:srgbClr val="FFFF99"/>
-          </a:solidFill>
-          <a:ln w="9525">
-            <a:solidFill>
-              <a:schemeClr val="tx1"/>
-            </a:solidFill>
-            <a:miter lim="800000"/>
-            <a:headEnd/>
-            <a:tailEnd/>
-          </a:ln>
-        </p:spPr>
-        <p:txBody>
-          <a:bodyPr wrap="none">
-            <a:spAutoFit/>
-          </a:bodyPr>
-          <a:lstStyle/>
-          <a:p>
-            <a:r>
-              <a:rPr lang="en-US" altLang="zh-TW" b="1" dirty="0">
-                <a:latin typeface="Consolas" pitchFamily="49" charset="0"/>
-              </a:rPr>
-              <a:t>accept()</a:t>
-            </a:r>
-          </a:p>
-        </p:txBody>
-      </p:sp>
-      <p:sp>
-        <p:nvSpPr>
-          <p:cNvPr id="69" name="Text Box 13">
-            <a:extLst>
-              <a:ext uri="{FF2B5EF4-FFF2-40B4-BE49-F238E27FC236}">
-                <a16:creationId xmlns:a16="http://schemas.microsoft.com/office/drawing/2014/main" id="{0589CC9B-2FAC-40C5-AE4B-E2A07D041A21}"/>
-              </a:ext>
-            </a:extLst>
-          </p:cNvPr>
-          <p:cNvSpPr txBox="1">
-            <a:spLocks noChangeArrowheads="1"/>
-          </p:cNvSpPr>
-          <p:nvPr/>
-        </p:nvSpPr>
-        <p:spPr bwMode="auto">
-          <a:xfrm>
-            <a:off x="7426325" y="4687887"/>
-            <a:ext cx="1657350" cy="650875"/>
-          </a:xfrm>
-          <a:prstGeom prst="rect">
-            <a:avLst/>
-          </a:prstGeom>
-          <a:solidFill>
-            <a:srgbClr val="FFCCFF"/>
-          </a:solidFill>
-          <a:ln w="9525">
-            <a:solidFill>
-              <a:schemeClr val="tx1"/>
-            </a:solidFill>
-            <a:miter lim="800000"/>
-            <a:headEnd/>
-            <a:tailEnd/>
-          </a:ln>
-        </p:spPr>
-        <p:txBody>
-          <a:bodyPr>
-            <a:spAutoFit/>
-          </a:bodyPr>
-          <a:lstStyle/>
-          <a:p>
-            <a:r>
-              <a:rPr lang="en-US" altLang="zh-TW" b="1">
-                <a:latin typeface="Consolas" pitchFamily="49" charset="0"/>
-              </a:rPr>
-              <a:t>Application-layer code</a:t>
-            </a:r>
-          </a:p>
-        </p:txBody>
-      </p:sp>
-      <p:sp>
-        <p:nvSpPr>
-          <p:cNvPr id="70" name="Line 14">
-            <a:extLst>
-              <a:ext uri="{FF2B5EF4-FFF2-40B4-BE49-F238E27FC236}">
-                <a16:creationId xmlns:a16="http://schemas.microsoft.com/office/drawing/2014/main" id="{855F7553-5C12-4AF6-93CE-579CDDCE9A90}"/>
-              </a:ext>
-            </a:extLst>
-          </p:cNvPr>
-          <p:cNvSpPr>
-            <a:spLocks noChangeShapeType="1"/>
-          </p:cNvSpPr>
-          <p:nvPr/>
-        </p:nvSpPr>
-        <p:spPr bwMode="auto">
-          <a:xfrm>
-            <a:off x="6797675" y="2290762"/>
-            <a:ext cx="457200" cy="0"/>
-          </a:xfrm>
-          <a:prstGeom prst="line">
-            <a:avLst/>
-          </a:prstGeom>
-          <a:noFill/>
-          <a:ln w="9525">
-            <a:solidFill>
-              <a:schemeClr val="tx1"/>
-            </a:solidFill>
-            <a:round/>
-            <a:headEnd/>
-            <a:tailEnd type="triangle" w="med" len="med"/>
-          </a:ln>
-        </p:spPr>
-        <p:txBody>
-          <a:bodyPr/>
-          <a:lstStyle/>
-          <a:p>
-            <a:endParaRPr lang="en-US"/>
-          </a:p>
-        </p:txBody>
-      </p:sp>
-      <p:sp>
-        <p:nvSpPr>
-          <p:cNvPr id="71" name="Text Box 18">
-            <a:extLst>
-              <a:ext uri="{FF2B5EF4-FFF2-40B4-BE49-F238E27FC236}">
-                <a16:creationId xmlns:a16="http://schemas.microsoft.com/office/drawing/2014/main" id="{01751F0C-58E5-4F6C-BAFA-C8D6CFAC3FBE}"/>
-              </a:ext>
-            </a:extLst>
-          </p:cNvPr>
-          <p:cNvSpPr txBox="1">
-            <a:spLocks noChangeArrowheads="1"/>
-          </p:cNvSpPr>
-          <p:nvPr/>
-        </p:nvSpPr>
-        <p:spPr bwMode="auto">
-          <a:xfrm>
-            <a:off x="4587875" y="3362325"/>
-            <a:ext cx="3917950" cy="376237"/>
-          </a:xfrm>
-          <a:prstGeom prst="rect">
-            <a:avLst/>
-          </a:prstGeom>
-          <a:solidFill>
-            <a:srgbClr val="FFFF99"/>
-          </a:solidFill>
-          <a:ln w="9525">
-            <a:solidFill>
-              <a:schemeClr val="tx1"/>
-            </a:solidFill>
-            <a:miter lim="800000"/>
-            <a:headEnd/>
-            <a:tailEnd/>
-          </a:ln>
-        </p:spPr>
-        <p:txBody>
-          <a:bodyPr>
-            <a:spAutoFit/>
-          </a:bodyPr>
-          <a:lstStyle/>
-          <a:p>
-            <a:pPr algn="ctr"/>
-            <a:r>
-              <a:rPr lang="en-US" altLang="zh-TW" b="1" dirty="0">
-                <a:latin typeface="Consolas" pitchFamily="49" charset="0"/>
-              </a:rPr>
-              <a:t>fork() or </a:t>
-            </a:r>
-            <a:r>
-              <a:rPr lang="en-US" altLang="zh-TW" b="1" dirty="0" err="1">
-                <a:latin typeface="Consolas" pitchFamily="49" charset="0"/>
-              </a:rPr>
-              <a:t>pthread_create</a:t>
-            </a:r>
-            <a:r>
-              <a:rPr lang="en-US" altLang="zh-TW" b="1" dirty="0">
-                <a:latin typeface="Consolas" pitchFamily="49" charset="0"/>
-              </a:rPr>
-              <a:t>()</a:t>
-            </a:r>
-          </a:p>
-        </p:txBody>
-      </p:sp>
-      <p:sp>
-        <p:nvSpPr>
-          <p:cNvPr id="72" name="Line 21">
-            <a:extLst>
-              <a:ext uri="{FF2B5EF4-FFF2-40B4-BE49-F238E27FC236}">
-                <a16:creationId xmlns:a16="http://schemas.microsoft.com/office/drawing/2014/main" id="{5048673B-FD5E-4AC6-BDFC-7342D119D6F6}"/>
-              </a:ext>
-            </a:extLst>
-          </p:cNvPr>
-          <p:cNvSpPr>
-            <a:spLocks noChangeShapeType="1"/>
-          </p:cNvSpPr>
-          <p:nvPr/>
-        </p:nvSpPr>
-        <p:spPr bwMode="auto">
-          <a:xfrm flipH="1">
-            <a:off x="5749925" y="5033962"/>
-            <a:ext cx="1600200" cy="0"/>
-          </a:xfrm>
-          <a:prstGeom prst="line">
-            <a:avLst/>
-          </a:prstGeom>
-          <a:noFill/>
-          <a:ln w="9525">
-            <a:solidFill>
-              <a:schemeClr val="tx1"/>
-            </a:solidFill>
-            <a:round/>
-            <a:headEnd/>
-            <a:tailEnd type="triangle" w="med" len="med"/>
-          </a:ln>
-        </p:spPr>
-        <p:txBody>
-          <a:bodyPr anchor="ctr"/>
-          <a:lstStyle/>
-          <a:p>
-            <a:endParaRPr lang="en-US"/>
-          </a:p>
-        </p:txBody>
-      </p:sp>
-      <p:sp>
-        <p:nvSpPr>
-          <p:cNvPr id="73" name="Text Box 16">
-            <a:extLst>
-              <a:ext uri="{FF2B5EF4-FFF2-40B4-BE49-F238E27FC236}">
-                <a16:creationId xmlns:a16="http://schemas.microsoft.com/office/drawing/2014/main" id="{A7A49A50-3CA3-4FA5-B08A-C3380D8899DE}"/>
-              </a:ext>
-            </a:extLst>
-          </p:cNvPr>
-          <p:cNvSpPr txBox="1">
-            <a:spLocks noChangeArrowheads="1"/>
-          </p:cNvSpPr>
-          <p:nvPr/>
-        </p:nvSpPr>
-        <p:spPr bwMode="auto">
-          <a:xfrm>
-            <a:off x="6030913" y="4795837"/>
-            <a:ext cx="1090612" cy="466725"/>
-          </a:xfrm>
-          <a:prstGeom prst="rect">
-            <a:avLst/>
-          </a:prstGeom>
-          <a:solidFill>
-            <a:schemeClr val="bg1"/>
-          </a:solidFill>
-          <a:ln w="9525">
-            <a:solidFill>
-              <a:schemeClr val="tx1"/>
-            </a:solidFill>
-            <a:miter lim="800000"/>
-            <a:headEnd/>
-            <a:tailEnd/>
-          </a:ln>
-        </p:spPr>
-        <p:txBody>
-          <a:bodyPr>
-            <a:spAutoFit/>
-          </a:bodyPr>
-          <a:lstStyle/>
-          <a:p>
-            <a:r>
-              <a:rPr lang="en-US" altLang="zh-TW" sz="1200" b="1">
-                <a:latin typeface="Consolas" pitchFamily="49" charset="0"/>
-              </a:rPr>
-              <a:t>connection is closed.</a:t>
-            </a:r>
-          </a:p>
-        </p:txBody>
-      </p:sp>
-      <p:sp>
-        <p:nvSpPr>
-          <p:cNvPr id="74" name="Text Box 23">
-            <a:extLst>
-              <a:ext uri="{FF2B5EF4-FFF2-40B4-BE49-F238E27FC236}">
-                <a16:creationId xmlns:a16="http://schemas.microsoft.com/office/drawing/2014/main" id="{D77CC3D0-5ADF-4F8F-A4FF-172DBD3C2AD8}"/>
-              </a:ext>
-            </a:extLst>
-          </p:cNvPr>
-          <p:cNvSpPr txBox="1">
-            <a:spLocks noChangeArrowheads="1"/>
-          </p:cNvSpPr>
-          <p:nvPr/>
-        </p:nvSpPr>
-        <p:spPr bwMode="auto">
-          <a:xfrm>
-            <a:off x="3692525" y="4652962"/>
-            <a:ext cx="1949450" cy="650875"/>
-          </a:xfrm>
-          <a:prstGeom prst="rect">
-            <a:avLst/>
-          </a:prstGeom>
-          <a:solidFill>
-            <a:srgbClr val="FFFF99"/>
-          </a:solidFill>
-          <a:ln w="9525">
-            <a:solidFill>
-              <a:schemeClr val="tx1"/>
-            </a:solidFill>
-            <a:miter lim="800000"/>
-            <a:headEnd/>
-            <a:tailEnd/>
-          </a:ln>
-        </p:spPr>
-        <p:txBody>
-          <a:bodyPr wrap="none">
-            <a:spAutoFit/>
-          </a:bodyPr>
-          <a:lstStyle/>
-          <a:p>
-            <a:r>
-              <a:rPr lang="en-US" altLang="zh-TW" b="1">
-                <a:latin typeface="Consolas" pitchFamily="49" charset="0"/>
-              </a:rPr>
-              <a:t>exit() or</a:t>
-            </a:r>
-          </a:p>
-          <a:p>
-            <a:r>
-              <a:rPr lang="en-US" altLang="zh-TW" b="1">
-                <a:latin typeface="Consolas" pitchFamily="49" charset="0"/>
-              </a:rPr>
-              <a:t>pthread_exit()</a:t>
-            </a:r>
-          </a:p>
-        </p:txBody>
-      </p:sp>
-      <p:sp>
-        <p:nvSpPr>
-          <p:cNvPr id="75" name="Line 24">
-            <a:extLst>
-              <a:ext uri="{FF2B5EF4-FFF2-40B4-BE49-F238E27FC236}">
-                <a16:creationId xmlns:a16="http://schemas.microsoft.com/office/drawing/2014/main" id="{5E6552E1-DE21-473E-B000-FE76B12F5935}"/>
-              </a:ext>
-            </a:extLst>
-          </p:cNvPr>
-          <p:cNvSpPr>
-            <a:spLocks noChangeShapeType="1"/>
-          </p:cNvSpPr>
-          <p:nvPr/>
-        </p:nvSpPr>
-        <p:spPr bwMode="auto">
-          <a:xfrm>
-            <a:off x="8016875" y="3814762"/>
-            <a:ext cx="0" cy="838200"/>
-          </a:xfrm>
-          <a:prstGeom prst="line">
-            <a:avLst/>
-          </a:prstGeom>
-          <a:noFill/>
-          <a:ln w="9525">
-            <a:solidFill>
-              <a:schemeClr val="tx1"/>
-            </a:solidFill>
-            <a:round/>
-            <a:headEnd/>
-            <a:tailEnd type="triangle" w="med" len="med"/>
-          </a:ln>
-        </p:spPr>
-        <p:txBody>
-          <a:bodyPr anchor="ctr"/>
-          <a:lstStyle/>
-          <a:p>
-            <a:endParaRPr lang="en-US"/>
-          </a:p>
-        </p:txBody>
-      </p:sp>
-      <p:sp>
-        <p:nvSpPr>
-          <p:cNvPr id="76" name="Text Box 25">
-            <a:extLst>
-              <a:ext uri="{FF2B5EF4-FFF2-40B4-BE49-F238E27FC236}">
-                <a16:creationId xmlns:a16="http://schemas.microsoft.com/office/drawing/2014/main" id="{32F94719-8F28-4DFF-A14E-982864C855B1}"/>
-              </a:ext>
-            </a:extLst>
-          </p:cNvPr>
-          <p:cNvSpPr txBox="1">
-            <a:spLocks noChangeArrowheads="1"/>
-          </p:cNvSpPr>
-          <p:nvPr/>
-        </p:nvSpPr>
-        <p:spPr bwMode="auto">
-          <a:xfrm>
-            <a:off x="7635875" y="4043362"/>
-            <a:ext cx="685800" cy="284163"/>
-          </a:xfrm>
-          <a:prstGeom prst="rect">
-            <a:avLst/>
-          </a:prstGeom>
-          <a:solidFill>
-            <a:schemeClr val="bg1"/>
-          </a:solidFill>
-          <a:ln w="9525">
-            <a:solidFill>
-              <a:schemeClr val="tx1"/>
-            </a:solidFill>
-            <a:miter lim="800000"/>
-            <a:headEnd/>
-            <a:tailEnd/>
-          </a:ln>
-        </p:spPr>
-        <p:txBody>
-          <a:bodyPr>
-            <a:spAutoFit/>
-          </a:bodyPr>
-          <a:lstStyle/>
-          <a:p>
-            <a:r>
-              <a:rPr lang="en-US" altLang="zh-TW" sz="1200" b="1">
-                <a:latin typeface="Consolas" pitchFamily="49" charset="0"/>
-              </a:rPr>
-              <a:t>child</a:t>
-            </a:r>
-          </a:p>
-        </p:txBody>
-      </p:sp>
-      <p:sp>
-        <p:nvSpPr>
-          <p:cNvPr id="77" name="Line 26">
-            <a:extLst>
-              <a:ext uri="{FF2B5EF4-FFF2-40B4-BE49-F238E27FC236}">
-                <a16:creationId xmlns:a16="http://schemas.microsoft.com/office/drawing/2014/main" id="{CE17BBD3-09CA-4E6B-8347-B3C285BA6A10}"/>
-              </a:ext>
-            </a:extLst>
-          </p:cNvPr>
-          <p:cNvSpPr>
-            <a:spLocks noChangeShapeType="1"/>
-          </p:cNvSpPr>
-          <p:nvPr/>
-        </p:nvSpPr>
-        <p:spPr bwMode="auto">
-          <a:xfrm>
-            <a:off x="8016875" y="2595562"/>
-            <a:ext cx="0" cy="762000"/>
-          </a:xfrm>
-          <a:prstGeom prst="line">
-            <a:avLst/>
-          </a:prstGeom>
-          <a:noFill/>
-          <a:ln w="9525">
-            <a:solidFill>
-              <a:schemeClr val="tx1"/>
-            </a:solidFill>
-            <a:round/>
-            <a:headEnd/>
-            <a:tailEnd type="triangle" w="med" len="med"/>
-          </a:ln>
-        </p:spPr>
-        <p:txBody>
-          <a:bodyPr anchor="ctr"/>
-          <a:lstStyle/>
-          <a:p>
-            <a:endParaRPr lang="en-US"/>
-          </a:p>
-        </p:txBody>
-      </p:sp>
-      <p:sp>
-        <p:nvSpPr>
-          <p:cNvPr id="78" name="Line 27">
-            <a:extLst>
-              <a:ext uri="{FF2B5EF4-FFF2-40B4-BE49-F238E27FC236}">
-                <a16:creationId xmlns:a16="http://schemas.microsoft.com/office/drawing/2014/main" id="{9FBC52DC-90B9-4B97-9011-B26D7EAD8B2E}"/>
-              </a:ext>
-            </a:extLst>
-          </p:cNvPr>
-          <p:cNvSpPr>
-            <a:spLocks noChangeShapeType="1"/>
-          </p:cNvSpPr>
-          <p:nvPr/>
-        </p:nvSpPr>
-        <p:spPr bwMode="auto">
-          <a:xfrm flipH="1">
-            <a:off x="8626475" y="2290762"/>
-            <a:ext cx="381000" cy="0"/>
-          </a:xfrm>
-          <a:prstGeom prst="line">
-            <a:avLst/>
-          </a:prstGeom>
-          <a:noFill/>
-          <a:ln w="9525">
-            <a:solidFill>
-              <a:schemeClr val="tx1"/>
-            </a:solidFill>
-            <a:round/>
-            <a:headEnd/>
-            <a:tailEnd type="triangle" w="med" len="med"/>
-          </a:ln>
-        </p:spPr>
-        <p:txBody>
-          <a:bodyPr anchor="ctr"/>
-          <a:lstStyle/>
-          <a:p>
-            <a:endParaRPr lang="en-US"/>
-          </a:p>
-        </p:txBody>
-      </p:sp>
-      <p:sp>
-        <p:nvSpPr>
-          <p:cNvPr id="79" name="Line 28">
-            <a:extLst>
-              <a:ext uri="{FF2B5EF4-FFF2-40B4-BE49-F238E27FC236}">
-                <a16:creationId xmlns:a16="http://schemas.microsoft.com/office/drawing/2014/main" id="{85CC7AD9-D641-426B-A611-843784356599}"/>
-              </a:ext>
-            </a:extLst>
-          </p:cNvPr>
-          <p:cNvSpPr>
-            <a:spLocks noChangeShapeType="1"/>
-          </p:cNvSpPr>
-          <p:nvPr/>
-        </p:nvSpPr>
-        <p:spPr bwMode="auto">
-          <a:xfrm>
-            <a:off x="9007475" y="2290762"/>
-            <a:ext cx="0" cy="1219200"/>
-          </a:xfrm>
-          <a:prstGeom prst="line">
-            <a:avLst/>
-          </a:prstGeom>
-          <a:noFill/>
-          <a:ln w="9525">
-            <a:solidFill>
-              <a:schemeClr val="tx1"/>
-            </a:solidFill>
-            <a:round/>
-            <a:headEnd/>
-            <a:tailEnd/>
-          </a:ln>
-        </p:spPr>
-        <p:txBody>
-          <a:bodyPr anchor="ctr"/>
-          <a:lstStyle/>
-          <a:p>
-            <a:endParaRPr lang="en-US"/>
-          </a:p>
-        </p:txBody>
-      </p:sp>
-      <p:sp>
-        <p:nvSpPr>
-          <p:cNvPr id="80" name="Line 29">
-            <a:extLst>
-              <a:ext uri="{FF2B5EF4-FFF2-40B4-BE49-F238E27FC236}">
-                <a16:creationId xmlns:a16="http://schemas.microsoft.com/office/drawing/2014/main" id="{08C4E711-3A7B-450E-BA21-AFE77C36DF71}"/>
-              </a:ext>
-            </a:extLst>
-          </p:cNvPr>
-          <p:cNvSpPr>
-            <a:spLocks noChangeShapeType="1"/>
-          </p:cNvSpPr>
-          <p:nvPr/>
-        </p:nvSpPr>
-        <p:spPr bwMode="auto">
-          <a:xfrm>
-            <a:off x="8550275" y="3509962"/>
-            <a:ext cx="457200" cy="0"/>
-          </a:xfrm>
-          <a:prstGeom prst="line">
-            <a:avLst/>
-          </a:prstGeom>
-          <a:noFill/>
-          <a:ln w="9525">
-            <a:solidFill>
-              <a:schemeClr val="tx1"/>
-            </a:solidFill>
-            <a:round/>
-            <a:headEnd/>
-            <a:tailEnd/>
-          </a:ln>
-        </p:spPr>
-        <p:txBody>
-          <a:bodyPr anchor="ctr"/>
-          <a:lstStyle/>
-          <a:p>
-            <a:endParaRPr lang="en-US"/>
-          </a:p>
-        </p:txBody>
-      </p:sp>
-      <p:sp>
-        <p:nvSpPr>
-          <p:cNvPr id="81" name="Text Box 30">
-            <a:extLst>
-              <a:ext uri="{FF2B5EF4-FFF2-40B4-BE49-F238E27FC236}">
-                <a16:creationId xmlns:a16="http://schemas.microsoft.com/office/drawing/2014/main" id="{2F07CAF5-4724-46FC-BA4A-6DD2C34C7212}"/>
-              </a:ext>
-            </a:extLst>
-          </p:cNvPr>
-          <p:cNvSpPr txBox="1">
-            <a:spLocks noChangeArrowheads="1"/>
-          </p:cNvSpPr>
-          <p:nvPr/>
-        </p:nvSpPr>
-        <p:spPr bwMode="auto">
-          <a:xfrm>
-            <a:off x="8550275" y="2595562"/>
-            <a:ext cx="914400" cy="284163"/>
-          </a:xfrm>
-          <a:prstGeom prst="rect">
-            <a:avLst/>
-          </a:prstGeom>
-          <a:solidFill>
-            <a:schemeClr val="bg1"/>
-          </a:solidFill>
-          <a:ln w="9525">
-            <a:solidFill>
-              <a:schemeClr val="tx1"/>
-            </a:solidFill>
-            <a:miter lim="800000"/>
-            <a:headEnd/>
-            <a:tailEnd/>
-          </a:ln>
-        </p:spPr>
-        <p:txBody>
-          <a:bodyPr>
-            <a:spAutoFit/>
-          </a:bodyPr>
-          <a:lstStyle/>
-          <a:p>
-            <a:r>
-              <a:rPr lang="en-US" altLang="zh-TW" sz="1200" b="1">
-                <a:latin typeface="Consolas" pitchFamily="49" charset="0"/>
-              </a:rPr>
-              <a:t>parent</a:t>
-            </a:r>
-          </a:p>
-        </p:txBody>
-      </p:sp>
-      <p:sp>
-        <p:nvSpPr>
-          <p:cNvPr id="82" name="Text Box 31">
-            <a:extLst>
-              <a:ext uri="{FF2B5EF4-FFF2-40B4-BE49-F238E27FC236}">
-                <a16:creationId xmlns:a16="http://schemas.microsoft.com/office/drawing/2014/main" id="{4F08A940-1BE8-4B41-A27D-F3960F52DAAD}"/>
-              </a:ext>
-            </a:extLst>
-          </p:cNvPr>
-          <p:cNvSpPr txBox="1">
-            <a:spLocks noChangeArrowheads="1"/>
-          </p:cNvSpPr>
-          <p:nvPr/>
-        </p:nvSpPr>
-        <p:spPr bwMode="auto">
-          <a:xfrm>
-            <a:off x="1692275" y="4576762"/>
-            <a:ext cx="1600200" cy="739775"/>
-          </a:xfrm>
-          <a:prstGeom prst="rect">
-            <a:avLst/>
-          </a:prstGeom>
-          <a:solidFill>
-            <a:schemeClr val="bg1"/>
-          </a:solidFill>
-          <a:ln w="9525">
-            <a:solidFill>
-              <a:srgbClr val="FF3300"/>
-            </a:solidFill>
-            <a:miter lim="800000"/>
-            <a:headEnd/>
-            <a:tailEnd/>
-          </a:ln>
-        </p:spPr>
-        <p:txBody>
-          <a:bodyPr>
-            <a:spAutoFit/>
-          </a:bodyPr>
-          <a:lstStyle/>
-          <a:p>
-            <a:r>
-              <a:rPr lang="en-US" altLang="zh-TW" sz="1400" b="1">
-                <a:latin typeface="Consolas" pitchFamily="49" charset="0"/>
-              </a:rPr>
-              <a:t>Server client-handler flow chart</a:t>
-            </a:r>
-          </a:p>
-        </p:txBody>
-      </p:sp>
-      <p:sp>
-        <p:nvSpPr>
-          <p:cNvPr id="83" name="Text Box 33">
-            <a:extLst>
-              <a:ext uri="{FF2B5EF4-FFF2-40B4-BE49-F238E27FC236}">
-                <a16:creationId xmlns:a16="http://schemas.microsoft.com/office/drawing/2014/main" id="{028C2B4C-9E72-4C06-99C3-6500F58E37B6}"/>
-              </a:ext>
-            </a:extLst>
-          </p:cNvPr>
-          <p:cNvSpPr txBox="1">
-            <a:spLocks noChangeArrowheads="1"/>
-          </p:cNvSpPr>
-          <p:nvPr/>
-        </p:nvSpPr>
-        <p:spPr bwMode="auto">
-          <a:xfrm>
-            <a:off x="6492875" y="2671762"/>
-            <a:ext cx="1395413" cy="466725"/>
-          </a:xfrm>
-          <a:prstGeom prst="rect">
-            <a:avLst/>
-          </a:prstGeom>
-          <a:solidFill>
-            <a:schemeClr val="bg1"/>
-          </a:solidFill>
-          <a:ln w="9525">
-            <a:solidFill>
-              <a:schemeClr val="tx1"/>
-            </a:solidFill>
-            <a:miter lim="800000"/>
-            <a:headEnd/>
-            <a:tailEnd/>
-          </a:ln>
-        </p:spPr>
-        <p:txBody>
-          <a:bodyPr>
-            <a:spAutoFit/>
-          </a:bodyPr>
-          <a:lstStyle/>
-          <a:p>
-            <a:r>
-              <a:rPr lang="en-US" altLang="zh-TW" sz="1200" b="1">
-                <a:latin typeface="Consolas" pitchFamily="49" charset="0"/>
-              </a:rPr>
-              <a:t>New connection arrives</a:t>
-            </a:r>
-          </a:p>
-        </p:txBody>
-      </p:sp>
-    </p:spTree>
-    <p:extLst>
-      <p:ext uri="{BB962C8B-B14F-4D97-AF65-F5344CB8AC3E}">
-        <p14:creationId xmlns:p14="http://schemas.microsoft.com/office/powerpoint/2010/main" val="1729902151"/>
-      </p:ext>
-    </p:extLst>
-  </p:cSld>
-  <p:clrMapOvr>
-    <a:masterClrMapping/>
-  </p:clrMapOvr>
 </p:sld>
 </file>
 

--- a/tutorial/T02/tut02.pptx
+++ b/tutorial/T02/tut02.pptx
@@ -2342,7 +2342,7 @@
           <a:p>
             <a:fld id="{E03FF167-5468-407F-BF08-399F401F3E28}" type="datetimeFigureOut">
               <a:rPr lang="en-HK" smtClean="0"/>
-              <a:t>15/1/2025</a:t>
+              <a:t>16/1/2025</a:t>
             </a:fld>
             <a:endParaRPr lang="en-HK"/>
           </a:p>
@@ -4593,7 +4593,7 @@
           <a:p>
             <a:fld id="{2425905D-C0C4-D040-B3F5-79CCA23FA4EB}" type="datetimeFigureOut">
               <a:rPr lang="en-US" smtClean="0"/>
-              <a:t>1/15/2025</a:t>
+              <a:t>1/16/2025</a:t>
             </a:fld>
             <a:endParaRPr lang="en-US"/>
           </a:p>
@@ -4793,7 +4793,7 @@
           <a:p>
             <a:fld id="{2425905D-C0C4-D040-B3F5-79CCA23FA4EB}" type="datetimeFigureOut">
               <a:rPr lang="en-US" smtClean="0"/>
-              <a:t>1/15/2025</a:t>
+              <a:t>1/16/2025</a:t>
             </a:fld>
             <a:endParaRPr lang="en-US"/>
           </a:p>
@@ -5003,7 +5003,7 @@
           <a:p>
             <a:fld id="{2425905D-C0C4-D040-B3F5-79CCA23FA4EB}" type="datetimeFigureOut">
               <a:rPr lang="en-US" smtClean="0"/>
-              <a:t>1/15/2025</a:t>
+              <a:t>1/16/2025</a:t>
             </a:fld>
             <a:endParaRPr lang="en-US"/>
           </a:p>
@@ -5203,7 +5203,7 @@
           <a:p>
             <a:fld id="{2425905D-C0C4-D040-B3F5-79CCA23FA4EB}" type="datetimeFigureOut">
               <a:rPr lang="en-US" smtClean="0"/>
-              <a:t>1/15/2025</a:t>
+              <a:t>1/16/2025</a:t>
             </a:fld>
             <a:endParaRPr lang="en-US"/>
           </a:p>
@@ -5479,7 +5479,7 @@
           <a:p>
             <a:fld id="{2425905D-C0C4-D040-B3F5-79CCA23FA4EB}" type="datetimeFigureOut">
               <a:rPr lang="en-US" smtClean="0"/>
-              <a:t>1/15/2025</a:t>
+              <a:t>1/16/2025</a:t>
             </a:fld>
             <a:endParaRPr lang="en-US"/>
           </a:p>
@@ -5747,7 +5747,7 @@
           <a:p>
             <a:fld id="{2425905D-C0C4-D040-B3F5-79CCA23FA4EB}" type="datetimeFigureOut">
               <a:rPr lang="en-US" smtClean="0"/>
-              <a:t>1/15/2025</a:t>
+              <a:t>1/16/2025</a:t>
             </a:fld>
             <a:endParaRPr lang="en-US"/>
           </a:p>
@@ -6162,7 +6162,7 @@
           <a:p>
             <a:fld id="{2425905D-C0C4-D040-B3F5-79CCA23FA4EB}" type="datetimeFigureOut">
               <a:rPr lang="en-US" smtClean="0"/>
-              <a:t>1/15/2025</a:t>
+              <a:t>1/16/2025</a:t>
             </a:fld>
             <a:endParaRPr lang="en-US"/>
           </a:p>
@@ -6304,7 +6304,7 @@
           <a:p>
             <a:fld id="{2425905D-C0C4-D040-B3F5-79CCA23FA4EB}" type="datetimeFigureOut">
               <a:rPr lang="en-US" smtClean="0"/>
-              <a:t>1/15/2025</a:t>
+              <a:t>1/16/2025</a:t>
             </a:fld>
             <a:endParaRPr lang="en-US"/>
           </a:p>
@@ -6417,7 +6417,7 @@
           <a:p>
             <a:fld id="{2425905D-C0C4-D040-B3F5-79CCA23FA4EB}" type="datetimeFigureOut">
               <a:rPr lang="en-US" smtClean="0"/>
-              <a:t>1/15/2025</a:t>
+              <a:t>1/16/2025</a:t>
             </a:fld>
             <a:endParaRPr lang="en-US"/>
           </a:p>
@@ -6730,7 +6730,7 @@
           <a:p>
             <a:fld id="{2425905D-C0C4-D040-B3F5-79CCA23FA4EB}" type="datetimeFigureOut">
               <a:rPr lang="en-US" smtClean="0"/>
-              <a:t>1/15/2025</a:t>
+              <a:t>1/16/2025</a:t>
             </a:fld>
             <a:endParaRPr lang="en-US"/>
           </a:p>
@@ -7019,7 +7019,7 @@
           <a:p>
             <a:fld id="{2425905D-C0C4-D040-B3F5-79CCA23FA4EB}" type="datetimeFigureOut">
               <a:rPr lang="en-US" smtClean="0"/>
-              <a:t>1/15/2025</a:t>
+              <a:t>1/16/2025</a:t>
             </a:fld>
             <a:endParaRPr lang="en-US"/>
           </a:p>
@@ -7262,7 +7262,7 @@
           <a:p>
             <a:fld id="{2425905D-C0C4-D040-B3F5-79CCA23FA4EB}" type="datetimeFigureOut">
               <a:rPr lang="en-US" smtClean="0"/>
-              <a:t>1/15/2025</a:t>
+              <a:t>1/16/2025</a:t>
             </a:fld>
             <a:endParaRPr lang="en-US"/>
           </a:p>
@@ -12503,8 +12503,34 @@
                   <a:srgbClr val="FF0000"/>
                 </a:solidFill>
               </a:rPr>
-              <a:t>11:59:59 p.m., Sat, Jan. 25th</a:t>
-            </a:r>
+              <a:t>11:59:59 p.m., Sat, F</a:t>
+            </a:r>
+            <a:r>
+              <a:rPr lang="en-US" altLang="zh-CN" sz="3200" dirty="0">
+                <a:solidFill>
+                  <a:srgbClr val="FF0000"/>
+                </a:solidFill>
+              </a:rPr>
+              <a:t>eb</a:t>
+            </a:r>
+            <a:r>
+              <a:rPr lang="en-HK" sz="3200" dirty="0">
+                <a:solidFill>
+                  <a:srgbClr val="FF0000"/>
+                </a:solidFill>
+              </a:rPr>
+              <a:t>. </a:t>
+            </a:r>
+            <a:r>
+              <a:rPr lang="en-US" sz="3200" dirty="0">
+                <a:solidFill>
+                  <a:srgbClr val="FF0000"/>
+                </a:solidFill>
+              </a:rPr>
+              <a:t>1st</a:t>
+            </a:r>
+          </a:p>
+          <a:p>
             <a:endParaRPr lang="en-US" sz="3200" dirty="0">
               <a:solidFill>
                 <a:srgbClr val="FF0000"/>
@@ -12542,7 +12568,7 @@
         </p:blipFill>
         <p:spPr>
           <a:xfrm>
-            <a:off x="850988" y="2358734"/>
+            <a:off x="868197" y="2077598"/>
             <a:ext cx="6070917" cy="2926201"/>
           </a:xfrm>
           <a:prstGeom prst="rect">
@@ -12684,7 +12710,7 @@
         </p:nvSpPr>
         <p:spPr>
           <a:xfrm>
-            <a:off x="4962059" y="2660191"/>
+            <a:off x="4971119" y="2367087"/>
             <a:ext cx="517947" cy="184184"/>
           </a:xfrm>
           <a:prstGeom prst="rect">
@@ -12738,8 +12764,8 @@
         </p:nvCxnSpPr>
         <p:spPr>
           <a:xfrm>
-            <a:off x="5371301" y="2877633"/>
-            <a:ext cx="501204" cy="377119"/>
+            <a:off x="5345906" y="2588419"/>
+            <a:ext cx="526599" cy="666333"/>
           </a:xfrm>
           <a:prstGeom prst="straightConnector1">
             <a:avLst/>
@@ -12876,7 +12902,7 @@
         </p:nvSpPr>
         <p:spPr>
           <a:xfrm>
-            <a:off x="4444114" y="2662102"/>
+            <a:off x="4453174" y="2368998"/>
             <a:ext cx="517947" cy="184184"/>
           </a:xfrm>
           <a:prstGeom prst="rect">
@@ -12914,12 +12940,42 @@
           </a:p>
         </p:txBody>
       </p:sp>
+      <p:pic>
+        <p:nvPicPr>
+          <p:cNvPr id="5" name="图片 4">
+            <a:extLst>
+              <a:ext uri="{FF2B5EF4-FFF2-40B4-BE49-F238E27FC236}">
+                <a16:creationId xmlns:a16="http://schemas.microsoft.com/office/drawing/2014/main" id="{354354CD-9609-44F6-A39F-8F04899C6E54}"/>
+              </a:ext>
+            </a:extLst>
+          </p:cNvPr>
+          <p:cNvPicPr>
+            <a:picLocks noChangeAspect="1"/>
+          </p:cNvPicPr>
+          <p:nvPr/>
+        </p:nvPicPr>
+        <p:blipFill>
+          <a:blip r:embed="rId8"/>
+          <a:stretch>
+            <a:fillRect/>
+          </a:stretch>
+        </p:blipFill>
+        <p:spPr>
+          <a:xfrm>
+            <a:off x="945470" y="3341111"/>
+            <a:ext cx="4099442" cy="3325377"/>
+          </a:xfrm>
+          <a:prstGeom prst="rect">
+            <a:avLst/>
+          </a:prstGeom>
+        </p:spPr>
+      </p:pic>
       <p:cxnSp>
         <p:nvCxnSpPr>
-          <p:cNvPr id="30" name="直接箭头连接符 29">
-            <a:extLst>
-              <a:ext uri="{FF2B5EF4-FFF2-40B4-BE49-F238E27FC236}">
-                <a16:creationId xmlns:a16="http://schemas.microsoft.com/office/drawing/2014/main" id="{5BDC46D1-A8B6-4691-85CF-3662F3CFE629}"/>
+          <p:cNvPr id="19" name="直接箭头连接符 18">
+            <a:extLst>
+              <a:ext uri="{FF2B5EF4-FFF2-40B4-BE49-F238E27FC236}">
+                <a16:creationId xmlns:a16="http://schemas.microsoft.com/office/drawing/2014/main" id="{46D395BC-64BB-4891-8E2A-1FACC2727795}"/>
               </a:ext>
             </a:extLst>
           </p:cNvPr>
@@ -12930,8 +12986,8 @@
         </p:nvCxnSpPr>
         <p:spPr>
           <a:xfrm>
-            <a:off x="4744649" y="2877633"/>
-            <a:ext cx="382392" cy="1201998"/>
+            <a:off x="4805895" y="2588419"/>
+            <a:ext cx="321146" cy="1491212"/>
           </a:xfrm>
           <a:prstGeom prst="straightConnector1">
             <a:avLst/>
@@ -12958,6 +13014,110 @@
           </a:fontRef>
         </p:style>
       </p:cxnSp>
+      <p:sp>
+        <p:nvSpPr>
+          <p:cNvPr id="21" name="矩形 20">
+            <a:extLst>
+              <a:ext uri="{FF2B5EF4-FFF2-40B4-BE49-F238E27FC236}">
+                <a16:creationId xmlns:a16="http://schemas.microsoft.com/office/drawing/2014/main" id="{E093CB40-FC0F-4100-8325-83CE6744067B}"/>
+              </a:ext>
+            </a:extLst>
+          </p:cNvPr>
+          <p:cNvSpPr/>
+          <p:nvPr/>
+        </p:nvSpPr>
+        <p:spPr>
+          <a:xfrm>
+            <a:off x="921823" y="3328411"/>
+            <a:ext cx="2589727" cy="184184"/>
+          </a:xfrm>
+          <a:prstGeom prst="rect">
+            <a:avLst/>
+          </a:prstGeom>
+          <a:noFill/>
+          <a:ln>
+            <a:solidFill>
+              <a:schemeClr val="tx1"/>
+            </a:solidFill>
+          </a:ln>
+        </p:spPr>
+        <p:style>
+          <a:lnRef idx="2">
+            <a:schemeClr val="accent1">
+              <a:shade val="50000"/>
+            </a:schemeClr>
+          </a:lnRef>
+          <a:fillRef idx="1">
+            <a:schemeClr val="accent1"/>
+          </a:fillRef>
+          <a:effectRef idx="0">
+            <a:schemeClr val="accent1"/>
+          </a:effectRef>
+          <a:fontRef idx="minor">
+            <a:schemeClr val="lt1"/>
+          </a:fontRef>
+        </p:style>
+        <p:txBody>
+          <a:bodyPr rtlCol="0" anchor="ctr"/>
+          <a:lstStyle/>
+          <a:p>
+            <a:pPr algn="ctr"/>
+            <a:endParaRPr lang="en-HK"/>
+          </a:p>
+        </p:txBody>
+      </p:sp>
+      <p:sp>
+        <p:nvSpPr>
+          <p:cNvPr id="22" name="矩形 21">
+            <a:extLst>
+              <a:ext uri="{FF2B5EF4-FFF2-40B4-BE49-F238E27FC236}">
+                <a16:creationId xmlns:a16="http://schemas.microsoft.com/office/drawing/2014/main" id="{33712862-03A5-4B60-BE61-B1F0AF6D3EE9}"/>
+              </a:ext>
+            </a:extLst>
+          </p:cNvPr>
+          <p:cNvSpPr/>
+          <p:nvPr/>
+        </p:nvSpPr>
+        <p:spPr>
+          <a:xfrm>
+            <a:off x="921823" y="2077598"/>
+            <a:ext cx="2113477" cy="184184"/>
+          </a:xfrm>
+          <a:prstGeom prst="rect">
+            <a:avLst/>
+          </a:prstGeom>
+          <a:noFill/>
+          <a:ln>
+            <a:solidFill>
+              <a:schemeClr val="tx1"/>
+            </a:solidFill>
+          </a:ln>
+        </p:spPr>
+        <p:style>
+          <a:lnRef idx="2">
+            <a:schemeClr val="accent1">
+              <a:shade val="50000"/>
+            </a:schemeClr>
+          </a:lnRef>
+          <a:fillRef idx="1">
+            <a:schemeClr val="accent1"/>
+          </a:fillRef>
+          <a:effectRef idx="0">
+            <a:schemeClr val="accent1"/>
+          </a:effectRef>
+          <a:fontRef idx="minor">
+            <a:schemeClr val="lt1"/>
+          </a:fontRef>
+        </p:style>
+        <p:txBody>
+          <a:bodyPr rtlCol="0" anchor="ctr"/>
+          <a:lstStyle/>
+          <a:p>
+            <a:pPr algn="ctr"/>
+            <a:endParaRPr lang="en-HK"/>
+          </a:p>
+        </p:txBody>
+      </p:sp>
     </p:spTree>
     <p:extLst>
       <p:ext uri="{BB962C8B-B14F-4D97-AF65-F5344CB8AC3E}">

--- a/tutorial/T02/tut02.pptx
+++ b/tutorial/T02/tut02.pptx
@@ -2342,7 +2342,7 @@
           <a:p>
             <a:fld id="{E03FF167-5468-407F-BF08-399F401F3E28}" type="datetimeFigureOut">
               <a:rPr lang="en-HK" smtClean="0"/>
-              <a:t>16/1/2025</a:t>
+              <a:t>8/5/2025</a:t>
             </a:fld>
             <a:endParaRPr lang="en-HK"/>
           </a:p>
@@ -4593,7 +4593,7 @@
           <a:p>
             <a:fld id="{2425905D-C0C4-D040-B3F5-79CCA23FA4EB}" type="datetimeFigureOut">
               <a:rPr lang="en-US" smtClean="0"/>
-              <a:t>1/16/2025</a:t>
+              <a:t>5/8/2025</a:t>
             </a:fld>
             <a:endParaRPr lang="en-US"/>
           </a:p>
@@ -4793,7 +4793,7 @@
           <a:p>
             <a:fld id="{2425905D-C0C4-D040-B3F5-79CCA23FA4EB}" type="datetimeFigureOut">
               <a:rPr lang="en-US" smtClean="0"/>
-              <a:t>1/16/2025</a:t>
+              <a:t>5/8/2025</a:t>
             </a:fld>
             <a:endParaRPr lang="en-US"/>
           </a:p>
@@ -5003,7 +5003,7 @@
           <a:p>
             <a:fld id="{2425905D-C0C4-D040-B3F5-79CCA23FA4EB}" type="datetimeFigureOut">
               <a:rPr lang="en-US" smtClean="0"/>
-              <a:t>1/16/2025</a:t>
+              <a:t>5/8/2025</a:t>
             </a:fld>
             <a:endParaRPr lang="en-US"/>
           </a:p>
@@ -5203,7 +5203,7 @@
           <a:p>
             <a:fld id="{2425905D-C0C4-D040-B3F5-79CCA23FA4EB}" type="datetimeFigureOut">
               <a:rPr lang="en-US" smtClean="0"/>
-              <a:t>1/16/2025</a:t>
+              <a:t>5/8/2025</a:t>
             </a:fld>
             <a:endParaRPr lang="en-US"/>
           </a:p>
@@ -5479,7 +5479,7 @@
           <a:p>
             <a:fld id="{2425905D-C0C4-D040-B3F5-79CCA23FA4EB}" type="datetimeFigureOut">
               <a:rPr lang="en-US" smtClean="0"/>
-              <a:t>1/16/2025</a:t>
+              <a:t>5/8/2025</a:t>
             </a:fld>
             <a:endParaRPr lang="en-US"/>
           </a:p>
@@ -5747,7 +5747,7 @@
           <a:p>
             <a:fld id="{2425905D-C0C4-D040-B3F5-79CCA23FA4EB}" type="datetimeFigureOut">
               <a:rPr lang="en-US" smtClean="0"/>
-              <a:t>1/16/2025</a:t>
+              <a:t>5/8/2025</a:t>
             </a:fld>
             <a:endParaRPr lang="en-US"/>
           </a:p>
@@ -6162,7 +6162,7 @@
           <a:p>
             <a:fld id="{2425905D-C0C4-D040-B3F5-79CCA23FA4EB}" type="datetimeFigureOut">
               <a:rPr lang="en-US" smtClean="0"/>
-              <a:t>1/16/2025</a:t>
+              <a:t>5/8/2025</a:t>
             </a:fld>
             <a:endParaRPr lang="en-US"/>
           </a:p>
@@ -6304,7 +6304,7 @@
           <a:p>
             <a:fld id="{2425905D-C0C4-D040-B3F5-79CCA23FA4EB}" type="datetimeFigureOut">
               <a:rPr lang="en-US" smtClean="0"/>
-              <a:t>1/16/2025</a:t>
+              <a:t>5/8/2025</a:t>
             </a:fld>
             <a:endParaRPr lang="en-US"/>
           </a:p>
@@ -6417,7 +6417,7 @@
           <a:p>
             <a:fld id="{2425905D-C0C4-D040-B3F5-79CCA23FA4EB}" type="datetimeFigureOut">
               <a:rPr lang="en-US" smtClean="0"/>
-              <a:t>1/16/2025</a:t>
+              <a:t>5/8/2025</a:t>
             </a:fld>
             <a:endParaRPr lang="en-US"/>
           </a:p>
@@ -6730,7 +6730,7 @@
           <a:p>
             <a:fld id="{2425905D-C0C4-D040-B3F5-79CCA23FA4EB}" type="datetimeFigureOut">
               <a:rPr lang="en-US" smtClean="0"/>
-              <a:t>1/16/2025</a:t>
+              <a:t>5/8/2025</a:t>
             </a:fld>
             <a:endParaRPr lang="en-US"/>
           </a:p>
@@ -7019,7 +7019,7 @@
           <a:p>
             <a:fld id="{2425905D-C0C4-D040-B3F5-79CCA23FA4EB}" type="datetimeFigureOut">
               <a:rPr lang="en-US" smtClean="0"/>
-              <a:t>1/16/2025</a:t>
+              <a:t>5/8/2025</a:t>
             </a:fld>
             <a:endParaRPr lang="en-US"/>
           </a:p>
@@ -7262,7 +7262,7 @@
           <a:p>
             <a:fld id="{2425905D-C0C4-D040-B3F5-79CCA23FA4EB}" type="datetimeFigureOut">
               <a:rPr lang="en-US" smtClean="0"/>
-              <a:t>1/16/2025</a:t>
+              <a:t>5/8/2025</a:t>
             </a:fld>
             <a:endParaRPr lang="en-US"/>
           </a:p>
@@ -10710,8 +10710,29 @@
                   <a:srgbClr val="FF0000"/>
                 </a:solidFill>
               </a:rPr>
-              <a:t>Throughput = 25MB * 8 / (2s + 1.28333s) = 60.9 Mbps </a:t>
-            </a:r>
+              <a:t>Throughput = 25MB * 8 / 4.5666 =43</a:t>
+            </a:r>
+            <a:r>
+              <a:rPr lang="en-HK" sz="2400">
+                <a:solidFill>
+                  <a:srgbClr val="FF0000"/>
+                </a:solidFill>
+              </a:rPr>
+              <a:t>.8 </a:t>
+            </a:r>
+            <a:r>
+              <a:rPr lang="en-US" sz="2400">
+                <a:solidFill>
+                  <a:srgbClr val="FF0000"/>
+                </a:solidFill>
+              </a:rPr>
+              <a:t>Mbps </a:t>
+            </a:r>
+            <a:endParaRPr lang="en-US" sz="2400" dirty="0">
+              <a:solidFill>
+                <a:srgbClr val="FF0000"/>
+              </a:solidFill>
+            </a:endParaRPr>
           </a:p>
         </p:txBody>
       </p:sp>

--- a/tutorial/T02/tut02.pptx
+++ b/tutorial/T02/tut02.pptx
@@ -217,7 +217,7 @@
           <a:p>
             <a:fld id="{E03FF167-5468-407F-BF08-399F401F3E28}" type="datetimeFigureOut">
               <a:rPr lang="en-HK" smtClean="0"/>
-              <a:t>7/9/2025</a:t>
+              <a:t>9/9/2025</a:t>
             </a:fld>
             <a:endParaRPr lang="en-HK"/>
           </a:p>
@@ -718,6 +718,90 @@
           <a:p>
             <a:fld id="{B17E5830-6A7B-473E-B69D-2E2616132BAF}" type="slidenum">
               <a:rPr lang="en-HK" smtClean="0"/>
+              <a:t>15</a:t>
+            </a:fld>
+            <a:endParaRPr lang="en-HK"/>
+          </a:p>
+        </p:txBody>
+      </p:sp>
+    </p:spTree>
+    <p:extLst>
+      <p:ext uri="{BB962C8B-B14F-4D97-AF65-F5344CB8AC3E}">
+        <p14:creationId xmlns:p14="http://schemas.microsoft.com/office/powerpoint/2010/main" val="1890588193"/>
+      </p:ext>
+    </p:extLst>
+  </p:cSld>
+  <p:clrMapOvr>
+    <a:masterClrMapping/>
+  </p:clrMapOvr>
+</p:notes>
+</file>
+
+<file path=ppt/notesSlides/notesSlide12.xml><?xml version="1.0" encoding="utf-8"?>
+<p:notes xmlns:a="http://schemas.openxmlformats.org/drawingml/2006/main" xmlns:r="http://schemas.openxmlformats.org/officeDocument/2006/relationships" xmlns:p="http://schemas.openxmlformats.org/presentationml/2006/main">
+  <p:cSld>
+    <p:spTree>
+      <p:nvGrpSpPr>
+        <p:cNvPr id="1" name=""/>
+        <p:cNvGrpSpPr/>
+        <p:nvPr/>
+      </p:nvGrpSpPr>
+      <p:grpSpPr>
+        <a:xfrm>
+          <a:off x="0" y="0"/>
+          <a:ext cx="0" cy="0"/>
+          <a:chOff x="0" y="0"/>
+          <a:chExt cx="0" cy="0"/>
+        </a:xfrm>
+      </p:grpSpPr>
+      <p:sp>
+        <p:nvSpPr>
+          <p:cNvPr id="2" name="幻灯片图像占位符 1"/>
+          <p:cNvSpPr>
+            <a:spLocks noGrp="1" noRot="1" noChangeAspect="1"/>
+          </p:cNvSpPr>
+          <p:nvPr>
+            <p:ph type="sldImg"/>
+          </p:nvPr>
+        </p:nvSpPr>
+        <p:spPr/>
+      </p:sp>
+      <p:sp>
+        <p:nvSpPr>
+          <p:cNvPr id="3" name="备注占位符 2"/>
+          <p:cNvSpPr>
+            <a:spLocks noGrp="1"/>
+          </p:cNvSpPr>
+          <p:nvPr>
+            <p:ph type="body" idx="1"/>
+          </p:nvPr>
+        </p:nvSpPr>
+        <p:spPr/>
+        <p:txBody>
+          <a:bodyPr/>
+          <a:lstStyle/>
+          <a:p>
+            <a:endParaRPr lang="en-HK" dirty="0"/>
+          </a:p>
+        </p:txBody>
+      </p:sp>
+      <p:sp>
+        <p:nvSpPr>
+          <p:cNvPr id="4" name="灯片编号占位符 3"/>
+          <p:cNvSpPr>
+            <a:spLocks noGrp="1"/>
+          </p:cNvSpPr>
+          <p:nvPr>
+            <p:ph type="sldNum" sz="quarter" idx="5"/>
+          </p:nvPr>
+        </p:nvSpPr>
+        <p:spPr/>
+        <p:txBody>
+          <a:bodyPr/>
+          <a:lstStyle/>
+          <a:p>
+            <a:fld id="{B17E5830-6A7B-473E-B69D-2E2616132BAF}" type="slidenum">
+              <a:rPr lang="en-HK" smtClean="0"/>
               <a:t>17</a:t>
             </a:fld>
             <a:endParaRPr lang="en-HK"/>
@@ -1558,7 +1642,7 @@
           <a:p>
             <a:fld id="{2425905D-C0C4-D040-B3F5-79CCA23FA4EB}" type="datetimeFigureOut">
               <a:rPr lang="en-US" smtClean="0"/>
-              <a:t>9/7/2025</a:t>
+              <a:t>9/9/2025</a:t>
             </a:fld>
             <a:endParaRPr lang="en-US"/>
           </a:p>
@@ -1758,7 +1842,7 @@
           <a:p>
             <a:fld id="{2425905D-C0C4-D040-B3F5-79CCA23FA4EB}" type="datetimeFigureOut">
               <a:rPr lang="en-US" smtClean="0"/>
-              <a:t>9/7/2025</a:t>
+              <a:t>9/9/2025</a:t>
             </a:fld>
             <a:endParaRPr lang="en-US"/>
           </a:p>
@@ -1968,7 +2052,7 @@
           <a:p>
             <a:fld id="{2425905D-C0C4-D040-B3F5-79CCA23FA4EB}" type="datetimeFigureOut">
               <a:rPr lang="en-US" smtClean="0"/>
-              <a:t>9/7/2025</a:t>
+              <a:t>9/9/2025</a:t>
             </a:fld>
             <a:endParaRPr lang="en-US"/>
           </a:p>
@@ -2168,7 +2252,7 @@
           <a:p>
             <a:fld id="{2425905D-C0C4-D040-B3F5-79CCA23FA4EB}" type="datetimeFigureOut">
               <a:rPr lang="en-US" smtClean="0"/>
-              <a:t>9/7/2025</a:t>
+              <a:t>9/9/2025</a:t>
             </a:fld>
             <a:endParaRPr lang="en-US"/>
           </a:p>
@@ -2444,7 +2528,7 @@
           <a:p>
             <a:fld id="{2425905D-C0C4-D040-B3F5-79CCA23FA4EB}" type="datetimeFigureOut">
               <a:rPr lang="en-US" smtClean="0"/>
-              <a:t>9/7/2025</a:t>
+              <a:t>9/9/2025</a:t>
             </a:fld>
             <a:endParaRPr lang="en-US"/>
           </a:p>
@@ -2712,7 +2796,7 @@
           <a:p>
             <a:fld id="{2425905D-C0C4-D040-B3F5-79CCA23FA4EB}" type="datetimeFigureOut">
               <a:rPr lang="en-US" smtClean="0"/>
-              <a:t>9/7/2025</a:t>
+              <a:t>9/9/2025</a:t>
             </a:fld>
             <a:endParaRPr lang="en-US"/>
           </a:p>
@@ -3127,7 +3211,7 @@
           <a:p>
             <a:fld id="{2425905D-C0C4-D040-B3F5-79CCA23FA4EB}" type="datetimeFigureOut">
               <a:rPr lang="en-US" smtClean="0"/>
-              <a:t>9/7/2025</a:t>
+              <a:t>9/9/2025</a:t>
             </a:fld>
             <a:endParaRPr lang="en-US"/>
           </a:p>
@@ -3269,7 +3353,7 @@
           <a:p>
             <a:fld id="{2425905D-C0C4-D040-B3F5-79CCA23FA4EB}" type="datetimeFigureOut">
               <a:rPr lang="en-US" smtClean="0"/>
-              <a:t>9/7/2025</a:t>
+              <a:t>9/9/2025</a:t>
             </a:fld>
             <a:endParaRPr lang="en-US"/>
           </a:p>
@@ -3382,7 +3466,7 @@
           <a:p>
             <a:fld id="{2425905D-C0C4-D040-B3F5-79CCA23FA4EB}" type="datetimeFigureOut">
               <a:rPr lang="en-US" smtClean="0"/>
-              <a:t>9/7/2025</a:t>
+              <a:t>9/9/2025</a:t>
             </a:fld>
             <a:endParaRPr lang="en-US"/>
           </a:p>
@@ -3695,7 +3779,7 @@
           <a:p>
             <a:fld id="{2425905D-C0C4-D040-B3F5-79CCA23FA4EB}" type="datetimeFigureOut">
               <a:rPr lang="en-US" smtClean="0"/>
-              <a:t>9/7/2025</a:t>
+              <a:t>9/9/2025</a:t>
             </a:fld>
             <a:endParaRPr lang="en-US"/>
           </a:p>
@@ -3984,7 +4068,7 @@
           <a:p>
             <a:fld id="{2425905D-C0C4-D040-B3F5-79CCA23FA4EB}" type="datetimeFigureOut">
               <a:rPr lang="en-US" smtClean="0"/>
-              <a:t>9/7/2025</a:t>
+              <a:t>9/9/2025</a:t>
             </a:fld>
             <a:endParaRPr lang="en-US"/>
           </a:p>
@@ -4227,7 +4311,7 @@
           <a:p>
             <a:fld id="{2425905D-C0C4-D040-B3F5-79CCA23FA4EB}" type="datetimeFigureOut">
               <a:rPr lang="en-US" smtClean="0"/>
-              <a:t>9/7/2025</a:t>
+              <a:t>9/9/2025</a:t>
             </a:fld>
             <a:endParaRPr lang="en-US"/>
           </a:p>
@@ -4895,7 +4979,15 @@
           <a:p>
             <a:r>
               <a:rPr lang="en-HK" sz="1200" dirty="0"/>
-              <a:t>https://github.com/henryhxu/CSCI4430/tree/2025_spring/tutorial/T01/bgreeves-socket-example</a:t>
+              <a:t>https://github.com/henryhxu/CSCI4430/tree/2025_</a:t>
+            </a:r>
+            <a:r>
+              <a:rPr lang="en-US" altLang="zh-CN" sz="1200" dirty="0"/>
+              <a:t>fall</a:t>
+            </a:r>
+            <a:r>
+              <a:rPr lang="en-HK" sz="1200" dirty="0"/>
+              <a:t>/tutorial/T01/bgreeves-socket-example</a:t>
             </a:r>
           </a:p>
         </p:txBody>
@@ -6777,7 +6869,7 @@
                   <a:srgbClr val="FF0000"/>
                 </a:solidFill>
               </a:rPr>
-              <a:t>delay = RTT + transmission delay = 2.5666 + 2 = 4.5666s </a:t>
+              <a:t>delay = RTT + transmission delay = 2.5666 + 2 = 4.57s </a:t>
             </a:r>
           </a:p>
           <a:p>
@@ -6787,7 +6879,7 @@
                   <a:srgbClr val="FF0000"/>
                 </a:solidFill>
               </a:rPr>
-              <a:t>throughput = 25MB * 8 / (2s + 1.28333s) = 60.9 Mbps </a:t>
+              <a:t>throughput = 25MB * 8 / 4.57= 43.76 Mbps </a:t>
             </a:r>
           </a:p>
         </p:txBody>

--- a/tutorial/T02/tut02.pptx
+++ b/tutorial/T02/tut02.pptx
@@ -217,7 +217,7 @@
           <a:p>
             <a:fld id="{E03FF167-5468-407F-BF08-399F401F3E28}" type="datetimeFigureOut">
               <a:rPr lang="en-HK" smtClean="0"/>
-              <a:t>9/9/2025</a:t>
+              <a:t>26/10/2025</a:t>
             </a:fld>
             <a:endParaRPr lang="en-HK"/>
           </a:p>
@@ -1642,7 +1642,7 @@
           <a:p>
             <a:fld id="{2425905D-C0C4-D040-B3F5-79CCA23FA4EB}" type="datetimeFigureOut">
               <a:rPr lang="en-US" smtClean="0"/>
-              <a:t>9/9/2025</a:t>
+              <a:t>10/26/2025</a:t>
             </a:fld>
             <a:endParaRPr lang="en-US"/>
           </a:p>
@@ -1842,7 +1842,7 @@
           <a:p>
             <a:fld id="{2425905D-C0C4-D040-B3F5-79CCA23FA4EB}" type="datetimeFigureOut">
               <a:rPr lang="en-US" smtClean="0"/>
-              <a:t>9/9/2025</a:t>
+              <a:t>10/26/2025</a:t>
             </a:fld>
             <a:endParaRPr lang="en-US"/>
           </a:p>
@@ -2052,7 +2052,7 @@
           <a:p>
             <a:fld id="{2425905D-C0C4-D040-B3F5-79CCA23FA4EB}" type="datetimeFigureOut">
               <a:rPr lang="en-US" smtClean="0"/>
-              <a:t>9/9/2025</a:t>
+              <a:t>10/26/2025</a:t>
             </a:fld>
             <a:endParaRPr lang="en-US"/>
           </a:p>
@@ -2252,7 +2252,7 @@
           <a:p>
             <a:fld id="{2425905D-C0C4-D040-B3F5-79CCA23FA4EB}" type="datetimeFigureOut">
               <a:rPr lang="en-US" smtClean="0"/>
-              <a:t>9/9/2025</a:t>
+              <a:t>10/26/2025</a:t>
             </a:fld>
             <a:endParaRPr lang="en-US"/>
           </a:p>
@@ -2528,7 +2528,7 @@
           <a:p>
             <a:fld id="{2425905D-C0C4-D040-B3F5-79CCA23FA4EB}" type="datetimeFigureOut">
               <a:rPr lang="en-US" smtClean="0"/>
-              <a:t>9/9/2025</a:t>
+              <a:t>10/26/2025</a:t>
             </a:fld>
             <a:endParaRPr lang="en-US"/>
           </a:p>
@@ -2796,7 +2796,7 @@
           <a:p>
             <a:fld id="{2425905D-C0C4-D040-B3F5-79CCA23FA4EB}" type="datetimeFigureOut">
               <a:rPr lang="en-US" smtClean="0"/>
-              <a:t>9/9/2025</a:t>
+              <a:t>10/26/2025</a:t>
             </a:fld>
             <a:endParaRPr lang="en-US"/>
           </a:p>
@@ -3211,7 +3211,7 @@
           <a:p>
             <a:fld id="{2425905D-C0C4-D040-B3F5-79CCA23FA4EB}" type="datetimeFigureOut">
               <a:rPr lang="en-US" smtClean="0"/>
-              <a:t>9/9/2025</a:t>
+              <a:t>10/26/2025</a:t>
             </a:fld>
             <a:endParaRPr lang="en-US"/>
           </a:p>
@@ -3353,7 +3353,7 @@
           <a:p>
             <a:fld id="{2425905D-C0C4-D040-B3F5-79CCA23FA4EB}" type="datetimeFigureOut">
               <a:rPr lang="en-US" smtClean="0"/>
-              <a:t>9/9/2025</a:t>
+              <a:t>10/26/2025</a:t>
             </a:fld>
             <a:endParaRPr lang="en-US"/>
           </a:p>
@@ -3466,7 +3466,7 @@
           <a:p>
             <a:fld id="{2425905D-C0C4-D040-B3F5-79CCA23FA4EB}" type="datetimeFigureOut">
               <a:rPr lang="en-US" smtClean="0"/>
-              <a:t>9/9/2025</a:t>
+              <a:t>10/26/2025</a:t>
             </a:fld>
             <a:endParaRPr lang="en-US"/>
           </a:p>
@@ -3779,7 +3779,7 @@
           <a:p>
             <a:fld id="{2425905D-C0C4-D040-B3F5-79CCA23FA4EB}" type="datetimeFigureOut">
               <a:rPr lang="en-US" smtClean="0"/>
-              <a:t>9/9/2025</a:t>
+              <a:t>10/26/2025</a:t>
             </a:fld>
             <a:endParaRPr lang="en-US"/>
           </a:p>
@@ -4068,7 +4068,7 @@
           <a:p>
             <a:fld id="{2425905D-C0C4-D040-B3F5-79CCA23FA4EB}" type="datetimeFigureOut">
               <a:rPr lang="en-US" smtClean="0"/>
-              <a:t>9/9/2025</a:t>
+              <a:t>10/26/2025</a:t>
             </a:fld>
             <a:endParaRPr lang="en-US"/>
           </a:p>
@@ -4311,7 +4311,7 @@
           <a:p>
             <a:fld id="{2425905D-C0C4-D040-B3F5-79CCA23FA4EB}" type="datetimeFigureOut">
               <a:rPr lang="en-US" smtClean="0"/>
-              <a:t>9/9/2025</a:t>
+              <a:t>10/26/2025</a:t>
             </a:fld>
             <a:endParaRPr lang="en-US"/>
           </a:p>
@@ -7810,6 +7810,61 @@
               <a:t>Transfer time = transmission delay + propagation delay</a:t>
             </a:r>
             <a:endParaRPr lang="en-HK" dirty="0"/>
+          </a:p>
+        </p:txBody>
+      </p:sp>
+      <p:sp>
+        <p:nvSpPr>
+          <p:cNvPr id="17" name="文本框 16">
+            <a:extLst>
+              <a:ext uri="{FF2B5EF4-FFF2-40B4-BE49-F238E27FC236}">
+                <a16:creationId xmlns:a16="http://schemas.microsoft.com/office/drawing/2014/main" id="{7D8D643B-F3E9-41BF-B58D-5730D20B9286}"/>
+              </a:ext>
+            </a:extLst>
+          </p:cNvPr>
+          <p:cNvSpPr txBox="1"/>
+          <p:nvPr/>
+        </p:nvSpPr>
+        <p:spPr>
+          <a:xfrm>
+            <a:off x="632404" y="5807923"/>
+            <a:ext cx="10580676" cy="923330"/>
+          </a:xfrm>
+          <a:prstGeom prst="rect">
+            <a:avLst/>
+          </a:prstGeom>
+          <a:noFill/>
+        </p:spPr>
+        <p:txBody>
+          <a:bodyPr wrap="square">
+            <a:spAutoFit/>
+          </a:bodyPr>
+          <a:lstStyle/>
+          <a:p>
+            <a:r>
+              <a:rPr lang="en-HK" b="1" dirty="0"/>
+              <a:t>Please note:</a:t>
+            </a:r>
+            <a:r>
+              <a:rPr lang="en-HK" dirty="0"/>
+              <a:t> This is a </a:t>
+            </a:r>
+            <a:r>
+              <a:rPr lang="en-HK" b="1" dirty="0"/>
+              <a:t>highly simplified scenario</a:t>
+            </a:r>
+            <a:r>
+              <a:rPr lang="en-HK" dirty="0"/>
+              <a:t>, omitting </a:t>
+            </a:r>
+            <a:r>
+              <a:rPr lang="en-HK" b="1" dirty="0"/>
+              <a:t>complex communication </a:t>
+            </a:r>
+            <a:r>
+              <a:rPr lang="en-HK" dirty="0"/>
+              <a:t>details such as ACK, TCP, and other related concepts. You should only consider RTT (Round Trip Time) when these concepts are explicitly referenced in the problem statement.</a:t>
+            </a:r>
           </a:p>
         </p:txBody>
       </p:sp>
